--- a/Research-Gaps-الفجوات-البحثية.pptx
+++ b/Research-Gaps-الفجوات-البحثية.pptx
@@ -4880,9 +4880,9 @@
                 <a:solidFill>
                   <a:srgbClr val="FFFFFF"/>
                 </a:solidFill>
-                <a:latin typeface="Sakkal Majalla"/>
-                <a:cs typeface="Sakkal Majalla"/>
-                <a:ea typeface="Sakkal Majalla"/>
+                <a:latin typeface="Segoe UI"/>
+                <a:cs typeface="Segoe UI"/>
+                <a:ea typeface="Segoe UI"/>
               </a:rPr>
               <a:t>ورشة عمل أكاديمية متخصصة  •  ACADEMIC WORKSHOP</a:t>
             </a:r>
@@ -4927,9 +4927,9 @@
                 <a:solidFill>
                   <a:srgbClr val="FFFFFF"/>
                 </a:solidFill>
-                <a:latin typeface="Sakkal Majalla"/>
-                <a:cs typeface="Sakkal Majalla"/>
-                <a:ea typeface="Sakkal Majalla"/>
+                <a:latin typeface="Segoe UI"/>
+                <a:cs typeface="Segoe UI"/>
+                <a:ea typeface="Segoe UI"/>
               </a:rPr>
               <a:t>الفجوات البحثية</a:t>
             </a:r>
@@ -4974,9 +4974,9 @@
                 <a:solidFill>
                   <a:srgbClr val="FBBF24"/>
                 </a:solidFill>
-                <a:latin typeface="Sakkal Majalla"/>
-                <a:cs typeface="Sakkal Majalla"/>
-                <a:ea typeface="Sakkal Majalla"/>
+                <a:latin typeface="Segoe UI"/>
+                <a:cs typeface="Segoe UI"/>
+                <a:ea typeface="Segoe UI"/>
               </a:rPr>
               <a:t>R E S E A R C H   G A P S</a:t>
             </a:r>
@@ -5073,9 +5073,9 @@
                 <a:solidFill>
                   <a:srgbClr val="FFFFFF"/>
                 </a:solidFill>
-                <a:latin typeface="Sakkal Majalla"/>
-                <a:cs typeface="Sakkal Majalla"/>
-                <a:ea typeface="Sakkal Majalla"/>
+                <a:latin typeface="Segoe UI"/>
+                <a:cs typeface="Segoe UI"/>
+                <a:ea typeface="Segoe UI"/>
               </a:rPr>
               <a:t>دليلك الشامل لاكتشاف الفجوات البحثية بذكاء واحترافية — نسخة موسّعة من الشرح الكامل للورشة</a:t>
             </a:r>
@@ -5168,9 +5168,9 @@
                 <a:solidFill>
                   <a:srgbClr val="FFFFFF"/>
                 </a:solidFill>
-                <a:latin typeface="Sakkal Majalla"/>
-                <a:cs typeface="Sakkal Majalla"/>
-                <a:ea typeface="Sakkal Majalla"/>
+                <a:latin typeface="Segoe UI"/>
+                <a:cs typeface="Segoe UI"/>
+                <a:ea typeface="Segoe UI"/>
               </a:rPr>
               <a:t>السؤال الأكثر تكراراً: هل يمكن استخدام الذكاء الاصطناعي لإيجاد الفجوة البحثية؟</a:t>
             </a:r>
@@ -5215,9 +5215,9 @@
                 <a:solidFill>
                   <a:srgbClr val="FBBF24"/>
                 </a:solidFill>
-                <a:latin typeface="Sakkal Majalla"/>
-                <a:cs typeface="Sakkal Majalla"/>
-                <a:ea typeface="Sakkal Majalla"/>
+                <a:latin typeface="Segoe UI"/>
+                <a:cs typeface="Segoe UI"/>
+                <a:ea typeface="Segoe UI"/>
               </a:rPr>
               <a:t>الجواب: نعم — وفي هذا العرض ستتعلم كيف، خطوة بخطوة</a:t>
             </a:r>
@@ -5262,9 +5262,9 @@
                 <a:solidFill>
                   <a:srgbClr val="FFFFFF"/>
                 </a:solidFill>
-                <a:latin typeface="Sakkal Majalla"/>
-                <a:cs typeface="Sakkal Majalla"/>
-                <a:ea typeface="Sakkal Majalla"/>
+                <a:latin typeface="Segoe UI"/>
+                <a:cs typeface="Segoe UI"/>
+                <a:ea typeface="Segoe UI"/>
               </a:rPr>
               <a:t>المحتوى العلمي:  </a:t>
             </a:r>
@@ -5273,9 +5273,9 @@
                 <a:solidFill>
                   <a:srgbClr val="FBBF24"/>
                 </a:solidFill>
-                <a:latin typeface="Sakkal Majalla"/>
-                <a:cs typeface="Sakkal Majalla"/>
-                <a:ea typeface="Sakkal Majalla"/>
+                <a:latin typeface="Segoe UI"/>
+                <a:cs typeface="Segoe UI"/>
+                <a:ea typeface="Segoe UI"/>
               </a:rPr>
               <a:t>الدكتورة هناء حسين الأهيمر</a:t>
             </a:r>
@@ -5284,9 +5284,9 @@
                 <a:solidFill>
                   <a:srgbClr val="FFFFFF"/>
                 </a:solidFill>
-                <a:latin typeface="Sakkal Majalla"/>
-                <a:cs typeface="Sakkal Majalla"/>
-                <a:ea typeface="Sakkal Majalla"/>
+                <a:latin typeface="Segoe UI"/>
+                <a:cs typeface="Segoe UI"/>
+                <a:ea typeface="Segoe UI"/>
               </a:rPr>
               <a:t>   Dr. Hana Hossen Elahemer</a:t>
             </a:r>
@@ -5331,9 +5331,9 @@
                 <a:solidFill>
                   <a:srgbClr val="FFFFFF"/>
                 </a:solidFill>
-                <a:latin typeface="Sakkal Majalla"/>
-                <a:cs typeface="Sakkal Majalla"/>
-                <a:ea typeface="Sakkal Majalla"/>
+                <a:latin typeface="Segoe UI"/>
+                <a:cs typeface="Segoe UI"/>
+                <a:ea typeface="Segoe UI"/>
               </a:rPr>
               <a:t>نسخة موسّعة بشرح تفصيلي أكبر وتصميم جديد</a:t>
             </a:r>
@@ -5440,9 +5440,9 @@
                 <a:solidFill>
                   <a:srgbClr val="ECE9FA"/>
                 </a:solidFill>
-                <a:latin typeface="Sakkal Majalla"/>
-                <a:cs typeface="Sakkal Majalla"/>
-                <a:ea typeface="Sakkal Majalla"/>
+                <a:latin typeface="Segoe UI"/>
+                <a:cs typeface="Segoe UI"/>
+                <a:ea typeface="Segoe UI"/>
               </a:rPr>
               <a:t>10</a:t>
             </a:r>
@@ -5511,9 +5511,9 @@
                 <a:solidFill>
                   <a:srgbClr val="FFFFFF"/>
                 </a:solidFill>
-                <a:latin typeface="Sakkal Majalla"/>
-                <a:cs typeface="Sakkal Majalla"/>
-                <a:ea typeface="Sakkal Majalla"/>
+                <a:latin typeface="Segoe UI"/>
+                <a:cs typeface="Segoe UI"/>
+                <a:ea typeface="Segoe UI"/>
               </a:rPr>
               <a:t>🗞</a:t>
             </a:r>
@@ -5558,9 +5558,9 @@
                 <a:solidFill>
                   <a:srgbClr val="047857"/>
                 </a:solidFill>
-                <a:latin typeface="Sakkal Majalla"/>
-                <a:cs typeface="Sakkal Majalla"/>
-                <a:ea typeface="Sakkal Majalla"/>
+                <a:latin typeface="Segoe UI"/>
+                <a:cs typeface="Segoe UI"/>
+                <a:ea typeface="Segoe UI"/>
               </a:rPr>
               <a:t>EXPERT RESEARCHER STRATEGIES</a:t>
             </a:r>
@@ -5605,9 +5605,9 @@
                 <a:solidFill>
                   <a:srgbClr val="221C57"/>
                 </a:solidFill>
-                <a:latin typeface="Sakkal Majalla"/>
-                <a:cs typeface="Sakkal Majalla"/>
-                <a:ea typeface="Sakkal Majalla"/>
+                <a:latin typeface="Segoe UI"/>
+                <a:cs typeface="Segoe UI"/>
+                <a:ea typeface="Segoe UI"/>
               </a:rPr>
               <a:t>استراتيجيات الباحثين المحترفين</a:t>
             </a:r>
@@ -5776,9 +5776,9 @@
                 <a:solidFill>
                   <a:srgbClr val="FFFFFF"/>
                 </a:solidFill>
-                <a:latin typeface="Sakkal Majalla"/>
-                <a:cs typeface="Sakkal Majalla"/>
-                <a:ea typeface="Sakkal Majalla"/>
+                <a:latin typeface="Segoe UI"/>
+                <a:cs typeface="Segoe UI"/>
+                <a:ea typeface="Segoe UI"/>
               </a:rPr>
               <a:t>10</a:t>
             </a:r>
@@ -5823,9 +5823,9 @@
                 <a:solidFill>
                   <a:srgbClr val="6E6A8F"/>
                 </a:solidFill>
-                <a:latin typeface="Sakkal Majalla"/>
-                <a:cs typeface="Sakkal Majalla"/>
-                <a:ea typeface="Sakkal Majalla"/>
+                <a:latin typeface="Segoe UI"/>
+                <a:cs typeface="Segoe UI"/>
+                <a:ea typeface="Segoe UI"/>
               </a:rPr>
               <a:t>الفجوات البحثية  •  د. هناء حسين الأهيمر</a:t>
             </a:r>
@@ -5946,9 +5946,9 @@
                 <a:solidFill>
                   <a:srgbClr val="FFFFFF"/>
                 </a:solidFill>
-                <a:latin typeface="Sakkal Majalla"/>
-                <a:cs typeface="Sakkal Majalla"/>
-                <a:ea typeface="Sakkal Majalla"/>
+                <a:latin typeface="Segoe UI"/>
+                <a:cs typeface="Segoe UI"/>
+                <a:ea typeface="Segoe UI"/>
               </a:rPr>
               <a:t>📄</a:t>
             </a:r>
@@ -5993,9 +5993,9 @@
                 <a:solidFill>
                   <a:srgbClr val="6D28D9"/>
                 </a:solidFill>
-                <a:latin typeface="Sakkal Majalla"/>
-                <a:cs typeface="Sakkal Majalla"/>
-                <a:ea typeface="Sakkal Majalla"/>
+                <a:latin typeface="Segoe UI"/>
+                <a:cs typeface="Segoe UI"/>
+                <a:ea typeface="Segoe UI"/>
               </a:rPr>
               <a:t>اقرأ خاتمة الدراسات   </a:t>
             </a:r>
@@ -6004,9 +6004,9 @@
                 <a:solidFill>
                   <a:srgbClr val="6E6A8F"/>
                 </a:solidFill>
-                <a:latin typeface="Sakkal Majalla"/>
-                <a:cs typeface="Sakkal Majalla"/>
-                <a:ea typeface="Sakkal Majalla"/>
+                <a:latin typeface="Segoe UI"/>
+                <a:cs typeface="Segoe UI"/>
+                <a:ea typeface="Segoe UI"/>
               </a:rPr>
               <a:t>Conclusion Section</a:t>
             </a:r>
@@ -6051,9 +6051,9 @@
                 <a:solidFill>
                   <a:srgbClr val="221C57"/>
                 </a:solidFill>
-                <a:latin typeface="Sakkal Majalla"/>
-                <a:cs typeface="Sakkal Majalla"/>
-                <a:ea typeface="Sakkal Majalla"/>
+                <a:latin typeface="Segoe UI"/>
+                <a:cs typeface="Segoe UI"/>
+                <a:ea typeface="Segoe UI"/>
               </a:rPr>
               <a:t>الباحثون غالباً يذكرون اقتراحات مستقبلية وفجوات صريحة في نهاية أبحاثهم — فجوات جاهزة وموثقة فاستثمرها!</a:t>
             </a:r>
@@ -6174,9 +6174,9 @@
                 <a:solidFill>
                   <a:srgbClr val="FFFFFF"/>
                 </a:solidFill>
-                <a:latin typeface="Sakkal Majalla"/>
-                <a:cs typeface="Sakkal Majalla"/>
-                <a:ea typeface="Sakkal Majalla"/>
+                <a:latin typeface="Segoe UI"/>
+                <a:cs typeface="Segoe UI"/>
+                <a:ea typeface="Segoe UI"/>
               </a:rPr>
               <a:t>🗺</a:t>
             </a:r>
@@ -6221,9 +6221,9 @@
                 <a:solidFill>
                   <a:srgbClr val="0D9488"/>
                 </a:solidFill>
-                <a:latin typeface="Sakkal Majalla"/>
-                <a:cs typeface="Sakkal Majalla"/>
-                <a:ea typeface="Sakkal Majalla"/>
+                <a:latin typeface="Segoe UI"/>
+                <a:cs typeface="Segoe UI"/>
+                <a:ea typeface="Segoe UI"/>
               </a:rPr>
               <a:t>اعمل خريطة للأدبيات   </a:t>
             </a:r>
@@ -6232,9 +6232,9 @@
                 <a:solidFill>
                   <a:srgbClr val="6E6A8F"/>
                 </a:solidFill>
-                <a:latin typeface="Sakkal Majalla"/>
-                <a:cs typeface="Sakkal Majalla"/>
-                <a:ea typeface="Sakkal Majalla"/>
+                <a:latin typeface="Segoe UI"/>
+                <a:cs typeface="Segoe UI"/>
+                <a:ea typeface="Segoe UI"/>
               </a:rPr>
               <a:t>Literature Mapping</a:t>
             </a:r>
@@ -6279,9 +6279,9 @@
                 <a:solidFill>
                   <a:srgbClr val="221C57"/>
                 </a:solidFill>
-                <a:latin typeface="Sakkal Majalla"/>
-                <a:cs typeface="Sakkal Majalla"/>
-                <a:ea typeface="Sakkal Majalla"/>
+                <a:latin typeface="Segoe UI"/>
+                <a:cs typeface="Segoe UI"/>
+                <a:ea typeface="Segoe UI"/>
               </a:rPr>
               <a:t>صنّف الدراسات حسب: السكان، المنهج، الدولة، الزمن — الخانات الفارغة في الخريطة هي فجواتك المحتملة</a:t>
             </a:r>
@@ -6402,9 +6402,9 @@
                 <a:solidFill>
                   <a:srgbClr val="FFFFFF"/>
                 </a:solidFill>
-                <a:latin typeface="Sakkal Majalla"/>
-                <a:cs typeface="Sakkal Majalla"/>
-                <a:ea typeface="Sakkal Majalla"/>
+                <a:latin typeface="Segoe UI"/>
+                <a:cs typeface="Segoe UI"/>
+                <a:ea typeface="Segoe UI"/>
               </a:rPr>
               <a:t>⚖️</a:t>
             </a:r>
@@ -6449,9 +6449,9 @@
                 <a:solidFill>
                   <a:srgbClr val="A21CAF"/>
                 </a:solidFill>
-                <a:latin typeface="Sakkal Majalla"/>
-                <a:cs typeface="Sakkal Majalla"/>
-                <a:ea typeface="Sakkal Majalla"/>
+                <a:latin typeface="Segoe UI"/>
+                <a:cs typeface="Segoe UI"/>
+                <a:ea typeface="Segoe UI"/>
               </a:rPr>
               <a:t>ابحث عن التناقضات   </a:t>
             </a:r>
@@ -6460,9 +6460,9 @@
                 <a:solidFill>
                   <a:srgbClr val="6E6A8F"/>
                 </a:solidFill>
-                <a:latin typeface="Sakkal Majalla"/>
-                <a:cs typeface="Sakkal Majalla"/>
-                <a:ea typeface="Sakkal Majalla"/>
+                <a:latin typeface="Segoe UI"/>
+                <a:cs typeface="Segoe UI"/>
+                <a:ea typeface="Segoe UI"/>
               </a:rPr>
               <a:t>Contradictions</a:t>
             </a:r>
@@ -6507,9 +6507,9 @@
                 <a:solidFill>
                   <a:srgbClr val="221C57"/>
                 </a:solidFill>
-                <a:latin typeface="Sakkal Majalla"/>
-                <a:cs typeface="Sakkal Majalla"/>
-                <a:ea typeface="Sakkal Majalla"/>
+                <a:latin typeface="Segoe UI"/>
+                <a:cs typeface="Segoe UI"/>
+                <a:ea typeface="Segoe UI"/>
               </a:rPr>
               <a:t>التضارب بين نتائج الدراسات فجوة قوية وفرصة ذهبية — دراستك قد تكون الحكم الذي يحسم الخلاف</a:t>
             </a:r>
@@ -6630,9 +6630,9 @@
                 <a:solidFill>
                   <a:srgbClr val="FFFFFF"/>
                 </a:solidFill>
-                <a:latin typeface="Sakkal Majalla"/>
-                <a:cs typeface="Sakkal Majalla"/>
-                <a:ea typeface="Sakkal Majalla"/>
+                <a:latin typeface="Segoe UI"/>
+                <a:cs typeface="Segoe UI"/>
+                <a:ea typeface="Segoe UI"/>
               </a:rPr>
               <a:t>❓</a:t>
             </a:r>
@@ -6677,9 +6677,9 @@
                 <a:solidFill>
                   <a:srgbClr val="D97706"/>
                 </a:solidFill>
-                <a:latin typeface="Sakkal Majalla"/>
-                <a:cs typeface="Sakkal Majalla"/>
-                <a:ea typeface="Sakkal Majalla"/>
+                <a:latin typeface="Segoe UI"/>
+                <a:cs typeface="Segoe UI"/>
+                <a:ea typeface="Segoe UI"/>
               </a:rPr>
               <a:t>اسأل: ماذا لو؟   </a:t>
             </a:r>
@@ -6688,9 +6688,9 @@
                 <a:solidFill>
                   <a:srgbClr val="6E6A8F"/>
                 </a:solidFill>
-                <a:latin typeface="Sakkal Majalla"/>
-                <a:cs typeface="Sakkal Majalla"/>
-                <a:ea typeface="Sakkal Majalla"/>
+                <a:latin typeface="Segoe UI"/>
+                <a:cs typeface="Segoe UI"/>
+                <a:ea typeface="Segoe UI"/>
               </a:rPr>
               <a:t>What if?</a:t>
             </a:r>
@@ -6735,9 +6735,9 @@
                 <a:solidFill>
                   <a:srgbClr val="221C57"/>
                 </a:solidFill>
-                <a:latin typeface="Sakkal Majalla"/>
-                <a:cs typeface="Sakkal Majalla"/>
-                <a:ea typeface="Sakkal Majalla"/>
+                <a:latin typeface="Segoe UI"/>
+                <a:cs typeface="Segoe UI"/>
+                <a:ea typeface="Segoe UI"/>
               </a:rPr>
               <a:t>ماذا لو طبّقنا الدراسة نفسها على فئة عمرية مختلفة أو في دولة مختلفة؟ هنا غالباً تجد فجوة بحثية ممتازة</a:t>
             </a:r>
@@ -6842,9 +6842,9 @@
                 <a:solidFill>
                   <a:srgbClr val="FBBF24"/>
                 </a:solidFill>
-                <a:latin typeface="Sakkal Majalla"/>
-                <a:cs typeface="Sakkal Majalla"/>
-                <a:ea typeface="Sakkal Majalla"/>
+                <a:latin typeface="Segoe UI"/>
+                <a:cs typeface="Segoe UI"/>
+                <a:ea typeface="Segoe UI"/>
               </a:rPr>
               <a:t>💡 نصيحة ذهبية: </a:t>
             </a:r>
@@ -6853,9 +6853,9 @@
                 <a:solidFill>
                   <a:srgbClr val="FFFFFF"/>
                 </a:solidFill>
-                <a:latin typeface="Sakkal Majalla"/>
-                <a:cs typeface="Sakkal Majalla"/>
-                <a:ea typeface="Sakkal Majalla"/>
+                <a:latin typeface="Segoe UI"/>
+                <a:cs typeface="Segoe UI"/>
+                <a:ea typeface="Segoe UI"/>
               </a:rPr>
               <a:t>اقرأ آخر ٢٠ ورقة في مجلتك المستهدفة — الأنماط المتكررة ستكشف لك الفراغات بوضوح تام</a:t>
             </a:r>
@@ -6962,9 +6962,9 @@
                 <a:solidFill>
                   <a:srgbClr val="ECE9FA"/>
                 </a:solidFill>
-                <a:latin typeface="Sakkal Majalla"/>
-                <a:cs typeface="Sakkal Majalla"/>
-                <a:ea typeface="Sakkal Majalla"/>
+                <a:latin typeface="Segoe UI"/>
+                <a:cs typeface="Segoe UI"/>
+                <a:ea typeface="Segoe UI"/>
               </a:rPr>
               <a:t>11</a:t>
             </a:r>
@@ -7033,9 +7033,9 @@
                 <a:solidFill>
                   <a:srgbClr val="FFFFFF"/>
                 </a:solidFill>
-                <a:latin typeface="Sakkal Majalla"/>
-                <a:cs typeface="Sakkal Majalla"/>
-                <a:ea typeface="Sakkal Majalla"/>
+                <a:latin typeface="Segoe UI"/>
+                <a:cs typeface="Segoe UI"/>
+                <a:ea typeface="Segoe UI"/>
               </a:rPr>
               <a:t>💡</a:t>
             </a:r>
@@ -7080,9 +7080,9 @@
                 <a:solidFill>
                   <a:srgbClr val="1D4ED8"/>
                 </a:solidFill>
-                <a:latin typeface="Sakkal Majalla"/>
-                <a:cs typeface="Sakkal Majalla"/>
-                <a:ea typeface="Sakkal Majalla"/>
+                <a:latin typeface="Segoe UI"/>
+                <a:cs typeface="Segoe UI"/>
+                <a:ea typeface="Segoe UI"/>
               </a:rPr>
               <a:t>CRITICAL THINKING FRAMEWORK</a:t>
             </a:r>
@@ -7127,9 +7127,9 @@
                 <a:solidFill>
                   <a:srgbClr val="221C57"/>
                 </a:solidFill>
-                <a:latin typeface="Sakkal Majalla"/>
-                <a:cs typeface="Sakkal Majalla"/>
-                <a:ea typeface="Sakkal Majalla"/>
+                <a:latin typeface="Segoe UI"/>
+                <a:cs typeface="Segoe UI"/>
+                <a:ea typeface="Segoe UI"/>
               </a:rPr>
               <a:t>التفكير النقدي عند تحليل الدراسات</a:t>
             </a:r>
@@ -7298,9 +7298,9 @@
                 <a:solidFill>
                   <a:srgbClr val="FFFFFF"/>
                 </a:solidFill>
-                <a:latin typeface="Sakkal Majalla"/>
-                <a:cs typeface="Sakkal Majalla"/>
-                <a:ea typeface="Sakkal Majalla"/>
+                <a:latin typeface="Segoe UI"/>
+                <a:cs typeface="Segoe UI"/>
+                <a:ea typeface="Segoe UI"/>
               </a:rPr>
               <a:t>11</a:t>
             </a:r>
@@ -7345,9 +7345,9 @@
                 <a:solidFill>
                   <a:srgbClr val="6E6A8F"/>
                 </a:solidFill>
-                <a:latin typeface="Sakkal Majalla"/>
-                <a:cs typeface="Sakkal Majalla"/>
-                <a:ea typeface="Sakkal Majalla"/>
+                <a:latin typeface="Segoe UI"/>
+                <a:cs typeface="Segoe UI"/>
+                <a:ea typeface="Segoe UI"/>
               </a:rPr>
               <a:t>الفجوات البحثية  •  د. هناء حسين الأهيمر</a:t>
             </a:r>
@@ -7500,9 +7500,9 @@
                 <a:solidFill>
                   <a:srgbClr val="6D28D9"/>
                 </a:solidFill>
-                <a:latin typeface="Sakkal Majalla"/>
-                <a:cs typeface="Sakkal Majalla"/>
-                <a:ea typeface="Sakkal Majalla"/>
+                <a:latin typeface="Segoe UI"/>
+                <a:cs typeface="Segoe UI"/>
+                <a:ea typeface="Segoe UI"/>
               </a:rPr>
               <a:t>❓ الأسئلة الستة الذهبية</a:t>
             </a:r>
@@ -7547,9 +7547,9 @@
                 <a:solidFill>
                   <a:srgbClr val="A21CAF"/>
                 </a:solidFill>
-                <a:latin typeface="Sakkal Majalla"/>
-                <a:cs typeface="Sakkal Majalla"/>
-                <a:ea typeface="Sakkal Majalla"/>
+                <a:latin typeface="Segoe UI"/>
+                <a:cs typeface="Segoe UI"/>
+                <a:ea typeface="Segoe UI"/>
               </a:rPr>
               <a:t>●  </a:t>
             </a:r>
@@ -7558,9 +7558,9 @@
                 <a:solidFill>
                   <a:srgbClr val="A21CAF"/>
                 </a:solidFill>
-                <a:latin typeface="Sakkal Majalla"/>
-                <a:cs typeface="Sakkal Majalla"/>
-                <a:ea typeface="Sakkal Majalla"/>
+                <a:latin typeface="Segoe UI"/>
+                <a:cs typeface="Segoe UI"/>
+                <a:ea typeface="Segoe UI"/>
               </a:rPr>
               <a:t>Who — مَن:  </a:t>
             </a:r>
@@ -7569,9 +7569,9 @@
                 <a:solidFill>
                   <a:srgbClr val="221C57"/>
                 </a:solidFill>
-                <a:latin typeface="Sakkal Majalla"/>
-                <a:cs typeface="Sakkal Majalla"/>
-                <a:ea typeface="Sakkal Majalla"/>
+                <a:latin typeface="Segoe UI"/>
+                <a:cs typeface="Segoe UI"/>
+                <a:ea typeface="Segoe UI"/>
               </a:rPr>
               <a:t>الذي تمت دراسته؟ (السكان والعينة)</a:t>
             </a:r>
@@ -7593,9 +7593,9 @@
                 <a:solidFill>
                   <a:srgbClr val="D97706"/>
                 </a:solidFill>
-                <a:latin typeface="Sakkal Majalla"/>
-                <a:cs typeface="Sakkal Majalla"/>
-                <a:ea typeface="Sakkal Majalla"/>
+                <a:latin typeface="Segoe UI"/>
+                <a:cs typeface="Segoe UI"/>
+                <a:ea typeface="Segoe UI"/>
               </a:rPr>
               <a:t>●  </a:t>
             </a:r>
@@ -7604,9 +7604,9 @@
                 <a:solidFill>
                   <a:srgbClr val="D97706"/>
                 </a:solidFill>
-                <a:latin typeface="Sakkal Majalla"/>
-                <a:cs typeface="Sakkal Majalla"/>
-                <a:ea typeface="Sakkal Majalla"/>
+                <a:latin typeface="Segoe UI"/>
+                <a:cs typeface="Segoe UI"/>
+                <a:ea typeface="Segoe UI"/>
               </a:rPr>
               <a:t>What — ماذا:  </a:t>
             </a:r>
@@ -7615,9 +7615,9 @@
                 <a:solidFill>
                   <a:srgbClr val="221C57"/>
                 </a:solidFill>
-                <a:latin typeface="Sakkal Majalla"/>
-                <a:cs typeface="Sakkal Majalla"/>
-                <a:ea typeface="Sakkal Majalla"/>
+                <a:latin typeface="Segoe UI"/>
+                <a:cs typeface="Segoe UI"/>
+                <a:ea typeface="Segoe UI"/>
               </a:rPr>
               <a:t>قِيس بالضبط؟ (المتغيرات والأدوات)</a:t>
             </a:r>
@@ -7639,9 +7639,9 @@
                 <a:solidFill>
                   <a:srgbClr val="0D9488"/>
                 </a:solidFill>
-                <a:latin typeface="Sakkal Majalla"/>
-                <a:cs typeface="Sakkal Majalla"/>
-                <a:ea typeface="Sakkal Majalla"/>
+                <a:latin typeface="Segoe UI"/>
+                <a:cs typeface="Segoe UI"/>
+                <a:ea typeface="Segoe UI"/>
               </a:rPr>
               <a:t>●  </a:t>
             </a:r>
@@ -7650,9 +7650,9 @@
                 <a:solidFill>
                   <a:srgbClr val="0D9488"/>
                 </a:solidFill>
-                <a:latin typeface="Sakkal Majalla"/>
-                <a:cs typeface="Sakkal Majalla"/>
-                <a:ea typeface="Sakkal Majalla"/>
+                <a:latin typeface="Segoe UI"/>
+                <a:cs typeface="Segoe UI"/>
+                <a:ea typeface="Segoe UI"/>
               </a:rPr>
               <a:t>Where — أين:  </a:t>
             </a:r>
@@ -7661,9 +7661,9 @@
                 <a:solidFill>
                   <a:srgbClr val="221C57"/>
                 </a:solidFill>
-                <a:latin typeface="Sakkal Majalla"/>
-                <a:cs typeface="Sakkal Majalla"/>
-                <a:ea typeface="Sakkal Majalla"/>
+                <a:latin typeface="Segoe UI"/>
+                <a:cs typeface="Segoe UI"/>
+                <a:ea typeface="Segoe UI"/>
               </a:rPr>
               <a:t>أُجري البحث؟ (السياق الجغرافي والثقافي)</a:t>
             </a:r>
@@ -7685,9 +7685,9 @@
                 <a:solidFill>
                   <a:srgbClr val="6D28D9"/>
                 </a:solidFill>
-                <a:latin typeface="Sakkal Majalla"/>
-                <a:cs typeface="Sakkal Majalla"/>
-                <a:ea typeface="Sakkal Majalla"/>
+                <a:latin typeface="Segoe UI"/>
+                <a:cs typeface="Segoe UI"/>
+                <a:ea typeface="Segoe UI"/>
               </a:rPr>
               <a:t>●  </a:t>
             </a:r>
@@ -7696,9 +7696,9 @@
                 <a:solidFill>
                   <a:srgbClr val="6D28D9"/>
                 </a:solidFill>
-                <a:latin typeface="Sakkal Majalla"/>
-                <a:cs typeface="Sakkal Majalla"/>
-                <a:ea typeface="Sakkal Majalla"/>
+                <a:latin typeface="Segoe UI"/>
+                <a:cs typeface="Segoe UI"/>
+                <a:ea typeface="Segoe UI"/>
               </a:rPr>
               <a:t>When — متى:  </a:t>
             </a:r>
@@ -7707,9 +7707,9 @@
                 <a:solidFill>
                   <a:srgbClr val="221C57"/>
                 </a:solidFill>
-                <a:latin typeface="Sakkal Majalla"/>
-                <a:cs typeface="Sakkal Majalla"/>
-                <a:ea typeface="Sakkal Majalla"/>
+                <a:latin typeface="Segoe UI"/>
+                <a:cs typeface="Segoe UI"/>
+                <a:ea typeface="Segoe UI"/>
               </a:rPr>
               <a:t>نُشرت الدراسة؟ (الزمن ومدى الحداثة)</a:t>
             </a:r>
@@ -7731,9 +7731,9 @@
                 <a:solidFill>
                   <a:srgbClr val="047857"/>
                 </a:solidFill>
-                <a:latin typeface="Sakkal Majalla"/>
-                <a:cs typeface="Sakkal Majalla"/>
-                <a:ea typeface="Sakkal Majalla"/>
+                <a:latin typeface="Segoe UI"/>
+                <a:cs typeface="Segoe UI"/>
+                <a:ea typeface="Segoe UI"/>
               </a:rPr>
               <a:t>●  </a:t>
             </a:r>
@@ -7742,9 +7742,9 @@
                 <a:solidFill>
                   <a:srgbClr val="047857"/>
                 </a:solidFill>
-                <a:latin typeface="Sakkal Majalla"/>
-                <a:cs typeface="Sakkal Majalla"/>
-                <a:ea typeface="Sakkal Majalla"/>
+                <a:latin typeface="Segoe UI"/>
+                <a:cs typeface="Segoe UI"/>
+                <a:ea typeface="Segoe UI"/>
               </a:rPr>
               <a:t>How — كيف:  </a:t>
             </a:r>
@@ -7753,9 +7753,9 @@
                 <a:solidFill>
                   <a:srgbClr val="221C57"/>
                 </a:solidFill>
-                <a:latin typeface="Sakkal Majalla"/>
-                <a:cs typeface="Sakkal Majalla"/>
-                <a:ea typeface="Sakkal Majalla"/>
+                <a:latin typeface="Segoe UI"/>
+                <a:cs typeface="Segoe UI"/>
+                <a:ea typeface="Segoe UI"/>
               </a:rPr>
               <a:t>تمت الدراسة؟ (المنهجية والتصميم)</a:t>
             </a:r>
@@ -7777,9 +7777,9 @@
                 <a:solidFill>
                   <a:srgbClr val="BE123C"/>
                 </a:solidFill>
-                <a:latin typeface="Sakkal Majalla"/>
-                <a:cs typeface="Sakkal Majalla"/>
-                <a:ea typeface="Sakkal Majalla"/>
+                <a:latin typeface="Segoe UI"/>
+                <a:cs typeface="Segoe UI"/>
+                <a:ea typeface="Segoe UI"/>
               </a:rPr>
               <a:t>●  </a:t>
             </a:r>
@@ -7788,9 +7788,9 @@
                 <a:solidFill>
                   <a:srgbClr val="BE123C"/>
                 </a:solidFill>
-                <a:latin typeface="Sakkal Majalla"/>
-                <a:cs typeface="Sakkal Majalla"/>
-                <a:ea typeface="Sakkal Majalla"/>
+                <a:latin typeface="Segoe UI"/>
+                <a:cs typeface="Segoe UI"/>
+                <a:ea typeface="Segoe UI"/>
               </a:rPr>
               <a:t>Why — لماذا:  </a:t>
             </a:r>
@@ -7799,9 +7799,9 @@
                 <a:solidFill>
                   <a:srgbClr val="221C57"/>
                 </a:solidFill>
-                <a:latin typeface="Sakkal Majalla"/>
-                <a:cs typeface="Sakkal Majalla"/>
-                <a:ea typeface="Sakkal Majalla"/>
+                <a:latin typeface="Segoe UI"/>
+                <a:cs typeface="Segoe UI"/>
+                <a:ea typeface="Segoe UI"/>
               </a:rPr>
               <a:t>توقفت الدراسة؟ (حدودها المعلنة)</a:t>
             </a:r>
@@ -7954,9 +7954,9 @@
                 <a:solidFill>
                   <a:srgbClr val="0D9488"/>
                 </a:solidFill>
-                <a:latin typeface="Sakkal Majalla"/>
-                <a:cs typeface="Sakkal Majalla"/>
-                <a:ea typeface="Sakkal Majalla"/>
+                <a:latin typeface="Segoe UI"/>
+                <a:cs typeface="Segoe UI"/>
+                <a:ea typeface="Segoe UI"/>
               </a:rPr>
               <a:t>🔎 عبارات تدل على فجوة قابلة للبحث</a:t>
             </a:r>
@@ -8001,9 +8001,9 @@
                 <a:solidFill>
                   <a:srgbClr val="0D9488"/>
                 </a:solidFill>
-                <a:latin typeface="Sakkal Majalla"/>
-                <a:cs typeface="Sakkal Majalla"/>
-                <a:ea typeface="Sakkal Majalla"/>
+                <a:latin typeface="Segoe UI"/>
+                <a:cs typeface="Segoe UI"/>
+                <a:ea typeface="Segoe UI"/>
               </a:rPr>
               <a:t>✔  </a:t>
             </a:r>
@@ -8012,9 +8012,9 @@
                 <a:solidFill>
                   <a:srgbClr val="1D4ED8"/>
                 </a:solidFill>
-                <a:latin typeface="Sakkal Majalla"/>
-                <a:cs typeface="Sakkal Majalla"/>
-                <a:ea typeface="Sakkal Majalla"/>
+                <a:latin typeface="Segoe UI"/>
+                <a:cs typeface="Segoe UI"/>
+                <a:ea typeface="Segoe UI"/>
               </a:rPr>
               <a:t>"This area has not been studied…"</a:t>
             </a:r>
@@ -8023,9 +8023,9 @@
                 <a:solidFill>
                   <a:srgbClr val="6E6A8F"/>
                 </a:solidFill>
-                <a:latin typeface="Sakkal Majalla"/>
-                <a:cs typeface="Sakkal Majalla"/>
-                <a:ea typeface="Sakkal Majalla"/>
+                <a:latin typeface="Segoe UI"/>
+                <a:cs typeface="Segoe UI"/>
+                <a:ea typeface="Segoe UI"/>
               </a:rPr>
               <a:t>  هذه المنطقة لم تُدرس بعد — غياب صريح</a:t>
             </a:r>
@@ -8047,9 +8047,9 @@
                 <a:solidFill>
                   <a:srgbClr val="0D9488"/>
                 </a:solidFill>
-                <a:latin typeface="Sakkal Majalla"/>
-                <a:cs typeface="Sakkal Majalla"/>
-                <a:ea typeface="Sakkal Majalla"/>
+                <a:latin typeface="Segoe UI"/>
+                <a:cs typeface="Segoe UI"/>
+                <a:ea typeface="Segoe UI"/>
               </a:rPr>
               <a:t>✔  </a:t>
             </a:r>
@@ -8058,9 +8058,9 @@
                 <a:solidFill>
                   <a:srgbClr val="1D4ED8"/>
                 </a:solidFill>
-                <a:latin typeface="Sakkal Majalla"/>
-                <a:cs typeface="Sakkal Majalla"/>
-                <a:ea typeface="Sakkal Majalla"/>
+                <a:latin typeface="Segoe UI"/>
+                <a:cs typeface="Segoe UI"/>
+                <a:ea typeface="Segoe UI"/>
               </a:rPr>
               <a:t>"Results are conflicting…"</a:t>
             </a:r>
@@ -8069,9 +8069,9 @@
                 <a:solidFill>
                   <a:srgbClr val="6E6A8F"/>
                 </a:solidFill>
-                <a:latin typeface="Sakkal Majalla"/>
-                <a:cs typeface="Sakkal Majalla"/>
-                <a:ea typeface="Sakkal Majalla"/>
+                <a:latin typeface="Segoe UI"/>
+                <a:cs typeface="Segoe UI"/>
+                <a:ea typeface="Segoe UI"/>
               </a:rPr>
               <a:t>  النتائج متضاربة — تناقض يستدعي الحسم</a:t>
             </a:r>
@@ -8093,9 +8093,9 @@
                 <a:solidFill>
                   <a:srgbClr val="0D9488"/>
                 </a:solidFill>
-                <a:latin typeface="Sakkal Majalla"/>
-                <a:cs typeface="Sakkal Majalla"/>
-                <a:ea typeface="Sakkal Majalla"/>
+                <a:latin typeface="Segoe UI"/>
+                <a:cs typeface="Segoe UI"/>
+                <a:ea typeface="Segoe UI"/>
               </a:rPr>
               <a:t>✔  </a:t>
             </a:r>
@@ -8104,9 +8104,9 @@
                 <a:solidFill>
                   <a:srgbClr val="1D4ED8"/>
                 </a:solidFill>
-                <a:latin typeface="Sakkal Majalla"/>
-                <a:cs typeface="Sakkal Majalla"/>
-                <a:ea typeface="Sakkal Majalla"/>
+                <a:latin typeface="Segoe UI"/>
+                <a:cs typeface="Segoe UI"/>
+                <a:ea typeface="Segoe UI"/>
               </a:rPr>
               <a:t>"The sample does not represent…"</a:t>
             </a:r>
@@ -8115,9 +8115,9 @@
                 <a:solidFill>
                   <a:srgbClr val="6E6A8F"/>
                 </a:solidFill>
-                <a:latin typeface="Sakkal Majalla"/>
-                <a:cs typeface="Sakkal Majalla"/>
-                <a:ea typeface="Sakkal Majalla"/>
+                <a:latin typeface="Segoe UI"/>
+                <a:cs typeface="Segoe UI"/>
+                <a:ea typeface="Segoe UI"/>
               </a:rPr>
               <a:t>  العينة لا تمثّل — قصور في التعميم</a:t>
             </a:r>
@@ -8139,9 +8139,9 @@
                 <a:solidFill>
                   <a:srgbClr val="0D9488"/>
                 </a:solidFill>
-                <a:latin typeface="Sakkal Majalla"/>
-                <a:cs typeface="Sakkal Majalla"/>
-                <a:ea typeface="Sakkal Majalla"/>
+                <a:latin typeface="Segoe UI"/>
+                <a:cs typeface="Segoe UI"/>
+                <a:ea typeface="Segoe UI"/>
               </a:rPr>
               <a:t>✔  </a:t>
             </a:r>
@@ -8150,9 +8150,9 @@
                 <a:solidFill>
                   <a:srgbClr val="1D4ED8"/>
                 </a:solidFill>
-                <a:latin typeface="Sakkal Majalla"/>
-                <a:cs typeface="Sakkal Majalla"/>
-                <a:ea typeface="Sakkal Majalla"/>
+                <a:latin typeface="Segoe UI"/>
+                <a:cs typeface="Segoe UI"/>
+                <a:ea typeface="Segoe UI"/>
               </a:rPr>
               <a:t>"Further research is needed…"</a:t>
             </a:r>
@@ -8161,9 +8161,9 @@
                 <a:solidFill>
                   <a:srgbClr val="6E6A8F"/>
                 </a:solidFill>
-                <a:latin typeface="Sakkal Majalla"/>
-                <a:cs typeface="Sakkal Majalla"/>
-                <a:ea typeface="Sakkal Majalla"/>
+                <a:latin typeface="Segoe UI"/>
+                <a:cs typeface="Segoe UI"/>
+                <a:ea typeface="Segoe UI"/>
               </a:rPr>
               <a:t>  هناك حاجة لمزيد من البحث — دعوة مباشرة</a:t>
             </a:r>
@@ -8185,9 +8185,9 @@
                 <a:solidFill>
                   <a:srgbClr val="0D9488"/>
                 </a:solidFill>
-                <a:latin typeface="Sakkal Majalla"/>
-                <a:cs typeface="Sakkal Majalla"/>
-                <a:ea typeface="Sakkal Majalla"/>
+                <a:latin typeface="Segoe UI"/>
+                <a:cs typeface="Segoe UI"/>
+                <a:ea typeface="Segoe UI"/>
               </a:rPr>
               <a:t>✔  </a:t>
             </a:r>
@@ -8196,9 +8196,9 @@
                 <a:solidFill>
                   <a:srgbClr val="1D4ED8"/>
                 </a:solidFill>
-                <a:latin typeface="Sakkal Majalla"/>
-                <a:cs typeface="Sakkal Majalla"/>
-                <a:ea typeface="Sakkal Majalla"/>
+                <a:latin typeface="Segoe UI"/>
+                <a:cs typeface="Segoe UI"/>
+                <a:ea typeface="Segoe UI"/>
               </a:rPr>
               <a:t>"Only quantitative methods were used…"</a:t>
             </a:r>
@@ -8207,9 +8207,9 @@
                 <a:solidFill>
                   <a:srgbClr val="6E6A8F"/>
                 </a:solidFill>
-                <a:latin typeface="Sakkal Majalla"/>
-                <a:cs typeface="Sakkal Majalla"/>
-                <a:ea typeface="Sakkal Majalla"/>
+                <a:latin typeface="Segoe UI"/>
+                <a:cs typeface="Segoe UI"/>
+                <a:ea typeface="Segoe UI"/>
               </a:rPr>
               <a:t>  اقتصار على منهج واحد — فجوة منهجية</a:t>
             </a:r>
@@ -8231,9 +8231,9 @@
                 <a:solidFill>
                   <a:srgbClr val="0D9488"/>
                 </a:solidFill>
-                <a:latin typeface="Sakkal Majalla"/>
-                <a:cs typeface="Sakkal Majalla"/>
-                <a:ea typeface="Sakkal Majalla"/>
+                <a:latin typeface="Segoe UI"/>
+                <a:cs typeface="Segoe UI"/>
+                <a:ea typeface="Segoe UI"/>
               </a:rPr>
               <a:t>✔  </a:t>
             </a:r>
@@ -8242,9 +8242,9 @@
                 <a:solidFill>
                   <a:srgbClr val="1D4ED8"/>
                 </a:solidFill>
-                <a:latin typeface="Sakkal Majalla"/>
-                <a:cs typeface="Sakkal Majalla"/>
-                <a:ea typeface="Sakkal Majalla"/>
+                <a:latin typeface="Segoe UI"/>
+                <a:cs typeface="Segoe UI"/>
+                <a:ea typeface="Segoe UI"/>
               </a:rPr>
               <a:t>"Before 2020…"</a:t>
             </a:r>
@@ -8253,9 +8253,9 @@
                 <a:solidFill>
                   <a:srgbClr val="6E6A8F"/>
                 </a:solidFill>
-                <a:latin typeface="Sakkal Majalla"/>
-                <a:cs typeface="Sakkal Majalla"/>
-                <a:ea typeface="Sakkal Majalla"/>
+                <a:latin typeface="Segoe UI"/>
+                <a:cs typeface="Segoe UI"/>
+                <a:ea typeface="Segoe UI"/>
               </a:rPr>
               <a:t>  بيانات قديمة — فجوة زمنية محتملة</a:t>
             </a:r>
@@ -8348,9 +8348,9 @@
                 <a:solidFill>
                   <a:srgbClr val="A21CAF"/>
                 </a:solidFill>
-                <a:latin typeface="Sakkal Majalla"/>
-                <a:cs typeface="Sakkal Majalla"/>
-                <a:ea typeface="Sakkal Majalla"/>
+                <a:latin typeface="Segoe UI"/>
+                <a:cs typeface="Segoe UI"/>
+                <a:ea typeface="Segoe UI"/>
               </a:rPr>
               <a:t>«التفكير النقدي لا يعني أن ننتقد الدراسات السابقة — بل أن نبني عليها ونطوّرها»  </a:t>
             </a:r>
@@ -8359,9 +8359,9 @@
                 <a:solidFill>
                   <a:srgbClr val="6E6A8F"/>
                 </a:solidFill>
-                <a:latin typeface="Sakkal Majalla"/>
-                <a:cs typeface="Sakkal Majalla"/>
-                <a:ea typeface="Sakkal Majalla"/>
+                <a:latin typeface="Segoe UI"/>
+                <a:cs typeface="Segoe UI"/>
+                <a:ea typeface="Segoe UI"/>
               </a:rPr>
               <a:t>— من شرح الورشة</a:t>
             </a:r>
@@ -8468,9 +8468,9 @@
                 <a:solidFill>
                   <a:srgbClr val="ECE9FA"/>
                 </a:solidFill>
-                <a:latin typeface="Sakkal Majalla"/>
-                <a:cs typeface="Sakkal Majalla"/>
-                <a:ea typeface="Sakkal Majalla"/>
+                <a:latin typeface="Segoe UI"/>
+                <a:cs typeface="Segoe UI"/>
+                <a:ea typeface="Segoe UI"/>
               </a:rPr>
               <a:t>12</a:t>
             </a:r>
@@ -8539,9 +8539,9 @@
                 <a:solidFill>
                   <a:srgbClr val="FFFFFF"/>
                 </a:solidFill>
-                <a:latin typeface="Sakkal Majalla"/>
-                <a:cs typeface="Sakkal Majalla"/>
-                <a:ea typeface="Sakkal Majalla"/>
+                <a:latin typeface="Segoe UI"/>
+                <a:cs typeface="Segoe UI"/>
+                <a:ea typeface="Segoe UI"/>
               </a:rPr>
               <a:t>⚖️</a:t>
             </a:r>
@@ -8586,9 +8586,9 @@
                 <a:solidFill>
                   <a:srgbClr val="0D9488"/>
                 </a:solidFill>
-                <a:latin typeface="Sakkal Majalla"/>
-                <a:cs typeface="Sakkal Majalla"/>
-                <a:ea typeface="Sakkal Majalla"/>
+                <a:latin typeface="Segoe UI"/>
+                <a:cs typeface="Segoe UI"/>
+                <a:ea typeface="Segoe UI"/>
               </a:rPr>
               <a:t>STRONG GAP VS. WEAK GAP</a:t>
             </a:r>
@@ -8633,9 +8633,9 @@
                 <a:solidFill>
                   <a:srgbClr val="221C57"/>
                 </a:solidFill>
-                <a:latin typeface="Sakkal Majalla"/>
-                <a:cs typeface="Sakkal Majalla"/>
-                <a:ea typeface="Sakkal Majalla"/>
+                <a:latin typeface="Segoe UI"/>
+                <a:cs typeface="Segoe UI"/>
+                <a:ea typeface="Segoe UI"/>
               </a:rPr>
               <a:t>الفجوة القوية والفجوة الضعيفة</a:t>
             </a:r>
@@ -8804,9 +8804,9 @@
                 <a:solidFill>
                   <a:srgbClr val="FFFFFF"/>
                 </a:solidFill>
-                <a:latin typeface="Sakkal Majalla"/>
-                <a:cs typeface="Sakkal Majalla"/>
-                <a:ea typeface="Sakkal Majalla"/>
+                <a:latin typeface="Segoe UI"/>
+                <a:cs typeface="Segoe UI"/>
+                <a:ea typeface="Segoe UI"/>
               </a:rPr>
               <a:t>12</a:t>
             </a:r>
@@ -8851,9 +8851,9 @@
                 <a:solidFill>
                   <a:srgbClr val="6E6A8F"/>
                 </a:solidFill>
-                <a:latin typeface="Sakkal Majalla"/>
-                <a:cs typeface="Sakkal Majalla"/>
-                <a:ea typeface="Sakkal Majalla"/>
+                <a:latin typeface="Segoe UI"/>
+                <a:cs typeface="Segoe UI"/>
+                <a:ea typeface="Segoe UI"/>
               </a:rPr>
               <a:t>الفجوات البحثية  •  د. هناء حسين الأهيمر</a:t>
             </a:r>
@@ -9006,9 +9006,9 @@
                 <a:solidFill>
                   <a:srgbClr val="047857"/>
                 </a:solidFill>
-                <a:latin typeface="Sakkal Majalla"/>
-                <a:cs typeface="Sakkal Majalla"/>
-                <a:ea typeface="Sakkal Majalla"/>
+                <a:latin typeface="Segoe UI"/>
+                <a:cs typeface="Segoe UI"/>
+                <a:ea typeface="Segoe UI"/>
               </a:rPr>
               <a:t>💪 الفجوة القوية — Strong Gap</a:t>
             </a:r>
@@ -9053,9 +9053,9 @@
                 <a:solidFill>
                   <a:srgbClr val="047857"/>
                 </a:solidFill>
-                <a:latin typeface="Sakkal Majalla"/>
-                <a:cs typeface="Sakkal Majalla"/>
-                <a:ea typeface="Sakkal Majalla"/>
+                <a:latin typeface="Segoe UI"/>
+                <a:cs typeface="Segoe UI"/>
+                <a:ea typeface="Segoe UI"/>
               </a:rPr>
               <a:t>✔  </a:t>
             </a:r>
@@ -9064,9 +9064,9 @@
                 <a:solidFill>
                   <a:srgbClr val="221C57"/>
                 </a:solidFill>
-                <a:latin typeface="Sakkal Majalla"/>
-                <a:cs typeface="Sakkal Majalla"/>
-                <a:ea typeface="Sakkal Majalla"/>
+                <a:latin typeface="Segoe UI"/>
+                <a:cs typeface="Segoe UI"/>
+                <a:ea typeface="Segoe UI"/>
               </a:rPr>
               <a:t>مدعومة بالأدلة</a:t>
             </a:r>
@@ -9075,9 +9075,9 @@
                 <a:solidFill>
                   <a:srgbClr val="6E6A8F"/>
                 </a:solidFill>
-                <a:latin typeface="Sakkal Majalla"/>
-                <a:cs typeface="Sakkal Majalla"/>
-                <a:ea typeface="Sakkal Majalla"/>
+                <a:latin typeface="Segoe UI"/>
+                <a:cs typeface="Segoe UI"/>
+                <a:ea typeface="Segoe UI"/>
               </a:rPr>
               <a:t>  —  تستند إلى مراجعة أدبيات حقيقية تثبت الغياب</a:t>
             </a:r>
@@ -9099,9 +9099,9 @@
                 <a:solidFill>
                   <a:srgbClr val="047857"/>
                 </a:solidFill>
-                <a:latin typeface="Sakkal Majalla"/>
-                <a:cs typeface="Sakkal Majalla"/>
-                <a:ea typeface="Sakkal Majalla"/>
+                <a:latin typeface="Segoe UI"/>
+                <a:cs typeface="Segoe UI"/>
+                <a:ea typeface="Segoe UI"/>
               </a:rPr>
               <a:t>✔  </a:t>
             </a:r>
@@ -9110,9 +9110,9 @@
                 <a:solidFill>
                   <a:srgbClr val="221C57"/>
                 </a:solidFill>
-                <a:latin typeface="Sakkal Majalla"/>
-                <a:cs typeface="Sakkal Majalla"/>
-                <a:ea typeface="Sakkal Majalla"/>
+                <a:latin typeface="Segoe UI"/>
+                <a:cs typeface="Segoe UI"/>
+                <a:ea typeface="Segoe UI"/>
               </a:rPr>
               <a:t>محددة وقابلة للقياس</a:t>
             </a:r>
@@ -9121,9 +9121,9 @@
                 <a:solidFill>
                   <a:srgbClr val="6E6A8F"/>
                 </a:solidFill>
-                <a:latin typeface="Sakkal Majalla"/>
-                <a:cs typeface="Sakkal Majalla"/>
-                <a:ea typeface="Sakkal Majalla"/>
+                <a:latin typeface="Segoe UI"/>
+                <a:cs typeface="Segoe UI"/>
+                <a:ea typeface="Segoe UI"/>
               </a:rPr>
               <a:t>  —  موضوع + فئة + سياق + إطار زمني واضح</a:t>
             </a:r>
@@ -9145,9 +9145,9 @@
                 <a:solidFill>
                   <a:srgbClr val="047857"/>
                 </a:solidFill>
-                <a:latin typeface="Sakkal Majalla"/>
-                <a:cs typeface="Sakkal Majalla"/>
-                <a:ea typeface="Sakkal Majalla"/>
+                <a:latin typeface="Segoe UI"/>
+                <a:cs typeface="Segoe UI"/>
+                <a:ea typeface="Segoe UI"/>
               </a:rPr>
               <a:t>✔  </a:t>
             </a:r>
@@ -9156,9 +9156,9 @@
                 <a:solidFill>
                   <a:srgbClr val="221C57"/>
                 </a:solidFill>
-                <a:latin typeface="Sakkal Majalla"/>
-                <a:cs typeface="Sakkal Majalla"/>
-                <a:ea typeface="Sakkal Majalla"/>
+                <a:latin typeface="Segoe UI"/>
+                <a:cs typeface="Segoe UI"/>
+                <a:ea typeface="Segoe UI"/>
               </a:rPr>
               <a:t>لها قيمة علمية وعملية</a:t>
             </a:r>
@@ -9167,9 +9167,9 @@
                 <a:solidFill>
                   <a:srgbClr val="6E6A8F"/>
                 </a:solidFill>
-                <a:latin typeface="Sakkal Majalla"/>
-                <a:cs typeface="Sakkal Majalla"/>
-                <a:ea typeface="Sakkal Majalla"/>
+                <a:latin typeface="Segoe UI"/>
+                <a:cs typeface="Segoe UI"/>
+                <a:ea typeface="Segoe UI"/>
               </a:rPr>
               <a:t>  —  سدّها يغيّر فهماً علمياً أو ممارسة واقعية</a:t>
             </a:r>
@@ -9191,9 +9191,9 @@
                 <a:solidFill>
                   <a:srgbClr val="047857"/>
                 </a:solidFill>
-                <a:latin typeface="Sakkal Majalla"/>
-                <a:cs typeface="Sakkal Majalla"/>
-                <a:ea typeface="Sakkal Majalla"/>
+                <a:latin typeface="Segoe UI"/>
+                <a:cs typeface="Segoe UI"/>
+                <a:ea typeface="Segoe UI"/>
               </a:rPr>
               <a:t>✔  </a:t>
             </a:r>
@@ -9202,9 +9202,9 @@
                 <a:solidFill>
                   <a:srgbClr val="221C57"/>
                 </a:solidFill>
-                <a:latin typeface="Sakkal Majalla"/>
-                <a:cs typeface="Sakkal Majalla"/>
-                <a:ea typeface="Sakkal Majalla"/>
+                <a:latin typeface="Segoe UI"/>
+                <a:cs typeface="Segoe UI"/>
+                <a:ea typeface="Segoe UI"/>
               </a:rPr>
               <a:t>قابلة للمعالجة</a:t>
             </a:r>
@@ -9213,9 +9213,9 @@
                 <a:solidFill>
                   <a:srgbClr val="6E6A8F"/>
                 </a:solidFill>
-                <a:latin typeface="Sakkal Majalla"/>
-                <a:cs typeface="Sakkal Majalla"/>
-                <a:ea typeface="Sakkal Majalla"/>
+                <a:latin typeface="Segoe UI"/>
+                <a:cs typeface="Segoe UI"/>
+                <a:ea typeface="Segoe UI"/>
               </a:rPr>
               <a:t>  —  يمكن تصميم دراسة واقعية وقابلة للتنفيذ لسدّها</a:t>
             </a:r>
@@ -9237,9 +9237,9 @@
                 <a:solidFill>
                   <a:srgbClr val="047857"/>
                 </a:solidFill>
-                <a:latin typeface="Sakkal Majalla"/>
-                <a:cs typeface="Sakkal Majalla"/>
-                <a:ea typeface="Sakkal Majalla"/>
+                <a:latin typeface="Segoe UI"/>
+                <a:cs typeface="Segoe UI"/>
+                <a:ea typeface="Segoe UI"/>
               </a:rPr>
               <a:t>✔  </a:t>
             </a:r>
@@ -9248,9 +9248,9 @@
                 <a:solidFill>
                   <a:srgbClr val="221C57"/>
                 </a:solidFill>
-                <a:latin typeface="Sakkal Majalla"/>
-                <a:cs typeface="Sakkal Majalla"/>
-                <a:ea typeface="Sakkal Majalla"/>
+                <a:latin typeface="Segoe UI"/>
+                <a:cs typeface="Segoe UI"/>
+                <a:ea typeface="Segoe UI"/>
               </a:rPr>
               <a:t>مرتبطة بسياق محدد</a:t>
             </a:r>
@@ -9259,9 +9259,9 @@
                 <a:solidFill>
                   <a:srgbClr val="6E6A8F"/>
                 </a:solidFill>
-                <a:latin typeface="Sakkal Majalla"/>
-                <a:cs typeface="Sakkal Majalla"/>
-                <a:ea typeface="Sakkal Majalla"/>
+                <a:latin typeface="Segoe UI"/>
+                <a:cs typeface="Segoe UI"/>
+                <a:ea typeface="Segoe UI"/>
               </a:rPr>
               <a:t>  —  بيئة أو مجتمع أو قطاع معيّن — لا عموميات</a:t>
             </a:r>
@@ -9414,9 +9414,9 @@
                 <a:solidFill>
                   <a:srgbClr val="BE123C"/>
                 </a:solidFill>
-                <a:latin typeface="Sakkal Majalla"/>
-                <a:cs typeface="Sakkal Majalla"/>
-                <a:ea typeface="Sakkal Majalla"/>
+                <a:latin typeface="Segoe UI"/>
+                <a:cs typeface="Segoe UI"/>
+                <a:ea typeface="Segoe UI"/>
               </a:rPr>
               <a:t>⚠️ الفجوة الضعيفة — Weak Gap</a:t>
             </a:r>
@@ -9461,9 +9461,9 @@
                 <a:solidFill>
                   <a:srgbClr val="BE123C"/>
                 </a:solidFill>
-                <a:latin typeface="Sakkal Majalla"/>
-                <a:cs typeface="Sakkal Majalla"/>
-                <a:ea typeface="Sakkal Majalla"/>
+                <a:latin typeface="Segoe UI"/>
+                <a:cs typeface="Segoe UI"/>
+                <a:ea typeface="Segoe UI"/>
               </a:rPr>
               <a:t>✘  </a:t>
             </a:r>
@@ -9472,9 +9472,9 @@
                 <a:solidFill>
                   <a:srgbClr val="221C57"/>
                 </a:solidFill>
-                <a:latin typeface="Sakkal Majalla"/>
-                <a:cs typeface="Sakkal Majalla"/>
-                <a:ea typeface="Sakkal Majalla"/>
+                <a:latin typeface="Segoe UI"/>
+                <a:cs typeface="Segoe UI"/>
+                <a:ea typeface="Segoe UI"/>
               </a:rPr>
               <a:t>عامة جداً وغير واضحة</a:t>
             </a:r>
@@ -9483,9 +9483,9 @@
                 <a:solidFill>
                   <a:srgbClr val="6E6A8F"/>
                 </a:solidFill>
-                <a:latin typeface="Sakkal Majalla"/>
-                <a:cs typeface="Sakkal Majalla"/>
-                <a:ea typeface="Sakkal Majalla"/>
+                <a:latin typeface="Segoe UI"/>
+                <a:cs typeface="Segoe UI"/>
+                <a:ea typeface="Segoe UI"/>
               </a:rPr>
               <a:t>  —  بلا موضوع محدد أو سياق أو حدود</a:t>
             </a:r>
@@ -9507,9 +9507,9 @@
                 <a:solidFill>
                   <a:srgbClr val="BE123C"/>
                 </a:solidFill>
-                <a:latin typeface="Sakkal Majalla"/>
-                <a:cs typeface="Sakkal Majalla"/>
-                <a:ea typeface="Sakkal Majalla"/>
+                <a:latin typeface="Segoe UI"/>
+                <a:cs typeface="Segoe UI"/>
+                <a:ea typeface="Segoe UI"/>
               </a:rPr>
               <a:t>✘  </a:t>
             </a:r>
@@ -9518,9 +9518,9 @@
                 <a:solidFill>
                   <a:srgbClr val="221C57"/>
                 </a:solidFill>
-                <a:latin typeface="Sakkal Majalla"/>
-                <a:cs typeface="Sakkal Majalla"/>
-                <a:ea typeface="Sakkal Majalla"/>
+                <a:latin typeface="Segoe UI"/>
+                <a:cs typeface="Segoe UI"/>
+                <a:ea typeface="Segoe UI"/>
               </a:rPr>
               <a:t>غير مدعومة بمراجعة كافية</a:t>
             </a:r>
@@ -9529,9 +9529,9 @@
                 <a:solidFill>
                   <a:srgbClr val="6E6A8F"/>
                 </a:solidFill>
-                <a:latin typeface="Sakkal Majalla"/>
-                <a:cs typeface="Sakkal Majalla"/>
-                <a:ea typeface="Sakkal Majalla"/>
+                <a:latin typeface="Segoe UI"/>
+                <a:cs typeface="Segoe UI"/>
+                <a:ea typeface="Segoe UI"/>
               </a:rPr>
               <a:t>  —  انطباع شخصي وليس مسحاً منهجياً</a:t>
             </a:r>
@@ -9553,9 +9553,9 @@
                 <a:solidFill>
                   <a:srgbClr val="BE123C"/>
                 </a:solidFill>
-                <a:latin typeface="Sakkal Majalla"/>
-                <a:cs typeface="Sakkal Majalla"/>
-                <a:ea typeface="Sakkal Majalla"/>
+                <a:latin typeface="Segoe UI"/>
+                <a:cs typeface="Segoe UI"/>
+                <a:ea typeface="Segoe UI"/>
               </a:rPr>
               <a:t>✘  </a:t>
             </a:r>
@@ -9564,9 +9564,9 @@
                 <a:solidFill>
                   <a:srgbClr val="221C57"/>
                 </a:solidFill>
-                <a:latin typeface="Sakkal Majalla"/>
-                <a:cs typeface="Sakkal Majalla"/>
-                <a:ea typeface="Sakkal Majalla"/>
+                <a:latin typeface="Segoe UI"/>
+                <a:cs typeface="Segoe UI"/>
+                <a:ea typeface="Segoe UI"/>
               </a:rPr>
               <a:t>«لم يدرسها أحد» بلا دليل</a:t>
             </a:r>
@@ -9575,9 +9575,9 @@
                 <a:solidFill>
                   <a:srgbClr val="6E6A8F"/>
                 </a:solidFill>
-                <a:latin typeface="Sakkal Majalla"/>
-                <a:cs typeface="Sakkal Majalla"/>
-                <a:ea typeface="Sakkal Majalla"/>
+                <a:latin typeface="Segoe UI"/>
+                <a:cs typeface="Segoe UI"/>
+                <a:ea typeface="Segoe UI"/>
               </a:rPr>
               <a:t>  —  ادعاء يسهل دحضه بدراسة واحدة مضادة</a:t>
             </a:r>
@@ -9599,9 +9599,9 @@
                 <a:solidFill>
                   <a:srgbClr val="BE123C"/>
                 </a:solidFill>
-                <a:latin typeface="Sakkal Majalla"/>
-                <a:cs typeface="Sakkal Majalla"/>
-                <a:ea typeface="Sakkal Majalla"/>
+                <a:latin typeface="Segoe UI"/>
+                <a:cs typeface="Segoe UI"/>
+                <a:ea typeface="Segoe UI"/>
               </a:rPr>
               <a:t>✘  </a:t>
             </a:r>
@@ -9610,9 +9610,9 @@
                 <a:solidFill>
                   <a:srgbClr val="221C57"/>
                 </a:solidFill>
-                <a:latin typeface="Sakkal Majalla"/>
-                <a:cs typeface="Sakkal Majalla"/>
-                <a:ea typeface="Sakkal Majalla"/>
+                <a:latin typeface="Segoe UI"/>
+                <a:cs typeface="Segoe UI"/>
+                <a:ea typeface="Segoe UI"/>
               </a:rPr>
               <a:t>لا تضيف قيمة للمعرفة</a:t>
             </a:r>
@@ -9621,9 +9621,9 @@
                 <a:solidFill>
                   <a:srgbClr val="6E6A8F"/>
                 </a:solidFill>
-                <a:latin typeface="Sakkal Majalla"/>
-                <a:cs typeface="Sakkal Majalla"/>
-                <a:ea typeface="Sakkal Majalla"/>
+                <a:latin typeface="Segoe UI"/>
+                <a:cs typeface="Segoe UI"/>
+                <a:ea typeface="Segoe UI"/>
               </a:rPr>
               <a:t>  —  سدّها لا يغيّر شيئاً يُذكر علمياً أو عملياً</a:t>
             </a:r>
@@ -9645,9 +9645,9 @@
                 <a:solidFill>
                   <a:srgbClr val="BE123C"/>
                 </a:solidFill>
-                <a:latin typeface="Sakkal Majalla"/>
-                <a:cs typeface="Sakkal Majalla"/>
-                <a:ea typeface="Sakkal Majalla"/>
+                <a:latin typeface="Segoe UI"/>
+                <a:cs typeface="Segoe UI"/>
+                <a:ea typeface="Segoe UI"/>
               </a:rPr>
               <a:t>✘  </a:t>
             </a:r>
@@ -9656,9 +9656,9 @@
                 <a:solidFill>
                   <a:srgbClr val="221C57"/>
                 </a:solidFill>
-                <a:latin typeface="Sakkal Majalla"/>
-                <a:cs typeface="Sakkal Majalla"/>
-                <a:ea typeface="Sakkal Majalla"/>
+                <a:latin typeface="Segoe UI"/>
+                <a:cs typeface="Segoe UI"/>
+                <a:ea typeface="Segoe UI"/>
               </a:rPr>
               <a:t>تكرار لدراسات سابقة</a:t>
             </a:r>
@@ -9667,9 +9667,9 @@
                 <a:solidFill>
                   <a:srgbClr val="6E6A8F"/>
                 </a:solidFill>
-                <a:latin typeface="Sakkal Majalla"/>
-                <a:cs typeface="Sakkal Majalla"/>
-                <a:ea typeface="Sakkal Majalla"/>
+                <a:latin typeface="Segoe UI"/>
+                <a:cs typeface="Segoe UI"/>
+                <a:ea typeface="Segoe UI"/>
               </a:rPr>
               <a:t>  —  إعادة إنتاج مقنَّعة وليست بحثاً جديداً</a:t>
             </a:r>
@@ -9768,9 +9768,9 @@
                 <a:solidFill>
                   <a:srgbClr val="D97706"/>
                 </a:solidFill>
-                <a:latin typeface="Sakkal Majalla"/>
-                <a:cs typeface="Sakkal Majalla"/>
-                <a:ea typeface="Sakkal Majalla"/>
+                <a:latin typeface="Segoe UI"/>
+                <a:cs typeface="Segoe UI"/>
+                <a:ea typeface="Segoe UI"/>
               </a:rPr>
               <a:t>🧪 المثال المقارن من الورشة —  </a:t>
             </a:r>
@@ -9779,9 +9779,9 @@
                 <a:solidFill>
                   <a:srgbClr val="BE123C"/>
                 </a:solidFill>
-                <a:latin typeface="Sakkal Majalla"/>
-                <a:cs typeface="Sakkal Majalla"/>
-                <a:ea typeface="Sakkal Majalla"/>
+                <a:latin typeface="Segoe UI"/>
+                <a:cs typeface="Segoe UI"/>
+                <a:ea typeface="Segoe UI"/>
               </a:rPr>
               <a:t>ضعيفة: </a:t>
             </a:r>
@@ -9790,9 +9790,9 @@
                 <a:solidFill>
                   <a:srgbClr val="221C57"/>
                 </a:solidFill>
-                <a:latin typeface="Sakkal Majalla"/>
-                <a:cs typeface="Sakkal Majalla"/>
-                <a:ea typeface="Sakkal Majalla"/>
+                <a:latin typeface="Segoe UI"/>
+                <a:cs typeface="Segoe UI"/>
+                <a:ea typeface="Segoe UI"/>
               </a:rPr>
               <a:t>«الصحة النفسية لم تُدرس بشكل كافٍ»  —  عامة، بلا فئة ولا سياق ولا زمن</a:t>
             </a:r>
@@ -9814,9 +9814,9 @@
                 <a:solidFill>
                   <a:srgbClr val="047857"/>
                 </a:solidFill>
-                <a:latin typeface="Sakkal Majalla"/>
-                <a:cs typeface="Sakkal Majalla"/>
-                <a:ea typeface="Sakkal Majalla"/>
+                <a:latin typeface="Segoe UI"/>
+                <a:cs typeface="Segoe UI"/>
+                <a:ea typeface="Segoe UI"/>
               </a:rPr>
               <a:t>قوية: </a:t>
             </a:r>
@@ -9825,9 +9825,9 @@
                 <a:solidFill>
                   <a:srgbClr val="221C57"/>
                 </a:solidFill>
-                <a:latin typeface="Sakkal Majalla"/>
-                <a:cs typeface="Sakkal Majalla"/>
-                <a:ea typeface="Sakkal Majalla"/>
+                <a:latin typeface="Segoe UI"/>
+                <a:cs typeface="Segoe UI"/>
+                <a:ea typeface="Segoe UI"/>
               </a:rPr>
               <a:t>«لا توجد دراسة حول تأثير الدراسة عن بُعد على القلق عند طلاب الجامعات العربية بعد 2020»  —  واضحة وقابلة للبحث</a:t>
             </a:r>
@@ -9934,9 +9934,9 @@
                 <a:solidFill>
                   <a:srgbClr val="ECE9FA"/>
                 </a:solidFill>
-                <a:latin typeface="Sakkal Majalla"/>
-                <a:cs typeface="Sakkal Majalla"/>
-                <a:ea typeface="Sakkal Majalla"/>
+                <a:latin typeface="Segoe UI"/>
+                <a:cs typeface="Segoe UI"/>
+                <a:ea typeface="Segoe UI"/>
               </a:rPr>
               <a:t>13</a:t>
             </a:r>
@@ -10005,9 +10005,9 @@
                 <a:solidFill>
                   <a:srgbClr val="FFFFFF"/>
                 </a:solidFill>
-                <a:latin typeface="Sakkal Majalla"/>
-                <a:cs typeface="Sakkal Majalla"/>
-                <a:ea typeface="Sakkal Majalla"/>
+                <a:latin typeface="Segoe UI"/>
+                <a:cs typeface="Segoe UI"/>
+                <a:ea typeface="Segoe UI"/>
               </a:rPr>
               <a:t>🚀</a:t>
             </a:r>
@@ -10052,9 +10052,9 @@
                 <a:solidFill>
                   <a:srgbClr val="BE123C"/>
                 </a:solidFill>
-                <a:latin typeface="Sakkal Majalla"/>
-                <a:cs typeface="Sakkal Majalla"/>
-                <a:ea typeface="Sakkal Majalla"/>
+                <a:latin typeface="Segoe UI"/>
+                <a:cs typeface="Segoe UI"/>
+                <a:ea typeface="Segoe UI"/>
               </a:rPr>
               <a:t>A 7-STEP PRACTICAL ROADMAP</a:t>
             </a:r>
@@ -10099,9 +10099,9 @@
                 <a:solidFill>
                   <a:srgbClr val="221C57"/>
                 </a:solidFill>
-                <a:latin typeface="Sakkal Majalla"/>
-                <a:cs typeface="Sakkal Majalla"/>
-                <a:ea typeface="Sakkal Majalla"/>
+                <a:latin typeface="Segoe UI"/>
+                <a:cs typeface="Segoe UI"/>
+                <a:ea typeface="Segoe UI"/>
               </a:rPr>
               <a:t>خارطة طريق عملية: من الصفر إلى الفجوة</a:t>
             </a:r>
@@ -10270,9 +10270,9 @@
                 <a:solidFill>
                   <a:srgbClr val="FFFFFF"/>
                 </a:solidFill>
-                <a:latin typeface="Sakkal Majalla"/>
-                <a:cs typeface="Sakkal Majalla"/>
-                <a:ea typeface="Sakkal Majalla"/>
+                <a:latin typeface="Segoe UI"/>
+                <a:cs typeface="Segoe UI"/>
+                <a:ea typeface="Segoe UI"/>
               </a:rPr>
               <a:t>13</a:t>
             </a:r>
@@ -10317,9 +10317,9 @@
                 <a:solidFill>
                   <a:srgbClr val="6E6A8F"/>
                 </a:solidFill>
-                <a:latin typeface="Sakkal Majalla"/>
-                <a:cs typeface="Sakkal Majalla"/>
-                <a:ea typeface="Sakkal Majalla"/>
+                <a:latin typeface="Segoe UI"/>
+                <a:cs typeface="Segoe UI"/>
+                <a:ea typeface="Segoe UI"/>
               </a:rPr>
               <a:t>الفجوات البحثية  •  د. هناء حسين الأهيمر</a:t>
             </a:r>
@@ -10440,9 +10440,9 @@
                 <a:solidFill>
                   <a:srgbClr val="FFFFFF"/>
                 </a:solidFill>
-                <a:latin typeface="Sakkal Majalla"/>
-                <a:cs typeface="Sakkal Majalla"/>
-                <a:ea typeface="Sakkal Majalla"/>
+                <a:latin typeface="Segoe UI"/>
+                <a:cs typeface="Segoe UI"/>
+                <a:ea typeface="Segoe UI"/>
               </a:rPr>
               <a:t>١</a:t>
             </a:r>
@@ -10487,9 +10487,9 @@
                 <a:solidFill>
                   <a:srgbClr val="A21CAF"/>
                 </a:solidFill>
-                <a:latin typeface="Sakkal Majalla"/>
-                <a:cs typeface="Sakkal Majalla"/>
-                <a:ea typeface="Sakkal Majalla"/>
+                <a:latin typeface="Segoe UI"/>
+                <a:cs typeface="Segoe UI"/>
+                <a:ea typeface="Segoe UI"/>
               </a:rPr>
               <a:t>حدّد مجالك بدقة</a:t>
             </a:r>
@@ -10534,9 +10534,9 @@
                 <a:solidFill>
                   <a:srgbClr val="221C57"/>
                 </a:solidFill>
-                <a:latin typeface="Sakkal Majalla"/>
-                <a:cs typeface="Sakkal Majalla"/>
-                <a:ea typeface="Sakkal Majalla"/>
+                <a:latin typeface="Segoe UI"/>
+                <a:cs typeface="Segoe UI"/>
+                <a:ea typeface="Segoe UI"/>
               </a:rPr>
               <a:t>تخصص فرعي ضيق — «التعليم الإلكتروني للمرحلة الابتدائية» لا «التعليم» عموماً</a:t>
             </a:r>
@@ -10657,9 +10657,9 @@
                 <a:solidFill>
                   <a:srgbClr val="FFFFFF"/>
                 </a:solidFill>
-                <a:latin typeface="Sakkal Majalla"/>
-                <a:cs typeface="Sakkal Majalla"/>
-                <a:ea typeface="Sakkal Majalla"/>
+                <a:latin typeface="Segoe UI"/>
+                <a:cs typeface="Segoe UI"/>
+                <a:ea typeface="Segoe UI"/>
               </a:rPr>
               <a:t>٢</a:t>
             </a:r>
@@ -10704,9 +10704,9 @@
                 <a:solidFill>
                   <a:srgbClr val="D97706"/>
                 </a:solidFill>
-                <a:latin typeface="Sakkal Majalla"/>
-                <a:cs typeface="Sakkal Majalla"/>
-                <a:ea typeface="Sakkal Majalla"/>
+                <a:latin typeface="Segoe UI"/>
+                <a:cs typeface="Segoe UI"/>
+                <a:ea typeface="Segoe UI"/>
               </a:rPr>
               <a:t>اجمع أحدث الدراسات</a:t>
             </a:r>
@@ -10751,9 +10751,9 @@
                 <a:solidFill>
                   <a:srgbClr val="221C57"/>
                 </a:solidFill>
-                <a:latin typeface="Sakkal Majalla"/>
-                <a:cs typeface="Sakkal Majalla"/>
-                <a:ea typeface="Sakkal Majalla"/>
+                <a:latin typeface="Segoe UI"/>
+                <a:cs typeface="Segoe UI"/>
+                <a:ea typeface="Segoe UI"/>
               </a:rPr>
               <a:t>20–30 دراسة من آخر 5 سنوات عبر Semantic Scholar وGoogle Scholar</a:t>
             </a:r>
@@ -10874,9 +10874,9 @@
                 <a:solidFill>
                   <a:srgbClr val="FFFFFF"/>
                 </a:solidFill>
-                <a:latin typeface="Sakkal Majalla"/>
-                <a:cs typeface="Sakkal Majalla"/>
-                <a:ea typeface="Sakkal Majalla"/>
+                <a:latin typeface="Segoe UI"/>
+                <a:cs typeface="Segoe UI"/>
+                <a:ea typeface="Segoe UI"/>
               </a:rPr>
               <a:t>٣</a:t>
             </a:r>
@@ -10921,9 +10921,9 @@
                 <a:solidFill>
                   <a:srgbClr val="0D9488"/>
                 </a:solidFill>
-                <a:latin typeface="Sakkal Majalla"/>
-                <a:cs typeface="Sakkal Majalla"/>
-                <a:ea typeface="Sakkal Majalla"/>
+                <a:latin typeface="Segoe UI"/>
+                <a:cs typeface="Segoe UI"/>
+                <a:ea typeface="Segoe UI"/>
               </a:rPr>
               <a:t>اقرأ الخاتمات أولاً</a:t>
             </a:r>
@@ -10968,9 +10968,9 @@
                 <a:solidFill>
                   <a:srgbClr val="221C57"/>
                 </a:solidFill>
-                <a:latin typeface="Sakkal Majalla"/>
-                <a:cs typeface="Sakkal Majalla"/>
-                <a:ea typeface="Sakkal Majalla"/>
+                <a:latin typeface="Segoe UI"/>
+                <a:cs typeface="Segoe UI"/>
+                <a:ea typeface="Segoe UI"/>
               </a:rPr>
               <a:t>أقسام حدود الدراسة والاقتراحات المستقبلية — أسرع مصدر للفجوات الموثقة</a:t>
             </a:r>
@@ -11091,9 +11091,9 @@
                 <a:solidFill>
                   <a:srgbClr val="FFFFFF"/>
                 </a:solidFill>
-                <a:latin typeface="Sakkal Majalla"/>
-                <a:cs typeface="Sakkal Majalla"/>
-                <a:ea typeface="Sakkal Majalla"/>
+                <a:latin typeface="Segoe UI"/>
+                <a:cs typeface="Segoe UI"/>
+                <a:ea typeface="Segoe UI"/>
               </a:rPr>
               <a:t>٤</a:t>
             </a:r>
@@ -11138,9 +11138,9 @@
                 <a:solidFill>
                   <a:srgbClr val="6D28D9"/>
                 </a:solidFill>
-                <a:latin typeface="Sakkal Majalla"/>
-                <a:cs typeface="Sakkal Majalla"/>
-                <a:ea typeface="Sakkal Majalla"/>
+                <a:latin typeface="Segoe UI"/>
+                <a:cs typeface="Segoe UI"/>
+                <a:ea typeface="Segoe UI"/>
               </a:rPr>
               <a:t>اعمل خريطة الأدبيات</a:t>
             </a:r>
@@ -11185,9 +11185,9 @@
                 <a:solidFill>
                   <a:srgbClr val="221C57"/>
                 </a:solidFill>
-                <a:latin typeface="Sakkal Majalla"/>
-                <a:cs typeface="Sakkal Majalla"/>
-                <a:ea typeface="Sakkal Majalla"/>
+                <a:latin typeface="Segoe UI"/>
+                <a:cs typeface="Segoe UI"/>
+                <a:ea typeface="Segoe UI"/>
               </a:rPr>
               <a:t>جدول يقارن: السكان، المنهج، الدولة، الزمن، أبرز النتائج لكل دراسة</a:t>
             </a:r>
@@ -11308,9 +11308,9 @@
                 <a:solidFill>
                   <a:srgbClr val="FFFFFF"/>
                 </a:solidFill>
-                <a:latin typeface="Sakkal Majalla"/>
-                <a:cs typeface="Sakkal Majalla"/>
-                <a:ea typeface="Sakkal Majalla"/>
+                <a:latin typeface="Segoe UI"/>
+                <a:cs typeface="Segoe UI"/>
+                <a:ea typeface="Segoe UI"/>
               </a:rPr>
               <a:t>٥</a:t>
             </a:r>
@@ -11355,9 +11355,9 @@
                 <a:solidFill>
                   <a:srgbClr val="BE123C"/>
                 </a:solidFill>
-                <a:latin typeface="Sakkal Majalla"/>
-                <a:cs typeface="Sakkal Majalla"/>
-                <a:ea typeface="Sakkal Majalla"/>
+                <a:latin typeface="Segoe UI"/>
+                <a:cs typeface="Segoe UI"/>
+                <a:ea typeface="Segoe UI"/>
               </a:rPr>
               <a:t>علّم الفراغات والتناقضات</a:t>
             </a:r>
@@ -11402,9 +11402,9 @@
                 <a:solidFill>
                   <a:srgbClr val="221C57"/>
                 </a:solidFill>
-                <a:latin typeface="Sakkal Majalla"/>
-                <a:cs typeface="Sakkal Majalla"/>
-                <a:ea typeface="Sakkal Majalla"/>
+                <a:latin typeface="Segoe UI"/>
+                <a:cs typeface="Segoe UI"/>
+                <a:ea typeface="Segoe UI"/>
               </a:rPr>
               <a:t>ظلّل الخانات الفارغة والنتائج المتضاربة — هذه مواضع فجواتك المحتملة</a:t>
             </a:r>
@@ -11525,9 +11525,9 @@
                 <a:solidFill>
                   <a:srgbClr val="FFFFFF"/>
                 </a:solidFill>
-                <a:latin typeface="Sakkal Majalla"/>
-                <a:cs typeface="Sakkal Majalla"/>
-                <a:ea typeface="Sakkal Majalla"/>
+                <a:latin typeface="Segoe UI"/>
+                <a:cs typeface="Segoe UI"/>
+                <a:ea typeface="Segoe UI"/>
               </a:rPr>
               <a:t>٦</a:t>
             </a:r>
@@ -11572,9 +11572,9 @@
                 <a:solidFill>
                   <a:srgbClr val="047857"/>
                 </a:solidFill>
-                <a:latin typeface="Sakkal Majalla"/>
-                <a:cs typeface="Sakkal Majalla"/>
-                <a:ea typeface="Sakkal Majalla"/>
+                <a:latin typeface="Segoe UI"/>
+                <a:cs typeface="Segoe UI"/>
+                <a:ea typeface="Segoe UI"/>
               </a:rPr>
               <a:t>تحقق بأدوات الذكاء الاصطناعي</a:t>
             </a:r>
@@ -11619,9 +11619,9 @@
                 <a:solidFill>
                   <a:srgbClr val="221C57"/>
                 </a:solidFill>
-                <a:latin typeface="Sakkal Majalla"/>
-                <a:cs typeface="Sakkal Majalla"/>
-                <a:ea typeface="Sakkal Majalla"/>
+                <a:latin typeface="Segoe UI"/>
+                <a:cs typeface="Segoe UI"/>
+                <a:ea typeface="Segoe UI"/>
               </a:rPr>
               <a:t>Research Rabbit وConsensus للتأكد أن الفجوة لم تُسد بدراسة حديثة</a:t>
             </a:r>
@@ -11742,9 +11742,9 @@
                 <a:solidFill>
                   <a:srgbClr val="FFFFFF"/>
                 </a:solidFill>
-                <a:latin typeface="Sakkal Majalla"/>
-                <a:cs typeface="Sakkal Majalla"/>
-                <a:ea typeface="Sakkal Majalla"/>
+                <a:latin typeface="Segoe UI"/>
+                <a:cs typeface="Segoe UI"/>
+                <a:ea typeface="Segoe UI"/>
               </a:rPr>
               <a:t>٧</a:t>
             </a:r>
@@ -11789,9 +11789,9 @@
                 <a:solidFill>
                   <a:srgbClr val="1D4ED8"/>
                 </a:solidFill>
-                <a:latin typeface="Sakkal Majalla"/>
-                <a:cs typeface="Sakkal Majalla"/>
-                <a:ea typeface="Sakkal Majalla"/>
+                <a:latin typeface="Segoe UI"/>
+                <a:cs typeface="Segoe UI"/>
+                <a:ea typeface="Segoe UI"/>
               </a:rPr>
               <a:t>صُغ فجوتك بدقة</a:t>
             </a:r>
@@ -11836,9 +11836,9 @@
                 <a:solidFill>
                   <a:srgbClr val="221C57"/>
                 </a:solidFill>
-                <a:latin typeface="Sakkal Majalla"/>
-                <a:cs typeface="Sakkal Majalla"/>
-                <a:ea typeface="Sakkal Majalla"/>
+                <a:latin typeface="Segoe UI"/>
+                <a:cs typeface="Segoe UI"/>
+                <a:ea typeface="Segoe UI"/>
               </a:rPr>
               <a:t>جملة محددة قابلة للقياس: الموضوع + الفئة + السياق + الزمن</a:t>
             </a:r>
@@ -11943,9 +11943,9 @@
                 <a:solidFill>
                   <a:srgbClr val="FBBF24"/>
                 </a:solidFill>
-                <a:latin typeface="Sakkal Majalla"/>
-                <a:cs typeface="Sakkal Majalla"/>
-                <a:ea typeface="Sakkal Majalla"/>
+                <a:latin typeface="Segoe UI"/>
+                <a:cs typeface="Segoe UI"/>
+                <a:ea typeface="Segoe UI"/>
               </a:rPr>
               <a:t>⏱ الزمن الواقعي: </a:t>
             </a:r>
@@ -11954,9 +11954,9 @@
                 <a:solidFill>
                   <a:srgbClr val="FFFFFF"/>
                 </a:solidFill>
-                <a:latin typeface="Sakkal Majalla"/>
-                <a:cs typeface="Sakkal Majalla"/>
-                <a:ea typeface="Sakkal Majalla"/>
+                <a:latin typeface="Segoe UI"/>
+                <a:cs typeface="Segoe UI"/>
+                <a:ea typeface="Segoe UI"/>
               </a:rPr>
               <a:t>أسبوعان إلى أربعة أسابيع من العمل المنظّم تكفي غالباً للوصول إلى فجوة موثقة تصمد أمام أي لجنة علمية</a:t>
             </a:r>
@@ -12063,9 +12063,9 @@
                 <a:solidFill>
                   <a:srgbClr val="ECE9FA"/>
                 </a:solidFill>
-                <a:latin typeface="Sakkal Majalla"/>
-                <a:cs typeface="Sakkal Majalla"/>
-                <a:ea typeface="Sakkal Majalla"/>
+                <a:latin typeface="Segoe UI"/>
+                <a:cs typeface="Segoe UI"/>
+                <a:ea typeface="Segoe UI"/>
               </a:rPr>
               <a:t>14</a:t>
             </a:r>
@@ -12134,9 +12134,9 @@
                 <a:solidFill>
                   <a:srgbClr val="FFFFFF"/>
                 </a:solidFill>
-                <a:latin typeface="Sakkal Majalla"/>
-                <a:cs typeface="Sakkal Majalla"/>
-                <a:ea typeface="Sakkal Majalla"/>
+                <a:latin typeface="Segoe UI"/>
+                <a:cs typeface="Segoe UI"/>
+                <a:ea typeface="Segoe UI"/>
               </a:rPr>
               <a:t>✍️</a:t>
             </a:r>
@@ -12181,9 +12181,9 @@
                 <a:solidFill>
                   <a:srgbClr val="1D4ED8"/>
                 </a:solidFill>
-                <a:latin typeface="Sakkal Majalla"/>
-                <a:cs typeface="Sakkal Majalla"/>
-                <a:ea typeface="Sakkal Majalla"/>
+                <a:latin typeface="Segoe UI"/>
+                <a:cs typeface="Segoe UI"/>
+                <a:ea typeface="Segoe UI"/>
               </a:rPr>
               <a:t>WRITING YOUR GAP STATEMENT</a:t>
             </a:r>
@@ -12228,9 +12228,9 @@
                 <a:solidFill>
                   <a:srgbClr val="221C57"/>
                 </a:solidFill>
-                <a:latin typeface="Sakkal Majalla"/>
-                <a:cs typeface="Sakkal Majalla"/>
-                <a:ea typeface="Sakkal Majalla"/>
+                <a:latin typeface="Segoe UI"/>
+                <a:cs typeface="Segoe UI"/>
+                <a:ea typeface="Segoe UI"/>
               </a:rPr>
               <a:t>صياغة الفجوة البحثية باحترافية</a:t>
             </a:r>
@@ -12399,9 +12399,9 @@
                 <a:solidFill>
                   <a:srgbClr val="FFFFFF"/>
                 </a:solidFill>
-                <a:latin typeface="Sakkal Majalla"/>
-                <a:cs typeface="Sakkal Majalla"/>
-                <a:ea typeface="Sakkal Majalla"/>
+                <a:latin typeface="Segoe UI"/>
+                <a:cs typeface="Segoe UI"/>
+                <a:ea typeface="Segoe UI"/>
               </a:rPr>
               <a:t>14</a:t>
             </a:r>
@@ -12446,9 +12446,9 @@
                 <a:solidFill>
                   <a:srgbClr val="6E6A8F"/>
                 </a:solidFill>
-                <a:latin typeface="Sakkal Majalla"/>
-                <a:cs typeface="Sakkal Majalla"/>
-                <a:ea typeface="Sakkal Majalla"/>
+                <a:latin typeface="Segoe UI"/>
+                <a:cs typeface="Segoe UI"/>
+                <a:ea typeface="Segoe UI"/>
               </a:rPr>
               <a:t>الفجوات البحثية  •  د. هناء حسين الأهيمر</a:t>
             </a:r>
@@ -12553,9 +12553,9 @@
                 <a:solidFill>
                   <a:srgbClr val="FBBF24"/>
                 </a:solidFill>
-                <a:latin typeface="Sakkal Majalla"/>
-                <a:cs typeface="Sakkal Majalla"/>
-                <a:ea typeface="Sakkal Majalla"/>
+                <a:latin typeface="Segoe UI"/>
+                <a:cs typeface="Segoe UI"/>
+                <a:ea typeface="Segoe UI"/>
               </a:rPr>
               <a:t>القالب الجاهز:  </a:t>
             </a:r>
@@ -12564,9 +12564,9 @@
                 <a:solidFill>
                   <a:srgbClr val="FFFFFF"/>
                 </a:solidFill>
-                <a:latin typeface="Sakkal Majalla"/>
-                <a:cs typeface="Sakkal Majalla"/>
-                <a:ea typeface="Sakkal Majalla"/>
+                <a:latin typeface="Segoe UI"/>
+                <a:cs typeface="Segoe UI"/>
+                <a:ea typeface="Segoe UI"/>
               </a:rPr>
               <a:t>انسخه واملأ الفراغات الملونة</a:t>
             </a:r>
@@ -12611,9 +12611,9 @@
                 <a:solidFill>
                   <a:srgbClr val="FFFFFF"/>
                 </a:solidFill>
-                <a:latin typeface="Sakkal Majalla"/>
-                <a:cs typeface="Sakkal Majalla"/>
-                <a:ea typeface="Sakkal Majalla"/>
+                <a:latin typeface="Segoe UI"/>
+                <a:cs typeface="Segoe UI"/>
+                <a:ea typeface="Segoe UI"/>
               </a:rPr>
               <a:t>«على الرغم من أن الدراسات السابقة تناولت </a:t>
             </a:r>
@@ -12622,9 +12622,9 @@
                 <a:solidFill>
                   <a:srgbClr val="FBBF24"/>
                 </a:solidFill>
-                <a:latin typeface="Sakkal Majalla"/>
-                <a:cs typeface="Sakkal Majalla"/>
-                <a:ea typeface="Sakkal Majalla"/>
+                <a:latin typeface="Segoe UI"/>
+                <a:cs typeface="Segoe UI"/>
+                <a:ea typeface="Segoe UI"/>
               </a:rPr>
               <a:t>[الموضوع X]</a:t>
             </a:r>
@@ -12633,9 +12633,9 @@
                 <a:solidFill>
                   <a:srgbClr val="FFFFFF"/>
                 </a:solidFill>
-                <a:latin typeface="Sakkal Majalla"/>
-                <a:cs typeface="Sakkal Majalla"/>
-                <a:ea typeface="Sakkal Majalla"/>
+                <a:latin typeface="Segoe UI"/>
+                <a:cs typeface="Segoe UI"/>
+                <a:ea typeface="Segoe UI"/>
               </a:rPr>
               <a:t>، إلا أن </a:t>
             </a:r>
@@ -12644,9 +12644,9 @@
                 <a:solidFill>
                   <a:srgbClr val="5EEAD4"/>
                 </a:solidFill>
-                <a:latin typeface="Sakkal Majalla"/>
-                <a:cs typeface="Sakkal Majalla"/>
-                <a:ea typeface="Sakkal Majalla"/>
+                <a:latin typeface="Segoe UI"/>
+                <a:cs typeface="Segoe UI"/>
+                <a:ea typeface="Segoe UI"/>
               </a:rPr>
               <a:t>[الجانب Y]</a:t>
             </a:r>
@@ -12655,9 +12655,9 @@
                 <a:solidFill>
                   <a:srgbClr val="FFFFFF"/>
                 </a:solidFill>
-                <a:latin typeface="Sakkal Majalla"/>
-                <a:cs typeface="Sakkal Majalla"/>
-                <a:ea typeface="Sakkal Majalla"/>
+                <a:latin typeface="Segoe UI"/>
+                <a:cs typeface="Segoe UI"/>
+                <a:ea typeface="Segoe UI"/>
               </a:rPr>
               <a:t> لم يُدرس بعد في </a:t>
             </a:r>
@@ -12666,9 +12666,9 @@
                 <a:solidFill>
                   <a:srgbClr val="FDA4AF"/>
                 </a:solidFill>
-                <a:latin typeface="Sakkal Majalla"/>
-                <a:cs typeface="Sakkal Majalla"/>
-                <a:ea typeface="Sakkal Majalla"/>
+                <a:latin typeface="Segoe UI"/>
+                <a:cs typeface="Segoe UI"/>
+                <a:ea typeface="Segoe UI"/>
               </a:rPr>
               <a:t>[السياق Z]</a:t>
             </a:r>
@@ -12677,9 +12677,9 @@
                 <a:solidFill>
                   <a:srgbClr val="FFFFFF"/>
                 </a:solidFill>
-                <a:latin typeface="Sakkal Majalla"/>
-                <a:cs typeface="Sakkal Majalla"/>
-                <a:ea typeface="Sakkal Majalla"/>
+                <a:latin typeface="Segoe UI"/>
+                <a:cs typeface="Segoe UI"/>
+                <a:ea typeface="Segoe UI"/>
               </a:rPr>
               <a:t>، مما يستدعي إجراء </a:t>
             </a:r>
@@ -12688,9 +12688,9 @@
                 <a:solidFill>
                   <a:srgbClr val="C4B5FD"/>
                 </a:solidFill>
-                <a:latin typeface="Sakkal Majalla"/>
-                <a:cs typeface="Sakkal Majalla"/>
-                <a:ea typeface="Sakkal Majalla"/>
+                <a:latin typeface="Segoe UI"/>
+                <a:cs typeface="Segoe UI"/>
+                <a:ea typeface="Segoe UI"/>
               </a:rPr>
               <a:t>[نوع الدراسة المقترحة]</a:t>
             </a:r>
@@ -12699,9 +12699,9 @@
                 <a:solidFill>
                   <a:srgbClr val="FFFFFF"/>
                 </a:solidFill>
-                <a:latin typeface="Sakkal Majalla"/>
-                <a:cs typeface="Sakkal Majalla"/>
-                <a:ea typeface="Sakkal Majalla"/>
+                <a:latin typeface="Segoe UI"/>
+                <a:cs typeface="Segoe UI"/>
+                <a:ea typeface="Segoe UI"/>
               </a:rPr>
               <a:t>.»</a:t>
             </a:r>
@@ -12800,9 +12800,9 @@
                 <a:solidFill>
                   <a:srgbClr val="0D9488"/>
                 </a:solidFill>
-                <a:latin typeface="Sakkal Majalla"/>
-                <a:cs typeface="Sakkal Majalla"/>
-                <a:ea typeface="Sakkal Majalla"/>
+                <a:latin typeface="Segoe UI"/>
+                <a:cs typeface="Segoe UI"/>
+                <a:ea typeface="Segoe UI"/>
               </a:rPr>
               <a:t>✅ مثال مطبَّق بأسلوب الورشة:  </a:t>
             </a:r>
@@ -12811,9 +12811,9 @@
                 <a:solidFill>
                   <a:srgbClr val="221C57"/>
                 </a:solidFill>
-                <a:latin typeface="Sakkal Majalla"/>
-                <a:cs typeface="Sakkal Majalla"/>
-                <a:ea typeface="Sakkal Majalla"/>
+                <a:latin typeface="Segoe UI"/>
+                <a:cs typeface="Segoe UI"/>
+                <a:ea typeface="Segoe UI"/>
               </a:rPr>
               <a:t>«على الرغم من أن الدراسات السابقة تناولت التعلم الإلكتروني في الجامعات، إلا أن تأثيره على القلق عند طلاب الجامعات العربية بعد 2020 لم يُدرس بعد، مما يستدعي إجراء دراسة مختلطة (كمية ونوعية) لسدّ هذه الفجوة.»</a:t>
             </a:r>
@@ -12858,9 +12858,9 @@
                 <a:solidFill>
                   <a:srgbClr val="221C57"/>
                 </a:solidFill>
-                <a:latin typeface="Sakkal Majalla"/>
-                <a:cs typeface="Sakkal Majalla"/>
-                <a:ea typeface="Sakkal Majalla"/>
+                <a:latin typeface="Segoe UI"/>
+                <a:cs typeface="Segoe UI"/>
+                <a:ea typeface="Segoe UI"/>
               </a:rPr>
               <a:t>قائمة الفحص الخماسية قبل اعتماد الفجوة نهائياً:</a:t>
             </a:r>
@@ -13013,9 +13013,9 @@
                 <a:solidFill>
                   <a:srgbClr val="A21CAF"/>
                 </a:solidFill>
-                <a:latin typeface="Sakkal Majalla"/>
-                <a:cs typeface="Sakkal Majalla"/>
-                <a:ea typeface="Sakkal Majalla"/>
+                <a:latin typeface="Segoe UI"/>
+                <a:cs typeface="Segoe UI"/>
+                <a:ea typeface="Segoe UI"/>
               </a:rPr>
               <a:t>✔ موثّقة؟</a:t>
             </a:r>
@@ -13060,9 +13060,9 @@
                 <a:solidFill>
                   <a:srgbClr val="6E6A8F"/>
                 </a:solidFill>
-                <a:latin typeface="Sakkal Majalla"/>
-                <a:cs typeface="Sakkal Majalla"/>
-                <a:ea typeface="Sakkal Majalla"/>
+                <a:latin typeface="Segoe UI"/>
+                <a:cs typeface="Segoe UI"/>
+                <a:ea typeface="Segoe UI"/>
               </a:rPr>
               <a:t>تستند لمراجعة فعلية</a:t>
             </a:r>
@@ -13215,9 +13215,9 @@
                 <a:solidFill>
                   <a:srgbClr val="D97706"/>
                 </a:solidFill>
-                <a:latin typeface="Sakkal Majalla"/>
-                <a:cs typeface="Sakkal Majalla"/>
-                <a:ea typeface="Sakkal Majalla"/>
+                <a:latin typeface="Segoe UI"/>
+                <a:cs typeface="Segoe UI"/>
+                <a:ea typeface="Segoe UI"/>
               </a:rPr>
               <a:t>✔ محددة؟</a:t>
             </a:r>
@@ -13262,9 +13262,9 @@
                 <a:solidFill>
                   <a:srgbClr val="6E6A8F"/>
                 </a:solidFill>
-                <a:latin typeface="Sakkal Majalla"/>
-                <a:cs typeface="Sakkal Majalla"/>
-                <a:ea typeface="Sakkal Majalla"/>
+                <a:latin typeface="Segoe UI"/>
+                <a:cs typeface="Segoe UI"/>
+                <a:ea typeface="Segoe UI"/>
               </a:rPr>
               <a:t>موضوع وفئة وسياق وزمن</a:t>
             </a:r>
@@ -13417,9 +13417,9 @@
                 <a:solidFill>
                   <a:srgbClr val="0D9488"/>
                 </a:solidFill>
-                <a:latin typeface="Sakkal Majalla"/>
-                <a:cs typeface="Sakkal Majalla"/>
-                <a:ea typeface="Sakkal Majalla"/>
+                <a:latin typeface="Segoe UI"/>
+                <a:cs typeface="Segoe UI"/>
+                <a:ea typeface="Segoe UI"/>
               </a:rPr>
               <a:t>✔ مهمة؟</a:t>
             </a:r>
@@ -13464,9 +13464,9 @@
                 <a:solidFill>
                   <a:srgbClr val="6E6A8F"/>
                 </a:solidFill>
-                <a:latin typeface="Sakkal Majalla"/>
-                <a:cs typeface="Sakkal Majalla"/>
-                <a:ea typeface="Sakkal Majalla"/>
+                <a:latin typeface="Segoe UI"/>
+                <a:cs typeface="Segoe UI"/>
+                <a:ea typeface="Segoe UI"/>
               </a:rPr>
               <a:t>سدّها يُحدث فرقاً</a:t>
             </a:r>
@@ -13619,9 +13619,9 @@
                 <a:solidFill>
                   <a:srgbClr val="6D28D9"/>
                 </a:solidFill>
-                <a:latin typeface="Sakkal Majalla"/>
-                <a:cs typeface="Sakkal Majalla"/>
-                <a:ea typeface="Sakkal Majalla"/>
+                <a:latin typeface="Segoe UI"/>
+                <a:cs typeface="Segoe UI"/>
+                <a:ea typeface="Segoe UI"/>
               </a:rPr>
               <a:t>✔ قابلة للمعالجة؟</a:t>
             </a:r>
@@ -13666,9 +13666,9 @@
                 <a:solidFill>
                   <a:srgbClr val="6E6A8F"/>
                 </a:solidFill>
-                <a:latin typeface="Sakkal Majalla"/>
-                <a:cs typeface="Sakkal Majalla"/>
-                <a:ea typeface="Sakkal Majalla"/>
+                <a:latin typeface="Segoe UI"/>
+                <a:cs typeface="Segoe UI"/>
+                <a:ea typeface="Segoe UI"/>
               </a:rPr>
               <a:t>منهجية واقعية متاحة</a:t>
             </a:r>
@@ -13821,9 +13821,9 @@
                 <a:solidFill>
                   <a:srgbClr val="BE123C"/>
                 </a:solidFill>
-                <a:latin typeface="Sakkal Majalla"/>
-                <a:cs typeface="Sakkal Majalla"/>
-                <a:ea typeface="Sakkal Majalla"/>
+                <a:latin typeface="Segoe UI"/>
+                <a:cs typeface="Segoe UI"/>
+                <a:ea typeface="Segoe UI"/>
               </a:rPr>
               <a:t>✔ جديدة؟</a:t>
             </a:r>
@@ -13868,9 +13868,9 @@
                 <a:solidFill>
                   <a:srgbClr val="6E6A8F"/>
                 </a:solidFill>
-                <a:latin typeface="Sakkal Majalla"/>
-                <a:cs typeface="Sakkal Majalla"/>
-                <a:ea typeface="Sakkal Majalla"/>
+                <a:latin typeface="Segoe UI"/>
+                <a:cs typeface="Segoe UI"/>
+                <a:ea typeface="Segoe UI"/>
               </a:rPr>
               <a:t>لم تُسد بدراسة أحدث</a:t>
             </a:r>
@@ -14169,9 +14169,9 @@
                 <a:solidFill>
                   <a:srgbClr val="FFFFFF"/>
                 </a:solidFill>
-                <a:latin typeface="Sakkal Majalla"/>
-                <a:cs typeface="Sakkal Majalla"/>
-                <a:ea typeface="Sakkal Majalla"/>
+                <a:latin typeface="Segoe UI"/>
+                <a:cs typeface="Segoe UI"/>
+                <a:ea typeface="Segoe UI"/>
               </a:rPr>
               <a:t>الخلاصة: رسائل تأخذها معك</a:t>
             </a:r>
@@ -14216,9 +14216,9 @@
                 <a:solidFill>
                   <a:srgbClr val="FBBF24"/>
                 </a:solidFill>
-                <a:latin typeface="Sakkal Majalla"/>
-                <a:cs typeface="Sakkal Majalla"/>
-                <a:ea typeface="Sakkal Majalla"/>
+                <a:latin typeface="Segoe UI"/>
+                <a:cs typeface="Segoe UI"/>
+                <a:ea typeface="Segoe UI"/>
               </a:rPr>
               <a:t>K E Y   T A K E A W A Y S</a:t>
             </a:r>
@@ -14333,9 +14333,9 @@
                 <a:solidFill>
                   <a:srgbClr val="FFFFFF"/>
                 </a:solidFill>
-                <a:latin typeface="Sakkal Majalla"/>
-                <a:cs typeface="Sakkal Majalla"/>
-                <a:ea typeface="Sakkal Majalla"/>
+                <a:latin typeface="Segoe UI"/>
+                <a:cs typeface="Segoe UI"/>
+                <a:ea typeface="Segoe UI"/>
               </a:rPr>
               <a:t>١</a:t>
             </a:r>
@@ -14380,9 +14380,9 @@
                 <a:solidFill>
                   <a:srgbClr val="FFFFFF"/>
                 </a:solidFill>
-                <a:latin typeface="Sakkal Majalla"/>
-                <a:cs typeface="Sakkal Majalla"/>
-                <a:ea typeface="Sakkal Majalla"/>
+                <a:latin typeface="Segoe UI"/>
+                <a:cs typeface="Segoe UI"/>
+                <a:ea typeface="Segoe UI"/>
               </a:rPr>
               <a:t>الفجوة البحثية أساس أي بحث علمي ناجح</a:t>
             </a:r>
@@ -14427,9 +14427,9 @@
                 <a:solidFill>
                   <a:srgbClr val="FFFFFF"/>
                 </a:solidFill>
-                <a:latin typeface="Sakkal Majalla"/>
-                <a:cs typeface="Sakkal Majalla"/>
-                <a:ea typeface="Sakkal Majalla"/>
+                <a:latin typeface="Segoe UI"/>
+                <a:cs typeface="Segoe UI"/>
+                <a:ea typeface="Segoe UI"/>
               </a:rPr>
               <a:t>هي جواز مرورك إلى الأصالة والقبول والنشر والتمويل</a:t>
             </a:r>
@@ -14544,9 +14544,9 @@
                 <a:solidFill>
                   <a:srgbClr val="FFFFFF"/>
                 </a:solidFill>
-                <a:latin typeface="Sakkal Majalla"/>
-                <a:cs typeface="Sakkal Majalla"/>
-                <a:ea typeface="Sakkal Majalla"/>
+                <a:latin typeface="Segoe UI"/>
+                <a:cs typeface="Segoe UI"/>
+                <a:ea typeface="Segoe UI"/>
               </a:rPr>
               <a:t>٢</a:t>
             </a:r>
@@ -14591,9 +14591,9 @@
                 <a:solidFill>
                   <a:srgbClr val="FFFFFF"/>
                 </a:solidFill>
-                <a:latin typeface="Sakkal Majalla"/>
-                <a:cs typeface="Sakkal Majalla"/>
-                <a:ea typeface="Sakkal Majalla"/>
+                <a:latin typeface="Segoe UI"/>
+                <a:cs typeface="Segoe UI"/>
+                <a:ea typeface="Segoe UI"/>
               </a:rPr>
               <a:t>اعرف الأنواع الستة وسؤال كل نوع</a:t>
             </a:r>
@@ -14638,9 +14638,9 @@
                 <a:solidFill>
                   <a:srgbClr val="FFFFFF"/>
                 </a:solidFill>
-                <a:latin typeface="Sakkal Majalla"/>
-                <a:cs typeface="Sakkal Majalla"/>
-                <a:ea typeface="Sakkal Majalla"/>
+                <a:latin typeface="Segoe UI"/>
+                <a:cs typeface="Segoe UI"/>
+                <a:ea typeface="Segoe UI"/>
               </a:rPr>
               <a:t>معرفة، ممارسة، أدلة، سكان، منهجية، زمن — ولكل نوع بابه</a:t>
             </a:r>
@@ -14755,9 +14755,9 @@
                 <a:solidFill>
                   <a:srgbClr val="FFFFFF"/>
                 </a:solidFill>
-                <a:latin typeface="Sakkal Majalla"/>
-                <a:cs typeface="Sakkal Majalla"/>
-                <a:ea typeface="Sakkal Majalla"/>
+                <a:latin typeface="Segoe UI"/>
+                <a:cs typeface="Segoe UI"/>
+                <a:ea typeface="Segoe UI"/>
               </a:rPr>
               <a:t>٣</a:t>
             </a:r>
@@ -14802,9 +14802,9 @@
                 <a:solidFill>
                   <a:srgbClr val="FFFFFF"/>
                 </a:solidFill>
-                <a:latin typeface="Sakkal Majalla"/>
-                <a:cs typeface="Sakkal Majalla"/>
-                <a:ea typeface="Sakkal Majalla"/>
+                <a:latin typeface="Segoe UI"/>
+                <a:cs typeface="Segoe UI"/>
+                <a:ea typeface="Segoe UI"/>
               </a:rPr>
               <a:t>استخدم الذكاء الاصطناعي بذكاء</a:t>
             </a:r>
@@ -14849,9 +14849,9 @@
                 <a:solidFill>
                   <a:srgbClr val="FFFFFF"/>
                 </a:solidFill>
-                <a:latin typeface="Sakkal Majalla"/>
-                <a:cs typeface="Sakkal Majalla"/>
-                <a:ea typeface="Sakkal Majalla"/>
+                <a:latin typeface="Segoe UI"/>
+                <a:cs typeface="Segoe UI"/>
+                <a:ea typeface="Segoe UI"/>
               </a:rPr>
               <a:t>ارفع، اسأل بدقة، راجع بنفسك — الأداة تقترح والباحث يقرر</a:t>
             </a:r>
@@ -14966,9 +14966,9 @@
                 <a:solidFill>
                   <a:srgbClr val="FFFFFF"/>
                 </a:solidFill>
-                <a:latin typeface="Sakkal Majalla"/>
-                <a:cs typeface="Sakkal Majalla"/>
-                <a:ea typeface="Sakkal Majalla"/>
+                <a:latin typeface="Segoe UI"/>
+                <a:cs typeface="Segoe UI"/>
+                <a:ea typeface="Segoe UI"/>
               </a:rPr>
               <a:t>٤</a:t>
             </a:r>
@@ -15013,9 +15013,9 @@
                 <a:solidFill>
                   <a:srgbClr val="FFFFFF"/>
                 </a:solidFill>
-                <a:latin typeface="Sakkal Majalla"/>
-                <a:cs typeface="Sakkal Majalla"/>
-                <a:ea typeface="Sakkal Majalla"/>
+                <a:latin typeface="Segoe UI"/>
+                <a:cs typeface="Segoe UI"/>
+                <a:ea typeface="Segoe UI"/>
               </a:rPr>
               <a:t>اصنع فجوة قوية لا ضعيفة</a:t>
             </a:r>
@@ -15060,9 +15060,9 @@
                 <a:solidFill>
                   <a:srgbClr val="FFFFFF"/>
                 </a:solidFill>
-                <a:latin typeface="Sakkal Majalla"/>
-                <a:cs typeface="Sakkal Majalla"/>
-                <a:ea typeface="Sakkal Majalla"/>
+                <a:latin typeface="Segoe UI"/>
+                <a:cs typeface="Segoe UI"/>
+                <a:ea typeface="Segoe UI"/>
               </a:rPr>
               <a:t>محددة، موثقة، مهمة — استخدم القالب وقائمة الفحص الخماسية</a:t>
             </a:r>
@@ -15159,9 +15159,9 @@
                 <a:solidFill>
                   <a:srgbClr val="FBBF24"/>
                 </a:solidFill>
-                <a:latin typeface="Sakkal Majalla"/>
-                <a:cs typeface="Sakkal Majalla"/>
-                <a:ea typeface="Sakkal Majalla"/>
+                <a:latin typeface="Segoe UI"/>
+                <a:cs typeface="Segoe UI"/>
+                <a:ea typeface="Segoe UI"/>
               </a:rPr>
               <a:t>«الباحث المتميّز ليس من يجد الإجابات فقط… بل من يطرح أسئلة لم يفكر فيها أحد من قبل»</a:t>
             </a:r>
@@ -15206,9 +15206,9 @@
                 <a:solidFill>
                   <a:srgbClr val="FFFFFF"/>
                 </a:solidFill>
-                <a:latin typeface="Sakkal Majalla"/>
-                <a:cs typeface="Sakkal Majalla"/>
-                <a:ea typeface="Sakkal Majalla"/>
+                <a:latin typeface="Segoe UI"/>
+                <a:cs typeface="Segoe UI"/>
+                <a:ea typeface="Segoe UI"/>
               </a:rPr>
               <a:t>شكراً لحسن استماعكم — </a:t>
             </a:r>
@@ -15217,9 +15217,9 @@
                 <a:solidFill>
                   <a:srgbClr val="FFFFFF"/>
                 </a:solidFill>
-                <a:latin typeface="Sakkal Majalla"/>
-                <a:cs typeface="Sakkal Majalla"/>
-                <a:ea typeface="Sakkal Majalla"/>
+                <a:latin typeface="Segoe UI"/>
+                <a:cs typeface="Segoe UI"/>
+                <a:ea typeface="Segoe UI"/>
               </a:rPr>
               <a:t>الدكتورة هناء حسين الأهيمر</a:t>
             </a:r>
@@ -15228,9 +15228,9 @@
                 <a:solidFill>
                   <a:srgbClr val="FFFFFF"/>
                 </a:solidFill>
-                <a:latin typeface="Sakkal Majalla"/>
-                <a:cs typeface="Sakkal Majalla"/>
-                <a:ea typeface="Sakkal Majalla"/>
+                <a:latin typeface="Segoe UI"/>
+                <a:cs typeface="Segoe UI"/>
+                <a:ea typeface="Segoe UI"/>
               </a:rPr>
               <a:t>  •  نسخة موسّعة بتصميم جديد</a:t>
             </a:r>
@@ -15337,9 +15337,9 @@
                 <a:solidFill>
                   <a:srgbClr val="ECE9FA"/>
                 </a:solidFill>
-                <a:latin typeface="Sakkal Majalla"/>
-                <a:cs typeface="Sakkal Majalla"/>
-                <a:ea typeface="Sakkal Majalla"/>
+                <a:latin typeface="Segoe UI"/>
+                <a:cs typeface="Segoe UI"/>
+                <a:ea typeface="Segoe UI"/>
               </a:rPr>
               <a:t>02</a:t>
             </a:r>
@@ -15408,9 +15408,9 @@
                 <a:solidFill>
                   <a:srgbClr val="FFFFFF"/>
                 </a:solidFill>
-                <a:latin typeface="Sakkal Majalla"/>
-                <a:cs typeface="Sakkal Majalla"/>
-                <a:ea typeface="Sakkal Majalla"/>
+                <a:latin typeface="Segoe UI"/>
+                <a:cs typeface="Segoe UI"/>
+                <a:ea typeface="Segoe UI"/>
               </a:rPr>
               <a:t>🗂</a:t>
             </a:r>
@@ -15455,9 +15455,9 @@
                 <a:solidFill>
                   <a:srgbClr val="D97706"/>
                 </a:solidFill>
-                <a:latin typeface="Sakkal Majalla"/>
-                <a:cs typeface="Sakkal Majalla"/>
-                <a:ea typeface="Sakkal Majalla"/>
+                <a:latin typeface="Segoe UI"/>
+                <a:cs typeface="Segoe UI"/>
+                <a:ea typeface="Segoe UI"/>
               </a:rPr>
               <a:t>AGENDA &amp; GOAL</a:t>
             </a:r>
@@ -15502,9 +15502,9 @@
                 <a:solidFill>
                   <a:srgbClr val="221C57"/>
                 </a:solidFill>
-                <a:latin typeface="Sakkal Majalla"/>
-                <a:cs typeface="Sakkal Majalla"/>
-                <a:ea typeface="Sakkal Majalla"/>
+                <a:latin typeface="Segoe UI"/>
+                <a:cs typeface="Segoe UI"/>
+                <a:ea typeface="Segoe UI"/>
               </a:rPr>
               <a:t>خطة العرض وهدفه</a:t>
             </a:r>
@@ -15673,9 +15673,9 @@
                 <a:solidFill>
                   <a:srgbClr val="FFFFFF"/>
                 </a:solidFill>
-                <a:latin typeface="Sakkal Majalla"/>
-                <a:cs typeface="Sakkal Majalla"/>
-                <a:ea typeface="Sakkal Majalla"/>
+                <a:latin typeface="Segoe UI"/>
+                <a:cs typeface="Segoe UI"/>
+                <a:ea typeface="Segoe UI"/>
               </a:rPr>
               <a:t>02</a:t>
             </a:r>
@@ -15720,9 +15720,9 @@
                 <a:solidFill>
                   <a:srgbClr val="6E6A8F"/>
                 </a:solidFill>
-                <a:latin typeface="Sakkal Majalla"/>
-                <a:cs typeface="Sakkal Majalla"/>
-                <a:ea typeface="Sakkal Majalla"/>
+                <a:latin typeface="Segoe UI"/>
+                <a:cs typeface="Segoe UI"/>
+                <a:ea typeface="Segoe UI"/>
               </a:rPr>
               <a:t>الفجوات البحثية  •  د. هناء حسين الأهيمر</a:t>
             </a:r>
@@ -15827,9 +15827,9 @@
                 <a:solidFill>
                   <a:srgbClr val="FBBF24"/>
                 </a:solidFill>
-                <a:latin typeface="Sakkal Majalla"/>
-                <a:cs typeface="Sakkal Majalla"/>
-                <a:ea typeface="Sakkal Majalla"/>
+                <a:latin typeface="Segoe UI"/>
+                <a:cs typeface="Segoe UI"/>
+                <a:ea typeface="Segoe UI"/>
               </a:rPr>
               <a:t>🎯 هدف الورشة:  </a:t>
             </a:r>
@@ -15838,9 +15838,9 @@
                 <a:solidFill>
                   <a:srgbClr val="FFFFFF"/>
                 </a:solidFill>
-                <a:latin typeface="Sakkal Majalla"/>
-                <a:cs typeface="Sakkal Majalla"/>
-                <a:ea typeface="Sakkal Majalla"/>
+                <a:latin typeface="Segoe UI"/>
+                <a:cs typeface="Segoe UI"/>
+                <a:ea typeface="Segoe UI"/>
               </a:rPr>
               <a:t>أن يتمكّن أي طالب أو باحث — بعد هذا العرض — من تحديد فجوة بحثية قوية بطريقة احترافية</a:t>
             </a:r>
@@ -15955,9 +15955,9 @@
                 <a:solidFill>
                   <a:srgbClr val="FFFFFF"/>
                 </a:solidFill>
-                <a:latin typeface="Sakkal Majalla"/>
-                <a:cs typeface="Sakkal Majalla"/>
-                <a:ea typeface="Sakkal Majalla"/>
+                <a:latin typeface="Segoe UI"/>
+                <a:cs typeface="Segoe UI"/>
+                <a:ea typeface="Segoe UI"/>
               </a:rPr>
               <a:t>١</a:t>
             </a:r>
@@ -16002,9 +16002,9 @@
                 <a:solidFill>
                   <a:srgbClr val="221C57"/>
                 </a:solidFill>
-                <a:latin typeface="Sakkal Majalla"/>
-                <a:cs typeface="Sakkal Majalla"/>
-                <a:ea typeface="Sakkal Majalla"/>
+                <a:latin typeface="Segoe UI"/>
+                <a:cs typeface="Segoe UI"/>
+                <a:ea typeface="Segoe UI"/>
               </a:rPr>
               <a:t>مفهوم الفجوة البحثية</a:t>
             </a:r>
@@ -16049,9 +16049,9 @@
                 <a:solidFill>
                   <a:srgbClr val="6E6A8F"/>
                 </a:solidFill>
-                <a:latin typeface="Sakkal Majalla"/>
-                <a:cs typeface="Sakkal Majalla"/>
-                <a:ea typeface="Sakkal Majalla"/>
+                <a:latin typeface="Segoe UI"/>
+                <a:cs typeface="Segoe UI"/>
+                <a:ea typeface="Segoe UI"/>
               </a:rPr>
               <a:t>التعريف الدقيق وصورها الأربع كما شرحتها الورشة</a:t>
             </a:r>
@@ -16166,9 +16166,9 @@
                 <a:solidFill>
                   <a:srgbClr val="FFFFFF"/>
                 </a:solidFill>
-                <a:latin typeface="Sakkal Majalla"/>
-                <a:cs typeface="Sakkal Majalla"/>
-                <a:ea typeface="Sakkal Majalla"/>
+                <a:latin typeface="Segoe UI"/>
+                <a:cs typeface="Segoe UI"/>
+                <a:ea typeface="Segoe UI"/>
               </a:rPr>
               <a:t>٢</a:t>
             </a:r>
@@ -16213,9 +16213,9 @@
                 <a:solidFill>
                   <a:srgbClr val="221C57"/>
                 </a:solidFill>
-                <a:latin typeface="Sakkal Majalla"/>
-                <a:cs typeface="Sakkal Majalla"/>
-                <a:ea typeface="Sakkal Majalla"/>
+                <a:latin typeface="Segoe UI"/>
+                <a:cs typeface="Segoe UI"/>
+                <a:ea typeface="Segoe UI"/>
               </a:rPr>
               <a:t>لماذا تهمّنا الفجوات؟</a:t>
             </a:r>
@@ -16260,9 +16260,9 @@
                 <a:solidFill>
                   <a:srgbClr val="6E6A8F"/>
                 </a:solidFill>
-                <a:latin typeface="Sakkal Majalla"/>
-                <a:cs typeface="Sakkal Majalla"/>
-                <a:ea typeface="Sakkal Majalla"/>
+                <a:latin typeface="Segoe UI"/>
+                <a:cs typeface="Segoe UI"/>
+                <a:ea typeface="Segoe UI"/>
               </a:rPr>
               <a:t>ستة أسباب تجعلها حجر الأساس في أي بحث ناجح</a:t>
             </a:r>
@@ -16377,9 +16377,9 @@
                 <a:solidFill>
                   <a:srgbClr val="FFFFFF"/>
                 </a:solidFill>
-                <a:latin typeface="Sakkal Majalla"/>
-                <a:cs typeface="Sakkal Majalla"/>
-                <a:ea typeface="Sakkal Majalla"/>
+                <a:latin typeface="Segoe UI"/>
+                <a:cs typeface="Segoe UI"/>
+                <a:ea typeface="Segoe UI"/>
               </a:rPr>
               <a:t>٣</a:t>
             </a:r>
@@ -16424,9 +16424,9 @@
                 <a:solidFill>
                   <a:srgbClr val="221C57"/>
                 </a:solidFill>
-                <a:latin typeface="Sakkal Majalla"/>
-                <a:cs typeface="Sakkal Majalla"/>
-                <a:ea typeface="Sakkal Majalla"/>
+                <a:latin typeface="Segoe UI"/>
+                <a:cs typeface="Segoe UI"/>
+                <a:ea typeface="Segoe UI"/>
               </a:rPr>
               <a:t>الأنواع الستة بالتفصيل</a:t>
             </a:r>
@@ -16471,9 +16471,9 @@
                 <a:solidFill>
                   <a:srgbClr val="6E6A8F"/>
                 </a:solidFill>
-                <a:latin typeface="Sakkal Majalla"/>
-                <a:cs typeface="Sakkal Majalla"/>
-                <a:ea typeface="Sakkal Majalla"/>
+                <a:latin typeface="Segoe UI"/>
+                <a:cs typeface="Segoe UI"/>
+                <a:ea typeface="Segoe UI"/>
               </a:rPr>
               <a:t>شرح موسّع لكل نوع مع سؤاله المفتاحي ومثاله</a:t>
             </a:r>
@@ -16588,9 +16588,9 @@
                 <a:solidFill>
                   <a:srgbClr val="FFFFFF"/>
                 </a:solidFill>
-                <a:latin typeface="Sakkal Majalla"/>
-                <a:cs typeface="Sakkal Majalla"/>
-                <a:ea typeface="Sakkal Majalla"/>
+                <a:latin typeface="Segoe UI"/>
+                <a:cs typeface="Segoe UI"/>
+                <a:ea typeface="Segoe UI"/>
               </a:rPr>
               <a:t>٤</a:t>
             </a:r>
@@ -16635,9 +16635,9 @@
                 <a:solidFill>
                   <a:srgbClr val="221C57"/>
                 </a:solidFill>
-                <a:latin typeface="Sakkal Majalla"/>
-                <a:cs typeface="Sakkal Majalla"/>
-                <a:ea typeface="Sakkal Majalla"/>
+                <a:latin typeface="Segoe UI"/>
+                <a:cs typeface="Segoe UI"/>
+                <a:ea typeface="Segoe UI"/>
               </a:rPr>
               <a:t>أمثلة تطبيقية واقعية</a:t>
             </a:r>
@@ -16682,9 +16682,9 @@
                 <a:solidFill>
                   <a:srgbClr val="6E6A8F"/>
                 </a:solidFill>
-                <a:latin typeface="Sakkal Majalla"/>
-                <a:cs typeface="Sakkal Majalla"/>
-                <a:ea typeface="Sakkal Majalla"/>
+                <a:latin typeface="Segoe UI"/>
+                <a:cs typeface="Segoe UI"/>
+                <a:ea typeface="Segoe UI"/>
               </a:rPr>
               <a:t>مثال ملموس على كل نوع ولماذا يُعد فجوة</a:t>
             </a:r>
@@ -16799,9 +16799,9 @@
                 <a:solidFill>
                   <a:srgbClr val="FFFFFF"/>
                 </a:solidFill>
-                <a:latin typeface="Sakkal Majalla"/>
-                <a:cs typeface="Sakkal Majalla"/>
-                <a:ea typeface="Sakkal Majalla"/>
+                <a:latin typeface="Segoe UI"/>
+                <a:cs typeface="Segoe UI"/>
+                <a:ea typeface="Segoe UI"/>
               </a:rPr>
               <a:t>٥</a:t>
             </a:r>
@@ -16846,9 +16846,9 @@
                 <a:solidFill>
                   <a:srgbClr val="221C57"/>
                 </a:solidFill>
-                <a:latin typeface="Sakkal Majalla"/>
-                <a:cs typeface="Sakkal Majalla"/>
-                <a:ea typeface="Sakkal Majalla"/>
+                <a:latin typeface="Segoe UI"/>
+                <a:cs typeface="Segoe UI"/>
+                <a:ea typeface="Segoe UI"/>
               </a:rPr>
               <a:t>أدوات الذكاء الاصطناعي</a:t>
             </a:r>
@@ -16893,9 +16893,9 @@
                 <a:solidFill>
                   <a:srgbClr val="6E6A8F"/>
                 </a:solidFill>
-                <a:latin typeface="Sakkal Majalla"/>
-                <a:cs typeface="Sakkal Majalla"/>
-                <a:ea typeface="Sakkal Majalla"/>
+                <a:latin typeface="Segoe UI"/>
+                <a:cs typeface="Segoe UI"/>
+                <a:ea typeface="Segoe UI"/>
               </a:rPr>
               <a:t>ثماني أدوات + سير العمل الذكي مع الأداة الأقوى</a:t>
             </a:r>
@@ -17010,9 +17010,9 @@
                 <a:solidFill>
                   <a:srgbClr val="FFFFFF"/>
                 </a:solidFill>
-                <a:latin typeface="Sakkal Majalla"/>
-                <a:cs typeface="Sakkal Majalla"/>
-                <a:ea typeface="Sakkal Majalla"/>
+                <a:latin typeface="Segoe UI"/>
+                <a:cs typeface="Segoe UI"/>
+                <a:ea typeface="Segoe UI"/>
               </a:rPr>
               <a:t>٦</a:t>
             </a:r>
@@ -17057,9 +17057,9 @@
                 <a:solidFill>
                   <a:srgbClr val="221C57"/>
                 </a:solidFill>
-                <a:latin typeface="Sakkal Majalla"/>
-                <a:cs typeface="Sakkal Majalla"/>
-                <a:ea typeface="Sakkal Majalla"/>
+                <a:latin typeface="Segoe UI"/>
+                <a:cs typeface="Segoe UI"/>
+                <a:ea typeface="Segoe UI"/>
               </a:rPr>
               <a:t>استراتيجيات المحترفين</a:t>
             </a:r>
@@ -17104,9 +17104,9 @@
                 <a:solidFill>
                   <a:srgbClr val="6E6A8F"/>
                 </a:solidFill>
-                <a:latin typeface="Sakkal Majalla"/>
-                <a:cs typeface="Sakkal Majalla"/>
-                <a:ea typeface="Sakkal Majalla"/>
+                <a:latin typeface="Segoe UI"/>
+                <a:cs typeface="Segoe UI"/>
+                <a:ea typeface="Segoe UI"/>
               </a:rPr>
               <a:t>أربع استراتيجيات ميدانية + إطار التفكير النقدي</a:t>
             </a:r>
@@ -17221,9 +17221,9 @@
                 <a:solidFill>
                   <a:srgbClr val="FFFFFF"/>
                 </a:solidFill>
-                <a:latin typeface="Sakkal Majalla"/>
-                <a:cs typeface="Sakkal Majalla"/>
-                <a:ea typeface="Sakkal Majalla"/>
+                <a:latin typeface="Segoe UI"/>
+                <a:cs typeface="Segoe UI"/>
+                <a:ea typeface="Segoe UI"/>
               </a:rPr>
               <a:t>٧</a:t>
             </a:r>
@@ -17268,9 +17268,9 @@
                 <a:solidFill>
                   <a:srgbClr val="221C57"/>
                 </a:solidFill>
-                <a:latin typeface="Sakkal Majalla"/>
-                <a:cs typeface="Sakkal Majalla"/>
-                <a:ea typeface="Sakkal Majalla"/>
+                <a:latin typeface="Segoe UI"/>
+                <a:cs typeface="Segoe UI"/>
+                <a:ea typeface="Segoe UI"/>
               </a:rPr>
               <a:t>من الفجوة إلى الصياغة</a:t>
             </a:r>
@@ -17315,9 +17315,9 @@
                 <a:solidFill>
                   <a:srgbClr val="6E6A8F"/>
                 </a:solidFill>
-                <a:latin typeface="Sakkal Majalla"/>
-                <a:cs typeface="Sakkal Majalla"/>
-                <a:ea typeface="Sakkal Majalla"/>
+                <a:latin typeface="Segoe UI"/>
+                <a:cs typeface="Segoe UI"/>
+                <a:ea typeface="Segoe UI"/>
               </a:rPr>
               <a:t>تمييز الفجوة القوية، خارطة طريق، وقالب صياغة جاهز</a:t>
             </a:r>
@@ -17410,9 +17410,9 @@
                 <a:solidFill>
                   <a:srgbClr val="6D28D9"/>
                 </a:solidFill>
-                <a:latin typeface="Sakkal Majalla"/>
-                <a:cs typeface="Sakkal Majalla"/>
-                <a:ea typeface="Sakkal Majalla"/>
+                <a:latin typeface="Segoe UI"/>
+                <a:cs typeface="Segoe UI"/>
+                <a:ea typeface="Segoe UI"/>
               </a:rPr>
               <a:t>«الفجوة البحثية هي أساس أي بحث علمي ناجح»</a:t>
             </a:r>
@@ -17434,9 +17434,9 @@
                 <a:solidFill>
                   <a:srgbClr val="6E6A8F"/>
                 </a:solidFill>
-                <a:latin typeface="Sakkal Majalla"/>
-                <a:cs typeface="Sakkal Majalla"/>
-                <a:ea typeface="Sakkal Majalla"/>
+                <a:latin typeface="Segoe UI"/>
+                <a:cs typeface="Segoe UI"/>
+                <a:ea typeface="Segoe UI"/>
               </a:rPr>
               <a:t>— من خلاصة الورشة</a:t>
             </a:r>
@@ -17543,9 +17543,9 @@
                 <a:solidFill>
                   <a:srgbClr val="ECE9FA"/>
                 </a:solidFill>
-                <a:latin typeface="Sakkal Majalla"/>
-                <a:cs typeface="Sakkal Majalla"/>
-                <a:ea typeface="Sakkal Majalla"/>
+                <a:latin typeface="Segoe UI"/>
+                <a:cs typeface="Segoe UI"/>
+                <a:ea typeface="Segoe UI"/>
               </a:rPr>
               <a:t>03</a:t>
             </a:r>
@@ -17614,9 +17614,9 @@
                 <a:solidFill>
                   <a:srgbClr val="FFFFFF"/>
                 </a:solidFill>
-                <a:latin typeface="Sakkal Majalla"/>
-                <a:cs typeface="Sakkal Majalla"/>
-                <a:ea typeface="Sakkal Majalla"/>
+                <a:latin typeface="Segoe UI"/>
+                <a:cs typeface="Segoe UI"/>
+                <a:ea typeface="Segoe UI"/>
               </a:rPr>
               <a:t>🧠</a:t>
             </a:r>
@@ -17661,9 +17661,9 @@
                 <a:solidFill>
                   <a:srgbClr val="A21CAF"/>
                 </a:solidFill>
-                <a:latin typeface="Sakkal Majalla"/>
-                <a:cs typeface="Sakkal Majalla"/>
-                <a:ea typeface="Sakkal Majalla"/>
+                <a:latin typeface="Segoe UI"/>
+                <a:cs typeface="Segoe UI"/>
+                <a:ea typeface="Segoe UI"/>
               </a:rPr>
               <a:t>WHAT IS A RESEARCH GAP?</a:t>
             </a:r>
@@ -17708,9 +17708,9 @@
                 <a:solidFill>
                   <a:srgbClr val="221C57"/>
                 </a:solidFill>
-                <a:latin typeface="Sakkal Majalla"/>
-                <a:cs typeface="Sakkal Majalla"/>
-                <a:ea typeface="Sakkal Majalla"/>
+                <a:latin typeface="Segoe UI"/>
+                <a:cs typeface="Segoe UI"/>
+                <a:ea typeface="Segoe UI"/>
               </a:rPr>
               <a:t>ما هي الفجوة البحثية؟</a:t>
             </a:r>
@@ -17879,9 +17879,9 @@
                 <a:solidFill>
                   <a:srgbClr val="FFFFFF"/>
                 </a:solidFill>
-                <a:latin typeface="Sakkal Majalla"/>
-                <a:cs typeface="Sakkal Majalla"/>
-                <a:ea typeface="Sakkal Majalla"/>
+                <a:latin typeface="Segoe UI"/>
+                <a:cs typeface="Segoe UI"/>
+                <a:ea typeface="Segoe UI"/>
               </a:rPr>
               <a:t>03</a:t>
             </a:r>
@@ -17926,9 +17926,9 @@
                 <a:solidFill>
                   <a:srgbClr val="6E6A8F"/>
                 </a:solidFill>
-                <a:latin typeface="Sakkal Majalla"/>
-                <a:cs typeface="Sakkal Majalla"/>
-                <a:ea typeface="Sakkal Majalla"/>
+                <a:latin typeface="Segoe UI"/>
+                <a:cs typeface="Segoe UI"/>
+                <a:ea typeface="Segoe UI"/>
               </a:rPr>
               <a:t>الفجوات البحثية  •  د. هناء حسين الأهيمر</a:t>
             </a:r>
@@ -18081,9 +18081,9 @@
                 <a:solidFill>
                   <a:srgbClr val="A21CAF"/>
                 </a:solidFill>
-                <a:latin typeface="Sakkal Majalla"/>
-                <a:cs typeface="Sakkal Majalla"/>
-                <a:ea typeface="Sakkal Majalla"/>
+                <a:latin typeface="Segoe UI"/>
+                <a:cs typeface="Segoe UI"/>
+                <a:ea typeface="Segoe UI"/>
               </a:rPr>
               <a:t>التعريف كما ورد في الشرح:  </a:t>
             </a:r>
@@ -18092,9 +18092,9 @@
                 <a:solidFill>
                   <a:srgbClr val="221C57"/>
                 </a:solidFill>
-                <a:latin typeface="Sakkal Majalla"/>
-                <a:cs typeface="Sakkal Majalla"/>
-                <a:ea typeface="Sakkal Majalla"/>
+                <a:latin typeface="Segoe UI"/>
+                <a:cs typeface="Segoe UI"/>
+                <a:ea typeface="Segoe UI"/>
               </a:rPr>
               <a:t>الفجوة البحثية ببساطة هي منطقة أو مشكلة في مجال معيّن: إما لم يدرسها أحد من قبل، أو تمت دراستها بشكل ناقص، أو تحتاج مزيداً من التحليل والاستكشاف.</a:t>
             </a:r>
@@ -18116,9 +18116,9 @@
                 <a:solidFill>
                   <a:srgbClr val="6D28D9"/>
                 </a:solidFill>
-                <a:latin typeface="Sakkal Majalla"/>
-                <a:cs typeface="Sakkal Majalla"/>
-                <a:ea typeface="Sakkal Majalla"/>
+                <a:latin typeface="Segoe UI"/>
+                <a:cs typeface="Segoe UI"/>
+                <a:ea typeface="Segoe UI"/>
               </a:rPr>
               <a:t>بعبارة أخرى:  </a:t>
             </a:r>
@@ -18127,9 +18127,9 @@
                 <a:solidFill>
                   <a:srgbClr val="221C57"/>
                 </a:solidFill>
-                <a:latin typeface="Sakkal Majalla"/>
-                <a:cs typeface="Sakkal Majalla"/>
-                <a:ea typeface="Sakkal Majalla"/>
+                <a:latin typeface="Segoe UI"/>
+                <a:cs typeface="Segoe UI"/>
+                <a:ea typeface="Segoe UI"/>
               </a:rPr>
               <a:t>هي شيء لم تتم دراسته بشكل كافٍ بعد، أو نقطة لم يركّز عليها الباحثون بوضوح — وسدّها هو ما يمنح بحثك قيمته.</a:t>
             </a:r>
@@ -18174,9 +18174,9 @@
                 <a:solidFill>
                   <a:srgbClr val="6E6A8F"/>
                 </a:solidFill>
-                <a:latin typeface="Sakkal Majalla"/>
-                <a:cs typeface="Sakkal Majalla"/>
-                <a:ea typeface="Sakkal Majalla"/>
+                <a:latin typeface="Segoe UI"/>
+                <a:cs typeface="Segoe UI"/>
+                <a:ea typeface="Segoe UI"/>
               </a:rPr>
               <a:t>للفجوة البحثية أكثر من صورة — هذه أشهر أربع صور تظهر بها:</a:t>
             </a:r>
@@ -18351,9 +18351,9 @@
                 <a:solidFill>
                   <a:srgbClr val="FFFFFF"/>
                 </a:solidFill>
-                <a:latin typeface="Sakkal Majalla"/>
-                <a:cs typeface="Sakkal Majalla"/>
-                <a:ea typeface="Sakkal Majalla"/>
+                <a:latin typeface="Segoe UI"/>
+                <a:cs typeface="Segoe UI"/>
+                <a:ea typeface="Segoe UI"/>
               </a:rPr>
               <a:t>🔍</a:t>
             </a:r>
@@ -18398,9 +18398,9 @@
                 <a:solidFill>
                   <a:srgbClr val="A21CAF"/>
                 </a:solidFill>
-                <a:latin typeface="Sakkal Majalla"/>
-                <a:cs typeface="Sakkal Majalla"/>
-                <a:ea typeface="Sakkal Majalla"/>
+                <a:latin typeface="Segoe UI"/>
+                <a:cs typeface="Segoe UI"/>
+                <a:ea typeface="Segoe UI"/>
               </a:rPr>
               <a:t>موضوع جديد كلياً</a:t>
             </a:r>
@@ -18445,9 +18445,9 @@
                 <a:solidFill>
                   <a:srgbClr val="221C57"/>
                 </a:solidFill>
-                <a:latin typeface="Sakkal Majalla"/>
-                <a:cs typeface="Sakkal Majalla"/>
-                <a:ea typeface="Sakkal Majalla"/>
+                <a:latin typeface="Segoe UI"/>
+                <a:cs typeface="Segoe UI"/>
+                <a:ea typeface="Segoe UI"/>
               </a:rPr>
               <a:t>لم يتناوله أي باحث من قبل — أندر الصور وأثمنها متى كان الموضوع مهماً وملحّاً</a:t>
             </a:r>
@@ -18622,9 +18622,9 @@
                 <a:solidFill>
                   <a:srgbClr val="FFFFFF"/>
                 </a:solidFill>
-                <a:latin typeface="Sakkal Majalla"/>
-                <a:cs typeface="Sakkal Majalla"/>
-                <a:ea typeface="Sakkal Majalla"/>
+                <a:latin typeface="Segoe UI"/>
+                <a:cs typeface="Segoe UI"/>
+                <a:ea typeface="Segoe UI"/>
               </a:rPr>
               <a:t>⚡</a:t>
             </a:r>
@@ -18669,9 +18669,9 @@
                 <a:solidFill>
                   <a:srgbClr val="D97706"/>
                 </a:solidFill>
-                <a:latin typeface="Sakkal Majalla"/>
-                <a:cs typeface="Sakkal Majalla"/>
-                <a:ea typeface="Sakkal Majalla"/>
+                <a:latin typeface="Segoe UI"/>
+                <a:cs typeface="Segoe UI"/>
+                <a:ea typeface="Segoe UI"/>
               </a:rPr>
               <a:t>دراسة من زاوية واحدة</a:t>
             </a:r>
@@ -18716,9 +18716,9 @@
                 <a:solidFill>
                   <a:srgbClr val="221C57"/>
                 </a:solidFill>
-                <a:latin typeface="Sakkal Majalla"/>
-                <a:cs typeface="Sakkal Majalla"/>
-                <a:ea typeface="Sakkal Majalla"/>
+                <a:latin typeface="Segoe UI"/>
+                <a:cs typeface="Segoe UI"/>
+                <a:ea typeface="Segoe UI"/>
               </a:rPr>
               <a:t>الموضوع دُرس جزئياً من منظور واحد فقط، وبقيت زواياه الأخرى مجهولة تماماً</a:t>
             </a:r>
@@ -18893,9 +18893,9 @@
                 <a:solidFill>
                   <a:srgbClr val="FFFFFF"/>
                 </a:solidFill>
-                <a:latin typeface="Sakkal Majalla"/>
-                <a:cs typeface="Sakkal Majalla"/>
-                <a:ea typeface="Sakkal Majalla"/>
+                <a:latin typeface="Segoe UI"/>
+                <a:cs typeface="Segoe UI"/>
+                <a:ea typeface="Segoe UI"/>
               </a:rPr>
               <a:t>🔄</a:t>
             </a:r>
@@ -18940,9 +18940,9 @@
                 <a:solidFill>
                   <a:srgbClr val="0D9488"/>
                 </a:solidFill>
-                <a:latin typeface="Sakkal Majalla"/>
-                <a:cs typeface="Sakkal Majalla"/>
-                <a:ea typeface="Sakkal Majalla"/>
+                <a:latin typeface="Segoe UI"/>
+                <a:cs typeface="Segoe UI"/>
+                <a:ea typeface="Segoe UI"/>
               </a:rPr>
               <a:t>نتائج متضاربة</a:t>
             </a:r>
@@ -18987,9 +18987,9 @@
                 <a:solidFill>
                   <a:srgbClr val="221C57"/>
                 </a:solidFill>
-                <a:latin typeface="Sakkal Majalla"/>
-                <a:cs typeface="Sakkal Majalla"/>
-                <a:ea typeface="Sakkal Majalla"/>
+                <a:latin typeface="Segoe UI"/>
+                <a:cs typeface="Segoe UI"/>
+                <a:ea typeface="Segoe UI"/>
               </a:rPr>
               <a:t>دراسات وصلت إلى نتائج متناقضة — والحسم بينها يحتاج بحثاً جديداً محكماً</a:t>
             </a:r>
@@ -19164,9 +19164,9 @@
                 <a:solidFill>
                   <a:srgbClr val="FFFFFF"/>
                 </a:solidFill>
-                <a:latin typeface="Sakkal Majalla"/>
-                <a:cs typeface="Sakkal Majalla"/>
-                <a:ea typeface="Sakkal Majalla"/>
+                <a:latin typeface="Segoe UI"/>
+                <a:cs typeface="Segoe UI"/>
+                <a:ea typeface="Segoe UI"/>
               </a:rPr>
               <a:t>🌍</a:t>
             </a:r>
@@ -19211,9 +19211,9 @@
                 <a:solidFill>
                   <a:srgbClr val="047857"/>
                 </a:solidFill>
-                <a:latin typeface="Sakkal Majalla"/>
-                <a:cs typeface="Sakkal Majalla"/>
-                <a:ea typeface="Sakkal Majalla"/>
+                <a:latin typeface="Segoe UI"/>
+                <a:cs typeface="Segoe UI"/>
+                <a:ea typeface="Segoe UI"/>
               </a:rPr>
               <a:t>سياق جغرافي مختلف</a:t>
             </a:r>
@@ -19258,9 +19258,9 @@
                 <a:solidFill>
                   <a:srgbClr val="221C57"/>
                 </a:solidFill>
-                <a:latin typeface="Sakkal Majalla"/>
-                <a:cs typeface="Sakkal Majalla"/>
-                <a:ea typeface="Sakkal Majalla"/>
+                <a:latin typeface="Segoe UI"/>
+                <a:cs typeface="Segoe UI"/>
+                <a:ea typeface="Segoe UI"/>
               </a:rPr>
               <a:t>دراسة نجحت في دولة ما، وليس شرطاً أن تنجح بالطريقة نفسها في مجتمع آخر</a:t>
             </a:r>
@@ -19367,9 +19367,9 @@
                 <a:solidFill>
                   <a:srgbClr val="ECE9FA"/>
                 </a:solidFill>
-                <a:latin typeface="Sakkal Majalla"/>
-                <a:cs typeface="Sakkal Majalla"/>
-                <a:ea typeface="Sakkal Majalla"/>
+                <a:latin typeface="Segoe UI"/>
+                <a:cs typeface="Segoe UI"/>
+                <a:ea typeface="Segoe UI"/>
               </a:rPr>
               <a:t>04</a:t>
             </a:r>
@@ -19438,9 +19438,9 @@
                 <a:solidFill>
                   <a:srgbClr val="FFFFFF"/>
                 </a:solidFill>
-                <a:latin typeface="Sakkal Majalla"/>
-                <a:cs typeface="Sakkal Majalla"/>
-                <a:ea typeface="Sakkal Majalla"/>
+                <a:latin typeface="Segoe UI"/>
+                <a:cs typeface="Segoe UI"/>
+                <a:ea typeface="Segoe UI"/>
               </a:rPr>
               <a:t>⚙️</a:t>
             </a:r>
@@ -19485,9 +19485,9 @@
                 <a:solidFill>
                   <a:srgbClr val="D97706"/>
                 </a:solidFill>
-                <a:latin typeface="Sakkal Majalla"/>
-                <a:cs typeface="Sakkal Majalla"/>
-                <a:ea typeface="Sakkal Majalla"/>
+                <a:latin typeface="Segoe UI"/>
+                <a:cs typeface="Segoe UI"/>
+                <a:ea typeface="Segoe UI"/>
               </a:rPr>
               <a:t>WHY RESEARCH GAPS MATTER</a:t>
             </a:r>
@@ -19532,9 +19532,9 @@
                 <a:solidFill>
                   <a:srgbClr val="221C57"/>
                 </a:solidFill>
-                <a:latin typeface="Sakkal Majalla"/>
-                <a:cs typeface="Sakkal Majalla"/>
-                <a:ea typeface="Sakkal Majalla"/>
+                <a:latin typeface="Segoe UI"/>
+                <a:cs typeface="Segoe UI"/>
+                <a:ea typeface="Segoe UI"/>
               </a:rPr>
               <a:t>لماذا تهمّنا الفجوات البحثية؟</a:t>
             </a:r>
@@ -19703,9 +19703,9 @@
                 <a:solidFill>
                   <a:srgbClr val="FFFFFF"/>
                 </a:solidFill>
-                <a:latin typeface="Sakkal Majalla"/>
-                <a:cs typeface="Sakkal Majalla"/>
-                <a:ea typeface="Sakkal Majalla"/>
+                <a:latin typeface="Segoe UI"/>
+                <a:cs typeface="Segoe UI"/>
+                <a:ea typeface="Segoe UI"/>
               </a:rPr>
               <a:t>04</a:t>
             </a:r>
@@ -19750,9 +19750,9 @@
                 <a:solidFill>
                   <a:srgbClr val="6E6A8F"/>
                 </a:solidFill>
-                <a:latin typeface="Sakkal Majalla"/>
-                <a:cs typeface="Sakkal Majalla"/>
-                <a:ea typeface="Sakkal Majalla"/>
+                <a:latin typeface="Segoe UI"/>
+                <a:cs typeface="Segoe UI"/>
+                <a:ea typeface="Segoe UI"/>
               </a:rPr>
               <a:t>الفجوات البحثية  •  د. هناء حسين الأهيمر</a:t>
             </a:r>
@@ -19869,9 +19869,9 @@
                 <a:solidFill>
                   <a:srgbClr val="FFFFFF"/>
                 </a:solidFill>
-                <a:latin typeface="Sakkal Majalla"/>
-                <a:cs typeface="Sakkal Majalla"/>
-                <a:ea typeface="Sakkal Majalla"/>
+                <a:latin typeface="Segoe UI"/>
+                <a:cs typeface="Segoe UI"/>
+                <a:ea typeface="Segoe UI"/>
               </a:rPr>
               <a:t>🧭</a:t>
             </a:r>
@@ -19916,9 +19916,9 @@
                 <a:solidFill>
                   <a:srgbClr val="A21CAF"/>
                 </a:solidFill>
-                <a:latin typeface="Sakkal Majalla"/>
-                <a:cs typeface="Sakkal Majalla"/>
-                <a:ea typeface="Sakkal Majalla"/>
+                <a:latin typeface="Segoe UI"/>
+                <a:cs typeface="Segoe UI"/>
+                <a:ea typeface="Segoe UI"/>
               </a:rPr>
               <a:t>اتجاه واضح لبحثك</a:t>
             </a:r>
@@ -19963,9 +19963,9 @@
                 <a:solidFill>
                   <a:srgbClr val="6E6A8F"/>
                 </a:solidFill>
-                <a:latin typeface="Sakkal Majalla"/>
-                <a:cs typeface="Sakkal Majalla"/>
-                <a:ea typeface="Sakkal Majalla"/>
+                <a:latin typeface="Segoe UI"/>
+                <a:cs typeface="Segoe UI"/>
+                <a:ea typeface="Segoe UI"/>
               </a:rPr>
               <a:t>Research Direction</a:t>
             </a:r>
@@ -20010,9 +20010,9 @@
                 <a:solidFill>
                   <a:srgbClr val="221C57"/>
                 </a:solidFill>
-                <a:latin typeface="Sakkal Majalla"/>
-                <a:cs typeface="Sakkal Majalla"/>
-                <a:ea typeface="Sakkal Majalla"/>
+                <a:latin typeface="Segoe UI"/>
+                <a:cs typeface="Segoe UI"/>
+                <a:ea typeface="Segoe UI"/>
               </a:rPr>
               <a:t>تمنحك بوصلة واضحة لرسالتك أو أطروحتك بدلاً من التخبط بين مواضيع مكررة</a:t>
             </a:r>
@@ -20129,9 +20129,9 @@
                 <a:solidFill>
                   <a:srgbClr val="FFFFFF"/>
                 </a:solidFill>
-                <a:latin typeface="Sakkal Majalla"/>
-                <a:cs typeface="Sakkal Majalla"/>
-                <a:ea typeface="Sakkal Majalla"/>
+                <a:latin typeface="Segoe UI"/>
+                <a:cs typeface="Segoe UI"/>
+                <a:ea typeface="Segoe UI"/>
               </a:rPr>
               <a:t>🏆</a:t>
             </a:r>
@@ -20176,9 +20176,9 @@
                 <a:solidFill>
                   <a:srgbClr val="D97706"/>
                 </a:solidFill>
-                <a:latin typeface="Sakkal Majalla"/>
-                <a:cs typeface="Sakkal Majalla"/>
-                <a:ea typeface="Sakkal Majalla"/>
+                <a:latin typeface="Segoe UI"/>
+                <a:cs typeface="Segoe UI"/>
+                <a:ea typeface="Segoe UI"/>
               </a:rPr>
               <a:t>الأصالة العلمية</a:t>
             </a:r>
@@ -20223,9 +20223,9 @@
                 <a:solidFill>
                   <a:srgbClr val="6E6A8F"/>
                 </a:solidFill>
-                <a:latin typeface="Sakkal Majalla"/>
-                <a:cs typeface="Sakkal Majalla"/>
-                <a:ea typeface="Sakkal Majalla"/>
+                <a:latin typeface="Segoe UI"/>
+                <a:cs typeface="Segoe UI"/>
+                <a:ea typeface="Segoe UI"/>
               </a:rPr>
               <a:t>Scientific Originality</a:t>
             </a:r>
@@ -20270,9 +20270,9 @@
                 <a:solidFill>
                   <a:srgbClr val="221C57"/>
                 </a:solidFill>
-                <a:latin typeface="Sakkal Majalla"/>
-                <a:cs typeface="Sakkal Majalla"/>
-                <a:ea typeface="Sakkal Majalla"/>
+                <a:latin typeface="Segoe UI"/>
+                <a:cs typeface="Segoe UI"/>
+                <a:ea typeface="Segoe UI"/>
               </a:rPr>
               <a:t>تضمن أن بحثك فيه إضافة جديدة حقيقية للمعرفة ولا يعيد ما هو موجود</a:t>
             </a:r>
@@ -20389,9 +20389,9 @@
                 <a:solidFill>
                   <a:srgbClr val="FFFFFF"/>
                 </a:solidFill>
-                <a:latin typeface="Sakkal Majalla"/>
-                <a:cs typeface="Sakkal Majalla"/>
-                <a:ea typeface="Sakkal Majalla"/>
+                <a:latin typeface="Segoe UI"/>
+                <a:cs typeface="Segoe UI"/>
+                <a:ea typeface="Segoe UI"/>
               </a:rPr>
               <a:t>⚖️</a:t>
             </a:r>
@@ -20436,9 +20436,9 @@
                 <a:solidFill>
                   <a:srgbClr val="6D28D9"/>
                 </a:solidFill>
-                <a:latin typeface="Sakkal Majalla"/>
-                <a:cs typeface="Sakkal Majalla"/>
-                <a:ea typeface="Sakkal Majalla"/>
+                <a:latin typeface="Segoe UI"/>
+                <a:cs typeface="Segoe UI"/>
+                <a:ea typeface="Segoe UI"/>
               </a:rPr>
               <a:t>تبرير الدراسة</a:t>
             </a:r>
@@ -20483,9 +20483,9 @@
                 <a:solidFill>
                   <a:srgbClr val="6E6A8F"/>
                 </a:solidFill>
-                <a:latin typeface="Sakkal Majalla"/>
-                <a:cs typeface="Sakkal Majalla"/>
-                <a:ea typeface="Sakkal Majalla"/>
+                <a:latin typeface="Segoe UI"/>
+                <a:cs typeface="Segoe UI"/>
+                <a:ea typeface="Segoe UI"/>
               </a:rPr>
               <a:t>Justifying the Study</a:t>
             </a:r>
@@ -20530,9 +20530,9 @@
                 <a:solidFill>
                   <a:srgbClr val="221C57"/>
                 </a:solidFill>
-                <a:latin typeface="Sakkal Majalla"/>
-                <a:cs typeface="Sakkal Majalla"/>
-                <a:ea typeface="Sakkal Majalla"/>
+                <a:latin typeface="Segoe UI"/>
+                <a:cs typeface="Segoe UI"/>
+                <a:ea typeface="Segoe UI"/>
               </a:rPr>
               <a:t>حجّتك الأقوى لإقناع اللجنة العلمية بقيمة بحثك وجدوى إجرائه</a:t>
             </a:r>
@@ -20649,9 +20649,9 @@
                 <a:solidFill>
                   <a:srgbClr val="FFFFFF"/>
                 </a:solidFill>
-                <a:latin typeface="Sakkal Majalla"/>
-                <a:cs typeface="Sakkal Majalla"/>
-                <a:ea typeface="Sakkal Majalla"/>
+                <a:latin typeface="Segoe UI"/>
+                <a:cs typeface="Segoe UI"/>
+                <a:ea typeface="Segoe UI"/>
               </a:rPr>
               <a:t>🔗</a:t>
             </a:r>
@@ -20696,9 +20696,9 @@
                 <a:solidFill>
                   <a:srgbClr val="0D9488"/>
                 </a:solidFill>
-                <a:latin typeface="Sakkal Majalla"/>
-                <a:cs typeface="Sakkal Majalla"/>
-                <a:ea typeface="Sakkal Majalla"/>
+                <a:latin typeface="Segoe UI"/>
+                <a:cs typeface="Segoe UI"/>
+                <a:ea typeface="Segoe UI"/>
               </a:rPr>
               <a:t>ربط الدراسات السابقة</a:t>
             </a:r>
@@ -20743,9 +20743,9 @@
                 <a:solidFill>
                   <a:srgbClr val="6E6A8F"/>
                 </a:solidFill>
-                <a:latin typeface="Sakkal Majalla"/>
-                <a:cs typeface="Sakkal Majalla"/>
-                <a:ea typeface="Sakkal Majalla"/>
+                <a:latin typeface="Segoe UI"/>
+                <a:cs typeface="Segoe UI"/>
+                <a:ea typeface="Segoe UI"/>
               </a:rPr>
               <a:t>Linking the Literature</a:t>
             </a:r>
@@ -20790,9 +20790,9 @@
                 <a:solidFill>
                   <a:srgbClr val="221C57"/>
                 </a:solidFill>
-                <a:latin typeface="Sakkal Majalla"/>
-                <a:cs typeface="Sakkal Majalla"/>
-                <a:ea typeface="Sakkal Majalla"/>
+                <a:latin typeface="Segoe UI"/>
+                <a:cs typeface="Segoe UI"/>
+                <a:ea typeface="Segoe UI"/>
               </a:rPr>
               <a:t>تصل بين ما قالته الأدبيات وبين الشيء الجديد الذي ستضيفه أنت</a:t>
             </a:r>
@@ -20909,9 +20909,9 @@
                 <a:solidFill>
                   <a:srgbClr val="FFFFFF"/>
                 </a:solidFill>
-                <a:latin typeface="Sakkal Majalla"/>
-                <a:cs typeface="Sakkal Majalla"/>
-                <a:ea typeface="Sakkal Majalla"/>
+                <a:latin typeface="Segoe UI"/>
+                <a:cs typeface="Segoe UI"/>
+                <a:ea typeface="Segoe UI"/>
               </a:rPr>
               <a:t>📰</a:t>
             </a:r>
@@ -20956,9 +20956,9 @@
                 <a:solidFill>
                   <a:srgbClr val="047857"/>
                 </a:solidFill>
-                <a:latin typeface="Sakkal Majalla"/>
-                <a:cs typeface="Sakkal Majalla"/>
-                <a:ea typeface="Sakkal Majalla"/>
+                <a:latin typeface="Segoe UI"/>
+                <a:cs typeface="Segoe UI"/>
+                <a:ea typeface="Segoe UI"/>
               </a:rPr>
               <a:t>النشر في المجلات</a:t>
             </a:r>
@@ -21003,9 +21003,9 @@
                 <a:solidFill>
                   <a:srgbClr val="6E6A8F"/>
                 </a:solidFill>
-                <a:latin typeface="Sakkal Majalla"/>
-                <a:cs typeface="Sakkal Majalla"/>
-                <a:ea typeface="Sakkal Majalla"/>
+                <a:latin typeface="Segoe UI"/>
+                <a:cs typeface="Segoe UI"/>
+                <a:ea typeface="Segoe UI"/>
               </a:rPr>
               <a:t>Academic Publishing</a:t>
             </a:r>
@@ -21050,9 +21050,9 @@
                 <a:solidFill>
                   <a:srgbClr val="221C57"/>
                 </a:solidFill>
-                <a:latin typeface="Sakkal Majalla"/>
-                <a:cs typeface="Sakkal Majalla"/>
-                <a:ea typeface="Sakkal Majalla"/>
+                <a:latin typeface="Segoe UI"/>
+                <a:cs typeface="Segoe UI"/>
+                <a:ea typeface="Segoe UI"/>
               </a:rPr>
               <a:t>المجلات العلمية المحكّمة تفضّل الأبحاث التي تعالج فجوات واضحة</a:t>
             </a:r>
@@ -21169,9 +21169,9 @@
                 <a:solidFill>
                   <a:srgbClr val="FFFFFF"/>
                 </a:solidFill>
-                <a:latin typeface="Sakkal Majalla"/>
-                <a:cs typeface="Sakkal Majalla"/>
-                <a:ea typeface="Sakkal Majalla"/>
+                <a:latin typeface="Segoe UI"/>
+                <a:cs typeface="Segoe UI"/>
+                <a:ea typeface="Segoe UI"/>
               </a:rPr>
               <a:t>💰</a:t>
             </a:r>
@@ -21216,9 +21216,9 @@
                 <a:solidFill>
                   <a:srgbClr val="BE123C"/>
                 </a:solidFill>
-                <a:latin typeface="Sakkal Majalla"/>
-                <a:cs typeface="Sakkal Majalla"/>
-                <a:ea typeface="Sakkal Majalla"/>
+                <a:latin typeface="Segoe UI"/>
+                <a:cs typeface="Segoe UI"/>
+                <a:ea typeface="Segoe UI"/>
               </a:rPr>
               <a:t>التمويل البحثي</a:t>
             </a:r>
@@ -21263,9 +21263,9 @@
                 <a:solidFill>
                   <a:srgbClr val="6E6A8F"/>
                 </a:solidFill>
-                <a:latin typeface="Sakkal Majalla"/>
-                <a:cs typeface="Sakkal Majalla"/>
-                <a:ea typeface="Sakkal Majalla"/>
+                <a:latin typeface="Segoe UI"/>
+                <a:cs typeface="Segoe UI"/>
+                <a:ea typeface="Segoe UI"/>
               </a:rPr>
               <a:t>Research Funding</a:t>
             </a:r>
@@ -21310,9 +21310,9 @@
                 <a:solidFill>
                   <a:srgbClr val="221C57"/>
                 </a:solidFill>
-                <a:latin typeface="Sakkal Majalla"/>
-                <a:cs typeface="Sakkal Majalla"/>
-                <a:ea typeface="Sakkal Majalla"/>
+                <a:latin typeface="Segoe UI"/>
+                <a:cs typeface="Segoe UI"/>
+                <a:ea typeface="Segoe UI"/>
               </a:rPr>
               <a:t>الجهات الممولة تبحث دائماً عن مشاكل حقيقية تحتاج إلى حلول</a:t>
             </a:r>
@@ -21419,9 +21419,9 @@
                 <a:solidFill>
                   <a:srgbClr val="ECE9FA"/>
                 </a:solidFill>
-                <a:latin typeface="Sakkal Majalla"/>
-                <a:cs typeface="Sakkal Majalla"/>
-                <a:ea typeface="Sakkal Majalla"/>
+                <a:latin typeface="Segoe UI"/>
+                <a:cs typeface="Segoe UI"/>
+                <a:ea typeface="Segoe UI"/>
               </a:rPr>
               <a:t>05</a:t>
             </a:r>
@@ -21490,9 +21490,9 @@
                 <a:solidFill>
                   <a:srgbClr val="FFFFFF"/>
                 </a:solidFill>
-                <a:latin typeface="Sakkal Majalla"/>
-                <a:cs typeface="Sakkal Majalla"/>
-                <a:ea typeface="Sakkal Majalla"/>
+                <a:latin typeface="Segoe UI"/>
+                <a:cs typeface="Segoe UI"/>
+                <a:ea typeface="Segoe UI"/>
               </a:rPr>
               <a:t>🔎</a:t>
             </a:r>
@@ -21537,9 +21537,9 @@
                 <a:solidFill>
                   <a:srgbClr val="0D9488"/>
                 </a:solidFill>
-                <a:latin typeface="Sakkal Majalla"/>
-                <a:cs typeface="Sakkal Majalla"/>
-                <a:ea typeface="Sakkal Majalla"/>
+                <a:latin typeface="Segoe UI"/>
+                <a:cs typeface="Segoe UI"/>
+                <a:ea typeface="Segoe UI"/>
               </a:rPr>
               <a:t>TYPES OF RESEARCH GAPS — 1/2</a:t>
             </a:r>
@@ -21584,9 +21584,9 @@
                 <a:solidFill>
                   <a:srgbClr val="221C57"/>
                 </a:solidFill>
-                <a:latin typeface="Sakkal Majalla"/>
-                <a:cs typeface="Sakkal Majalla"/>
-                <a:ea typeface="Sakkal Majalla"/>
+                <a:latin typeface="Segoe UI"/>
+                <a:cs typeface="Segoe UI"/>
+                <a:ea typeface="Segoe UI"/>
               </a:rPr>
               <a:t>الأنواع الستة بالتفصيل (١–٣)</a:t>
             </a:r>
@@ -21755,9 +21755,9 @@
                 <a:solidFill>
                   <a:srgbClr val="FFFFFF"/>
                 </a:solidFill>
-                <a:latin typeface="Sakkal Majalla"/>
-                <a:cs typeface="Sakkal Majalla"/>
-                <a:ea typeface="Sakkal Majalla"/>
+                <a:latin typeface="Segoe UI"/>
+                <a:cs typeface="Segoe UI"/>
+                <a:ea typeface="Segoe UI"/>
               </a:rPr>
               <a:t>05</a:t>
             </a:r>
@@ -21802,9 +21802,9 @@
                 <a:solidFill>
                   <a:srgbClr val="6E6A8F"/>
                 </a:solidFill>
-                <a:latin typeface="Sakkal Majalla"/>
-                <a:cs typeface="Sakkal Majalla"/>
-                <a:ea typeface="Sakkal Majalla"/>
+                <a:latin typeface="Segoe UI"/>
+                <a:cs typeface="Segoe UI"/>
+                <a:ea typeface="Segoe UI"/>
               </a:rPr>
               <a:t>الفجوات البحثية  •  د. هناء حسين الأهيمر</a:t>
             </a:r>
@@ -21849,9 +21849,9 @@
                 <a:solidFill>
                   <a:srgbClr val="6E6A8F"/>
                 </a:solidFill>
-                <a:latin typeface="Sakkal Majalla"/>
-                <a:cs typeface="Sakkal Majalla"/>
-                <a:ea typeface="Sakkal Majalla"/>
+                <a:latin typeface="Segoe UI"/>
+                <a:cs typeface="Segoe UI"/>
+                <a:ea typeface="Segoe UI"/>
               </a:rPr>
               <a:t>لكل نوع استخدامه الخاص — اعرفها جيداً لتعرف أي باب تطرقه في بحثك:</a:t>
             </a:r>
@@ -22014,9 +22014,9 @@
                 <a:solidFill>
                   <a:srgbClr val="FFFFFF"/>
                 </a:solidFill>
-                <a:latin typeface="Sakkal Majalla"/>
-                <a:cs typeface="Sakkal Majalla"/>
-                <a:ea typeface="Sakkal Majalla"/>
+                <a:latin typeface="Segoe UI"/>
+                <a:cs typeface="Segoe UI"/>
+                <a:ea typeface="Segoe UI"/>
               </a:rPr>
               <a:t>١</a:t>
             </a:r>
@@ -22061,9 +22061,9 @@
                 <a:solidFill>
                   <a:srgbClr val="FFFFFF"/>
                 </a:solidFill>
-                <a:latin typeface="Sakkal Majalla"/>
-                <a:cs typeface="Sakkal Majalla"/>
-                <a:ea typeface="Sakkal Majalla"/>
+                <a:latin typeface="Segoe UI"/>
+                <a:cs typeface="Segoe UI"/>
+                <a:ea typeface="Segoe UI"/>
               </a:rPr>
               <a:t>فجوة المعرفة</a:t>
             </a:r>
@@ -22108,9 +22108,9 @@
                 <a:solidFill>
                   <a:srgbClr val="FFFFFF"/>
                 </a:solidFill>
-                <a:latin typeface="Sakkal Majalla"/>
-                <a:cs typeface="Sakkal Majalla"/>
-                <a:ea typeface="Sakkal Majalla"/>
+                <a:latin typeface="Segoe UI"/>
+                <a:cs typeface="Segoe UI"/>
+                <a:ea typeface="Segoe UI"/>
               </a:rPr>
               <a:t>💡  Knowledge Gap</a:t>
             </a:r>
@@ -22155,9 +22155,9 @@
                 <a:solidFill>
                   <a:srgbClr val="A21CAF"/>
                 </a:solidFill>
-                <a:latin typeface="Sakkal Majalla"/>
-                <a:cs typeface="Sakkal Majalla"/>
-                <a:ea typeface="Sakkal Majalla"/>
+                <a:latin typeface="Segoe UI"/>
+                <a:cs typeface="Segoe UI"/>
+                <a:ea typeface="Segoe UI"/>
               </a:rPr>
               <a:t>التعريف:  </a:t>
             </a:r>
@@ -22166,9 +22166,9 @@
                 <a:solidFill>
                   <a:srgbClr val="221C57"/>
                 </a:solidFill>
-                <a:latin typeface="Sakkal Majalla"/>
-                <a:cs typeface="Sakkal Majalla"/>
-                <a:ea typeface="Sakkal Majalla"/>
+                <a:latin typeface="Segoe UI"/>
+                <a:cs typeface="Segoe UI"/>
+                <a:ea typeface="Segoe UI"/>
               </a:rPr>
               <a:t>معلومة أو ظاهرة لا يعرفها العلم حتى الآن في مجال معيّن.</a:t>
             </a:r>
@@ -22213,9 +22213,9 @@
                 <a:solidFill>
                   <a:srgbClr val="A21CAF"/>
                 </a:solidFill>
-                <a:latin typeface="Sakkal Majalla"/>
-                <a:cs typeface="Sakkal Majalla"/>
-                <a:ea typeface="Sakkal Majalla"/>
+                <a:latin typeface="Segoe UI"/>
+                <a:cs typeface="Segoe UI"/>
+                <a:ea typeface="Segoe UI"/>
               </a:rPr>
               <a:t>من شرح الورشة:  </a:t>
             </a:r>
@@ -22224,9 +22224,9 @@
                 <a:solidFill>
                   <a:srgbClr val="221C57"/>
                 </a:solidFill>
-                <a:latin typeface="Sakkal Majalla"/>
-                <a:cs typeface="Sakkal Majalla"/>
-                <a:ea typeface="Sakkal Majalla"/>
+                <a:latin typeface="Segoe UI"/>
+                <a:cs typeface="Segoe UI"/>
+                <a:ea typeface="Segoe UI"/>
               </a:rPr>
               <a:t>تظهر عندما يكون الموضوع جديداً بالكامل — تقنية ناشئة أو ظاهرة مستجدة لم تلحق بها الأبحاث بعد، فيكون أي بحث جاد فيها إضافة صافية للمعرفة.</a:t>
             </a:r>
@@ -22283,9 +22283,9 @@
                 <a:solidFill>
                   <a:srgbClr val="A21CAF"/>
                 </a:solidFill>
-                <a:latin typeface="Sakkal Majalla"/>
-                <a:cs typeface="Sakkal Majalla"/>
-                <a:ea typeface="Sakkal Majalla"/>
+                <a:latin typeface="Segoe UI"/>
+                <a:cs typeface="Segoe UI"/>
+                <a:ea typeface="Segoe UI"/>
               </a:rPr>
               <a:t>السؤال المفتاحي: ماذا لا نعرف بعد؟</a:t>
             </a:r>
@@ -22448,9 +22448,9 @@
                 <a:solidFill>
                   <a:srgbClr val="FFFFFF"/>
                 </a:solidFill>
-                <a:latin typeface="Sakkal Majalla"/>
-                <a:cs typeface="Sakkal Majalla"/>
-                <a:ea typeface="Sakkal Majalla"/>
+                <a:latin typeface="Segoe UI"/>
+                <a:cs typeface="Segoe UI"/>
+                <a:ea typeface="Segoe UI"/>
               </a:rPr>
               <a:t>٢</a:t>
             </a:r>
@@ -22495,9 +22495,9 @@
                 <a:solidFill>
                   <a:srgbClr val="FFFFFF"/>
                 </a:solidFill>
-                <a:latin typeface="Sakkal Majalla"/>
-                <a:cs typeface="Sakkal Majalla"/>
-                <a:ea typeface="Sakkal Majalla"/>
+                <a:latin typeface="Segoe UI"/>
+                <a:cs typeface="Segoe UI"/>
+                <a:ea typeface="Segoe UI"/>
               </a:rPr>
               <a:t>فجوة الممارسة</a:t>
             </a:r>
@@ -22542,9 +22542,9 @@
                 <a:solidFill>
                   <a:srgbClr val="FFFFFF"/>
                 </a:solidFill>
-                <a:latin typeface="Sakkal Majalla"/>
-                <a:cs typeface="Sakkal Majalla"/>
-                <a:ea typeface="Sakkal Majalla"/>
+                <a:latin typeface="Segoe UI"/>
+                <a:cs typeface="Segoe UI"/>
+                <a:ea typeface="Segoe UI"/>
               </a:rPr>
               <a:t>⚙️  Practice Gap</a:t>
             </a:r>
@@ -22589,9 +22589,9 @@
                 <a:solidFill>
                   <a:srgbClr val="D97706"/>
                 </a:solidFill>
-                <a:latin typeface="Sakkal Majalla"/>
-                <a:cs typeface="Sakkal Majalla"/>
-                <a:ea typeface="Sakkal Majalla"/>
+                <a:latin typeface="Segoe UI"/>
+                <a:cs typeface="Segoe UI"/>
+                <a:ea typeface="Segoe UI"/>
               </a:rPr>
               <a:t>التعريف:  </a:t>
             </a:r>
@@ -22600,9 +22600,9 @@
                 <a:solidFill>
                   <a:srgbClr val="221C57"/>
                 </a:solidFill>
-                <a:latin typeface="Sakkal Majalla"/>
-                <a:cs typeface="Sakkal Majalla"/>
-                <a:ea typeface="Sakkal Majalla"/>
+                <a:latin typeface="Segoe UI"/>
+                <a:cs typeface="Segoe UI"/>
+                <a:ea typeface="Segoe UI"/>
               </a:rPr>
               <a:t>الفرق بين ما تقوله النظرية وما يحدث فعلاً في التطبيق الواقعي.</a:t>
             </a:r>
@@ -22647,9 +22647,9 @@
                 <a:solidFill>
                   <a:srgbClr val="D97706"/>
                 </a:solidFill>
-                <a:latin typeface="Sakkal Majalla"/>
-                <a:cs typeface="Sakkal Majalla"/>
-                <a:ea typeface="Sakkal Majalla"/>
+                <a:latin typeface="Segoe UI"/>
+                <a:cs typeface="Segoe UI"/>
+                <a:ea typeface="Segoe UI"/>
               </a:rPr>
               <a:t>من شرح الورشة:  </a:t>
             </a:r>
@@ -22658,9 +22658,9 @@
                 <a:solidFill>
                   <a:srgbClr val="221C57"/>
                 </a:solidFill>
-                <a:latin typeface="Sakkal Majalla"/>
-                <a:cs typeface="Sakkal Majalla"/>
-                <a:ea typeface="Sakkal Majalla"/>
+                <a:latin typeface="Segoe UI"/>
+                <a:cs typeface="Segoe UI"/>
+                <a:ea typeface="Segoe UI"/>
               </a:rPr>
               <a:t>المعرفة موجودة والإرشادات منشورة، لكن الميدان يعمل بطريقة مختلفة. بحثك هنا يجيب: لماذا لا يُطبَّق ما نعرفه؟ وكيف نغلق الفرق بين الاثنين؟</a:t>
             </a:r>
@@ -22717,9 +22717,9 @@
                 <a:solidFill>
                   <a:srgbClr val="D97706"/>
                 </a:solidFill>
-                <a:latin typeface="Sakkal Majalla"/>
-                <a:cs typeface="Sakkal Majalla"/>
-                <a:ea typeface="Sakkal Majalla"/>
+                <a:latin typeface="Segoe UI"/>
+                <a:cs typeface="Segoe UI"/>
+                <a:ea typeface="Segoe UI"/>
               </a:rPr>
               <a:t>السؤال المفتاحي: لماذا لا يُطبَّق ما نعرفه؟</a:t>
             </a:r>
@@ -22882,9 +22882,9 @@
                 <a:solidFill>
                   <a:srgbClr val="FFFFFF"/>
                 </a:solidFill>
-                <a:latin typeface="Sakkal Majalla"/>
-                <a:cs typeface="Sakkal Majalla"/>
-                <a:ea typeface="Sakkal Majalla"/>
+                <a:latin typeface="Segoe UI"/>
+                <a:cs typeface="Segoe UI"/>
+                <a:ea typeface="Segoe UI"/>
               </a:rPr>
               <a:t>٣</a:t>
             </a:r>
@@ -22929,9 +22929,9 @@
                 <a:solidFill>
                   <a:srgbClr val="FFFFFF"/>
                 </a:solidFill>
-                <a:latin typeface="Sakkal Majalla"/>
-                <a:cs typeface="Sakkal Majalla"/>
-                <a:ea typeface="Sakkal Majalla"/>
+                <a:latin typeface="Segoe UI"/>
+                <a:cs typeface="Segoe UI"/>
+                <a:ea typeface="Segoe UI"/>
               </a:rPr>
               <a:t>فجوة الأدلة</a:t>
             </a:r>
@@ -22976,9 +22976,9 @@
                 <a:solidFill>
                   <a:srgbClr val="FFFFFF"/>
                 </a:solidFill>
-                <a:latin typeface="Sakkal Majalla"/>
-                <a:cs typeface="Sakkal Majalla"/>
-                <a:ea typeface="Sakkal Majalla"/>
+                <a:latin typeface="Segoe UI"/>
+                <a:cs typeface="Segoe UI"/>
+                <a:ea typeface="Segoe UI"/>
               </a:rPr>
               <a:t>🧪  Evidence Gap</a:t>
             </a:r>
@@ -23023,9 +23023,9 @@
                 <a:solidFill>
                   <a:srgbClr val="0D9488"/>
                 </a:solidFill>
-                <a:latin typeface="Sakkal Majalla"/>
-                <a:cs typeface="Sakkal Majalla"/>
-                <a:ea typeface="Sakkal Majalla"/>
+                <a:latin typeface="Segoe UI"/>
+                <a:cs typeface="Segoe UI"/>
+                <a:ea typeface="Segoe UI"/>
               </a:rPr>
               <a:t>التعريف:  </a:t>
             </a:r>
@@ -23034,9 +23034,9 @@
                 <a:solidFill>
                   <a:srgbClr val="221C57"/>
                 </a:solidFill>
-                <a:latin typeface="Sakkal Majalla"/>
-                <a:cs typeface="Sakkal Majalla"/>
-                <a:ea typeface="Sakkal Majalla"/>
+                <a:latin typeface="Segoe UI"/>
+                <a:cs typeface="Segoe UI"/>
+                <a:ea typeface="Segoe UI"/>
               </a:rPr>
               <a:t>الأدلة العلمية المتوفرة غير كافية لدعم فرضية أو توصية معيّنة.</a:t>
             </a:r>
@@ -23081,9 +23081,9 @@
                 <a:solidFill>
                   <a:srgbClr val="0D9488"/>
                 </a:solidFill>
-                <a:latin typeface="Sakkal Majalla"/>
-                <a:cs typeface="Sakkal Majalla"/>
-                <a:ea typeface="Sakkal Majalla"/>
+                <a:latin typeface="Segoe UI"/>
+                <a:cs typeface="Segoe UI"/>
+                <a:ea typeface="Segoe UI"/>
               </a:rPr>
               <a:t>من شرح الورشة:  </a:t>
             </a:r>
@@ -23092,9 +23092,9 @@
                 <a:solidFill>
                   <a:srgbClr val="221C57"/>
                 </a:solidFill>
-                <a:latin typeface="Sakkal Majalla"/>
-                <a:cs typeface="Sakkal Majalla"/>
-                <a:ea typeface="Sakkal Majalla"/>
+                <a:latin typeface="Segoe UI"/>
+                <a:cs typeface="Segoe UI"/>
+                <a:ea typeface="Segoe UI"/>
               </a:rPr>
               <a:t>توصيات شائعة ومقبولة على نطاق واسع، لكن دون تجارب مضبوطة تثبتها. البحث هنا يبني الدليل الغائب ويحوّل الرأي الشائع إلى علم موثق.</a:t>
             </a:r>
@@ -23151,9 +23151,9 @@
                 <a:solidFill>
                   <a:srgbClr val="0D9488"/>
                 </a:solidFill>
-                <a:latin typeface="Sakkal Majalla"/>
-                <a:cs typeface="Sakkal Majalla"/>
-                <a:ea typeface="Sakkal Majalla"/>
+                <a:latin typeface="Segoe UI"/>
+                <a:cs typeface="Segoe UI"/>
+                <a:ea typeface="Segoe UI"/>
               </a:rPr>
               <a:t>السؤال المفتاحي: أين الدليل العلمي؟</a:t>
             </a:r>
@@ -23260,9 +23260,9 @@
                 <a:solidFill>
                   <a:srgbClr val="ECE9FA"/>
                 </a:solidFill>
-                <a:latin typeface="Sakkal Majalla"/>
-                <a:cs typeface="Sakkal Majalla"/>
-                <a:ea typeface="Sakkal Majalla"/>
+                <a:latin typeface="Segoe UI"/>
+                <a:cs typeface="Segoe UI"/>
+                <a:ea typeface="Segoe UI"/>
               </a:rPr>
               <a:t>06</a:t>
             </a:r>
@@ -23331,9 +23331,9 @@
                 <a:solidFill>
                   <a:srgbClr val="FFFFFF"/>
                 </a:solidFill>
-                <a:latin typeface="Sakkal Majalla"/>
-                <a:cs typeface="Sakkal Majalla"/>
-                <a:ea typeface="Sakkal Majalla"/>
+                <a:latin typeface="Segoe UI"/>
+                <a:cs typeface="Segoe UI"/>
+                <a:ea typeface="Segoe UI"/>
               </a:rPr>
               <a:t>🔎</a:t>
             </a:r>
@@ -23378,9 +23378,9 @@
                 <a:solidFill>
                   <a:srgbClr val="0D9488"/>
                 </a:solidFill>
-                <a:latin typeface="Sakkal Majalla"/>
-                <a:cs typeface="Sakkal Majalla"/>
-                <a:ea typeface="Sakkal Majalla"/>
+                <a:latin typeface="Segoe UI"/>
+                <a:cs typeface="Segoe UI"/>
+                <a:ea typeface="Segoe UI"/>
               </a:rPr>
               <a:t>TYPES OF RESEARCH GAPS — 2/2</a:t>
             </a:r>
@@ -23425,9 +23425,9 @@
                 <a:solidFill>
                   <a:srgbClr val="221C57"/>
                 </a:solidFill>
-                <a:latin typeface="Sakkal Majalla"/>
-                <a:cs typeface="Sakkal Majalla"/>
-                <a:ea typeface="Sakkal Majalla"/>
+                <a:latin typeface="Segoe UI"/>
+                <a:cs typeface="Segoe UI"/>
+                <a:ea typeface="Segoe UI"/>
               </a:rPr>
               <a:t>الأنواع الستة بالتفصيل (٤–٦)</a:t>
             </a:r>
@@ -23596,9 +23596,9 @@
                 <a:solidFill>
                   <a:srgbClr val="FFFFFF"/>
                 </a:solidFill>
-                <a:latin typeface="Sakkal Majalla"/>
-                <a:cs typeface="Sakkal Majalla"/>
-                <a:ea typeface="Sakkal Majalla"/>
+                <a:latin typeface="Segoe UI"/>
+                <a:cs typeface="Segoe UI"/>
+                <a:ea typeface="Segoe UI"/>
               </a:rPr>
               <a:t>06</a:t>
             </a:r>
@@ -23643,9 +23643,9 @@
                 <a:solidFill>
                   <a:srgbClr val="6E6A8F"/>
                 </a:solidFill>
-                <a:latin typeface="Sakkal Majalla"/>
-                <a:cs typeface="Sakkal Majalla"/>
-                <a:ea typeface="Sakkal Majalla"/>
+                <a:latin typeface="Segoe UI"/>
+                <a:cs typeface="Segoe UI"/>
+                <a:ea typeface="Segoe UI"/>
               </a:rPr>
               <a:t>الفجوات البحثية  •  د. هناء حسين الأهيمر</a:t>
             </a:r>
@@ -23690,9 +23690,9 @@
                 <a:solidFill>
                   <a:srgbClr val="6E6A8F"/>
                 </a:solidFill>
-                <a:latin typeface="Sakkal Majalla"/>
-                <a:cs typeface="Sakkal Majalla"/>
-                <a:ea typeface="Sakkal Majalla"/>
+                <a:latin typeface="Segoe UI"/>
+                <a:cs typeface="Segoe UI"/>
+                <a:ea typeface="Segoe UI"/>
               </a:rPr>
               <a:t>ثلاثة أنواع أخرى شائعة جداً — وغالباً أسهل تناولاً للباحث المبتدئ:</a:t>
             </a:r>
@@ -23855,9 +23855,9 @@
                 <a:solidFill>
                   <a:srgbClr val="FFFFFF"/>
                 </a:solidFill>
-                <a:latin typeface="Sakkal Majalla"/>
-                <a:cs typeface="Sakkal Majalla"/>
-                <a:ea typeface="Sakkal Majalla"/>
+                <a:latin typeface="Segoe UI"/>
+                <a:cs typeface="Segoe UI"/>
+                <a:ea typeface="Segoe UI"/>
               </a:rPr>
               <a:t>٤</a:t>
             </a:r>
@@ -23902,9 +23902,9 @@
                 <a:solidFill>
                   <a:srgbClr val="FFFFFF"/>
                 </a:solidFill>
-                <a:latin typeface="Sakkal Majalla"/>
-                <a:cs typeface="Sakkal Majalla"/>
-                <a:ea typeface="Sakkal Majalla"/>
+                <a:latin typeface="Segoe UI"/>
+                <a:cs typeface="Segoe UI"/>
+                <a:ea typeface="Segoe UI"/>
               </a:rPr>
               <a:t>فجوة السكان</a:t>
             </a:r>
@@ -23949,9 +23949,9 @@
                 <a:solidFill>
                   <a:srgbClr val="FFFFFF"/>
                 </a:solidFill>
-                <a:latin typeface="Sakkal Majalla"/>
-                <a:cs typeface="Sakkal Majalla"/>
-                <a:ea typeface="Sakkal Majalla"/>
+                <a:latin typeface="Segoe UI"/>
+                <a:cs typeface="Segoe UI"/>
+                <a:ea typeface="Segoe UI"/>
               </a:rPr>
               <a:t>👥  Population Gap</a:t>
             </a:r>
@@ -23996,9 +23996,9 @@
                 <a:solidFill>
                   <a:srgbClr val="6D28D9"/>
                 </a:solidFill>
-                <a:latin typeface="Sakkal Majalla"/>
-                <a:cs typeface="Sakkal Majalla"/>
-                <a:ea typeface="Sakkal Majalla"/>
+                <a:latin typeface="Segoe UI"/>
+                <a:cs typeface="Segoe UI"/>
+                <a:ea typeface="Segoe UI"/>
               </a:rPr>
               <a:t>التعريف:  </a:t>
             </a:r>
@@ -24007,9 +24007,9 @@
                 <a:solidFill>
                   <a:srgbClr val="221C57"/>
                 </a:solidFill>
-                <a:latin typeface="Sakkal Majalla"/>
-                <a:cs typeface="Sakkal Majalla"/>
-                <a:ea typeface="Sakkal Majalla"/>
+                <a:latin typeface="Segoe UI"/>
+                <a:cs typeface="Segoe UI"/>
+                <a:ea typeface="Segoe UI"/>
               </a:rPr>
               <a:t>فئة معيّنة لم تتم دراستها بشكل كافٍ: جنس، عمر، ثقافة، أو مهنة.</a:t>
             </a:r>
@@ -24054,9 +24054,9 @@
                 <a:solidFill>
                   <a:srgbClr val="6D28D9"/>
                 </a:solidFill>
-                <a:latin typeface="Sakkal Majalla"/>
-                <a:cs typeface="Sakkal Majalla"/>
-                <a:ea typeface="Sakkal Majalla"/>
+                <a:latin typeface="Segoe UI"/>
+                <a:cs typeface="Segoe UI"/>
+                <a:ea typeface="Segoe UI"/>
               </a:rPr>
               <a:t>من شرح الورشة:  </a:t>
             </a:r>
@@ -24065,9 +24065,9 @@
                 <a:solidFill>
                   <a:srgbClr val="221C57"/>
                 </a:solidFill>
-                <a:latin typeface="Sakkal Majalla"/>
-                <a:cs typeface="Sakkal Majalla"/>
-                <a:ea typeface="Sakkal Majalla"/>
+                <a:latin typeface="Segoe UI"/>
+                <a:cs typeface="Segoe UI"/>
+                <a:ea typeface="Segoe UI"/>
               </a:rPr>
               <a:t>النتائج المبنية على عينات لا تشبه مجتمعك لا يمكن تعميمها عليه ببساطة. دراسة الفئة المهملة في سياقك تسدّ فجوة حقيقية وتخدم مجتمعك مباشرة.</a:t>
             </a:r>
@@ -24124,9 +24124,9 @@
                 <a:solidFill>
                   <a:srgbClr val="6D28D9"/>
                 </a:solidFill>
-                <a:latin typeface="Sakkal Majalla"/>
-                <a:cs typeface="Sakkal Majalla"/>
-                <a:ea typeface="Sakkal Majalla"/>
+                <a:latin typeface="Segoe UI"/>
+                <a:cs typeface="Segoe UI"/>
+                <a:ea typeface="Segoe UI"/>
               </a:rPr>
               <a:t>السؤال المفتاحي: مَن الذي أُهمل من الدراسة؟</a:t>
             </a:r>
@@ -24289,9 +24289,9 @@
                 <a:solidFill>
                   <a:srgbClr val="FFFFFF"/>
                 </a:solidFill>
-                <a:latin typeface="Sakkal Majalla"/>
-                <a:cs typeface="Sakkal Majalla"/>
-                <a:ea typeface="Sakkal Majalla"/>
+                <a:latin typeface="Segoe UI"/>
+                <a:cs typeface="Segoe UI"/>
+                <a:ea typeface="Segoe UI"/>
               </a:rPr>
               <a:t>٥</a:t>
             </a:r>
@@ -24336,9 +24336,9 @@
                 <a:solidFill>
                   <a:srgbClr val="FFFFFF"/>
                 </a:solidFill>
-                <a:latin typeface="Sakkal Majalla"/>
-                <a:cs typeface="Sakkal Majalla"/>
-                <a:ea typeface="Sakkal Majalla"/>
+                <a:latin typeface="Segoe UI"/>
+                <a:cs typeface="Segoe UI"/>
+                <a:ea typeface="Segoe UI"/>
               </a:rPr>
               <a:t>فجوة المنهجية</a:t>
             </a:r>
@@ -24383,9 +24383,9 @@
                 <a:solidFill>
                   <a:srgbClr val="FFFFFF"/>
                 </a:solidFill>
-                <a:latin typeface="Sakkal Majalla"/>
-                <a:cs typeface="Sakkal Majalla"/>
-                <a:ea typeface="Sakkal Majalla"/>
+                <a:latin typeface="Segoe UI"/>
+                <a:cs typeface="Segoe UI"/>
+                <a:ea typeface="Segoe UI"/>
               </a:rPr>
               <a:t>🧩  Methodological Gap</a:t>
             </a:r>
@@ -24430,9 +24430,9 @@
                 <a:solidFill>
                   <a:srgbClr val="BE123C"/>
                 </a:solidFill>
-                <a:latin typeface="Sakkal Majalla"/>
-                <a:cs typeface="Sakkal Majalla"/>
-                <a:ea typeface="Sakkal Majalla"/>
+                <a:latin typeface="Segoe UI"/>
+                <a:cs typeface="Segoe UI"/>
+                <a:ea typeface="Segoe UI"/>
               </a:rPr>
               <a:t>التعريف:  </a:t>
             </a:r>
@@ -24441,9 +24441,9 @@
                 <a:solidFill>
                   <a:srgbClr val="221C57"/>
                 </a:solidFill>
-                <a:latin typeface="Sakkal Majalla"/>
-                <a:cs typeface="Sakkal Majalla"/>
-                <a:ea typeface="Sakkal Majalla"/>
+                <a:latin typeface="Segoe UI"/>
+                <a:cs typeface="Segoe UI"/>
+                <a:ea typeface="Segoe UI"/>
               </a:rPr>
               <a:t>الباحثون استخدموا منهجاً واحداً فقط لدراسة الظاهرة.</a:t>
             </a:r>
@@ -24488,9 +24488,9 @@
                 <a:solidFill>
                   <a:srgbClr val="BE123C"/>
                 </a:solidFill>
-                <a:latin typeface="Sakkal Majalla"/>
-                <a:cs typeface="Sakkal Majalla"/>
-                <a:ea typeface="Sakkal Majalla"/>
+                <a:latin typeface="Segoe UI"/>
+                <a:cs typeface="Segoe UI"/>
+                <a:ea typeface="Segoe UI"/>
               </a:rPr>
               <a:t>من شرح الورشة:  </a:t>
             </a:r>
@@ -24499,9 +24499,9 @@
                 <a:solidFill>
                   <a:srgbClr val="221C57"/>
                 </a:solidFill>
-                <a:latin typeface="Sakkal Majalla"/>
-                <a:cs typeface="Sakkal Majalla"/>
-                <a:ea typeface="Sakkal Majalla"/>
+                <a:latin typeface="Segoe UI"/>
+                <a:cs typeface="Segoe UI"/>
+                <a:ea typeface="Segoe UI"/>
               </a:rPr>
               <a:t>تغيير المنهج — من كمي إلى نوعي أو مختلط — قد يكشف نتائج جديدة كلياً عن الظاهرة نفسها، ويضيف عمقاً لم تصل إليه الدراسات السابقة.</a:t>
             </a:r>
@@ -24558,9 +24558,9 @@
                 <a:solidFill>
                   <a:srgbClr val="BE123C"/>
                 </a:solidFill>
-                <a:latin typeface="Sakkal Majalla"/>
-                <a:cs typeface="Sakkal Majalla"/>
-                <a:ea typeface="Sakkal Majalla"/>
+                <a:latin typeface="Segoe UI"/>
+                <a:cs typeface="Segoe UI"/>
+                <a:ea typeface="Segoe UI"/>
               </a:rPr>
               <a:t>السؤال المفتاحي: ماذا لو بحثنا بطريقة أخرى؟</a:t>
             </a:r>
@@ -24723,9 +24723,9 @@
                 <a:solidFill>
                   <a:srgbClr val="FFFFFF"/>
                 </a:solidFill>
-                <a:latin typeface="Sakkal Majalla"/>
-                <a:cs typeface="Sakkal Majalla"/>
-                <a:ea typeface="Sakkal Majalla"/>
+                <a:latin typeface="Segoe UI"/>
+                <a:cs typeface="Segoe UI"/>
+                <a:ea typeface="Segoe UI"/>
               </a:rPr>
               <a:t>٦</a:t>
             </a:r>
@@ -24770,9 +24770,9 @@
                 <a:solidFill>
                   <a:srgbClr val="FFFFFF"/>
                 </a:solidFill>
-                <a:latin typeface="Sakkal Majalla"/>
-                <a:cs typeface="Sakkal Majalla"/>
-                <a:ea typeface="Sakkal Majalla"/>
+                <a:latin typeface="Segoe UI"/>
+                <a:cs typeface="Segoe UI"/>
+                <a:ea typeface="Segoe UI"/>
               </a:rPr>
               <a:t>فجوة الزمن</a:t>
             </a:r>
@@ -24817,9 +24817,9 @@
                 <a:solidFill>
                   <a:srgbClr val="FFFFFF"/>
                 </a:solidFill>
-                <a:latin typeface="Sakkal Majalla"/>
-                <a:cs typeface="Sakkal Majalla"/>
-                <a:ea typeface="Sakkal Majalla"/>
+                <a:latin typeface="Segoe UI"/>
+                <a:cs typeface="Segoe UI"/>
+                <a:ea typeface="Segoe UI"/>
               </a:rPr>
               <a:t>⏳  Temporal Gap</a:t>
             </a:r>
@@ -24864,9 +24864,9 @@
                 <a:solidFill>
                   <a:srgbClr val="047857"/>
                 </a:solidFill>
-                <a:latin typeface="Sakkal Majalla"/>
-                <a:cs typeface="Sakkal Majalla"/>
-                <a:ea typeface="Sakkal Majalla"/>
+                <a:latin typeface="Segoe UI"/>
+                <a:cs typeface="Segoe UI"/>
+                <a:ea typeface="Segoe UI"/>
               </a:rPr>
               <a:t>التعريف:  </a:t>
             </a:r>
@@ -24875,9 +24875,9 @@
                 <a:solidFill>
                   <a:srgbClr val="221C57"/>
                 </a:solidFill>
-                <a:latin typeface="Sakkal Majalla"/>
-                <a:cs typeface="Sakkal Majalla"/>
-                <a:ea typeface="Sakkal Majalla"/>
+                <a:latin typeface="Segoe UI"/>
+                <a:cs typeface="Segoe UI"/>
+                <a:ea typeface="Segoe UI"/>
               </a:rPr>
               <a:t>الدراسات المتاحة قديمة ولا تعكس الوضع الحالي.</a:t>
             </a:r>
@@ -24922,9 +24922,9 @@
                 <a:solidFill>
                   <a:srgbClr val="047857"/>
                 </a:solidFill>
-                <a:latin typeface="Sakkal Majalla"/>
-                <a:cs typeface="Sakkal Majalla"/>
-                <a:ea typeface="Sakkal Majalla"/>
+                <a:latin typeface="Segoe UI"/>
+                <a:cs typeface="Segoe UI"/>
+                <a:ea typeface="Segoe UI"/>
               </a:rPr>
               <a:t>من شرح الورشة:  </a:t>
             </a:r>
@@ -24933,9 +24933,9 @@
                 <a:solidFill>
                   <a:srgbClr val="221C57"/>
                 </a:solidFill>
-                <a:latin typeface="Sakkal Majalla"/>
-                <a:cs typeface="Sakkal Majalla"/>
-                <a:ea typeface="Sakkal Majalla"/>
+                <a:latin typeface="Segoe UI"/>
+                <a:cs typeface="Segoe UI"/>
+                <a:ea typeface="Segoe UI"/>
               </a:rPr>
               <a:t>بعد كل تحول كبير — كالجائحة أو ثورة الذكاء الاصطناعي — تصبح النتائج القديمة بحاجة إلى إعادة اختبار، فالواقع تغيّر والأرقام لم تعد تمثله.</a:t>
             </a:r>
@@ -24992,9 +24992,9 @@
                 <a:solidFill>
                   <a:srgbClr val="047857"/>
                 </a:solidFill>
-                <a:latin typeface="Sakkal Majalla"/>
-                <a:cs typeface="Sakkal Majalla"/>
-                <a:ea typeface="Sakkal Majalla"/>
+                <a:latin typeface="Segoe UI"/>
+                <a:cs typeface="Segoe UI"/>
+                <a:ea typeface="Segoe UI"/>
               </a:rPr>
               <a:t>السؤال المفتاحي: هل ما زالت النتائج صحيحة اليوم؟</a:t>
             </a:r>
@@ -25101,9 +25101,9 @@
                 <a:solidFill>
                   <a:srgbClr val="ECE9FA"/>
                 </a:solidFill>
-                <a:latin typeface="Sakkal Majalla"/>
-                <a:cs typeface="Sakkal Majalla"/>
-                <a:ea typeface="Sakkal Majalla"/>
+                <a:latin typeface="Segoe UI"/>
+                <a:cs typeface="Segoe UI"/>
+                <a:ea typeface="Segoe UI"/>
               </a:rPr>
               <a:t>07</a:t>
             </a:r>
@@ -25172,9 +25172,9 @@
                 <a:solidFill>
                   <a:srgbClr val="FFFFFF"/>
                 </a:solidFill>
-                <a:latin typeface="Sakkal Majalla"/>
-                <a:cs typeface="Sakkal Majalla"/>
-                <a:ea typeface="Sakkal Majalla"/>
+                <a:latin typeface="Segoe UI"/>
+                <a:cs typeface="Segoe UI"/>
+                <a:ea typeface="Segoe UI"/>
               </a:rPr>
               <a:t>📚</a:t>
             </a:r>
@@ -25219,9 +25219,9 @@
                 <a:solidFill>
                   <a:srgbClr val="6D28D9"/>
                 </a:solidFill>
-                <a:latin typeface="Sakkal Majalla"/>
-                <a:cs typeface="Sakkal Majalla"/>
-                <a:ea typeface="Sakkal Majalla"/>
+                <a:latin typeface="Segoe UI"/>
+                <a:cs typeface="Segoe UI"/>
+                <a:ea typeface="Segoe UI"/>
               </a:rPr>
               <a:t>PRACTICAL EXAMPLES</a:t>
             </a:r>
@@ -25266,9 +25266,9 @@
                 <a:solidFill>
                   <a:srgbClr val="221C57"/>
                 </a:solidFill>
-                <a:latin typeface="Sakkal Majalla"/>
-                <a:cs typeface="Sakkal Majalla"/>
-                <a:ea typeface="Sakkal Majalla"/>
+                <a:latin typeface="Segoe UI"/>
+                <a:cs typeface="Segoe UI"/>
+                <a:ea typeface="Segoe UI"/>
               </a:rPr>
               <a:t>أمثلة عملية على الفجوات</a:t>
             </a:r>
@@ -25437,9 +25437,9 @@
                 <a:solidFill>
                   <a:srgbClr val="FFFFFF"/>
                 </a:solidFill>
-                <a:latin typeface="Sakkal Majalla"/>
-                <a:cs typeface="Sakkal Majalla"/>
-                <a:ea typeface="Sakkal Majalla"/>
+                <a:latin typeface="Segoe UI"/>
+                <a:cs typeface="Segoe UI"/>
+                <a:ea typeface="Segoe UI"/>
               </a:rPr>
               <a:t>07</a:t>
             </a:r>
@@ -25484,9 +25484,9 @@
                 <a:solidFill>
                   <a:srgbClr val="6E6A8F"/>
                 </a:solidFill>
-                <a:latin typeface="Sakkal Majalla"/>
-                <a:cs typeface="Sakkal Majalla"/>
-                <a:ea typeface="Sakkal Majalla"/>
+                <a:latin typeface="Segoe UI"/>
+                <a:cs typeface="Segoe UI"/>
+                <a:ea typeface="Segoe UI"/>
               </a:rPr>
               <a:t>الفجوات البحثية  •  د. هناء حسين الأهيمر</a:t>
             </a:r>
@@ -25603,9 +25603,9 @@
                 <a:solidFill>
                   <a:srgbClr val="FFFFFF"/>
                 </a:solidFill>
-                <a:latin typeface="Sakkal Majalla"/>
-                <a:cs typeface="Sakkal Majalla"/>
-                <a:ea typeface="Sakkal Majalla"/>
+                <a:latin typeface="Segoe UI"/>
+                <a:cs typeface="Segoe UI"/>
+                <a:ea typeface="Segoe UI"/>
               </a:rPr>
               <a:t>معرفة</a:t>
             </a:r>
@@ -25650,9 +25650,9 @@
                 <a:solidFill>
                   <a:srgbClr val="221C57"/>
                 </a:solidFill>
-                <a:latin typeface="Sakkal Majalla"/>
-                <a:cs typeface="Sakkal Majalla"/>
-                <a:ea typeface="Sakkal Majalla"/>
+                <a:latin typeface="Segoe UI"/>
+                <a:cs typeface="Segoe UI"/>
+                <a:ea typeface="Segoe UI"/>
               </a:rPr>
               <a:t>تأثير الذكاء الاصطناعي على القرارات الأخلاقية في القطاع الصحي العربي لم تتم دراسته بشكل كافٍ</a:t>
             </a:r>
@@ -25697,9 +25697,9 @@
                 <a:solidFill>
                   <a:srgbClr val="A21CAF"/>
                 </a:solidFill>
-                <a:latin typeface="Sakkal Majalla"/>
-                <a:cs typeface="Sakkal Majalla"/>
-                <a:ea typeface="Sakkal Majalla"/>
+                <a:latin typeface="Segoe UI"/>
+                <a:cs typeface="Segoe UI"/>
+                <a:ea typeface="Segoe UI"/>
               </a:rPr>
               <a:t>لماذا هي فجوة؟  </a:t>
             </a:r>
@@ -25708,9 +25708,9 @@
                 <a:solidFill>
                   <a:srgbClr val="6E6A8F"/>
                 </a:solidFill>
-                <a:latin typeface="Sakkal Majalla"/>
-                <a:cs typeface="Sakkal Majalla"/>
-                <a:ea typeface="Sakkal Majalla"/>
+                <a:latin typeface="Segoe UI"/>
+                <a:cs typeface="Segoe UI"/>
+                <a:ea typeface="Segoe UI"/>
               </a:rPr>
               <a:t>موضوع حديث وحسّاس بلا دراسات كافية — إضافة صافية للمعرفة</a:t>
             </a:r>
@@ -25827,9 +25827,9 @@
                 <a:solidFill>
                   <a:srgbClr val="FFFFFF"/>
                 </a:solidFill>
-                <a:latin typeface="Sakkal Majalla"/>
-                <a:cs typeface="Sakkal Majalla"/>
-                <a:ea typeface="Sakkal Majalla"/>
+                <a:latin typeface="Segoe UI"/>
+                <a:cs typeface="Segoe UI"/>
+                <a:ea typeface="Segoe UI"/>
               </a:rPr>
               <a:t>ممارسة</a:t>
             </a:r>
@@ -25874,9 +25874,9 @@
                 <a:solidFill>
                   <a:srgbClr val="221C57"/>
                 </a:solidFill>
-                <a:latin typeface="Sakkal Majalla"/>
-                <a:cs typeface="Sakkal Majalla"/>
-                <a:ea typeface="Sakkal Majalla"/>
+                <a:latin typeface="Segoe UI"/>
+                <a:cs typeface="Segoe UI"/>
+                <a:ea typeface="Segoe UI"/>
               </a:rPr>
               <a:t>البروتوكولات الطبية الدولية موجودة وموثقة، لكن التطبيق الواقعي في المستشفيات مختلف تماماً</a:t>
             </a:r>
@@ -25921,9 +25921,9 @@
                 <a:solidFill>
                   <a:srgbClr val="D97706"/>
                 </a:solidFill>
-                <a:latin typeface="Sakkal Majalla"/>
-                <a:cs typeface="Sakkal Majalla"/>
-                <a:ea typeface="Sakkal Majalla"/>
+                <a:latin typeface="Segoe UI"/>
+                <a:cs typeface="Segoe UI"/>
+                <a:ea typeface="Segoe UI"/>
               </a:rPr>
               <a:t>لماذا هي فجوة؟  </a:t>
             </a:r>
@@ -25932,9 +25932,9 @@
                 <a:solidFill>
                   <a:srgbClr val="6E6A8F"/>
                 </a:solidFill>
-                <a:latin typeface="Sakkal Majalla"/>
-                <a:cs typeface="Sakkal Majalla"/>
-                <a:ea typeface="Sakkal Majalla"/>
+                <a:latin typeface="Segoe UI"/>
+                <a:cs typeface="Segoe UI"/>
+                <a:ea typeface="Segoe UI"/>
               </a:rPr>
               <a:t>المعرفة متوفرة والتطبيق غائب — البحث يدرس لماذا وكيف نصلحه</a:t>
             </a:r>
@@ -26051,9 +26051,9 @@
                 <a:solidFill>
                   <a:srgbClr val="FFFFFF"/>
                 </a:solidFill>
-                <a:latin typeface="Sakkal Majalla"/>
-                <a:cs typeface="Sakkal Majalla"/>
-                <a:ea typeface="Sakkal Majalla"/>
+                <a:latin typeface="Segoe UI"/>
+                <a:cs typeface="Segoe UI"/>
+                <a:ea typeface="Segoe UI"/>
               </a:rPr>
               <a:t>أدلة</a:t>
             </a:r>
@@ -26098,9 +26098,9 @@
                 <a:solidFill>
                   <a:srgbClr val="221C57"/>
                 </a:solidFill>
-                <a:latin typeface="Sakkal Majalla"/>
-                <a:cs typeface="Sakkal Majalla"/>
-                <a:ea typeface="Sakkal Majalla"/>
+                <a:latin typeface="Segoe UI"/>
+                <a:cs typeface="Segoe UI"/>
+                <a:ea typeface="Segoe UI"/>
               </a:rPr>
               <a:t>توصيات كثيرة بدمج التعلم المصغّر في التدريب، دون تجارب مضبوطة تثبت فاعليته</a:t>
             </a:r>
@@ -26145,9 +26145,9 @@
                 <a:solidFill>
                   <a:srgbClr val="0D9488"/>
                 </a:solidFill>
-                <a:latin typeface="Sakkal Majalla"/>
-                <a:cs typeface="Sakkal Majalla"/>
-                <a:ea typeface="Sakkal Majalla"/>
+                <a:latin typeface="Segoe UI"/>
+                <a:cs typeface="Segoe UI"/>
+                <a:ea typeface="Segoe UI"/>
               </a:rPr>
               <a:t>لماذا هي فجوة؟  </a:t>
             </a:r>
@@ -26156,9 +26156,9 @@
                 <a:solidFill>
                   <a:srgbClr val="6E6A8F"/>
                 </a:solidFill>
-                <a:latin typeface="Sakkal Majalla"/>
-                <a:cs typeface="Sakkal Majalla"/>
-                <a:ea typeface="Sakkal Majalla"/>
+                <a:latin typeface="Segoe UI"/>
+                <a:cs typeface="Segoe UI"/>
+                <a:ea typeface="Segoe UI"/>
               </a:rPr>
               <a:t>ادعاء شائع ينقصه الدليل التجريبي — بحثك يبني هذا الدليل</a:t>
             </a:r>
@@ -26275,9 +26275,9 @@
                 <a:solidFill>
                   <a:srgbClr val="FFFFFF"/>
                 </a:solidFill>
-                <a:latin typeface="Sakkal Majalla"/>
-                <a:cs typeface="Sakkal Majalla"/>
-                <a:ea typeface="Sakkal Majalla"/>
+                <a:latin typeface="Segoe UI"/>
+                <a:cs typeface="Segoe UI"/>
+                <a:ea typeface="Segoe UI"/>
               </a:rPr>
               <a:t>سكان</a:t>
             </a:r>
@@ -26322,9 +26322,9 @@
                 <a:solidFill>
                   <a:srgbClr val="221C57"/>
                 </a:solidFill>
-                <a:latin typeface="Sakkal Majalla"/>
-                <a:cs typeface="Sakkal Majalla"/>
-                <a:ea typeface="Sakkal Majalla"/>
+                <a:latin typeface="Segoe UI"/>
+                <a:cs typeface="Segoe UI"/>
+                <a:ea typeface="Segoe UI"/>
               </a:rPr>
               <a:t>معظم دراسات القلق الاجتماعي أُجريت على طلاب غربيين، والشباب العربي ما زال ناقصاً في الدراسات</a:t>
             </a:r>
@@ -26369,9 +26369,9 @@
                 <a:solidFill>
                   <a:srgbClr val="6D28D9"/>
                 </a:solidFill>
-                <a:latin typeface="Sakkal Majalla"/>
-                <a:cs typeface="Sakkal Majalla"/>
-                <a:ea typeface="Sakkal Majalla"/>
+                <a:latin typeface="Segoe UI"/>
+                <a:cs typeface="Segoe UI"/>
+                <a:ea typeface="Segoe UI"/>
               </a:rPr>
               <a:t>لماذا هي فجوة؟  </a:t>
             </a:r>
@@ -26380,9 +26380,9 @@
                 <a:solidFill>
                   <a:srgbClr val="6E6A8F"/>
                 </a:solidFill>
-                <a:latin typeface="Sakkal Majalla"/>
-                <a:cs typeface="Sakkal Majalla"/>
-                <a:ea typeface="Sakkal Majalla"/>
+                <a:latin typeface="Segoe UI"/>
+                <a:cs typeface="Segoe UI"/>
+                <a:ea typeface="Segoe UI"/>
               </a:rPr>
               <a:t>العينة لا تمثل مجتمعك — إعادة الدراسة محلياً تسد الفجوة</a:t>
             </a:r>
@@ -26499,9 +26499,9 @@
                 <a:solidFill>
                   <a:srgbClr val="FFFFFF"/>
                 </a:solidFill>
-                <a:latin typeface="Sakkal Majalla"/>
-                <a:cs typeface="Sakkal Majalla"/>
-                <a:ea typeface="Sakkal Majalla"/>
+                <a:latin typeface="Segoe UI"/>
+                <a:cs typeface="Segoe UI"/>
+                <a:ea typeface="Segoe UI"/>
               </a:rPr>
               <a:t>منهجية</a:t>
             </a:r>
@@ -26546,9 +26546,9 @@
                 <a:solidFill>
                   <a:srgbClr val="221C57"/>
                 </a:solidFill>
-                <a:latin typeface="Sakkal Majalla"/>
-                <a:cs typeface="Sakkal Majalla"/>
-                <a:ea typeface="Sakkal Majalla"/>
+                <a:latin typeface="Segoe UI"/>
+                <a:cs typeface="Segoe UI"/>
+                <a:ea typeface="Segoe UI"/>
               </a:rPr>
               <a:t>كل الدراسات استخدمت المنهج الكمي فقط، بينما المنهج النوعي يمكن أن يعطي تفاصيل أعمق</a:t>
             </a:r>
@@ -26593,9 +26593,9 @@
                 <a:solidFill>
                   <a:srgbClr val="BE123C"/>
                 </a:solidFill>
-                <a:latin typeface="Sakkal Majalla"/>
-                <a:cs typeface="Sakkal Majalla"/>
-                <a:ea typeface="Sakkal Majalla"/>
+                <a:latin typeface="Segoe UI"/>
+                <a:cs typeface="Segoe UI"/>
+                <a:ea typeface="Segoe UI"/>
               </a:rPr>
               <a:t>لماذا هي فجوة؟  </a:t>
             </a:r>
@@ -26604,9 +26604,9 @@
                 <a:solidFill>
                   <a:srgbClr val="6E6A8F"/>
                 </a:solidFill>
-                <a:latin typeface="Sakkal Majalla"/>
-                <a:cs typeface="Sakkal Majalla"/>
-                <a:ea typeface="Sakkal Majalla"/>
+                <a:latin typeface="Segoe UI"/>
+                <a:cs typeface="Segoe UI"/>
+                <a:ea typeface="Segoe UI"/>
               </a:rPr>
               <a:t>تغيير أسلوب البحث يفتح نافذة جديدة على الظاهرة نفسها</a:t>
             </a:r>
@@ -26723,9 +26723,9 @@
                 <a:solidFill>
                   <a:srgbClr val="FFFFFF"/>
                 </a:solidFill>
-                <a:latin typeface="Sakkal Majalla"/>
-                <a:cs typeface="Sakkal Majalla"/>
-                <a:ea typeface="Sakkal Majalla"/>
+                <a:latin typeface="Segoe UI"/>
+                <a:cs typeface="Segoe UI"/>
+                <a:ea typeface="Segoe UI"/>
               </a:rPr>
               <a:t>زمنية</a:t>
             </a:r>
@@ -26770,9 +26770,9 @@
                 <a:solidFill>
                   <a:srgbClr val="221C57"/>
                 </a:solidFill>
-                <a:latin typeface="Sakkal Majalla"/>
-                <a:cs typeface="Sakkal Majalla"/>
-                <a:ea typeface="Sakkal Majalla"/>
+                <a:latin typeface="Segoe UI"/>
+                <a:cs typeface="Segoe UI"/>
+                <a:ea typeface="Segoe UI"/>
               </a:rPr>
               <a:t>الدراسات القديمة قبل 2020 لا تعكس التغيرات التي حدثت بعد الجائحة</a:t>
             </a:r>
@@ -26817,9 +26817,9 @@
                 <a:solidFill>
                   <a:srgbClr val="047857"/>
                 </a:solidFill>
-                <a:latin typeface="Sakkal Majalla"/>
-                <a:cs typeface="Sakkal Majalla"/>
-                <a:ea typeface="Sakkal Majalla"/>
+                <a:latin typeface="Segoe UI"/>
+                <a:cs typeface="Segoe UI"/>
+                <a:ea typeface="Segoe UI"/>
               </a:rPr>
               <a:t>لماذا هي فجوة؟  </a:t>
             </a:r>
@@ -26828,9 +26828,9 @@
                 <a:solidFill>
                   <a:srgbClr val="6E6A8F"/>
                 </a:solidFill>
-                <a:latin typeface="Sakkal Majalla"/>
-                <a:cs typeface="Sakkal Majalla"/>
-                <a:ea typeface="Sakkal Majalla"/>
+                <a:latin typeface="Segoe UI"/>
+                <a:cs typeface="Segoe UI"/>
+                <a:ea typeface="Segoe UI"/>
               </a:rPr>
               <a:t>الواقع تغيّر جذرياً والأرقام القديمة لم تعد تمثله</a:t>
             </a:r>
@@ -26937,9 +26937,9 @@
                 <a:solidFill>
                   <a:srgbClr val="ECE9FA"/>
                 </a:solidFill>
-                <a:latin typeface="Sakkal Majalla"/>
-                <a:cs typeface="Sakkal Majalla"/>
-                <a:ea typeface="Sakkal Majalla"/>
+                <a:latin typeface="Segoe UI"/>
+                <a:cs typeface="Segoe UI"/>
+                <a:ea typeface="Segoe UI"/>
               </a:rPr>
               <a:t>08</a:t>
             </a:r>
@@ -27008,9 +27008,9 @@
                 <a:solidFill>
                   <a:srgbClr val="FFFFFF"/>
                 </a:solidFill>
-                <a:latin typeface="Sakkal Majalla"/>
-                <a:cs typeface="Sakkal Majalla"/>
-                <a:ea typeface="Sakkal Majalla"/>
+                <a:latin typeface="Segoe UI"/>
+                <a:cs typeface="Segoe UI"/>
+                <a:ea typeface="Segoe UI"/>
               </a:rPr>
               <a:t>🤖</a:t>
             </a:r>
@@ -27055,9 +27055,9 @@
                 <a:solidFill>
                   <a:srgbClr val="BE123C"/>
                 </a:solidFill>
-                <a:latin typeface="Sakkal Majalla"/>
-                <a:cs typeface="Sakkal Majalla"/>
-                <a:ea typeface="Sakkal Majalla"/>
+                <a:latin typeface="Segoe UI"/>
+                <a:cs typeface="Segoe UI"/>
+                <a:ea typeface="Segoe UI"/>
               </a:rPr>
               <a:t>AI TOOLS FOR GAP DISCOVERY</a:t>
             </a:r>
@@ -27102,9 +27102,9 @@
                 <a:solidFill>
                   <a:srgbClr val="221C57"/>
                 </a:solidFill>
-                <a:latin typeface="Sakkal Majalla"/>
-                <a:cs typeface="Sakkal Majalla"/>
-                <a:ea typeface="Sakkal Majalla"/>
+                <a:latin typeface="Segoe UI"/>
+                <a:cs typeface="Segoe UI"/>
+                <a:ea typeface="Segoe UI"/>
               </a:rPr>
               <a:t>أدوات الذكاء الاصطناعي الثمانية</a:t>
             </a:r>
@@ -27273,9 +27273,9 @@
                 <a:solidFill>
                   <a:srgbClr val="FFFFFF"/>
                 </a:solidFill>
-                <a:latin typeface="Sakkal Majalla"/>
-                <a:cs typeface="Sakkal Majalla"/>
-                <a:ea typeface="Sakkal Majalla"/>
+                <a:latin typeface="Segoe UI"/>
+                <a:cs typeface="Segoe UI"/>
+                <a:ea typeface="Segoe UI"/>
               </a:rPr>
               <a:t>08</a:t>
             </a:r>
@@ -27320,9 +27320,9 @@
                 <a:solidFill>
                   <a:srgbClr val="6E6A8F"/>
                 </a:solidFill>
-                <a:latin typeface="Sakkal Majalla"/>
-                <a:cs typeface="Sakkal Majalla"/>
-                <a:ea typeface="Sakkal Majalla"/>
+                <a:latin typeface="Segoe UI"/>
+                <a:cs typeface="Segoe UI"/>
+                <a:ea typeface="Segoe UI"/>
               </a:rPr>
               <a:t>الفجوات البحثية  •  د. هناء حسين الأهيمر</a:t>
             </a:r>
@@ -27443,9 +27443,9 @@
                 <a:solidFill>
                   <a:srgbClr val="FFFFFF"/>
                 </a:solidFill>
-                <a:latin typeface="Sakkal Majalla"/>
-                <a:cs typeface="Sakkal Majalla"/>
-                <a:ea typeface="Sakkal Majalla"/>
+                <a:latin typeface="Segoe UI"/>
+                <a:cs typeface="Segoe UI"/>
+                <a:ea typeface="Segoe UI"/>
               </a:rPr>
               <a:t>🔍</a:t>
             </a:r>
@@ -27490,9 +27490,9 @@
                 <a:solidFill>
                   <a:srgbClr val="A21CAF"/>
                 </a:solidFill>
-                <a:latin typeface="Sakkal Majalla"/>
-                <a:cs typeface="Sakkal Majalla"/>
-                <a:ea typeface="Sakkal Majalla"/>
+                <a:latin typeface="Segoe UI"/>
+                <a:cs typeface="Segoe UI"/>
+                <a:ea typeface="Segoe UI"/>
               </a:rPr>
               <a:t>Elicit</a:t>
             </a:r>
@@ -27537,9 +27537,9 @@
                 <a:solidFill>
                   <a:srgbClr val="221C57"/>
                 </a:solidFill>
-                <a:latin typeface="Sakkal Majalla"/>
-                <a:cs typeface="Sakkal Majalla"/>
-                <a:ea typeface="Sakkal Majalla"/>
+                <a:latin typeface="Segoe UI"/>
+                <a:cs typeface="Segoe UI"/>
+                <a:ea typeface="Segoe UI"/>
               </a:rPr>
               <a:t>يلخّص الدراسات ويستخرج النتائج بسؤال مباشر بلغة طبيعية</a:t>
             </a:r>
@@ -27660,9 +27660,9 @@
                 <a:solidFill>
                   <a:srgbClr val="FFFFFF"/>
                 </a:solidFill>
-                <a:latin typeface="Sakkal Majalla"/>
-                <a:cs typeface="Sakkal Majalla"/>
-                <a:ea typeface="Sakkal Majalla"/>
+                <a:latin typeface="Segoe UI"/>
+                <a:cs typeface="Segoe UI"/>
+                <a:ea typeface="Segoe UI"/>
               </a:rPr>
               <a:t>🤝</a:t>
             </a:r>
@@ -27707,9 +27707,9 @@
                 <a:solidFill>
                   <a:srgbClr val="0D9488"/>
                 </a:solidFill>
-                <a:latin typeface="Sakkal Majalla"/>
-                <a:cs typeface="Sakkal Majalla"/>
-                <a:ea typeface="Sakkal Majalla"/>
+                <a:latin typeface="Segoe UI"/>
+                <a:cs typeface="Segoe UI"/>
+                <a:ea typeface="Segoe UI"/>
               </a:rPr>
               <a:t>Consensus</a:t>
             </a:r>
@@ -27754,9 +27754,9 @@
                 <a:solidFill>
                   <a:srgbClr val="221C57"/>
                 </a:solidFill>
-                <a:latin typeface="Sakkal Majalla"/>
-                <a:cs typeface="Sakkal Majalla"/>
-                <a:ea typeface="Sakkal Majalla"/>
+                <a:latin typeface="Segoe UI"/>
+                <a:cs typeface="Segoe UI"/>
+                <a:ea typeface="Segoe UI"/>
               </a:rPr>
               <a:t>يعطيك إجماع الأبحاث حول سؤال علمي معيّن واتجاه الأدلة</a:t>
             </a:r>
@@ -27877,9 +27877,9 @@
                 <a:solidFill>
                   <a:srgbClr val="FFFFFF"/>
                 </a:solidFill>
-                <a:latin typeface="Sakkal Majalla"/>
-                <a:cs typeface="Sakkal Majalla"/>
-                <a:ea typeface="Sakkal Majalla"/>
+                <a:latin typeface="Segoe UI"/>
+                <a:cs typeface="Segoe UI"/>
+                <a:ea typeface="Segoe UI"/>
               </a:rPr>
               <a:t>🐇</a:t>
             </a:r>
@@ -27924,9 +27924,9 @@
                 <a:solidFill>
                   <a:srgbClr val="D97706"/>
                 </a:solidFill>
-                <a:latin typeface="Sakkal Majalla"/>
-                <a:cs typeface="Sakkal Majalla"/>
-                <a:ea typeface="Sakkal Majalla"/>
+                <a:latin typeface="Segoe UI"/>
+                <a:cs typeface="Segoe UI"/>
+                <a:ea typeface="Segoe UI"/>
               </a:rPr>
               <a:t>Research Rabbit</a:t>
             </a:r>
@@ -27971,9 +27971,9 @@
                 <a:solidFill>
                   <a:srgbClr val="221C57"/>
                 </a:solidFill>
-                <a:latin typeface="Sakkal Majalla"/>
-                <a:cs typeface="Sakkal Majalla"/>
-                <a:ea typeface="Sakkal Majalla"/>
+                <a:latin typeface="Segoe UI"/>
+                <a:cs typeface="Segoe UI"/>
+                <a:ea typeface="Segoe UI"/>
               </a:rPr>
               <a:t>يرسم خريطة للعلاقات بين الأبحاث — الأقوى بحسب الورشة</a:t>
             </a:r>
@@ -28042,9 +28042,9 @@
                 <a:solidFill>
                   <a:srgbClr val="FFFFFF"/>
                 </a:solidFill>
-                <a:latin typeface="Sakkal Majalla"/>
-                <a:cs typeface="Sakkal Majalla"/>
-                <a:ea typeface="Sakkal Majalla"/>
+                <a:latin typeface="Segoe UI"/>
+                <a:cs typeface="Segoe UI"/>
+                <a:ea typeface="Segoe UI"/>
               </a:rPr>
               <a:t>⭐ الأقوى</a:t>
             </a:r>
@@ -28165,9 +28165,9 @@
                 <a:solidFill>
                   <a:srgbClr val="FFFFFF"/>
                 </a:solidFill>
-                <a:latin typeface="Sakkal Majalla"/>
-                <a:cs typeface="Sakkal Majalla"/>
-                <a:ea typeface="Sakkal Majalla"/>
+                <a:latin typeface="Segoe UI"/>
+                <a:cs typeface="Segoe UI"/>
+                <a:ea typeface="Segoe UI"/>
               </a:rPr>
               <a:t>🕸</a:t>
             </a:r>
@@ -28212,9 +28212,9 @@
                 <a:solidFill>
                   <a:srgbClr val="6D28D9"/>
                 </a:solidFill>
-                <a:latin typeface="Sakkal Majalla"/>
-                <a:cs typeface="Sakkal Majalla"/>
-                <a:ea typeface="Sakkal Majalla"/>
+                <a:latin typeface="Segoe UI"/>
+                <a:cs typeface="Segoe UI"/>
+                <a:ea typeface="Segoe UI"/>
               </a:rPr>
               <a:t>Connected Papers</a:t>
             </a:r>
@@ -28259,9 +28259,9 @@
                 <a:solidFill>
                   <a:srgbClr val="221C57"/>
                 </a:solidFill>
-                <a:latin typeface="Sakkal Majalla"/>
-                <a:cs typeface="Sakkal Majalla"/>
-                <a:ea typeface="Sakkal Majalla"/>
+                <a:latin typeface="Segoe UI"/>
+                <a:cs typeface="Segoe UI"/>
+                <a:ea typeface="Segoe UI"/>
               </a:rPr>
               <a:t>يوضح الدراسات المرتبطة ببحثك في شبكة بصرية واحدة</a:t>
             </a:r>
@@ -28382,9 +28382,9 @@
                 <a:solidFill>
                   <a:srgbClr val="FFFFFF"/>
                 </a:solidFill>
-                <a:latin typeface="Sakkal Majalla"/>
-                <a:cs typeface="Sakkal Majalla"/>
-                <a:ea typeface="Sakkal Majalla"/>
+                <a:latin typeface="Segoe UI"/>
+                <a:cs typeface="Segoe UI"/>
+                <a:ea typeface="Segoe UI"/>
               </a:rPr>
               <a:t>📊</a:t>
             </a:r>
@@ -28429,9 +28429,9 @@
                 <a:solidFill>
                   <a:srgbClr val="BE123C"/>
                 </a:solidFill>
-                <a:latin typeface="Sakkal Majalla"/>
-                <a:cs typeface="Sakkal Majalla"/>
-                <a:ea typeface="Sakkal Majalla"/>
+                <a:latin typeface="Segoe UI"/>
+                <a:cs typeface="Segoe UI"/>
+                <a:ea typeface="Segoe UI"/>
               </a:rPr>
               <a:t>Scite.ai</a:t>
             </a:r>
@@ -28476,9 +28476,9 @@
                 <a:solidFill>
                   <a:srgbClr val="221C57"/>
                 </a:solidFill>
-                <a:latin typeface="Sakkal Majalla"/>
-                <a:cs typeface="Sakkal Majalla"/>
-                <a:ea typeface="Sakkal Majalla"/>
+                <a:latin typeface="Segoe UI"/>
+                <a:cs typeface="Segoe UI"/>
+                <a:ea typeface="Segoe UI"/>
               </a:rPr>
               <a:t>يقيّم قوة المراجع ويميز الاقتباسات الداعمة من المعارضة</a:t>
             </a:r>
@@ -28599,9 +28599,9 @@
                 <a:solidFill>
                   <a:srgbClr val="FFFFFF"/>
                 </a:solidFill>
-                <a:latin typeface="Sakkal Majalla"/>
-                <a:cs typeface="Sakkal Majalla"/>
-                <a:ea typeface="Sakkal Majalla"/>
+                <a:latin typeface="Segoe UI"/>
+                <a:cs typeface="Segoe UI"/>
+                <a:ea typeface="Segoe UI"/>
               </a:rPr>
               <a:t>🧠</a:t>
             </a:r>
@@ -28646,9 +28646,9 @@
                 <a:solidFill>
                   <a:srgbClr val="047857"/>
                 </a:solidFill>
-                <a:latin typeface="Sakkal Majalla"/>
-                <a:cs typeface="Sakkal Majalla"/>
-                <a:ea typeface="Sakkal Majalla"/>
+                <a:latin typeface="Segoe UI"/>
+                <a:cs typeface="Segoe UI"/>
+                <a:ea typeface="Segoe UI"/>
               </a:rPr>
               <a:t>Semantic Scholar</a:t>
             </a:r>
@@ -28693,9 +28693,9 @@
                 <a:solidFill>
                   <a:srgbClr val="221C57"/>
                 </a:solidFill>
-                <a:latin typeface="Sakkal Majalla"/>
-                <a:cs typeface="Sakkal Majalla"/>
-                <a:ea typeface="Sakkal Majalla"/>
+                <a:latin typeface="Segoe UI"/>
+                <a:cs typeface="Segoe UI"/>
+                <a:ea typeface="Segoe UI"/>
               </a:rPr>
               <a:t>محرك بحث أكاديمي دلالي يفهم المعنى لا الكلمات فقط</a:t>
             </a:r>
@@ -28816,9 +28816,9 @@
                 <a:solidFill>
                   <a:srgbClr val="FFFFFF"/>
                 </a:solidFill>
-                <a:latin typeface="Sakkal Majalla"/>
-                <a:cs typeface="Sakkal Majalla"/>
-                <a:ea typeface="Sakkal Majalla"/>
+                <a:latin typeface="Segoe UI"/>
+                <a:cs typeface="Segoe UI"/>
+                <a:ea typeface="Segoe UI"/>
               </a:rPr>
               <a:t>⭐</a:t>
             </a:r>
@@ -28863,9 +28863,9 @@
                 <a:solidFill>
                   <a:srgbClr val="17123B"/>
                 </a:solidFill>
-                <a:latin typeface="Sakkal Majalla"/>
-                <a:cs typeface="Sakkal Majalla"/>
-                <a:ea typeface="Sakkal Majalla"/>
+                <a:latin typeface="Segoe UI"/>
+                <a:cs typeface="Segoe UI"/>
+                <a:ea typeface="Segoe UI"/>
               </a:rPr>
               <a:t>Claude</a:t>
             </a:r>
@@ -28910,9 +28910,9 @@
                 <a:solidFill>
                   <a:srgbClr val="221C57"/>
                 </a:solidFill>
-                <a:latin typeface="Sakkal Majalla"/>
-                <a:cs typeface="Sakkal Majalla"/>
-                <a:ea typeface="Sakkal Majalla"/>
+                <a:latin typeface="Segoe UI"/>
+                <a:cs typeface="Segoe UI"/>
+                <a:ea typeface="Segoe UI"/>
               </a:rPr>
               <a:t>يحلل الأدبيات بعمق ويقترح فجوات عبر حوار نقدي متدرج</a:t>
             </a:r>
@@ -29033,9 +29033,9 @@
                 <a:solidFill>
                   <a:srgbClr val="FFFFFF"/>
                 </a:solidFill>
-                <a:latin typeface="Sakkal Majalla"/>
-                <a:cs typeface="Sakkal Majalla"/>
-                <a:ea typeface="Sakkal Majalla"/>
+                <a:latin typeface="Segoe UI"/>
+                <a:cs typeface="Segoe UI"/>
+                <a:ea typeface="Segoe UI"/>
               </a:rPr>
               <a:t>💬</a:t>
             </a:r>
@@ -29080,9 +29080,9 @@
                 <a:solidFill>
                   <a:srgbClr val="1D4ED8"/>
                 </a:solidFill>
-                <a:latin typeface="Sakkal Majalla"/>
-                <a:cs typeface="Sakkal Majalla"/>
-                <a:ea typeface="Sakkal Majalla"/>
+                <a:latin typeface="Segoe UI"/>
+                <a:cs typeface="Segoe UI"/>
+                <a:ea typeface="Segoe UI"/>
               </a:rPr>
               <a:t>ChatGPT</a:t>
             </a:r>
@@ -29127,9 +29127,9 @@
                 <a:solidFill>
                   <a:srgbClr val="221C57"/>
                 </a:solidFill>
-                <a:latin typeface="Sakkal Majalla"/>
-                <a:cs typeface="Sakkal Majalla"/>
-                <a:ea typeface="Sakkal Majalla"/>
+                <a:latin typeface="Segoe UI"/>
+                <a:cs typeface="Segoe UI"/>
+                <a:ea typeface="Segoe UI"/>
               </a:rPr>
               <a:t>يساعد في الفهم العام وصياغة أسئلة البحث الأولية</a:t>
             </a:r>
@@ -29234,9 +29234,9 @@
                 <a:solidFill>
                   <a:srgbClr val="FBBF24"/>
                 </a:solidFill>
-                <a:latin typeface="Sakkal Majalla"/>
-                <a:cs typeface="Sakkal Majalla"/>
-                <a:ea typeface="Sakkal Majalla"/>
+                <a:latin typeface="Segoe UI"/>
+                <a:cs typeface="Segoe UI"/>
+                <a:ea typeface="Segoe UI"/>
               </a:rPr>
               <a:t>💡 من الشرح: </a:t>
             </a:r>
@@ -29245,9 +29245,9 @@
                 <a:solidFill>
                   <a:srgbClr val="FFFFFF"/>
                 </a:solidFill>
-                <a:latin typeface="Sakkal Majalla"/>
-                <a:cs typeface="Sakkal Majalla"/>
-                <a:ea typeface="Sakkal Majalla"/>
+                <a:latin typeface="Segoe UI"/>
+                <a:cs typeface="Segoe UI"/>
+                <a:ea typeface="Segoe UI"/>
               </a:rPr>
               <a:t>الأدوات كثيرة، لكن الأقوى هو Research Rabbit لأنه يرسم خريطة واضحة للعلاقات بين الأبحاث — وسير العمل معه في الشريحة التالية</a:t>
             </a:r>
@@ -29354,9 +29354,9 @@
                 <a:solidFill>
                   <a:srgbClr val="ECE9FA"/>
                 </a:solidFill>
-                <a:latin typeface="Sakkal Majalla"/>
-                <a:cs typeface="Sakkal Majalla"/>
-                <a:ea typeface="Sakkal Majalla"/>
+                <a:latin typeface="Segoe UI"/>
+                <a:cs typeface="Segoe UI"/>
+                <a:ea typeface="Segoe UI"/>
               </a:rPr>
               <a:t>09</a:t>
             </a:r>
@@ -29425,9 +29425,9 @@
                 <a:solidFill>
                   <a:srgbClr val="FFFFFF"/>
                 </a:solidFill>
-                <a:latin typeface="Sakkal Majalla"/>
-                <a:cs typeface="Sakkal Majalla"/>
-                <a:ea typeface="Sakkal Majalla"/>
+                <a:latin typeface="Segoe UI"/>
+                <a:cs typeface="Segoe UI"/>
+                <a:ea typeface="Segoe UI"/>
               </a:rPr>
               <a:t>🐇</a:t>
             </a:r>
@@ -29472,9 +29472,9 @@
                 <a:solidFill>
                   <a:srgbClr val="D97706"/>
                 </a:solidFill>
-                <a:latin typeface="Sakkal Majalla"/>
-                <a:cs typeface="Sakkal Majalla"/>
-                <a:ea typeface="Sakkal Majalla"/>
+                <a:latin typeface="Segoe UI"/>
+                <a:cs typeface="Segoe UI"/>
+                <a:ea typeface="Segoe UI"/>
               </a:rPr>
               <a:t>THE RECOMMENDED WORKFLOW</a:t>
             </a:r>
@@ -29519,9 +29519,9 @@
                 <a:solidFill>
                   <a:srgbClr val="221C57"/>
                 </a:solidFill>
-                <a:latin typeface="Sakkal Majalla"/>
-                <a:cs typeface="Sakkal Majalla"/>
-                <a:ea typeface="Sakkal Majalla"/>
+                <a:latin typeface="Segoe UI"/>
+                <a:cs typeface="Segoe UI"/>
+                <a:ea typeface="Segoe UI"/>
               </a:rPr>
               <a:t>سير العمل الذكي مع Research Rabbit</a:t>
             </a:r>
@@ -29690,9 +29690,9 @@
                 <a:solidFill>
                   <a:srgbClr val="FFFFFF"/>
                 </a:solidFill>
-                <a:latin typeface="Sakkal Majalla"/>
-                <a:cs typeface="Sakkal Majalla"/>
-                <a:ea typeface="Sakkal Majalla"/>
+                <a:latin typeface="Segoe UI"/>
+                <a:cs typeface="Segoe UI"/>
+                <a:ea typeface="Segoe UI"/>
               </a:rPr>
               <a:t>09</a:t>
             </a:r>
@@ -29737,9 +29737,9 @@
                 <a:solidFill>
                   <a:srgbClr val="6E6A8F"/>
                 </a:solidFill>
-                <a:latin typeface="Sakkal Majalla"/>
-                <a:cs typeface="Sakkal Majalla"/>
-                <a:ea typeface="Sakkal Majalla"/>
+                <a:latin typeface="Segoe UI"/>
+                <a:cs typeface="Segoe UI"/>
+                <a:ea typeface="Segoe UI"/>
               </a:rPr>
               <a:t>الفجوات البحثية  •  د. هناء حسين الأهيمر</a:t>
             </a:r>
@@ -29784,9 +29784,9 @@
                 <a:solidFill>
                   <a:srgbClr val="6E6A8F"/>
                 </a:solidFill>
-                <a:latin typeface="Sakkal Majalla"/>
-                <a:cs typeface="Sakkal Majalla"/>
-                <a:ea typeface="Sakkal Majalla"/>
+                <a:latin typeface="Segoe UI"/>
+                <a:cs typeface="Segoe UI"/>
+                <a:ea typeface="Segoe UI"/>
               </a:rPr>
               <a:t>الطريقة العملية التي أوصت بها الورشة لاستخراج الفجوة بالذكاء الاصطناعي — أربع خطوات:</a:t>
             </a:r>
@@ -29961,9 +29961,9 @@
                 <a:solidFill>
                   <a:srgbClr val="FFFFFF"/>
                 </a:solidFill>
-                <a:latin typeface="Sakkal Majalla"/>
-                <a:cs typeface="Sakkal Majalla"/>
-                <a:ea typeface="Sakkal Majalla"/>
+                <a:latin typeface="Segoe UI"/>
+                <a:cs typeface="Segoe UI"/>
+                <a:ea typeface="Segoe UI"/>
               </a:rPr>
               <a:t>📤</a:t>
             </a:r>
@@ -30018,9 +30018,9 @@
                 <a:solidFill>
                   <a:srgbClr val="A21CAF"/>
                 </a:solidFill>
-                <a:latin typeface="Sakkal Majalla"/>
-                <a:cs typeface="Sakkal Majalla"/>
-                <a:ea typeface="Sakkal Majalla"/>
+                <a:latin typeface="Segoe UI"/>
+                <a:cs typeface="Segoe UI"/>
+                <a:ea typeface="Segoe UI"/>
               </a:rPr>
               <a:t>الخطوة ١</a:t>
             </a:r>
@@ -30065,9 +30065,9 @@
                 <a:solidFill>
                   <a:srgbClr val="A21CAF"/>
                 </a:solidFill>
-                <a:latin typeface="Sakkal Majalla"/>
-                <a:cs typeface="Sakkal Majalla"/>
-                <a:ea typeface="Sakkal Majalla"/>
+                <a:latin typeface="Segoe UI"/>
+                <a:cs typeface="Segoe UI"/>
+                <a:ea typeface="Segoe UI"/>
               </a:rPr>
               <a:t>ارفع ملفات الدراسات</a:t>
             </a:r>
@@ -30112,9 +30112,9 @@
                 <a:solidFill>
                   <a:srgbClr val="221C57"/>
                 </a:solidFill>
-                <a:latin typeface="Sakkal Majalla"/>
-                <a:cs typeface="Sakkal Majalla"/>
-                <a:ea typeface="Sakkal Majalla"/>
+                <a:latin typeface="Segoe UI"/>
+                <a:cs typeface="Segoe UI"/>
+                <a:ea typeface="Segoe UI"/>
               </a:rPr>
               <a:t>حمّل الأوراق العلمية المرتبطة بموضوعك إلى المنصة — كلما كانت أحدث وأشمل كانت الخريطة أدق</a:t>
             </a:r>
@@ -30165,9 +30165,9 @@
                 <a:solidFill>
                   <a:srgbClr val="6E6A8F"/>
                 </a:solidFill>
-                <a:latin typeface="Sakkal Majalla"/>
-                <a:cs typeface="Sakkal Majalla"/>
-                <a:ea typeface="Sakkal Majalla"/>
+                <a:latin typeface="Segoe UI"/>
+                <a:cs typeface="Segoe UI"/>
+                <a:ea typeface="Segoe UI"/>
               </a:rPr>
               <a:t>⬅</a:t>
             </a:r>
@@ -30342,9 +30342,9 @@
                 <a:solidFill>
                   <a:srgbClr val="FFFFFF"/>
                 </a:solidFill>
-                <a:latin typeface="Sakkal Majalla"/>
-                <a:cs typeface="Sakkal Majalla"/>
-                <a:ea typeface="Sakkal Majalla"/>
+                <a:latin typeface="Segoe UI"/>
+                <a:cs typeface="Segoe UI"/>
+                <a:ea typeface="Segoe UI"/>
               </a:rPr>
               <a:t>🎯</a:t>
             </a:r>
@@ -30399,9 +30399,9 @@
                 <a:solidFill>
                   <a:srgbClr val="D97706"/>
                 </a:solidFill>
-                <a:latin typeface="Sakkal Majalla"/>
-                <a:cs typeface="Sakkal Majalla"/>
-                <a:ea typeface="Sakkal Majalla"/>
+                <a:latin typeface="Segoe UI"/>
+                <a:cs typeface="Segoe UI"/>
+                <a:ea typeface="Segoe UI"/>
               </a:rPr>
               <a:t>الخطوة ٢</a:t>
             </a:r>
@@ -30446,9 +30446,9 @@
                 <a:solidFill>
                   <a:srgbClr val="D97706"/>
                 </a:solidFill>
-                <a:latin typeface="Sakkal Majalla"/>
-                <a:cs typeface="Sakkal Majalla"/>
-                <a:ea typeface="Sakkal Majalla"/>
+                <a:latin typeface="Segoe UI"/>
+                <a:cs typeface="Segoe UI"/>
+                <a:ea typeface="Segoe UI"/>
               </a:rPr>
               <a:t>اطرح سؤالاً دقيقاً</a:t>
             </a:r>
@@ -30493,9 +30493,9 @@
                 <a:solidFill>
                   <a:srgbClr val="221C57"/>
                 </a:solidFill>
-                <a:latin typeface="Sakkal Majalla"/>
-                <a:cs typeface="Sakkal Majalla"/>
-                <a:ea typeface="Sakkal Majalla"/>
+                <a:latin typeface="Segoe UI"/>
+                <a:cs typeface="Segoe UI"/>
+                <a:ea typeface="Segoe UI"/>
               </a:rPr>
               <a:t>اكتب طلباً محدداً: «حلّل هذه الملفات واستخرج الفجوة البحثية» — دقة السؤال تصنع دقة الإجابة</a:t>
             </a:r>
@@ -30546,9 +30546,9 @@
                 <a:solidFill>
                   <a:srgbClr val="6E6A8F"/>
                 </a:solidFill>
-                <a:latin typeface="Sakkal Majalla"/>
-                <a:cs typeface="Sakkal Majalla"/>
-                <a:ea typeface="Sakkal Majalla"/>
+                <a:latin typeface="Segoe UI"/>
+                <a:cs typeface="Segoe UI"/>
+                <a:ea typeface="Segoe UI"/>
               </a:rPr>
               <a:t>⬅</a:t>
             </a:r>
@@ -30723,9 +30723,9 @@
                 <a:solidFill>
                   <a:srgbClr val="FFFFFF"/>
                 </a:solidFill>
-                <a:latin typeface="Sakkal Majalla"/>
-                <a:cs typeface="Sakkal Majalla"/>
-                <a:ea typeface="Sakkal Majalla"/>
+                <a:latin typeface="Segoe UI"/>
+                <a:cs typeface="Segoe UI"/>
+                <a:ea typeface="Segoe UI"/>
               </a:rPr>
               <a:t>🧐</a:t>
             </a:r>
@@ -30780,9 +30780,9 @@
                 <a:solidFill>
                   <a:srgbClr val="0D9488"/>
                 </a:solidFill>
-                <a:latin typeface="Sakkal Majalla"/>
-                <a:cs typeface="Sakkal Majalla"/>
-                <a:ea typeface="Sakkal Majalla"/>
+                <a:latin typeface="Segoe UI"/>
+                <a:cs typeface="Segoe UI"/>
+                <a:ea typeface="Segoe UI"/>
               </a:rPr>
               <a:t>الخطوة ٣</a:t>
             </a:r>
@@ -30827,9 +30827,9 @@
                 <a:solidFill>
                   <a:srgbClr val="0D9488"/>
                 </a:solidFill>
-                <a:latin typeface="Sakkal Majalla"/>
-                <a:cs typeface="Sakkal Majalla"/>
-                <a:ea typeface="Sakkal Majalla"/>
+                <a:latin typeface="Segoe UI"/>
+                <a:cs typeface="Segoe UI"/>
+                <a:ea typeface="Segoe UI"/>
               </a:rPr>
               <a:t>راجع التحليل بنفسك</a:t>
             </a:r>
@@ -30874,9 +30874,9 @@
                 <a:solidFill>
                   <a:srgbClr val="221C57"/>
                 </a:solidFill>
-                <a:latin typeface="Sakkal Majalla"/>
-                <a:cs typeface="Sakkal Majalla"/>
-                <a:ea typeface="Sakkal Majalla"/>
+                <a:latin typeface="Segoe UI"/>
+                <a:cs typeface="Segoe UI"/>
+                <a:ea typeface="Segoe UI"/>
               </a:rPr>
               <a:t>افحص ما قدّمه الذكاء الاصطناعي بعقلك النقدي — لا تعتمد المخرجات كما هي أبداً</a:t>
             </a:r>
@@ -30927,9 +30927,9 @@
                 <a:solidFill>
                   <a:srgbClr val="6E6A8F"/>
                 </a:solidFill>
-                <a:latin typeface="Sakkal Majalla"/>
-                <a:cs typeface="Sakkal Majalla"/>
-                <a:ea typeface="Sakkal Majalla"/>
+                <a:latin typeface="Segoe UI"/>
+                <a:cs typeface="Segoe UI"/>
+                <a:ea typeface="Segoe UI"/>
               </a:rPr>
               <a:t>⬅</a:t>
             </a:r>
@@ -31104,9 +31104,9 @@
                 <a:solidFill>
                   <a:srgbClr val="FFFFFF"/>
                 </a:solidFill>
-                <a:latin typeface="Sakkal Majalla"/>
-                <a:cs typeface="Sakkal Majalla"/>
-                <a:ea typeface="Sakkal Majalla"/>
+                <a:latin typeface="Segoe UI"/>
+                <a:cs typeface="Segoe UI"/>
+                <a:ea typeface="Segoe UI"/>
               </a:rPr>
               <a:t>✅</a:t>
             </a:r>
@@ -31161,9 +31161,9 @@
                 <a:solidFill>
                   <a:srgbClr val="047857"/>
                 </a:solidFill>
-                <a:latin typeface="Sakkal Majalla"/>
-                <a:cs typeface="Sakkal Majalla"/>
-                <a:ea typeface="Sakkal Majalla"/>
+                <a:latin typeface="Segoe UI"/>
+                <a:cs typeface="Segoe UI"/>
+                <a:ea typeface="Segoe UI"/>
               </a:rPr>
               <a:t>الخطوة ٤</a:t>
             </a:r>
@@ -31208,9 +31208,9 @@
                 <a:solidFill>
                   <a:srgbClr val="047857"/>
                 </a:solidFill>
-                <a:latin typeface="Sakkal Majalla"/>
-                <a:cs typeface="Sakkal Majalla"/>
-                <a:ea typeface="Sakkal Majalla"/>
+                <a:latin typeface="Segoe UI"/>
+                <a:cs typeface="Segoe UI"/>
+                <a:ea typeface="Segoe UI"/>
               </a:rPr>
               <a:t>اعتمد القرار الأكاديمي</a:t>
             </a:r>
@@ -31255,9 +31255,9 @@
                 <a:solidFill>
                   <a:srgbClr val="221C57"/>
                 </a:solidFill>
-                <a:latin typeface="Sakkal Majalla"/>
-                <a:cs typeface="Sakkal Majalla"/>
-                <a:ea typeface="Sakkal Majalla"/>
+                <a:latin typeface="Segoe UI"/>
+                <a:cs typeface="Segoe UI"/>
+                <a:ea typeface="Segoe UI"/>
               </a:rPr>
               <a:t>بعد التحقق من المصادر تصبح الفجوة موثوقة وجاهزة لتتصدر مقترحك البحثي</a:t>
             </a:r>
@@ -31362,9 +31362,9 @@
                 <a:solidFill>
                   <a:srgbClr val="FBBF24"/>
                 </a:solidFill>
-                <a:latin typeface="Sakkal Majalla"/>
-                <a:cs typeface="Sakkal Majalla"/>
-                <a:ea typeface="Sakkal Majalla"/>
+                <a:latin typeface="Segoe UI"/>
+                <a:cs typeface="Segoe UI"/>
+                <a:ea typeface="Segoe UI"/>
               </a:rPr>
               <a:t>⚠️ القاعدة الذهبية: </a:t>
             </a:r>
@@ -31373,9 +31373,9 @@
                 <a:solidFill>
                   <a:srgbClr val="FFFFFF"/>
                 </a:solidFill>
-                <a:latin typeface="Sakkal Majalla"/>
-                <a:cs typeface="Sakkal Majalla"/>
-                <a:ea typeface="Sakkal Majalla"/>
+                <a:latin typeface="Segoe UI"/>
+                <a:cs typeface="Segoe UI"/>
+                <a:ea typeface="Segoe UI"/>
               </a:rPr>
               <a:t>الذكاء الاصطناعي يقترح والباحث يقرر — المراجعة البشرية للتحليل شرط أساسي لضمان دقة القرار الأكاديمي</a:t>
             </a:r>

--- a/Research-Gaps-الفجوات-البحثية.pptx
+++ b/Research-Gaps-الفجوات-البحثية.pptx
@@ -1,6 +1,6 @@
 
 <file path=ppt/presentation.xml><?xml version="1.0" encoding="utf-8"?>
-<p:presentation xmlns:a="http://schemas.openxmlformats.org/drawingml/2006/main" xmlns:r="http://schemas.openxmlformats.org/officeDocument/2006/relationships" xmlns:p="http://schemas.openxmlformats.org/presentationml/2006/main" saveSubsetFonts="1" autoCompressPictures="0">
+<p:presentation xmlns:a="http://schemas.openxmlformats.org/drawingml/2006/main" xmlns:r="http://schemas.openxmlformats.org/officeDocument/2006/relationships" xmlns:p="http://schemas.openxmlformats.org/presentationml/2006/main" saveSubsetFonts="1" autoCompressPictures="0" embedTrueTypeFonts="1">
   <p:sldMasterIdLst>
     <p:sldMasterId id="2147483648" r:id="rId1"/>
   </p:sldMasterIdLst>
@@ -23,6 +23,13 @@
   </p:sldIdLst>
   <p:sldSz cx="12191695" cy="6858000" type="screen4x3"/>
   <p:notesSz cx="6858000" cy="9144000"/>
+  <p:embeddedFontLst>
+    <p:embeddedFont>
+      <p:font typeface="Noto Sans Arabic"/>
+      <p:regular r:id="rIdFont1"/>
+      <p:bold r:id="rIdFont2"/>
+    </p:embeddedFont>
+  </p:embeddedFontLst>
   <p:defaultTextStyle>
     <a:defPPr>
       <a:defRPr lang="en-US"/>
@@ -4880,9 +4887,9 @@
                 <a:solidFill>
                   <a:srgbClr val="FFFFFF"/>
                 </a:solidFill>
-                <a:latin typeface="Segoe UI"/>
-                <a:cs typeface="Segoe UI"/>
-                <a:ea typeface="Segoe UI"/>
+                <a:latin typeface="Noto Sans Arabic"/>
+                <a:cs typeface="Noto Sans Arabic"/>
+                <a:ea typeface="Noto Sans Arabic"/>
               </a:rPr>
               <a:t>ورشة عمل أكاديمية متخصصة  •  ACADEMIC WORKSHOP</a:t>
             </a:r>
@@ -4927,9 +4934,9 @@
                 <a:solidFill>
                   <a:srgbClr val="FFFFFF"/>
                 </a:solidFill>
-                <a:latin typeface="Segoe UI"/>
-                <a:cs typeface="Segoe UI"/>
-                <a:ea typeface="Segoe UI"/>
+                <a:latin typeface="Noto Sans Arabic"/>
+                <a:cs typeface="Noto Sans Arabic"/>
+                <a:ea typeface="Noto Sans Arabic"/>
               </a:rPr>
               <a:t>الفجوات البحثية</a:t>
             </a:r>
@@ -4974,9 +4981,9 @@
                 <a:solidFill>
                   <a:srgbClr val="FBBF24"/>
                 </a:solidFill>
-                <a:latin typeface="Segoe UI"/>
-                <a:cs typeface="Segoe UI"/>
-                <a:ea typeface="Segoe UI"/>
+                <a:latin typeface="Noto Sans Arabic"/>
+                <a:cs typeface="Noto Sans Arabic"/>
+                <a:ea typeface="Noto Sans Arabic"/>
               </a:rPr>
               <a:t>R E S E A R C H   G A P S</a:t>
             </a:r>
@@ -5073,9 +5080,9 @@
                 <a:solidFill>
                   <a:srgbClr val="FFFFFF"/>
                 </a:solidFill>
-                <a:latin typeface="Segoe UI"/>
-                <a:cs typeface="Segoe UI"/>
-                <a:ea typeface="Segoe UI"/>
+                <a:latin typeface="Noto Sans Arabic"/>
+                <a:cs typeface="Noto Sans Arabic"/>
+                <a:ea typeface="Noto Sans Arabic"/>
               </a:rPr>
               <a:t>دليلك الشامل لاكتشاف الفجوات البحثية بذكاء واحترافية — نسخة موسّعة من الشرح الكامل للورشة</a:t>
             </a:r>
@@ -5168,9 +5175,9 @@
                 <a:solidFill>
                   <a:srgbClr val="FFFFFF"/>
                 </a:solidFill>
-                <a:latin typeface="Segoe UI"/>
-                <a:cs typeface="Segoe UI"/>
-                <a:ea typeface="Segoe UI"/>
+                <a:latin typeface="Noto Sans Arabic"/>
+                <a:cs typeface="Noto Sans Arabic"/>
+                <a:ea typeface="Noto Sans Arabic"/>
               </a:rPr>
               <a:t>السؤال الأكثر تكراراً: هل يمكن استخدام الذكاء الاصطناعي لإيجاد الفجوة البحثية؟</a:t>
             </a:r>
@@ -5215,9 +5222,9 @@
                 <a:solidFill>
                   <a:srgbClr val="FBBF24"/>
                 </a:solidFill>
-                <a:latin typeface="Segoe UI"/>
-                <a:cs typeface="Segoe UI"/>
-                <a:ea typeface="Segoe UI"/>
+                <a:latin typeface="Noto Sans Arabic"/>
+                <a:cs typeface="Noto Sans Arabic"/>
+                <a:ea typeface="Noto Sans Arabic"/>
               </a:rPr>
               <a:t>الجواب: نعم — وفي هذا العرض ستتعلم كيف، خطوة بخطوة</a:t>
             </a:r>
@@ -5262,9 +5269,9 @@
                 <a:solidFill>
                   <a:srgbClr val="FFFFFF"/>
                 </a:solidFill>
-                <a:latin typeface="Segoe UI"/>
-                <a:cs typeface="Segoe UI"/>
-                <a:ea typeface="Segoe UI"/>
+                <a:latin typeface="Noto Sans Arabic"/>
+                <a:cs typeface="Noto Sans Arabic"/>
+                <a:ea typeface="Noto Sans Arabic"/>
               </a:rPr>
               <a:t>المحتوى العلمي:  </a:t>
             </a:r>
@@ -5273,9 +5280,9 @@
                 <a:solidFill>
                   <a:srgbClr val="FBBF24"/>
                 </a:solidFill>
-                <a:latin typeface="Segoe UI"/>
-                <a:cs typeface="Segoe UI"/>
-                <a:ea typeface="Segoe UI"/>
+                <a:latin typeface="Noto Sans Arabic"/>
+                <a:cs typeface="Noto Sans Arabic"/>
+                <a:ea typeface="Noto Sans Arabic"/>
               </a:rPr>
               <a:t>الدكتورة هناء حسين الأهيمر</a:t>
             </a:r>
@@ -5284,9 +5291,9 @@
                 <a:solidFill>
                   <a:srgbClr val="FFFFFF"/>
                 </a:solidFill>
-                <a:latin typeface="Segoe UI"/>
-                <a:cs typeface="Segoe UI"/>
-                <a:ea typeface="Segoe UI"/>
+                <a:latin typeface="Noto Sans Arabic"/>
+                <a:cs typeface="Noto Sans Arabic"/>
+                <a:ea typeface="Noto Sans Arabic"/>
               </a:rPr>
               <a:t>   Dr. Hana Hossen Elahemer</a:t>
             </a:r>
@@ -5331,9 +5338,9 @@
                 <a:solidFill>
                   <a:srgbClr val="FFFFFF"/>
                 </a:solidFill>
-                <a:latin typeface="Segoe UI"/>
-                <a:cs typeface="Segoe UI"/>
-                <a:ea typeface="Segoe UI"/>
+                <a:latin typeface="Noto Sans Arabic"/>
+                <a:cs typeface="Noto Sans Arabic"/>
+                <a:ea typeface="Noto Sans Arabic"/>
               </a:rPr>
               <a:t>نسخة موسّعة بشرح تفصيلي أكبر وتصميم جديد</a:t>
             </a:r>
@@ -5440,9 +5447,9 @@
                 <a:solidFill>
                   <a:srgbClr val="ECE9FA"/>
                 </a:solidFill>
-                <a:latin typeface="Segoe UI"/>
-                <a:cs typeface="Segoe UI"/>
-                <a:ea typeface="Segoe UI"/>
+                <a:latin typeface="Noto Sans Arabic"/>
+                <a:cs typeface="Noto Sans Arabic"/>
+                <a:ea typeface="Noto Sans Arabic"/>
               </a:rPr>
               <a:t>10</a:t>
             </a:r>
@@ -5511,9 +5518,9 @@
                 <a:solidFill>
                   <a:srgbClr val="FFFFFF"/>
                 </a:solidFill>
-                <a:latin typeface="Segoe UI"/>
-                <a:cs typeface="Segoe UI"/>
-                <a:ea typeface="Segoe UI"/>
+                <a:latin typeface="Noto Sans Arabic"/>
+                <a:cs typeface="Noto Sans Arabic"/>
+                <a:ea typeface="Noto Sans Arabic"/>
               </a:rPr>
               <a:t>🗞</a:t>
             </a:r>
@@ -5558,9 +5565,9 @@
                 <a:solidFill>
                   <a:srgbClr val="047857"/>
                 </a:solidFill>
-                <a:latin typeface="Segoe UI"/>
-                <a:cs typeface="Segoe UI"/>
-                <a:ea typeface="Segoe UI"/>
+                <a:latin typeface="Noto Sans Arabic"/>
+                <a:cs typeface="Noto Sans Arabic"/>
+                <a:ea typeface="Noto Sans Arabic"/>
               </a:rPr>
               <a:t>EXPERT RESEARCHER STRATEGIES</a:t>
             </a:r>
@@ -5605,9 +5612,9 @@
                 <a:solidFill>
                   <a:srgbClr val="221C57"/>
                 </a:solidFill>
-                <a:latin typeface="Segoe UI"/>
-                <a:cs typeface="Segoe UI"/>
-                <a:ea typeface="Segoe UI"/>
+                <a:latin typeface="Noto Sans Arabic"/>
+                <a:cs typeface="Noto Sans Arabic"/>
+                <a:ea typeface="Noto Sans Arabic"/>
               </a:rPr>
               <a:t>استراتيجيات الباحثين المحترفين</a:t>
             </a:r>
@@ -5776,9 +5783,9 @@
                 <a:solidFill>
                   <a:srgbClr val="FFFFFF"/>
                 </a:solidFill>
-                <a:latin typeface="Segoe UI"/>
-                <a:cs typeface="Segoe UI"/>
-                <a:ea typeface="Segoe UI"/>
+                <a:latin typeface="Noto Sans Arabic"/>
+                <a:cs typeface="Noto Sans Arabic"/>
+                <a:ea typeface="Noto Sans Arabic"/>
               </a:rPr>
               <a:t>10</a:t>
             </a:r>
@@ -5823,9 +5830,9 @@
                 <a:solidFill>
                   <a:srgbClr val="6E6A8F"/>
                 </a:solidFill>
-                <a:latin typeface="Segoe UI"/>
-                <a:cs typeface="Segoe UI"/>
-                <a:ea typeface="Segoe UI"/>
+                <a:latin typeface="Noto Sans Arabic"/>
+                <a:cs typeface="Noto Sans Arabic"/>
+                <a:ea typeface="Noto Sans Arabic"/>
               </a:rPr>
               <a:t>الفجوات البحثية  •  د. هناء حسين الأهيمر</a:t>
             </a:r>
@@ -5946,9 +5953,9 @@
                 <a:solidFill>
                   <a:srgbClr val="FFFFFF"/>
                 </a:solidFill>
-                <a:latin typeface="Segoe UI"/>
-                <a:cs typeface="Segoe UI"/>
-                <a:ea typeface="Segoe UI"/>
+                <a:latin typeface="Noto Sans Arabic"/>
+                <a:cs typeface="Noto Sans Arabic"/>
+                <a:ea typeface="Noto Sans Arabic"/>
               </a:rPr>
               <a:t>📄</a:t>
             </a:r>
@@ -5993,9 +6000,9 @@
                 <a:solidFill>
                   <a:srgbClr val="6D28D9"/>
                 </a:solidFill>
-                <a:latin typeface="Segoe UI"/>
-                <a:cs typeface="Segoe UI"/>
-                <a:ea typeface="Segoe UI"/>
+                <a:latin typeface="Noto Sans Arabic"/>
+                <a:cs typeface="Noto Sans Arabic"/>
+                <a:ea typeface="Noto Sans Arabic"/>
               </a:rPr>
               <a:t>اقرأ خاتمة الدراسات   </a:t>
             </a:r>
@@ -6004,9 +6011,9 @@
                 <a:solidFill>
                   <a:srgbClr val="6E6A8F"/>
                 </a:solidFill>
-                <a:latin typeface="Segoe UI"/>
-                <a:cs typeface="Segoe UI"/>
-                <a:ea typeface="Segoe UI"/>
+                <a:latin typeface="Noto Sans Arabic"/>
+                <a:cs typeface="Noto Sans Arabic"/>
+                <a:ea typeface="Noto Sans Arabic"/>
               </a:rPr>
               <a:t>Conclusion Section</a:t>
             </a:r>
@@ -6051,9 +6058,9 @@
                 <a:solidFill>
                   <a:srgbClr val="221C57"/>
                 </a:solidFill>
-                <a:latin typeface="Segoe UI"/>
-                <a:cs typeface="Segoe UI"/>
-                <a:ea typeface="Segoe UI"/>
+                <a:latin typeface="Noto Sans Arabic"/>
+                <a:cs typeface="Noto Sans Arabic"/>
+                <a:ea typeface="Noto Sans Arabic"/>
               </a:rPr>
               <a:t>الباحثون غالباً يذكرون اقتراحات مستقبلية وفجوات صريحة في نهاية أبحاثهم — فجوات جاهزة وموثقة فاستثمرها!</a:t>
             </a:r>
@@ -6174,9 +6181,9 @@
                 <a:solidFill>
                   <a:srgbClr val="FFFFFF"/>
                 </a:solidFill>
-                <a:latin typeface="Segoe UI"/>
-                <a:cs typeface="Segoe UI"/>
-                <a:ea typeface="Segoe UI"/>
+                <a:latin typeface="Noto Sans Arabic"/>
+                <a:cs typeface="Noto Sans Arabic"/>
+                <a:ea typeface="Noto Sans Arabic"/>
               </a:rPr>
               <a:t>🗺</a:t>
             </a:r>
@@ -6221,9 +6228,9 @@
                 <a:solidFill>
                   <a:srgbClr val="0D9488"/>
                 </a:solidFill>
-                <a:latin typeface="Segoe UI"/>
-                <a:cs typeface="Segoe UI"/>
-                <a:ea typeface="Segoe UI"/>
+                <a:latin typeface="Noto Sans Arabic"/>
+                <a:cs typeface="Noto Sans Arabic"/>
+                <a:ea typeface="Noto Sans Arabic"/>
               </a:rPr>
               <a:t>اعمل خريطة للأدبيات   </a:t>
             </a:r>
@@ -6232,9 +6239,9 @@
                 <a:solidFill>
                   <a:srgbClr val="6E6A8F"/>
                 </a:solidFill>
-                <a:latin typeface="Segoe UI"/>
-                <a:cs typeface="Segoe UI"/>
-                <a:ea typeface="Segoe UI"/>
+                <a:latin typeface="Noto Sans Arabic"/>
+                <a:cs typeface="Noto Sans Arabic"/>
+                <a:ea typeface="Noto Sans Arabic"/>
               </a:rPr>
               <a:t>Literature Mapping</a:t>
             </a:r>
@@ -6279,9 +6286,9 @@
                 <a:solidFill>
                   <a:srgbClr val="221C57"/>
                 </a:solidFill>
-                <a:latin typeface="Segoe UI"/>
-                <a:cs typeface="Segoe UI"/>
-                <a:ea typeface="Segoe UI"/>
+                <a:latin typeface="Noto Sans Arabic"/>
+                <a:cs typeface="Noto Sans Arabic"/>
+                <a:ea typeface="Noto Sans Arabic"/>
               </a:rPr>
               <a:t>صنّف الدراسات حسب: السكان، المنهج، الدولة، الزمن — الخانات الفارغة في الخريطة هي فجواتك المحتملة</a:t>
             </a:r>
@@ -6402,9 +6409,9 @@
                 <a:solidFill>
                   <a:srgbClr val="FFFFFF"/>
                 </a:solidFill>
-                <a:latin typeface="Segoe UI"/>
-                <a:cs typeface="Segoe UI"/>
-                <a:ea typeface="Segoe UI"/>
+                <a:latin typeface="Noto Sans Arabic"/>
+                <a:cs typeface="Noto Sans Arabic"/>
+                <a:ea typeface="Noto Sans Arabic"/>
               </a:rPr>
               <a:t>⚖️</a:t>
             </a:r>
@@ -6449,9 +6456,9 @@
                 <a:solidFill>
                   <a:srgbClr val="A21CAF"/>
                 </a:solidFill>
-                <a:latin typeface="Segoe UI"/>
-                <a:cs typeface="Segoe UI"/>
-                <a:ea typeface="Segoe UI"/>
+                <a:latin typeface="Noto Sans Arabic"/>
+                <a:cs typeface="Noto Sans Arabic"/>
+                <a:ea typeface="Noto Sans Arabic"/>
               </a:rPr>
               <a:t>ابحث عن التناقضات   </a:t>
             </a:r>
@@ -6460,9 +6467,9 @@
                 <a:solidFill>
                   <a:srgbClr val="6E6A8F"/>
                 </a:solidFill>
-                <a:latin typeface="Segoe UI"/>
-                <a:cs typeface="Segoe UI"/>
-                <a:ea typeface="Segoe UI"/>
+                <a:latin typeface="Noto Sans Arabic"/>
+                <a:cs typeface="Noto Sans Arabic"/>
+                <a:ea typeface="Noto Sans Arabic"/>
               </a:rPr>
               <a:t>Contradictions</a:t>
             </a:r>
@@ -6507,9 +6514,9 @@
                 <a:solidFill>
                   <a:srgbClr val="221C57"/>
                 </a:solidFill>
-                <a:latin typeface="Segoe UI"/>
-                <a:cs typeface="Segoe UI"/>
-                <a:ea typeface="Segoe UI"/>
+                <a:latin typeface="Noto Sans Arabic"/>
+                <a:cs typeface="Noto Sans Arabic"/>
+                <a:ea typeface="Noto Sans Arabic"/>
               </a:rPr>
               <a:t>التضارب بين نتائج الدراسات فجوة قوية وفرصة ذهبية — دراستك قد تكون الحكم الذي يحسم الخلاف</a:t>
             </a:r>
@@ -6630,9 +6637,9 @@
                 <a:solidFill>
                   <a:srgbClr val="FFFFFF"/>
                 </a:solidFill>
-                <a:latin typeface="Segoe UI"/>
-                <a:cs typeface="Segoe UI"/>
-                <a:ea typeface="Segoe UI"/>
+                <a:latin typeface="Noto Sans Arabic"/>
+                <a:cs typeface="Noto Sans Arabic"/>
+                <a:ea typeface="Noto Sans Arabic"/>
               </a:rPr>
               <a:t>❓</a:t>
             </a:r>
@@ -6677,9 +6684,9 @@
                 <a:solidFill>
                   <a:srgbClr val="D97706"/>
                 </a:solidFill>
-                <a:latin typeface="Segoe UI"/>
-                <a:cs typeface="Segoe UI"/>
-                <a:ea typeface="Segoe UI"/>
+                <a:latin typeface="Noto Sans Arabic"/>
+                <a:cs typeface="Noto Sans Arabic"/>
+                <a:ea typeface="Noto Sans Arabic"/>
               </a:rPr>
               <a:t>اسأل: ماذا لو؟   </a:t>
             </a:r>
@@ -6688,9 +6695,9 @@
                 <a:solidFill>
                   <a:srgbClr val="6E6A8F"/>
                 </a:solidFill>
-                <a:latin typeface="Segoe UI"/>
-                <a:cs typeface="Segoe UI"/>
-                <a:ea typeface="Segoe UI"/>
+                <a:latin typeface="Noto Sans Arabic"/>
+                <a:cs typeface="Noto Sans Arabic"/>
+                <a:ea typeface="Noto Sans Arabic"/>
               </a:rPr>
               <a:t>What if?</a:t>
             </a:r>
@@ -6735,9 +6742,9 @@
                 <a:solidFill>
                   <a:srgbClr val="221C57"/>
                 </a:solidFill>
-                <a:latin typeface="Segoe UI"/>
-                <a:cs typeface="Segoe UI"/>
-                <a:ea typeface="Segoe UI"/>
+                <a:latin typeface="Noto Sans Arabic"/>
+                <a:cs typeface="Noto Sans Arabic"/>
+                <a:ea typeface="Noto Sans Arabic"/>
               </a:rPr>
               <a:t>ماذا لو طبّقنا الدراسة نفسها على فئة عمرية مختلفة أو في دولة مختلفة؟ هنا غالباً تجد فجوة بحثية ممتازة</a:t>
             </a:r>
@@ -6842,9 +6849,9 @@
                 <a:solidFill>
                   <a:srgbClr val="FBBF24"/>
                 </a:solidFill>
-                <a:latin typeface="Segoe UI"/>
-                <a:cs typeface="Segoe UI"/>
-                <a:ea typeface="Segoe UI"/>
+                <a:latin typeface="Noto Sans Arabic"/>
+                <a:cs typeface="Noto Sans Arabic"/>
+                <a:ea typeface="Noto Sans Arabic"/>
               </a:rPr>
               <a:t>💡 نصيحة ذهبية: </a:t>
             </a:r>
@@ -6853,9 +6860,9 @@
                 <a:solidFill>
                   <a:srgbClr val="FFFFFF"/>
                 </a:solidFill>
-                <a:latin typeface="Segoe UI"/>
-                <a:cs typeface="Segoe UI"/>
-                <a:ea typeface="Segoe UI"/>
+                <a:latin typeface="Noto Sans Arabic"/>
+                <a:cs typeface="Noto Sans Arabic"/>
+                <a:ea typeface="Noto Sans Arabic"/>
               </a:rPr>
               <a:t>اقرأ آخر ٢٠ ورقة في مجلتك المستهدفة — الأنماط المتكررة ستكشف لك الفراغات بوضوح تام</a:t>
             </a:r>
@@ -6962,9 +6969,9 @@
                 <a:solidFill>
                   <a:srgbClr val="ECE9FA"/>
                 </a:solidFill>
-                <a:latin typeface="Segoe UI"/>
-                <a:cs typeface="Segoe UI"/>
-                <a:ea typeface="Segoe UI"/>
+                <a:latin typeface="Noto Sans Arabic"/>
+                <a:cs typeface="Noto Sans Arabic"/>
+                <a:ea typeface="Noto Sans Arabic"/>
               </a:rPr>
               <a:t>11</a:t>
             </a:r>
@@ -7033,9 +7040,9 @@
                 <a:solidFill>
                   <a:srgbClr val="FFFFFF"/>
                 </a:solidFill>
-                <a:latin typeface="Segoe UI"/>
-                <a:cs typeface="Segoe UI"/>
-                <a:ea typeface="Segoe UI"/>
+                <a:latin typeface="Noto Sans Arabic"/>
+                <a:cs typeface="Noto Sans Arabic"/>
+                <a:ea typeface="Noto Sans Arabic"/>
               </a:rPr>
               <a:t>💡</a:t>
             </a:r>
@@ -7080,9 +7087,9 @@
                 <a:solidFill>
                   <a:srgbClr val="1D4ED8"/>
                 </a:solidFill>
-                <a:latin typeface="Segoe UI"/>
-                <a:cs typeface="Segoe UI"/>
-                <a:ea typeface="Segoe UI"/>
+                <a:latin typeface="Noto Sans Arabic"/>
+                <a:cs typeface="Noto Sans Arabic"/>
+                <a:ea typeface="Noto Sans Arabic"/>
               </a:rPr>
               <a:t>CRITICAL THINKING FRAMEWORK</a:t>
             </a:r>
@@ -7127,9 +7134,9 @@
                 <a:solidFill>
                   <a:srgbClr val="221C57"/>
                 </a:solidFill>
-                <a:latin typeface="Segoe UI"/>
-                <a:cs typeface="Segoe UI"/>
-                <a:ea typeface="Segoe UI"/>
+                <a:latin typeface="Noto Sans Arabic"/>
+                <a:cs typeface="Noto Sans Arabic"/>
+                <a:ea typeface="Noto Sans Arabic"/>
               </a:rPr>
               <a:t>التفكير النقدي عند تحليل الدراسات</a:t>
             </a:r>
@@ -7298,9 +7305,9 @@
                 <a:solidFill>
                   <a:srgbClr val="FFFFFF"/>
                 </a:solidFill>
-                <a:latin typeface="Segoe UI"/>
-                <a:cs typeface="Segoe UI"/>
-                <a:ea typeface="Segoe UI"/>
+                <a:latin typeface="Noto Sans Arabic"/>
+                <a:cs typeface="Noto Sans Arabic"/>
+                <a:ea typeface="Noto Sans Arabic"/>
               </a:rPr>
               <a:t>11</a:t>
             </a:r>
@@ -7345,9 +7352,9 @@
                 <a:solidFill>
                   <a:srgbClr val="6E6A8F"/>
                 </a:solidFill>
-                <a:latin typeface="Segoe UI"/>
-                <a:cs typeface="Segoe UI"/>
-                <a:ea typeface="Segoe UI"/>
+                <a:latin typeface="Noto Sans Arabic"/>
+                <a:cs typeface="Noto Sans Arabic"/>
+                <a:ea typeface="Noto Sans Arabic"/>
               </a:rPr>
               <a:t>الفجوات البحثية  •  د. هناء حسين الأهيمر</a:t>
             </a:r>
@@ -7500,9 +7507,9 @@
                 <a:solidFill>
                   <a:srgbClr val="6D28D9"/>
                 </a:solidFill>
-                <a:latin typeface="Segoe UI"/>
-                <a:cs typeface="Segoe UI"/>
-                <a:ea typeface="Segoe UI"/>
+                <a:latin typeface="Noto Sans Arabic"/>
+                <a:cs typeface="Noto Sans Arabic"/>
+                <a:ea typeface="Noto Sans Arabic"/>
               </a:rPr>
               <a:t>❓ الأسئلة الستة الذهبية</a:t>
             </a:r>
@@ -7547,9 +7554,9 @@
                 <a:solidFill>
                   <a:srgbClr val="A21CAF"/>
                 </a:solidFill>
-                <a:latin typeface="Segoe UI"/>
-                <a:cs typeface="Segoe UI"/>
-                <a:ea typeface="Segoe UI"/>
+                <a:latin typeface="Noto Sans Arabic"/>
+                <a:cs typeface="Noto Sans Arabic"/>
+                <a:ea typeface="Noto Sans Arabic"/>
               </a:rPr>
               <a:t>●  </a:t>
             </a:r>
@@ -7558,9 +7565,9 @@
                 <a:solidFill>
                   <a:srgbClr val="A21CAF"/>
                 </a:solidFill>
-                <a:latin typeface="Segoe UI"/>
-                <a:cs typeface="Segoe UI"/>
-                <a:ea typeface="Segoe UI"/>
+                <a:latin typeface="Noto Sans Arabic"/>
+                <a:cs typeface="Noto Sans Arabic"/>
+                <a:ea typeface="Noto Sans Arabic"/>
               </a:rPr>
               <a:t>Who — مَن:  </a:t>
             </a:r>
@@ -7569,9 +7576,9 @@
                 <a:solidFill>
                   <a:srgbClr val="221C57"/>
                 </a:solidFill>
-                <a:latin typeface="Segoe UI"/>
-                <a:cs typeface="Segoe UI"/>
-                <a:ea typeface="Segoe UI"/>
+                <a:latin typeface="Noto Sans Arabic"/>
+                <a:cs typeface="Noto Sans Arabic"/>
+                <a:ea typeface="Noto Sans Arabic"/>
               </a:rPr>
               <a:t>الذي تمت دراسته؟ (السكان والعينة)</a:t>
             </a:r>
@@ -7593,9 +7600,9 @@
                 <a:solidFill>
                   <a:srgbClr val="D97706"/>
                 </a:solidFill>
-                <a:latin typeface="Segoe UI"/>
-                <a:cs typeface="Segoe UI"/>
-                <a:ea typeface="Segoe UI"/>
+                <a:latin typeface="Noto Sans Arabic"/>
+                <a:cs typeface="Noto Sans Arabic"/>
+                <a:ea typeface="Noto Sans Arabic"/>
               </a:rPr>
               <a:t>●  </a:t>
             </a:r>
@@ -7604,9 +7611,9 @@
                 <a:solidFill>
                   <a:srgbClr val="D97706"/>
                 </a:solidFill>
-                <a:latin typeface="Segoe UI"/>
-                <a:cs typeface="Segoe UI"/>
-                <a:ea typeface="Segoe UI"/>
+                <a:latin typeface="Noto Sans Arabic"/>
+                <a:cs typeface="Noto Sans Arabic"/>
+                <a:ea typeface="Noto Sans Arabic"/>
               </a:rPr>
               <a:t>What — ماذا:  </a:t>
             </a:r>
@@ -7615,9 +7622,9 @@
                 <a:solidFill>
                   <a:srgbClr val="221C57"/>
                 </a:solidFill>
-                <a:latin typeface="Segoe UI"/>
-                <a:cs typeface="Segoe UI"/>
-                <a:ea typeface="Segoe UI"/>
+                <a:latin typeface="Noto Sans Arabic"/>
+                <a:cs typeface="Noto Sans Arabic"/>
+                <a:ea typeface="Noto Sans Arabic"/>
               </a:rPr>
               <a:t>قِيس بالضبط؟ (المتغيرات والأدوات)</a:t>
             </a:r>
@@ -7639,9 +7646,9 @@
                 <a:solidFill>
                   <a:srgbClr val="0D9488"/>
                 </a:solidFill>
-                <a:latin typeface="Segoe UI"/>
-                <a:cs typeface="Segoe UI"/>
-                <a:ea typeface="Segoe UI"/>
+                <a:latin typeface="Noto Sans Arabic"/>
+                <a:cs typeface="Noto Sans Arabic"/>
+                <a:ea typeface="Noto Sans Arabic"/>
               </a:rPr>
               <a:t>●  </a:t>
             </a:r>
@@ -7650,9 +7657,9 @@
                 <a:solidFill>
                   <a:srgbClr val="0D9488"/>
                 </a:solidFill>
-                <a:latin typeface="Segoe UI"/>
-                <a:cs typeface="Segoe UI"/>
-                <a:ea typeface="Segoe UI"/>
+                <a:latin typeface="Noto Sans Arabic"/>
+                <a:cs typeface="Noto Sans Arabic"/>
+                <a:ea typeface="Noto Sans Arabic"/>
               </a:rPr>
               <a:t>Where — أين:  </a:t>
             </a:r>
@@ -7661,9 +7668,9 @@
                 <a:solidFill>
                   <a:srgbClr val="221C57"/>
                 </a:solidFill>
-                <a:latin typeface="Segoe UI"/>
-                <a:cs typeface="Segoe UI"/>
-                <a:ea typeface="Segoe UI"/>
+                <a:latin typeface="Noto Sans Arabic"/>
+                <a:cs typeface="Noto Sans Arabic"/>
+                <a:ea typeface="Noto Sans Arabic"/>
               </a:rPr>
               <a:t>أُجري البحث؟ (السياق الجغرافي والثقافي)</a:t>
             </a:r>
@@ -7685,9 +7692,9 @@
                 <a:solidFill>
                   <a:srgbClr val="6D28D9"/>
                 </a:solidFill>
-                <a:latin typeface="Segoe UI"/>
-                <a:cs typeface="Segoe UI"/>
-                <a:ea typeface="Segoe UI"/>
+                <a:latin typeface="Noto Sans Arabic"/>
+                <a:cs typeface="Noto Sans Arabic"/>
+                <a:ea typeface="Noto Sans Arabic"/>
               </a:rPr>
               <a:t>●  </a:t>
             </a:r>
@@ -7696,9 +7703,9 @@
                 <a:solidFill>
                   <a:srgbClr val="6D28D9"/>
                 </a:solidFill>
-                <a:latin typeface="Segoe UI"/>
-                <a:cs typeface="Segoe UI"/>
-                <a:ea typeface="Segoe UI"/>
+                <a:latin typeface="Noto Sans Arabic"/>
+                <a:cs typeface="Noto Sans Arabic"/>
+                <a:ea typeface="Noto Sans Arabic"/>
               </a:rPr>
               <a:t>When — متى:  </a:t>
             </a:r>
@@ -7707,9 +7714,9 @@
                 <a:solidFill>
                   <a:srgbClr val="221C57"/>
                 </a:solidFill>
-                <a:latin typeface="Segoe UI"/>
-                <a:cs typeface="Segoe UI"/>
-                <a:ea typeface="Segoe UI"/>
+                <a:latin typeface="Noto Sans Arabic"/>
+                <a:cs typeface="Noto Sans Arabic"/>
+                <a:ea typeface="Noto Sans Arabic"/>
               </a:rPr>
               <a:t>نُشرت الدراسة؟ (الزمن ومدى الحداثة)</a:t>
             </a:r>
@@ -7731,9 +7738,9 @@
                 <a:solidFill>
                   <a:srgbClr val="047857"/>
                 </a:solidFill>
-                <a:latin typeface="Segoe UI"/>
-                <a:cs typeface="Segoe UI"/>
-                <a:ea typeface="Segoe UI"/>
+                <a:latin typeface="Noto Sans Arabic"/>
+                <a:cs typeface="Noto Sans Arabic"/>
+                <a:ea typeface="Noto Sans Arabic"/>
               </a:rPr>
               <a:t>●  </a:t>
             </a:r>
@@ -7742,9 +7749,9 @@
                 <a:solidFill>
                   <a:srgbClr val="047857"/>
                 </a:solidFill>
-                <a:latin typeface="Segoe UI"/>
-                <a:cs typeface="Segoe UI"/>
-                <a:ea typeface="Segoe UI"/>
+                <a:latin typeface="Noto Sans Arabic"/>
+                <a:cs typeface="Noto Sans Arabic"/>
+                <a:ea typeface="Noto Sans Arabic"/>
               </a:rPr>
               <a:t>How — كيف:  </a:t>
             </a:r>
@@ -7753,9 +7760,9 @@
                 <a:solidFill>
                   <a:srgbClr val="221C57"/>
                 </a:solidFill>
-                <a:latin typeface="Segoe UI"/>
-                <a:cs typeface="Segoe UI"/>
-                <a:ea typeface="Segoe UI"/>
+                <a:latin typeface="Noto Sans Arabic"/>
+                <a:cs typeface="Noto Sans Arabic"/>
+                <a:ea typeface="Noto Sans Arabic"/>
               </a:rPr>
               <a:t>تمت الدراسة؟ (المنهجية والتصميم)</a:t>
             </a:r>
@@ -7777,9 +7784,9 @@
                 <a:solidFill>
                   <a:srgbClr val="BE123C"/>
                 </a:solidFill>
-                <a:latin typeface="Segoe UI"/>
-                <a:cs typeface="Segoe UI"/>
-                <a:ea typeface="Segoe UI"/>
+                <a:latin typeface="Noto Sans Arabic"/>
+                <a:cs typeface="Noto Sans Arabic"/>
+                <a:ea typeface="Noto Sans Arabic"/>
               </a:rPr>
               <a:t>●  </a:t>
             </a:r>
@@ -7788,9 +7795,9 @@
                 <a:solidFill>
                   <a:srgbClr val="BE123C"/>
                 </a:solidFill>
-                <a:latin typeface="Segoe UI"/>
-                <a:cs typeface="Segoe UI"/>
-                <a:ea typeface="Segoe UI"/>
+                <a:latin typeface="Noto Sans Arabic"/>
+                <a:cs typeface="Noto Sans Arabic"/>
+                <a:ea typeface="Noto Sans Arabic"/>
               </a:rPr>
               <a:t>Why — لماذا:  </a:t>
             </a:r>
@@ -7799,9 +7806,9 @@
                 <a:solidFill>
                   <a:srgbClr val="221C57"/>
                 </a:solidFill>
-                <a:latin typeface="Segoe UI"/>
-                <a:cs typeface="Segoe UI"/>
-                <a:ea typeface="Segoe UI"/>
+                <a:latin typeface="Noto Sans Arabic"/>
+                <a:cs typeface="Noto Sans Arabic"/>
+                <a:ea typeface="Noto Sans Arabic"/>
               </a:rPr>
               <a:t>توقفت الدراسة؟ (حدودها المعلنة)</a:t>
             </a:r>
@@ -7954,9 +7961,9 @@
                 <a:solidFill>
                   <a:srgbClr val="0D9488"/>
                 </a:solidFill>
-                <a:latin typeface="Segoe UI"/>
-                <a:cs typeface="Segoe UI"/>
-                <a:ea typeface="Segoe UI"/>
+                <a:latin typeface="Noto Sans Arabic"/>
+                <a:cs typeface="Noto Sans Arabic"/>
+                <a:ea typeface="Noto Sans Arabic"/>
               </a:rPr>
               <a:t>🔎 عبارات تدل على فجوة قابلة للبحث</a:t>
             </a:r>
@@ -8001,9 +8008,9 @@
                 <a:solidFill>
                   <a:srgbClr val="0D9488"/>
                 </a:solidFill>
-                <a:latin typeface="Segoe UI"/>
-                <a:cs typeface="Segoe UI"/>
-                <a:ea typeface="Segoe UI"/>
+                <a:latin typeface="Noto Sans Arabic"/>
+                <a:cs typeface="Noto Sans Arabic"/>
+                <a:ea typeface="Noto Sans Arabic"/>
               </a:rPr>
               <a:t>✔  </a:t>
             </a:r>
@@ -8012,9 +8019,9 @@
                 <a:solidFill>
                   <a:srgbClr val="1D4ED8"/>
                 </a:solidFill>
-                <a:latin typeface="Segoe UI"/>
-                <a:cs typeface="Segoe UI"/>
-                <a:ea typeface="Segoe UI"/>
+                <a:latin typeface="Noto Sans Arabic"/>
+                <a:cs typeface="Noto Sans Arabic"/>
+                <a:ea typeface="Noto Sans Arabic"/>
               </a:rPr>
               <a:t>"This area has not been studied…"</a:t>
             </a:r>
@@ -8023,9 +8030,9 @@
                 <a:solidFill>
                   <a:srgbClr val="6E6A8F"/>
                 </a:solidFill>
-                <a:latin typeface="Segoe UI"/>
-                <a:cs typeface="Segoe UI"/>
-                <a:ea typeface="Segoe UI"/>
+                <a:latin typeface="Noto Sans Arabic"/>
+                <a:cs typeface="Noto Sans Arabic"/>
+                <a:ea typeface="Noto Sans Arabic"/>
               </a:rPr>
               <a:t>  هذه المنطقة لم تُدرس بعد — غياب صريح</a:t>
             </a:r>
@@ -8047,9 +8054,9 @@
                 <a:solidFill>
                   <a:srgbClr val="0D9488"/>
                 </a:solidFill>
-                <a:latin typeface="Segoe UI"/>
-                <a:cs typeface="Segoe UI"/>
-                <a:ea typeface="Segoe UI"/>
+                <a:latin typeface="Noto Sans Arabic"/>
+                <a:cs typeface="Noto Sans Arabic"/>
+                <a:ea typeface="Noto Sans Arabic"/>
               </a:rPr>
               <a:t>✔  </a:t>
             </a:r>
@@ -8058,9 +8065,9 @@
                 <a:solidFill>
                   <a:srgbClr val="1D4ED8"/>
                 </a:solidFill>
-                <a:latin typeface="Segoe UI"/>
-                <a:cs typeface="Segoe UI"/>
-                <a:ea typeface="Segoe UI"/>
+                <a:latin typeface="Noto Sans Arabic"/>
+                <a:cs typeface="Noto Sans Arabic"/>
+                <a:ea typeface="Noto Sans Arabic"/>
               </a:rPr>
               <a:t>"Results are conflicting…"</a:t>
             </a:r>
@@ -8069,9 +8076,9 @@
                 <a:solidFill>
                   <a:srgbClr val="6E6A8F"/>
                 </a:solidFill>
-                <a:latin typeface="Segoe UI"/>
-                <a:cs typeface="Segoe UI"/>
-                <a:ea typeface="Segoe UI"/>
+                <a:latin typeface="Noto Sans Arabic"/>
+                <a:cs typeface="Noto Sans Arabic"/>
+                <a:ea typeface="Noto Sans Arabic"/>
               </a:rPr>
               <a:t>  النتائج متضاربة — تناقض يستدعي الحسم</a:t>
             </a:r>
@@ -8093,9 +8100,9 @@
                 <a:solidFill>
                   <a:srgbClr val="0D9488"/>
                 </a:solidFill>
-                <a:latin typeface="Segoe UI"/>
-                <a:cs typeface="Segoe UI"/>
-                <a:ea typeface="Segoe UI"/>
+                <a:latin typeface="Noto Sans Arabic"/>
+                <a:cs typeface="Noto Sans Arabic"/>
+                <a:ea typeface="Noto Sans Arabic"/>
               </a:rPr>
               <a:t>✔  </a:t>
             </a:r>
@@ -8104,9 +8111,9 @@
                 <a:solidFill>
                   <a:srgbClr val="1D4ED8"/>
                 </a:solidFill>
-                <a:latin typeface="Segoe UI"/>
-                <a:cs typeface="Segoe UI"/>
-                <a:ea typeface="Segoe UI"/>
+                <a:latin typeface="Noto Sans Arabic"/>
+                <a:cs typeface="Noto Sans Arabic"/>
+                <a:ea typeface="Noto Sans Arabic"/>
               </a:rPr>
               <a:t>"The sample does not represent…"</a:t>
             </a:r>
@@ -8115,9 +8122,9 @@
                 <a:solidFill>
                   <a:srgbClr val="6E6A8F"/>
                 </a:solidFill>
-                <a:latin typeface="Segoe UI"/>
-                <a:cs typeface="Segoe UI"/>
-                <a:ea typeface="Segoe UI"/>
+                <a:latin typeface="Noto Sans Arabic"/>
+                <a:cs typeface="Noto Sans Arabic"/>
+                <a:ea typeface="Noto Sans Arabic"/>
               </a:rPr>
               <a:t>  العينة لا تمثّل — قصور في التعميم</a:t>
             </a:r>
@@ -8139,9 +8146,9 @@
                 <a:solidFill>
                   <a:srgbClr val="0D9488"/>
                 </a:solidFill>
-                <a:latin typeface="Segoe UI"/>
-                <a:cs typeface="Segoe UI"/>
-                <a:ea typeface="Segoe UI"/>
+                <a:latin typeface="Noto Sans Arabic"/>
+                <a:cs typeface="Noto Sans Arabic"/>
+                <a:ea typeface="Noto Sans Arabic"/>
               </a:rPr>
               <a:t>✔  </a:t>
             </a:r>
@@ -8150,9 +8157,9 @@
                 <a:solidFill>
                   <a:srgbClr val="1D4ED8"/>
                 </a:solidFill>
-                <a:latin typeface="Segoe UI"/>
-                <a:cs typeface="Segoe UI"/>
-                <a:ea typeface="Segoe UI"/>
+                <a:latin typeface="Noto Sans Arabic"/>
+                <a:cs typeface="Noto Sans Arabic"/>
+                <a:ea typeface="Noto Sans Arabic"/>
               </a:rPr>
               <a:t>"Further research is needed…"</a:t>
             </a:r>
@@ -8161,9 +8168,9 @@
                 <a:solidFill>
                   <a:srgbClr val="6E6A8F"/>
                 </a:solidFill>
-                <a:latin typeface="Segoe UI"/>
-                <a:cs typeface="Segoe UI"/>
-                <a:ea typeface="Segoe UI"/>
+                <a:latin typeface="Noto Sans Arabic"/>
+                <a:cs typeface="Noto Sans Arabic"/>
+                <a:ea typeface="Noto Sans Arabic"/>
               </a:rPr>
               <a:t>  هناك حاجة لمزيد من البحث — دعوة مباشرة</a:t>
             </a:r>
@@ -8185,9 +8192,9 @@
                 <a:solidFill>
                   <a:srgbClr val="0D9488"/>
                 </a:solidFill>
-                <a:latin typeface="Segoe UI"/>
-                <a:cs typeface="Segoe UI"/>
-                <a:ea typeface="Segoe UI"/>
+                <a:latin typeface="Noto Sans Arabic"/>
+                <a:cs typeface="Noto Sans Arabic"/>
+                <a:ea typeface="Noto Sans Arabic"/>
               </a:rPr>
               <a:t>✔  </a:t>
             </a:r>
@@ -8196,9 +8203,9 @@
                 <a:solidFill>
                   <a:srgbClr val="1D4ED8"/>
                 </a:solidFill>
-                <a:latin typeface="Segoe UI"/>
-                <a:cs typeface="Segoe UI"/>
-                <a:ea typeface="Segoe UI"/>
+                <a:latin typeface="Noto Sans Arabic"/>
+                <a:cs typeface="Noto Sans Arabic"/>
+                <a:ea typeface="Noto Sans Arabic"/>
               </a:rPr>
               <a:t>"Only quantitative methods were used…"</a:t>
             </a:r>
@@ -8207,9 +8214,9 @@
                 <a:solidFill>
                   <a:srgbClr val="6E6A8F"/>
                 </a:solidFill>
-                <a:latin typeface="Segoe UI"/>
-                <a:cs typeface="Segoe UI"/>
-                <a:ea typeface="Segoe UI"/>
+                <a:latin typeface="Noto Sans Arabic"/>
+                <a:cs typeface="Noto Sans Arabic"/>
+                <a:ea typeface="Noto Sans Arabic"/>
               </a:rPr>
               <a:t>  اقتصار على منهج واحد — فجوة منهجية</a:t>
             </a:r>
@@ -8231,9 +8238,9 @@
                 <a:solidFill>
                   <a:srgbClr val="0D9488"/>
                 </a:solidFill>
-                <a:latin typeface="Segoe UI"/>
-                <a:cs typeface="Segoe UI"/>
-                <a:ea typeface="Segoe UI"/>
+                <a:latin typeface="Noto Sans Arabic"/>
+                <a:cs typeface="Noto Sans Arabic"/>
+                <a:ea typeface="Noto Sans Arabic"/>
               </a:rPr>
               <a:t>✔  </a:t>
             </a:r>
@@ -8242,9 +8249,9 @@
                 <a:solidFill>
                   <a:srgbClr val="1D4ED8"/>
                 </a:solidFill>
-                <a:latin typeface="Segoe UI"/>
-                <a:cs typeface="Segoe UI"/>
-                <a:ea typeface="Segoe UI"/>
+                <a:latin typeface="Noto Sans Arabic"/>
+                <a:cs typeface="Noto Sans Arabic"/>
+                <a:ea typeface="Noto Sans Arabic"/>
               </a:rPr>
               <a:t>"Before 2020…"</a:t>
             </a:r>
@@ -8253,9 +8260,9 @@
                 <a:solidFill>
                   <a:srgbClr val="6E6A8F"/>
                 </a:solidFill>
-                <a:latin typeface="Segoe UI"/>
-                <a:cs typeface="Segoe UI"/>
-                <a:ea typeface="Segoe UI"/>
+                <a:latin typeface="Noto Sans Arabic"/>
+                <a:cs typeface="Noto Sans Arabic"/>
+                <a:ea typeface="Noto Sans Arabic"/>
               </a:rPr>
               <a:t>  بيانات قديمة — فجوة زمنية محتملة</a:t>
             </a:r>
@@ -8348,9 +8355,9 @@
                 <a:solidFill>
                   <a:srgbClr val="A21CAF"/>
                 </a:solidFill>
-                <a:latin typeface="Segoe UI"/>
-                <a:cs typeface="Segoe UI"/>
-                <a:ea typeface="Segoe UI"/>
+                <a:latin typeface="Noto Sans Arabic"/>
+                <a:cs typeface="Noto Sans Arabic"/>
+                <a:ea typeface="Noto Sans Arabic"/>
               </a:rPr>
               <a:t>«التفكير النقدي لا يعني أن ننتقد الدراسات السابقة — بل أن نبني عليها ونطوّرها»  </a:t>
             </a:r>
@@ -8359,9 +8366,9 @@
                 <a:solidFill>
                   <a:srgbClr val="6E6A8F"/>
                 </a:solidFill>
-                <a:latin typeface="Segoe UI"/>
-                <a:cs typeface="Segoe UI"/>
-                <a:ea typeface="Segoe UI"/>
+                <a:latin typeface="Noto Sans Arabic"/>
+                <a:cs typeface="Noto Sans Arabic"/>
+                <a:ea typeface="Noto Sans Arabic"/>
               </a:rPr>
               <a:t>— من شرح الورشة</a:t>
             </a:r>
@@ -8468,9 +8475,9 @@
                 <a:solidFill>
                   <a:srgbClr val="ECE9FA"/>
                 </a:solidFill>
-                <a:latin typeface="Segoe UI"/>
-                <a:cs typeface="Segoe UI"/>
-                <a:ea typeface="Segoe UI"/>
+                <a:latin typeface="Noto Sans Arabic"/>
+                <a:cs typeface="Noto Sans Arabic"/>
+                <a:ea typeface="Noto Sans Arabic"/>
               </a:rPr>
               <a:t>12</a:t>
             </a:r>
@@ -8539,9 +8546,9 @@
                 <a:solidFill>
                   <a:srgbClr val="FFFFFF"/>
                 </a:solidFill>
-                <a:latin typeface="Segoe UI"/>
-                <a:cs typeface="Segoe UI"/>
-                <a:ea typeface="Segoe UI"/>
+                <a:latin typeface="Noto Sans Arabic"/>
+                <a:cs typeface="Noto Sans Arabic"/>
+                <a:ea typeface="Noto Sans Arabic"/>
               </a:rPr>
               <a:t>⚖️</a:t>
             </a:r>
@@ -8586,9 +8593,9 @@
                 <a:solidFill>
                   <a:srgbClr val="0D9488"/>
                 </a:solidFill>
-                <a:latin typeface="Segoe UI"/>
-                <a:cs typeface="Segoe UI"/>
-                <a:ea typeface="Segoe UI"/>
+                <a:latin typeface="Noto Sans Arabic"/>
+                <a:cs typeface="Noto Sans Arabic"/>
+                <a:ea typeface="Noto Sans Arabic"/>
               </a:rPr>
               <a:t>STRONG GAP VS. WEAK GAP</a:t>
             </a:r>
@@ -8633,9 +8640,9 @@
                 <a:solidFill>
                   <a:srgbClr val="221C57"/>
                 </a:solidFill>
-                <a:latin typeface="Segoe UI"/>
-                <a:cs typeface="Segoe UI"/>
-                <a:ea typeface="Segoe UI"/>
+                <a:latin typeface="Noto Sans Arabic"/>
+                <a:cs typeface="Noto Sans Arabic"/>
+                <a:ea typeface="Noto Sans Arabic"/>
               </a:rPr>
               <a:t>الفجوة القوية والفجوة الضعيفة</a:t>
             </a:r>
@@ -8804,9 +8811,9 @@
                 <a:solidFill>
                   <a:srgbClr val="FFFFFF"/>
                 </a:solidFill>
-                <a:latin typeface="Segoe UI"/>
-                <a:cs typeface="Segoe UI"/>
-                <a:ea typeface="Segoe UI"/>
+                <a:latin typeface="Noto Sans Arabic"/>
+                <a:cs typeface="Noto Sans Arabic"/>
+                <a:ea typeface="Noto Sans Arabic"/>
               </a:rPr>
               <a:t>12</a:t>
             </a:r>
@@ -8851,9 +8858,9 @@
                 <a:solidFill>
                   <a:srgbClr val="6E6A8F"/>
                 </a:solidFill>
-                <a:latin typeface="Segoe UI"/>
-                <a:cs typeface="Segoe UI"/>
-                <a:ea typeface="Segoe UI"/>
+                <a:latin typeface="Noto Sans Arabic"/>
+                <a:cs typeface="Noto Sans Arabic"/>
+                <a:ea typeface="Noto Sans Arabic"/>
               </a:rPr>
               <a:t>الفجوات البحثية  •  د. هناء حسين الأهيمر</a:t>
             </a:r>
@@ -9006,9 +9013,9 @@
                 <a:solidFill>
                   <a:srgbClr val="047857"/>
                 </a:solidFill>
-                <a:latin typeface="Segoe UI"/>
-                <a:cs typeface="Segoe UI"/>
-                <a:ea typeface="Segoe UI"/>
+                <a:latin typeface="Noto Sans Arabic"/>
+                <a:cs typeface="Noto Sans Arabic"/>
+                <a:ea typeface="Noto Sans Arabic"/>
               </a:rPr>
               <a:t>💪 الفجوة القوية — Strong Gap</a:t>
             </a:r>
@@ -9053,9 +9060,9 @@
                 <a:solidFill>
                   <a:srgbClr val="047857"/>
                 </a:solidFill>
-                <a:latin typeface="Segoe UI"/>
-                <a:cs typeface="Segoe UI"/>
-                <a:ea typeface="Segoe UI"/>
+                <a:latin typeface="Noto Sans Arabic"/>
+                <a:cs typeface="Noto Sans Arabic"/>
+                <a:ea typeface="Noto Sans Arabic"/>
               </a:rPr>
               <a:t>✔  </a:t>
             </a:r>
@@ -9064,9 +9071,9 @@
                 <a:solidFill>
                   <a:srgbClr val="221C57"/>
                 </a:solidFill>
-                <a:latin typeface="Segoe UI"/>
-                <a:cs typeface="Segoe UI"/>
-                <a:ea typeface="Segoe UI"/>
+                <a:latin typeface="Noto Sans Arabic"/>
+                <a:cs typeface="Noto Sans Arabic"/>
+                <a:ea typeface="Noto Sans Arabic"/>
               </a:rPr>
               <a:t>مدعومة بالأدلة</a:t>
             </a:r>
@@ -9075,9 +9082,9 @@
                 <a:solidFill>
                   <a:srgbClr val="6E6A8F"/>
                 </a:solidFill>
-                <a:latin typeface="Segoe UI"/>
-                <a:cs typeface="Segoe UI"/>
-                <a:ea typeface="Segoe UI"/>
+                <a:latin typeface="Noto Sans Arabic"/>
+                <a:cs typeface="Noto Sans Arabic"/>
+                <a:ea typeface="Noto Sans Arabic"/>
               </a:rPr>
               <a:t>  —  تستند إلى مراجعة أدبيات حقيقية تثبت الغياب</a:t>
             </a:r>
@@ -9099,9 +9106,9 @@
                 <a:solidFill>
                   <a:srgbClr val="047857"/>
                 </a:solidFill>
-                <a:latin typeface="Segoe UI"/>
-                <a:cs typeface="Segoe UI"/>
-                <a:ea typeface="Segoe UI"/>
+                <a:latin typeface="Noto Sans Arabic"/>
+                <a:cs typeface="Noto Sans Arabic"/>
+                <a:ea typeface="Noto Sans Arabic"/>
               </a:rPr>
               <a:t>✔  </a:t>
             </a:r>
@@ -9110,9 +9117,9 @@
                 <a:solidFill>
                   <a:srgbClr val="221C57"/>
                 </a:solidFill>
-                <a:latin typeface="Segoe UI"/>
-                <a:cs typeface="Segoe UI"/>
-                <a:ea typeface="Segoe UI"/>
+                <a:latin typeface="Noto Sans Arabic"/>
+                <a:cs typeface="Noto Sans Arabic"/>
+                <a:ea typeface="Noto Sans Arabic"/>
               </a:rPr>
               <a:t>محددة وقابلة للقياس</a:t>
             </a:r>
@@ -9121,9 +9128,9 @@
                 <a:solidFill>
                   <a:srgbClr val="6E6A8F"/>
                 </a:solidFill>
-                <a:latin typeface="Segoe UI"/>
-                <a:cs typeface="Segoe UI"/>
-                <a:ea typeface="Segoe UI"/>
+                <a:latin typeface="Noto Sans Arabic"/>
+                <a:cs typeface="Noto Sans Arabic"/>
+                <a:ea typeface="Noto Sans Arabic"/>
               </a:rPr>
               <a:t>  —  موضوع + فئة + سياق + إطار زمني واضح</a:t>
             </a:r>
@@ -9145,9 +9152,9 @@
                 <a:solidFill>
                   <a:srgbClr val="047857"/>
                 </a:solidFill>
-                <a:latin typeface="Segoe UI"/>
-                <a:cs typeface="Segoe UI"/>
-                <a:ea typeface="Segoe UI"/>
+                <a:latin typeface="Noto Sans Arabic"/>
+                <a:cs typeface="Noto Sans Arabic"/>
+                <a:ea typeface="Noto Sans Arabic"/>
               </a:rPr>
               <a:t>✔  </a:t>
             </a:r>
@@ -9156,9 +9163,9 @@
                 <a:solidFill>
                   <a:srgbClr val="221C57"/>
                 </a:solidFill>
-                <a:latin typeface="Segoe UI"/>
-                <a:cs typeface="Segoe UI"/>
-                <a:ea typeface="Segoe UI"/>
+                <a:latin typeface="Noto Sans Arabic"/>
+                <a:cs typeface="Noto Sans Arabic"/>
+                <a:ea typeface="Noto Sans Arabic"/>
               </a:rPr>
               <a:t>لها قيمة علمية وعملية</a:t>
             </a:r>
@@ -9167,9 +9174,9 @@
                 <a:solidFill>
                   <a:srgbClr val="6E6A8F"/>
                 </a:solidFill>
-                <a:latin typeface="Segoe UI"/>
-                <a:cs typeface="Segoe UI"/>
-                <a:ea typeface="Segoe UI"/>
+                <a:latin typeface="Noto Sans Arabic"/>
+                <a:cs typeface="Noto Sans Arabic"/>
+                <a:ea typeface="Noto Sans Arabic"/>
               </a:rPr>
               <a:t>  —  سدّها يغيّر فهماً علمياً أو ممارسة واقعية</a:t>
             </a:r>
@@ -9191,9 +9198,9 @@
                 <a:solidFill>
                   <a:srgbClr val="047857"/>
                 </a:solidFill>
-                <a:latin typeface="Segoe UI"/>
-                <a:cs typeface="Segoe UI"/>
-                <a:ea typeface="Segoe UI"/>
+                <a:latin typeface="Noto Sans Arabic"/>
+                <a:cs typeface="Noto Sans Arabic"/>
+                <a:ea typeface="Noto Sans Arabic"/>
               </a:rPr>
               <a:t>✔  </a:t>
             </a:r>
@@ -9202,9 +9209,9 @@
                 <a:solidFill>
                   <a:srgbClr val="221C57"/>
                 </a:solidFill>
-                <a:latin typeface="Segoe UI"/>
-                <a:cs typeface="Segoe UI"/>
-                <a:ea typeface="Segoe UI"/>
+                <a:latin typeface="Noto Sans Arabic"/>
+                <a:cs typeface="Noto Sans Arabic"/>
+                <a:ea typeface="Noto Sans Arabic"/>
               </a:rPr>
               <a:t>قابلة للمعالجة</a:t>
             </a:r>
@@ -9213,9 +9220,9 @@
                 <a:solidFill>
                   <a:srgbClr val="6E6A8F"/>
                 </a:solidFill>
-                <a:latin typeface="Segoe UI"/>
-                <a:cs typeface="Segoe UI"/>
-                <a:ea typeface="Segoe UI"/>
+                <a:latin typeface="Noto Sans Arabic"/>
+                <a:cs typeface="Noto Sans Arabic"/>
+                <a:ea typeface="Noto Sans Arabic"/>
               </a:rPr>
               <a:t>  —  يمكن تصميم دراسة واقعية وقابلة للتنفيذ لسدّها</a:t>
             </a:r>
@@ -9237,9 +9244,9 @@
                 <a:solidFill>
                   <a:srgbClr val="047857"/>
                 </a:solidFill>
-                <a:latin typeface="Segoe UI"/>
-                <a:cs typeface="Segoe UI"/>
-                <a:ea typeface="Segoe UI"/>
+                <a:latin typeface="Noto Sans Arabic"/>
+                <a:cs typeface="Noto Sans Arabic"/>
+                <a:ea typeface="Noto Sans Arabic"/>
               </a:rPr>
               <a:t>✔  </a:t>
             </a:r>
@@ -9248,9 +9255,9 @@
                 <a:solidFill>
                   <a:srgbClr val="221C57"/>
                 </a:solidFill>
-                <a:latin typeface="Segoe UI"/>
-                <a:cs typeface="Segoe UI"/>
-                <a:ea typeface="Segoe UI"/>
+                <a:latin typeface="Noto Sans Arabic"/>
+                <a:cs typeface="Noto Sans Arabic"/>
+                <a:ea typeface="Noto Sans Arabic"/>
               </a:rPr>
               <a:t>مرتبطة بسياق محدد</a:t>
             </a:r>
@@ -9259,9 +9266,9 @@
                 <a:solidFill>
                   <a:srgbClr val="6E6A8F"/>
                 </a:solidFill>
-                <a:latin typeface="Segoe UI"/>
-                <a:cs typeface="Segoe UI"/>
-                <a:ea typeface="Segoe UI"/>
+                <a:latin typeface="Noto Sans Arabic"/>
+                <a:cs typeface="Noto Sans Arabic"/>
+                <a:ea typeface="Noto Sans Arabic"/>
               </a:rPr>
               <a:t>  —  بيئة أو مجتمع أو قطاع معيّن — لا عموميات</a:t>
             </a:r>
@@ -9414,9 +9421,9 @@
                 <a:solidFill>
                   <a:srgbClr val="BE123C"/>
                 </a:solidFill>
-                <a:latin typeface="Segoe UI"/>
-                <a:cs typeface="Segoe UI"/>
-                <a:ea typeface="Segoe UI"/>
+                <a:latin typeface="Noto Sans Arabic"/>
+                <a:cs typeface="Noto Sans Arabic"/>
+                <a:ea typeface="Noto Sans Arabic"/>
               </a:rPr>
               <a:t>⚠️ الفجوة الضعيفة — Weak Gap</a:t>
             </a:r>
@@ -9461,9 +9468,9 @@
                 <a:solidFill>
                   <a:srgbClr val="BE123C"/>
                 </a:solidFill>
-                <a:latin typeface="Segoe UI"/>
-                <a:cs typeface="Segoe UI"/>
-                <a:ea typeface="Segoe UI"/>
+                <a:latin typeface="Noto Sans Arabic"/>
+                <a:cs typeface="Noto Sans Arabic"/>
+                <a:ea typeface="Noto Sans Arabic"/>
               </a:rPr>
               <a:t>✘  </a:t>
             </a:r>
@@ -9472,9 +9479,9 @@
                 <a:solidFill>
                   <a:srgbClr val="221C57"/>
                 </a:solidFill>
-                <a:latin typeface="Segoe UI"/>
-                <a:cs typeface="Segoe UI"/>
-                <a:ea typeface="Segoe UI"/>
+                <a:latin typeface="Noto Sans Arabic"/>
+                <a:cs typeface="Noto Sans Arabic"/>
+                <a:ea typeface="Noto Sans Arabic"/>
               </a:rPr>
               <a:t>عامة جداً وغير واضحة</a:t>
             </a:r>
@@ -9483,9 +9490,9 @@
                 <a:solidFill>
                   <a:srgbClr val="6E6A8F"/>
                 </a:solidFill>
-                <a:latin typeface="Segoe UI"/>
-                <a:cs typeface="Segoe UI"/>
-                <a:ea typeface="Segoe UI"/>
+                <a:latin typeface="Noto Sans Arabic"/>
+                <a:cs typeface="Noto Sans Arabic"/>
+                <a:ea typeface="Noto Sans Arabic"/>
               </a:rPr>
               <a:t>  —  بلا موضوع محدد أو سياق أو حدود</a:t>
             </a:r>
@@ -9507,9 +9514,9 @@
                 <a:solidFill>
                   <a:srgbClr val="BE123C"/>
                 </a:solidFill>
-                <a:latin typeface="Segoe UI"/>
-                <a:cs typeface="Segoe UI"/>
-                <a:ea typeface="Segoe UI"/>
+                <a:latin typeface="Noto Sans Arabic"/>
+                <a:cs typeface="Noto Sans Arabic"/>
+                <a:ea typeface="Noto Sans Arabic"/>
               </a:rPr>
               <a:t>✘  </a:t>
             </a:r>
@@ -9518,9 +9525,9 @@
                 <a:solidFill>
                   <a:srgbClr val="221C57"/>
                 </a:solidFill>
-                <a:latin typeface="Segoe UI"/>
-                <a:cs typeface="Segoe UI"/>
-                <a:ea typeface="Segoe UI"/>
+                <a:latin typeface="Noto Sans Arabic"/>
+                <a:cs typeface="Noto Sans Arabic"/>
+                <a:ea typeface="Noto Sans Arabic"/>
               </a:rPr>
               <a:t>غير مدعومة بمراجعة كافية</a:t>
             </a:r>
@@ -9529,9 +9536,9 @@
                 <a:solidFill>
                   <a:srgbClr val="6E6A8F"/>
                 </a:solidFill>
-                <a:latin typeface="Segoe UI"/>
-                <a:cs typeface="Segoe UI"/>
-                <a:ea typeface="Segoe UI"/>
+                <a:latin typeface="Noto Sans Arabic"/>
+                <a:cs typeface="Noto Sans Arabic"/>
+                <a:ea typeface="Noto Sans Arabic"/>
               </a:rPr>
               <a:t>  —  انطباع شخصي وليس مسحاً منهجياً</a:t>
             </a:r>
@@ -9553,9 +9560,9 @@
                 <a:solidFill>
                   <a:srgbClr val="BE123C"/>
                 </a:solidFill>
-                <a:latin typeface="Segoe UI"/>
-                <a:cs typeface="Segoe UI"/>
-                <a:ea typeface="Segoe UI"/>
+                <a:latin typeface="Noto Sans Arabic"/>
+                <a:cs typeface="Noto Sans Arabic"/>
+                <a:ea typeface="Noto Sans Arabic"/>
               </a:rPr>
               <a:t>✘  </a:t>
             </a:r>
@@ -9564,9 +9571,9 @@
                 <a:solidFill>
                   <a:srgbClr val="221C57"/>
                 </a:solidFill>
-                <a:latin typeface="Segoe UI"/>
-                <a:cs typeface="Segoe UI"/>
-                <a:ea typeface="Segoe UI"/>
+                <a:latin typeface="Noto Sans Arabic"/>
+                <a:cs typeface="Noto Sans Arabic"/>
+                <a:ea typeface="Noto Sans Arabic"/>
               </a:rPr>
               <a:t>«لم يدرسها أحد» بلا دليل</a:t>
             </a:r>
@@ -9575,9 +9582,9 @@
                 <a:solidFill>
                   <a:srgbClr val="6E6A8F"/>
                 </a:solidFill>
-                <a:latin typeface="Segoe UI"/>
-                <a:cs typeface="Segoe UI"/>
-                <a:ea typeface="Segoe UI"/>
+                <a:latin typeface="Noto Sans Arabic"/>
+                <a:cs typeface="Noto Sans Arabic"/>
+                <a:ea typeface="Noto Sans Arabic"/>
               </a:rPr>
               <a:t>  —  ادعاء يسهل دحضه بدراسة واحدة مضادة</a:t>
             </a:r>
@@ -9599,9 +9606,9 @@
                 <a:solidFill>
                   <a:srgbClr val="BE123C"/>
                 </a:solidFill>
-                <a:latin typeface="Segoe UI"/>
-                <a:cs typeface="Segoe UI"/>
-                <a:ea typeface="Segoe UI"/>
+                <a:latin typeface="Noto Sans Arabic"/>
+                <a:cs typeface="Noto Sans Arabic"/>
+                <a:ea typeface="Noto Sans Arabic"/>
               </a:rPr>
               <a:t>✘  </a:t>
             </a:r>
@@ -9610,9 +9617,9 @@
                 <a:solidFill>
                   <a:srgbClr val="221C57"/>
                 </a:solidFill>
-                <a:latin typeface="Segoe UI"/>
-                <a:cs typeface="Segoe UI"/>
-                <a:ea typeface="Segoe UI"/>
+                <a:latin typeface="Noto Sans Arabic"/>
+                <a:cs typeface="Noto Sans Arabic"/>
+                <a:ea typeface="Noto Sans Arabic"/>
               </a:rPr>
               <a:t>لا تضيف قيمة للمعرفة</a:t>
             </a:r>
@@ -9621,9 +9628,9 @@
                 <a:solidFill>
                   <a:srgbClr val="6E6A8F"/>
                 </a:solidFill>
-                <a:latin typeface="Segoe UI"/>
-                <a:cs typeface="Segoe UI"/>
-                <a:ea typeface="Segoe UI"/>
+                <a:latin typeface="Noto Sans Arabic"/>
+                <a:cs typeface="Noto Sans Arabic"/>
+                <a:ea typeface="Noto Sans Arabic"/>
               </a:rPr>
               <a:t>  —  سدّها لا يغيّر شيئاً يُذكر علمياً أو عملياً</a:t>
             </a:r>
@@ -9645,9 +9652,9 @@
                 <a:solidFill>
                   <a:srgbClr val="BE123C"/>
                 </a:solidFill>
-                <a:latin typeface="Segoe UI"/>
-                <a:cs typeface="Segoe UI"/>
-                <a:ea typeface="Segoe UI"/>
+                <a:latin typeface="Noto Sans Arabic"/>
+                <a:cs typeface="Noto Sans Arabic"/>
+                <a:ea typeface="Noto Sans Arabic"/>
               </a:rPr>
               <a:t>✘  </a:t>
             </a:r>
@@ -9656,9 +9663,9 @@
                 <a:solidFill>
                   <a:srgbClr val="221C57"/>
                 </a:solidFill>
-                <a:latin typeface="Segoe UI"/>
-                <a:cs typeface="Segoe UI"/>
-                <a:ea typeface="Segoe UI"/>
+                <a:latin typeface="Noto Sans Arabic"/>
+                <a:cs typeface="Noto Sans Arabic"/>
+                <a:ea typeface="Noto Sans Arabic"/>
               </a:rPr>
               <a:t>تكرار لدراسات سابقة</a:t>
             </a:r>
@@ -9667,9 +9674,9 @@
                 <a:solidFill>
                   <a:srgbClr val="6E6A8F"/>
                 </a:solidFill>
-                <a:latin typeface="Segoe UI"/>
-                <a:cs typeface="Segoe UI"/>
-                <a:ea typeface="Segoe UI"/>
+                <a:latin typeface="Noto Sans Arabic"/>
+                <a:cs typeface="Noto Sans Arabic"/>
+                <a:ea typeface="Noto Sans Arabic"/>
               </a:rPr>
               <a:t>  —  إعادة إنتاج مقنَّعة وليست بحثاً جديداً</a:t>
             </a:r>
@@ -9768,9 +9775,9 @@
                 <a:solidFill>
                   <a:srgbClr val="D97706"/>
                 </a:solidFill>
-                <a:latin typeface="Segoe UI"/>
-                <a:cs typeface="Segoe UI"/>
-                <a:ea typeface="Segoe UI"/>
+                <a:latin typeface="Noto Sans Arabic"/>
+                <a:cs typeface="Noto Sans Arabic"/>
+                <a:ea typeface="Noto Sans Arabic"/>
               </a:rPr>
               <a:t>🧪 المثال المقارن من الورشة —  </a:t>
             </a:r>
@@ -9779,9 +9786,9 @@
                 <a:solidFill>
                   <a:srgbClr val="BE123C"/>
                 </a:solidFill>
-                <a:latin typeface="Segoe UI"/>
-                <a:cs typeface="Segoe UI"/>
-                <a:ea typeface="Segoe UI"/>
+                <a:latin typeface="Noto Sans Arabic"/>
+                <a:cs typeface="Noto Sans Arabic"/>
+                <a:ea typeface="Noto Sans Arabic"/>
               </a:rPr>
               <a:t>ضعيفة: </a:t>
             </a:r>
@@ -9790,9 +9797,9 @@
                 <a:solidFill>
                   <a:srgbClr val="221C57"/>
                 </a:solidFill>
-                <a:latin typeface="Segoe UI"/>
-                <a:cs typeface="Segoe UI"/>
-                <a:ea typeface="Segoe UI"/>
+                <a:latin typeface="Noto Sans Arabic"/>
+                <a:cs typeface="Noto Sans Arabic"/>
+                <a:ea typeface="Noto Sans Arabic"/>
               </a:rPr>
               <a:t>«الصحة النفسية لم تُدرس بشكل كافٍ»  —  عامة، بلا فئة ولا سياق ولا زمن</a:t>
             </a:r>
@@ -9814,9 +9821,9 @@
                 <a:solidFill>
                   <a:srgbClr val="047857"/>
                 </a:solidFill>
-                <a:latin typeface="Segoe UI"/>
-                <a:cs typeface="Segoe UI"/>
-                <a:ea typeface="Segoe UI"/>
+                <a:latin typeface="Noto Sans Arabic"/>
+                <a:cs typeface="Noto Sans Arabic"/>
+                <a:ea typeface="Noto Sans Arabic"/>
               </a:rPr>
               <a:t>قوية: </a:t>
             </a:r>
@@ -9825,9 +9832,9 @@
                 <a:solidFill>
                   <a:srgbClr val="221C57"/>
                 </a:solidFill>
-                <a:latin typeface="Segoe UI"/>
-                <a:cs typeface="Segoe UI"/>
-                <a:ea typeface="Segoe UI"/>
+                <a:latin typeface="Noto Sans Arabic"/>
+                <a:cs typeface="Noto Sans Arabic"/>
+                <a:ea typeface="Noto Sans Arabic"/>
               </a:rPr>
               <a:t>«لا توجد دراسة حول تأثير الدراسة عن بُعد على القلق عند طلاب الجامعات العربية بعد 2020»  —  واضحة وقابلة للبحث</a:t>
             </a:r>
@@ -9934,9 +9941,9 @@
                 <a:solidFill>
                   <a:srgbClr val="ECE9FA"/>
                 </a:solidFill>
-                <a:latin typeface="Segoe UI"/>
-                <a:cs typeface="Segoe UI"/>
-                <a:ea typeface="Segoe UI"/>
+                <a:latin typeface="Noto Sans Arabic"/>
+                <a:cs typeface="Noto Sans Arabic"/>
+                <a:ea typeface="Noto Sans Arabic"/>
               </a:rPr>
               <a:t>13</a:t>
             </a:r>
@@ -10005,9 +10012,9 @@
                 <a:solidFill>
                   <a:srgbClr val="FFFFFF"/>
                 </a:solidFill>
-                <a:latin typeface="Segoe UI"/>
-                <a:cs typeface="Segoe UI"/>
-                <a:ea typeface="Segoe UI"/>
+                <a:latin typeface="Noto Sans Arabic"/>
+                <a:cs typeface="Noto Sans Arabic"/>
+                <a:ea typeface="Noto Sans Arabic"/>
               </a:rPr>
               <a:t>🚀</a:t>
             </a:r>
@@ -10052,9 +10059,9 @@
                 <a:solidFill>
                   <a:srgbClr val="BE123C"/>
                 </a:solidFill>
-                <a:latin typeface="Segoe UI"/>
-                <a:cs typeface="Segoe UI"/>
-                <a:ea typeface="Segoe UI"/>
+                <a:latin typeface="Noto Sans Arabic"/>
+                <a:cs typeface="Noto Sans Arabic"/>
+                <a:ea typeface="Noto Sans Arabic"/>
               </a:rPr>
               <a:t>A 7-STEP PRACTICAL ROADMAP</a:t>
             </a:r>
@@ -10099,9 +10106,9 @@
                 <a:solidFill>
                   <a:srgbClr val="221C57"/>
                 </a:solidFill>
-                <a:latin typeface="Segoe UI"/>
-                <a:cs typeface="Segoe UI"/>
-                <a:ea typeface="Segoe UI"/>
+                <a:latin typeface="Noto Sans Arabic"/>
+                <a:cs typeface="Noto Sans Arabic"/>
+                <a:ea typeface="Noto Sans Arabic"/>
               </a:rPr>
               <a:t>خارطة طريق عملية: من الصفر إلى الفجوة</a:t>
             </a:r>
@@ -10270,9 +10277,9 @@
                 <a:solidFill>
                   <a:srgbClr val="FFFFFF"/>
                 </a:solidFill>
-                <a:latin typeface="Segoe UI"/>
-                <a:cs typeface="Segoe UI"/>
-                <a:ea typeface="Segoe UI"/>
+                <a:latin typeface="Noto Sans Arabic"/>
+                <a:cs typeface="Noto Sans Arabic"/>
+                <a:ea typeface="Noto Sans Arabic"/>
               </a:rPr>
               <a:t>13</a:t>
             </a:r>
@@ -10317,9 +10324,9 @@
                 <a:solidFill>
                   <a:srgbClr val="6E6A8F"/>
                 </a:solidFill>
-                <a:latin typeface="Segoe UI"/>
-                <a:cs typeface="Segoe UI"/>
-                <a:ea typeface="Segoe UI"/>
+                <a:latin typeface="Noto Sans Arabic"/>
+                <a:cs typeface="Noto Sans Arabic"/>
+                <a:ea typeface="Noto Sans Arabic"/>
               </a:rPr>
               <a:t>الفجوات البحثية  •  د. هناء حسين الأهيمر</a:t>
             </a:r>
@@ -10440,9 +10447,9 @@
                 <a:solidFill>
                   <a:srgbClr val="FFFFFF"/>
                 </a:solidFill>
-                <a:latin typeface="Segoe UI"/>
-                <a:cs typeface="Segoe UI"/>
-                <a:ea typeface="Segoe UI"/>
+                <a:latin typeface="Noto Sans Arabic"/>
+                <a:cs typeface="Noto Sans Arabic"/>
+                <a:ea typeface="Noto Sans Arabic"/>
               </a:rPr>
               <a:t>١</a:t>
             </a:r>
@@ -10487,9 +10494,9 @@
                 <a:solidFill>
                   <a:srgbClr val="A21CAF"/>
                 </a:solidFill>
-                <a:latin typeface="Segoe UI"/>
-                <a:cs typeface="Segoe UI"/>
-                <a:ea typeface="Segoe UI"/>
+                <a:latin typeface="Noto Sans Arabic"/>
+                <a:cs typeface="Noto Sans Arabic"/>
+                <a:ea typeface="Noto Sans Arabic"/>
               </a:rPr>
               <a:t>حدّد مجالك بدقة</a:t>
             </a:r>
@@ -10534,9 +10541,9 @@
                 <a:solidFill>
                   <a:srgbClr val="221C57"/>
                 </a:solidFill>
-                <a:latin typeface="Segoe UI"/>
-                <a:cs typeface="Segoe UI"/>
-                <a:ea typeface="Segoe UI"/>
+                <a:latin typeface="Noto Sans Arabic"/>
+                <a:cs typeface="Noto Sans Arabic"/>
+                <a:ea typeface="Noto Sans Arabic"/>
               </a:rPr>
               <a:t>تخصص فرعي ضيق — «التعليم الإلكتروني للمرحلة الابتدائية» لا «التعليم» عموماً</a:t>
             </a:r>
@@ -10657,9 +10664,9 @@
                 <a:solidFill>
                   <a:srgbClr val="FFFFFF"/>
                 </a:solidFill>
-                <a:latin typeface="Segoe UI"/>
-                <a:cs typeface="Segoe UI"/>
-                <a:ea typeface="Segoe UI"/>
+                <a:latin typeface="Noto Sans Arabic"/>
+                <a:cs typeface="Noto Sans Arabic"/>
+                <a:ea typeface="Noto Sans Arabic"/>
               </a:rPr>
               <a:t>٢</a:t>
             </a:r>
@@ -10704,9 +10711,9 @@
                 <a:solidFill>
                   <a:srgbClr val="D97706"/>
                 </a:solidFill>
-                <a:latin typeface="Segoe UI"/>
-                <a:cs typeface="Segoe UI"/>
-                <a:ea typeface="Segoe UI"/>
+                <a:latin typeface="Noto Sans Arabic"/>
+                <a:cs typeface="Noto Sans Arabic"/>
+                <a:ea typeface="Noto Sans Arabic"/>
               </a:rPr>
               <a:t>اجمع أحدث الدراسات</a:t>
             </a:r>
@@ -10751,9 +10758,9 @@
                 <a:solidFill>
                   <a:srgbClr val="221C57"/>
                 </a:solidFill>
-                <a:latin typeface="Segoe UI"/>
-                <a:cs typeface="Segoe UI"/>
-                <a:ea typeface="Segoe UI"/>
+                <a:latin typeface="Noto Sans Arabic"/>
+                <a:cs typeface="Noto Sans Arabic"/>
+                <a:ea typeface="Noto Sans Arabic"/>
               </a:rPr>
               <a:t>20–30 دراسة من آخر 5 سنوات عبر Semantic Scholar وGoogle Scholar</a:t>
             </a:r>
@@ -10874,9 +10881,9 @@
                 <a:solidFill>
                   <a:srgbClr val="FFFFFF"/>
                 </a:solidFill>
-                <a:latin typeface="Segoe UI"/>
-                <a:cs typeface="Segoe UI"/>
-                <a:ea typeface="Segoe UI"/>
+                <a:latin typeface="Noto Sans Arabic"/>
+                <a:cs typeface="Noto Sans Arabic"/>
+                <a:ea typeface="Noto Sans Arabic"/>
               </a:rPr>
               <a:t>٣</a:t>
             </a:r>
@@ -10921,9 +10928,9 @@
                 <a:solidFill>
                   <a:srgbClr val="0D9488"/>
                 </a:solidFill>
-                <a:latin typeface="Segoe UI"/>
-                <a:cs typeface="Segoe UI"/>
-                <a:ea typeface="Segoe UI"/>
+                <a:latin typeface="Noto Sans Arabic"/>
+                <a:cs typeface="Noto Sans Arabic"/>
+                <a:ea typeface="Noto Sans Arabic"/>
               </a:rPr>
               <a:t>اقرأ الخاتمات أولاً</a:t>
             </a:r>
@@ -10968,9 +10975,9 @@
                 <a:solidFill>
                   <a:srgbClr val="221C57"/>
                 </a:solidFill>
-                <a:latin typeface="Segoe UI"/>
-                <a:cs typeface="Segoe UI"/>
-                <a:ea typeface="Segoe UI"/>
+                <a:latin typeface="Noto Sans Arabic"/>
+                <a:cs typeface="Noto Sans Arabic"/>
+                <a:ea typeface="Noto Sans Arabic"/>
               </a:rPr>
               <a:t>أقسام حدود الدراسة والاقتراحات المستقبلية — أسرع مصدر للفجوات الموثقة</a:t>
             </a:r>
@@ -11091,9 +11098,9 @@
                 <a:solidFill>
                   <a:srgbClr val="FFFFFF"/>
                 </a:solidFill>
-                <a:latin typeface="Segoe UI"/>
-                <a:cs typeface="Segoe UI"/>
-                <a:ea typeface="Segoe UI"/>
+                <a:latin typeface="Noto Sans Arabic"/>
+                <a:cs typeface="Noto Sans Arabic"/>
+                <a:ea typeface="Noto Sans Arabic"/>
               </a:rPr>
               <a:t>٤</a:t>
             </a:r>
@@ -11138,9 +11145,9 @@
                 <a:solidFill>
                   <a:srgbClr val="6D28D9"/>
                 </a:solidFill>
-                <a:latin typeface="Segoe UI"/>
-                <a:cs typeface="Segoe UI"/>
-                <a:ea typeface="Segoe UI"/>
+                <a:latin typeface="Noto Sans Arabic"/>
+                <a:cs typeface="Noto Sans Arabic"/>
+                <a:ea typeface="Noto Sans Arabic"/>
               </a:rPr>
               <a:t>اعمل خريطة الأدبيات</a:t>
             </a:r>
@@ -11185,9 +11192,9 @@
                 <a:solidFill>
                   <a:srgbClr val="221C57"/>
                 </a:solidFill>
-                <a:latin typeface="Segoe UI"/>
-                <a:cs typeface="Segoe UI"/>
-                <a:ea typeface="Segoe UI"/>
+                <a:latin typeface="Noto Sans Arabic"/>
+                <a:cs typeface="Noto Sans Arabic"/>
+                <a:ea typeface="Noto Sans Arabic"/>
               </a:rPr>
               <a:t>جدول يقارن: السكان، المنهج، الدولة، الزمن، أبرز النتائج لكل دراسة</a:t>
             </a:r>
@@ -11308,9 +11315,9 @@
                 <a:solidFill>
                   <a:srgbClr val="FFFFFF"/>
                 </a:solidFill>
-                <a:latin typeface="Segoe UI"/>
-                <a:cs typeface="Segoe UI"/>
-                <a:ea typeface="Segoe UI"/>
+                <a:latin typeface="Noto Sans Arabic"/>
+                <a:cs typeface="Noto Sans Arabic"/>
+                <a:ea typeface="Noto Sans Arabic"/>
               </a:rPr>
               <a:t>٥</a:t>
             </a:r>
@@ -11355,9 +11362,9 @@
                 <a:solidFill>
                   <a:srgbClr val="BE123C"/>
                 </a:solidFill>
-                <a:latin typeface="Segoe UI"/>
-                <a:cs typeface="Segoe UI"/>
-                <a:ea typeface="Segoe UI"/>
+                <a:latin typeface="Noto Sans Arabic"/>
+                <a:cs typeface="Noto Sans Arabic"/>
+                <a:ea typeface="Noto Sans Arabic"/>
               </a:rPr>
               <a:t>علّم الفراغات والتناقضات</a:t>
             </a:r>
@@ -11402,9 +11409,9 @@
                 <a:solidFill>
                   <a:srgbClr val="221C57"/>
                 </a:solidFill>
-                <a:latin typeface="Segoe UI"/>
-                <a:cs typeface="Segoe UI"/>
-                <a:ea typeface="Segoe UI"/>
+                <a:latin typeface="Noto Sans Arabic"/>
+                <a:cs typeface="Noto Sans Arabic"/>
+                <a:ea typeface="Noto Sans Arabic"/>
               </a:rPr>
               <a:t>ظلّل الخانات الفارغة والنتائج المتضاربة — هذه مواضع فجواتك المحتملة</a:t>
             </a:r>
@@ -11525,9 +11532,9 @@
                 <a:solidFill>
                   <a:srgbClr val="FFFFFF"/>
                 </a:solidFill>
-                <a:latin typeface="Segoe UI"/>
-                <a:cs typeface="Segoe UI"/>
-                <a:ea typeface="Segoe UI"/>
+                <a:latin typeface="Noto Sans Arabic"/>
+                <a:cs typeface="Noto Sans Arabic"/>
+                <a:ea typeface="Noto Sans Arabic"/>
               </a:rPr>
               <a:t>٦</a:t>
             </a:r>
@@ -11572,9 +11579,9 @@
                 <a:solidFill>
                   <a:srgbClr val="047857"/>
                 </a:solidFill>
-                <a:latin typeface="Segoe UI"/>
-                <a:cs typeface="Segoe UI"/>
-                <a:ea typeface="Segoe UI"/>
+                <a:latin typeface="Noto Sans Arabic"/>
+                <a:cs typeface="Noto Sans Arabic"/>
+                <a:ea typeface="Noto Sans Arabic"/>
               </a:rPr>
               <a:t>تحقق بأدوات الذكاء الاصطناعي</a:t>
             </a:r>
@@ -11619,9 +11626,9 @@
                 <a:solidFill>
                   <a:srgbClr val="221C57"/>
                 </a:solidFill>
-                <a:latin typeface="Segoe UI"/>
-                <a:cs typeface="Segoe UI"/>
-                <a:ea typeface="Segoe UI"/>
+                <a:latin typeface="Noto Sans Arabic"/>
+                <a:cs typeface="Noto Sans Arabic"/>
+                <a:ea typeface="Noto Sans Arabic"/>
               </a:rPr>
               <a:t>Research Rabbit وConsensus للتأكد أن الفجوة لم تُسد بدراسة حديثة</a:t>
             </a:r>
@@ -11742,9 +11749,9 @@
                 <a:solidFill>
                   <a:srgbClr val="FFFFFF"/>
                 </a:solidFill>
-                <a:latin typeface="Segoe UI"/>
-                <a:cs typeface="Segoe UI"/>
-                <a:ea typeface="Segoe UI"/>
+                <a:latin typeface="Noto Sans Arabic"/>
+                <a:cs typeface="Noto Sans Arabic"/>
+                <a:ea typeface="Noto Sans Arabic"/>
               </a:rPr>
               <a:t>٧</a:t>
             </a:r>
@@ -11789,9 +11796,9 @@
                 <a:solidFill>
                   <a:srgbClr val="1D4ED8"/>
                 </a:solidFill>
-                <a:latin typeface="Segoe UI"/>
-                <a:cs typeface="Segoe UI"/>
-                <a:ea typeface="Segoe UI"/>
+                <a:latin typeface="Noto Sans Arabic"/>
+                <a:cs typeface="Noto Sans Arabic"/>
+                <a:ea typeface="Noto Sans Arabic"/>
               </a:rPr>
               <a:t>صُغ فجوتك بدقة</a:t>
             </a:r>
@@ -11836,9 +11843,9 @@
                 <a:solidFill>
                   <a:srgbClr val="221C57"/>
                 </a:solidFill>
-                <a:latin typeface="Segoe UI"/>
-                <a:cs typeface="Segoe UI"/>
-                <a:ea typeface="Segoe UI"/>
+                <a:latin typeface="Noto Sans Arabic"/>
+                <a:cs typeface="Noto Sans Arabic"/>
+                <a:ea typeface="Noto Sans Arabic"/>
               </a:rPr>
               <a:t>جملة محددة قابلة للقياس: الموضوع + الفئة + السياق + الزمن</a:t>
             </a:r>
@@ -11943,9 +11950,9 @@
                 <a:solidFill>
                   <a:srgbClr val="FBBF24"/>
                 </a:solidFill>
-                <a:latin typeface="Segoe UI"/>
-                <a:cs typeface="Segoe UI"/>
-                <a:ea typeface="Segoe UI"/>
+                <a:latin typeface="Noto Sans Arabic"/>
+                <a:cs typeface="Noto Sans Arabic"/>
+                <a:ea typeface="Noto Sans Arabic"/>
               </a:rPr>
               <a:t>⏱ الزمن الواقعي: </a:t>
             </a:r>
@@ -11954,9 +11961,9 @@
                 <a:solidFill>
                   <a:srgbClr val="FFFFFF"/>
                 </a:solidFill>
-                <a:latin typeface="Segoe UI"/>
-                <a:cs typeface="Segoe UI"/>
-                <a:ea typeface="Segoe UI"/>
+                <a:latin typeface="Noto Sans Arabic"/>
+                <a:cs typeface="Noto Sans Arabic"/>
+                <a:ea typeface="Noto Sans Arabic"/>
               </a:rPr>
               <a:t>أسبوعان إلى أربعة أسابيع من العمل المنظّم تكفي غالباً للوصول إلى فجوة موثقة تصمد أمام أي لجنة علمية</a:t>
             </a:r>
@@ -12063,9 +12070,9 @@
                 <a:solidFill>
                   <a:srgbClr val="ECE9FA"/>
                 </a:solidFill>
-                <a:latin typeface="Segoe UI"/>
-                <a:cs typeface="Segoe UI"/>
-                <a:ea typeface="Segoe UI"/>
+                <a:latin typeface="Noto Sans Arabic"/>
+                <a:cs typeface="Noto Sans Arabic"/>
+                <a:ea typeface="Noto Sans Arabic"/>
               </a:rPr>
               <a:t>14</a:t>
             </a:r>
@@ -12134,9 +12141,9 @@
                 <a:solidFill>
                   <a:srgbClr val="FFFFFF"/>
                 </a:solidFill>
-                <a:latin typeface="Segoe UI"/>
-                <a:cs typeface="Segoe UI"/>
-                <a:ea typeface="Segoe UI"/>
+                <a:latin typeface="Noto Sans Arabic"/>
+                <a:cs typeface="Noto Sans Arabic"/>
+                <a:ea typeface="Noto Sans Arabic"/>
               </a:rPr>
               <a:t>✍️</a:t>
             </a:r>
@@ -12181,9 +12188,9 @@
                 <a:solidFill>
                   <a:srgbClr val="1D4ED8"/>
                 </a:solidFill>
-                <a:latin typeface="Segoe UI"/>
-                <a:cs typeface="Segoe UI"/>
-                <a:ea typeface="Segoe UI"/>
+                <a:latin typeface="Noto Sans Arabic"/>
+                <a:cs typeface="Noto Sans Arabic"/>
+                <a:ea typeface="Noto Sans Arabic"/>
               </a:rPr>
               <a:t>WRITING YOUR GAP STATEMENT</a:t>
             </a:r>
@@ -12228,9 +12235,9 @@
                 <a:solidFill>
                   <a:srgbClr val="221C57"/>
                 </a:solidFill>
-                <a:latin typeface="Segoe UI"/>
-                <a:cs typeface="Segoe UI"/>
-                <a:ea typeface="Segoe UI"/>
+                <a:latin typeface="Noto Sans Arabic"/>
+                <a:cs typeface="Noto Sans Arabic"/>
+                <a:ea typeface="Noto Sans Arabic"/>
               </a:rPr>
               <a:t>صياغة الفجوة البحثية باحترافية</a:t>
             </a:r>
@@ -12399,9 +12406,9 @@
                 <a:solidFill>
                   <a:srgbClr val="FFFFFF"/>
                 </a:solidFill>
-                <a:latin typeface="Segoe UI"/>
-                <a:cs typeface="Segoe UI"/>
-                <a:ea typeface="Segoe UI"/>
+                <a:latin typeface="Noto Sans Arabic"/>
+                <a:cs typeface="Noto Sans Arabic"/>
+                <a:ea typeface="Noto Sans Arabic"/>
               </a:rPr>
               <a:t>14</a:t>
             </a:r>
@@ -12446,9 +12453,9 @@
                 <a:solidFill>
                   <a:srgbClr val="6E6A8F"/>
                 </a:solidFill>
-                <a:latin typeface="Segoe UI"/>
-                <a:cs typeface="Segoe UI"/>
-                <a:ea typeface="Segoe UI"/>
+                <a:latin typeface="Noto Sans Arabic"/>
+                <a:cs typeface="Noto Sans Arabic"/>
+                <a:ea typeface="Noto Sans Arabic"/>
               </a:rPr>
               <a:t>الفجوات البحثية  •  د. هناء حسين الأهيمر</a:t>
             </a:r>
@@ -12553,9 +12560,9 @@
                 <a:solidFill>
                   <a:srgbClr val="FBBF24"/>
                 </a:solidFill>
-                <a:latin typeface="Segoe UI"/>
-                <a:cs typeface="Segoe UI"/>
-                <a:ea typeface="Segoe UI"/>
+                <a:latin typeface="Noto Sans Arabic"/>
+                <a:cs typeface="Noto Sans Arabic"/>
+                <a:ea typeface="Noto Sans Arabic"/>
               </a:rPr>
               <a:t>القالب الجاهز:  </a:t>
             </a:r>
@@ -12564,9 +12571,9 @@
                 <a:solidFill>
                   <a:srgbClr val="FFFFFF"/>
                 </a:solidFill>
-                <a:latin typeface="Segoe UI"/>
-                <a:cs typeface="Segoe UI"/>
-                <a:ea typeface="Segoe UI"/>
+                <a:latin typeface="Noto Sans Arabic"/>
+                <a:cs typeface="Noto Sans Arabic"/>
+                <a:ea typeface="Noto Sans Arabic"/>
               </a:rPr>
               <a:t>انسخه واملأ الفراغات الملونة</a:t>
             </a:r>
@@ -12611,9 +12618,9 @@
                 <a:solidFill>
                   <a:srgbClr val="FFFFFF"/>
                 </a:solidFill>
-                <a:latin typeface="Segoe UI"/>
-                <a:cs typeface="Segoe UI"/>
-                <a:ea typeface="Segoe UI"/>
+                <a:latin typeface="Noto Sans Arabic"/>
+                <a:cs typeface="Noto Sans Arabic"/>
+                <a:ea typeface="Noto Sans Arabic"/>
               </a:rPr>
               <a:t>«على الرغم من أن الدراسات السابقة تناولت </a:t>
             </a:r>
@@ -12622,9 +12629,9 @@
                 <a:solidFill>
                   <a:srgbClr val="FBBF24"/>
                 </a:solidFill>
-                <a:latin typeface="Segoe UI"/>
-                <a:cs typeface="Segoe UI"/>
-                <a:ea typeface="Segoe UI"/>
+                <a:latin typeface="Noto Sans Arabic"/>
+                <a:cs typeface="Noto Sans Arabic"/>
+                <a:ea typeface="Noto Sans Arabic"/>
               </a:rPr>
               <a:t>[الموضوع X]</a:t>
             </a:r>
@@ -12633,9 +12640,9 @@
                 <a:solidFill>
                   <a:srgbClr val="FFFFFF"/>
                 </a:solidFill>
-                <a:latin typeface="Segoe UI"/>
-                <a:cs typeface="Segoe UI"/>
-                <a:ea typeface="Segoe UI"/>
+                <a:latin typeface="Noto Sans Arabic"/>
+                <a:cs typeface="Noto Sans Arabic"/>
+                <a:ea typeface="Noto Sans Arabic"/>
               </a:rPr>
               <a:t>، إلا أن </a:t>
             </a:r>
@@ -12644,9 +12651,9 @@
                 <a:solidFill>
                   <a:srgbClr val="5EEAD4"/>
                 </a:solidFill>
-                <a:latin typeface="Segoe UI"/>
-                <a:cs typeface="Segoe UI"/>
-                <a:ea typeface="Segoe UI"/>
+                <a:latin typeface="Noto Sans Arabic"/>
+                <a:cs typeface="Noto Sans Arabic"/>
+                <a:ea typeface="Noto Sans Arabic"/>
               </a:rPr>
               <a:t>[الجانب Y]</a:t>
             </a:r>
@@ -12655,9 +12662,9 @@
                 <a:solidFill>
                   <a:srgbClr val="FFFFFF"/>
                 </a:solidFill>
-                <a:latin typeface="Segoe UI"/>
-                <a:cs typeface="Segoe UI"/>
-                <a:ea typeface="Segoe UI"/>
+                <a:latin typeface="Noto Sans Arabic"/>
+                <a:cs typeface="Noto Sans Arabic"/>
+                <a:ea typeface="Noto Sans Arabic"/>
               </a:rPr>
               <a:t> لم يُدرس بعد في </a:t>
             </a:r>
@@ -12666,9 +12673,9 @@
                 <a:solidFill>
                   <a:srgbClr val="FDA4AF"/>
                 </a:solidFill>
-                <a:latin typeface="Segoe UI"/>
-                <a:cs typeface="Segoe UI"/>
-                <a:ea typeface="Segoe UI"/>
+                <a:latin typeface="Noto Sans Arabic"/>
+                <a:cs typeface="Noto Sans Arabic"/>
+                <a:ea typeface="Noto Sans Arabic"/>
               </a:rPr>
               <a:t>[السياق Z]</a:t>
             </a:r>
@@ -12677,9 +12684,9 @@
                 <a:solidFill>
                   <a:srgbClr val="FFFFFF"/>
                 </a:solidFill>
-                <a:latin typeface="Segoe UI"/>
-                <a:cs typeface="Segoe UI"/>
-                <a:ea typeface="Segoe UI"/>
+                <a:latin typeface="Noto Sans Arabic"/>
+                <a:cs typeface="Noto Sans Arabic"/>
+                <a:ea typeface="Noto Sans Arabic"/>
               </a:rPr>
               <a:t>، مما يستدعي إجراء </a:t>
             </a:r>
@@ -12688,9 +12695,9 @@
                 <a:solidFill>
                   <a:srgbClr val="C4B5FD"/>
                 </a:solidFill>
-                <a:latin typeface="Segoe UI"/>
-                <a:cs typeface="Segoe UI"/>
-                <a:ea typeface="Segoe UI"/>
+                <a:latin typeface="Noto Sans Arabic"/>
+                <a:cs typeface="Noto Sans Arabic"/>
+                <a:ea typeface="Noto Sans Arabic"/>
               </a:rPr>
               <a:t>[نوع الدراسة المقترحة]</a:t>
             </a:r>
@@ -12699,9 +12706,9 @@
                 <a:solidFill>
                   <a:srgbClr val="FFFFFF"/>
                 </a:solidFill>
-                <a:latin typeface="Segoe UI"/>
-                <a:cs typeface="Segoe UI"/>
-                <a:ea typeface="Segoe UI"/>
+                <a:latin typeface="Noto Sans Arabic"/>
+                <a:cs typeface="Noto Sans Arabic"/>
+                <a:ea typeface="Noto Sans Arabic"/>
               </a:rPr>
               <a:t>.»</a:t>
             </a:r>
@@ -12800,9 +12807,9 @@
                 <a:solidFill>
                   <a:srgbClr val="0D9488"/>
                 </a:solidFill>
-                <a:latin typeface="Segoe UI"/>
-                <a:cs typeface="Segoe UI"/>
-                <a:ea typeface="Segoe UI"/>
+                <a:latin typeface="Noto Sans Arabic"/>
+                <a:cs typeface="Noto Sans Arabic"/>
+                <a:ea typeface="Noto Sans Arabic"/>
               </a:rPr>
               <a:t>✅ مثال مطبَّق بأسلوب الورشة:  </a:t>
             </a:r>
@@ -12811,9 +12818,9 @@
                 <a:solidFill>
                   <a:srgbClr val="221C57"/>
                 </a:solidFill>
-                <a:latin typeface="Segoe UI"/>
-                <a:cs typeface="Segoe UI"/>
-                <a:ea typeface="Segoe UI"/>
+                <a:latin typeface="Noto Sans Arabic"/>
+                <a:cs typeface="Noto Sans Arabic"/>
+                <a:ea typeface="Noto Sans Arabic"/>
               </a:rPr>
               <a:t>«على الرغم من أن الدراسات السابقة تناولت التعلم الإلكتروني في الجامعات، إلا أن تأثيره على القلق عند طلاب الجامعات العربية بعد 2020 لم يُدرس بعد، مما يستدعي إجراء دراسة مختلطة (كمية ونوعية) لسدّ هذه الفجوة.»</a:t>
             </a:r>
@@ -12858,9 +12865,9 @@
                 <a:solidFill>
                   <a:srgbClr val="221C57"/>
                 </a:solidFill>
-                <a:latin typeface="Segoe UI"/>
-                <a:cs typeface="Segoe UI"/>
-                <a:ea typeface="Segoe UI"/>
+                <a:latin typeface="Noto Sans Arabic"/>
+                <a:cs typeface="Noto Sans Arabic"/>
+                <a:ea typeface="Noto Sans Arabic"/>
               </a:rPr>
               <a:t>قائمة الفحص الخماسية قبل اعتماد الفجوة نهائياً:</a:t>
             </a:r>
@@ -13013,9 +13020,9 @@
                 <a:solidFill>
                   <a:srgbClr val="A21CAF"/>
                 </a:solidFill>
-                <a:latin typeface="Segoe UI"/>
-                <a:cs typeface="Segoe UI"/>
-                <a:ea typeface="Segoe UI"/>
+                <a:latin typeface="Noto Sans Arabic"/>
+                <a:cs typeface="Noto Sans Arabic"/>
+                <a:ea typeface="Noto Sans Arabic"/>
               </a:rPr>
               <a:t>✔ موثّقة؟</a:t>
             </a:r>
@@ -13060,9 +13067,9 @@
                 <a:solidFill>
                   <a:srgbClr val="6E6A8F"/>
                 </a:solidFill>
-                <a:latin typeface="Segoe UI"/>
-                <a:cs typeface="Segoe UI"/>
-                <a:ea typeface="Segoe UI"/>
+                <a:latin typeface="Noto Sans Arabic"/>
+                <a:cs typeface="Noto Sans Arabic"/>
+                <a:ea typeface="Noto Sans Arabic"/>
               </a:rPr>
               <a:t>تستند لمراجعة فعلية</a:t>
             </a:r>
@@ -13215,9 +13222,9 @@
                 <a:solidFill>
                   <a:srgbClr val="D97706"/>
                 </a:solidFill>
-                <a:latin typeface="Segoe UI"/>
-                <a:cs typeface="Segoe UI"/>
-                <a:ea typeface="Segoe UI"/>
+                <a:latin typeface="Noto Sans Arabic"/>
+                <a:cs typeface="Noto Sans Arabic"/>
+                <a:ea typeface="Noto Sans Arabic"/>
               </a:rPr>
               <a:t>✔ محددة؟</a:t>
             </a:r>
@@ -13262,9 +13269,9 @@
                 <a:solidFill>
                   <a:srgbClr val="6E6A8F"/>
                 </a:solidFill>
-                <a:latin typeface="Segoe UI"/>
-                <a:cs typeface="Segoe UI"/>
-                <a:ea typeface="Segoe UI"/>
+                <a:latin typeface="Noto Sans Arabic"/>
+                <a:cs typeface="Noto Sans Arabic"/>
+                <a:ea typeface="Noto Sans Arabic"/>
               </a:rPr>
               <a:t>موضوع وفئة وسياق وزمن</a:t>
             </a:r>
@@ -13417,9 +13424,9 @@
                 <a:solidFill>
                   <a:srgbClr val="0D9488"/>
                 </a:solidFill>
-                <a:latin typeface="Segoe UI"/>
-                <a:cs typeface="Segoe UI"/>
-                <a:ea typeface="Segoe UI"/>
+                <a:latin typeface="Noto Sans Arabic"/>
+                <a:cs typeface="Noto Sans Arabic"/>
+                <a:ea typeface="Noto Sans Arabic"/>
               </a:rPr>
               <a:t>✔ مهمة؟</a:t>
             </a:r>
@@ -13464,9 +13471,9 @@
                 <a:solidFill>
                   <a:srgbClr val="6E6A8F"/>
                 </a:solidFill>
-                <a:latin typeface="Segoe UI"/>
-                <a:cs typeface="Segoe UI"/>
-                <a:ea typeface="Segoe UI"/>
+                <a:latin typeface="Noto Sans Arabic"/>
+                <a:cs typeface="Noto Sans Arabic"/>
+                <a:ea typeface="Noto Sans Arabic"/>
               </a:rPr>
               <a:t>سدّها يُحدث فرقاً</a:t>
             </a:r>
@@ -13619,9 +13626,9 @@
                 <a:solidFill>
                   <a:srgbClr val="6D28D9"/>
                 </a:solidFill>
-                <a:latin typeface="Segoe UI"/>
-                <a:cs typeface="Segoe UI"/>
-                <a:ea typeface="Segoe UI"/>
+                <a:latin typeface="Noto Sans Arabic"/>
+                <a:cs typeface="Noto Sans Arabic"/>
+                <a:ea typeface="Noto Sans Arabic"/>
               </a:rPr>
               <a:t>✔ قابلة للمعالجة؟</a:t>
             </a:r>
@@ -13666,9 +13673,9 @@
                 <a:solidFill>
                   <a:srgbClr val="6E6A8F"/>
                 </a:solidFill>
-                <a:latin typeface="Segoe UI"/>
-                <a:cs typeface="Segoe UI"/>
-                <a:ea typeface="Segoe UI"/>
+                <a:latin typeface="Noto Sans Arabic"/>
+                <a:cs typeface="Noto Sans Arabic"/>
+                <a:ea typeface="Noto Sans Arabic"/>
               </a:rPr>
               <a:t>منهجية واقعية متاحة</a:t>
             </a:r>
@@ -13821,9 +13828,9 @@
                 <a:solidFill>
                   <a:srgbClr val="BE123C"/>
                 </a:solidFill>
-                <a:latin typeface="Segoe UI"/>
-                <a:cs typeface="Segoe UI"/>
-                <a:ea typeface="Segoe UI"/>
+                <a:latin typeface="Noto Sans Arabic"/>
+                <a:cs typeface="Noto Sans Arabic"/>
+                <a:ea typeface="Noto Sans Arabic"/>
               </a:rPr>
               <a:t>✔ جديدة؟</a:t>
             </a:r>
@@ -13868,9 +13875,9 @@
                 <a:solidFill>
                   <a:srgbClr val="6E6A8F"/>
                 </a:solidFill>
-                <a:latin typeface="Segoe UI"/>
-                <a:cs typeface="Segoe UI"/>
-                <a:ea typeface="Segoe UI"/>
+                <a:latin typeface="Noto Sans Arabic"/>
+                <a:cs typeface="Noto Sans Arabic"/>
+                <a:ea typeface="Noto Sans Arabic"/>
               </a:rPr>
               <a:t>لم تُسد بدراسة أحدث</a:t>
             </a:r>
@@ -14169,9 +14176,9 @@
                 <a:solidFill>
                   <a:srgbClr val="FFFFFF"/>
                 </a:solidFill>
-                <a:latin typeface="Segoe UI"/>
-                <a:cs typeface="Segoe UI"/>
-                <a:ea typeface="Segoe UI"/>
+                <a:latin typeface="Noto Sans Arabic"/>
+                <a:cs typeface="Noto Sans Arabic"/>
+                <a:ea typeface="Noto Sans Arabic"/>
               </a:rPr>
               <a:t>الخلاصة: رسائل تأخذها معك</a:t>
             </a:r>
@@ -14216,9 +14223,9 @@
                 <a:solidFill>
                   <a:srgbClr val="FBBF24"/>
                 </a:solidFill>
-                <a:latin typeface="Segoe UI"/>
-                <a:cs typeface="Segoe UI"/>
-                <a:ea typeface="Segoe UI"/>
+                <a:latin typeface="Noto Sans Arabic"/>
+                <a:cs typeface="Noto Sans Arabic"/>
+                <a:ea typeface="Noto Sans Arabic"/>
               </a:rPr>
               <a:t>K E Y   T A K E A W A Y S</a:t>
             </a:r>
@@ -14333,9 +14340,9 @@
                 <a:solidFill>
                   <a:srgbClr val="FFFFFF"/>
                 </a:solidFill>
-                <a:latin typeface="Segoe UI"/>
-                <a:cs typeface="Segoe UI"/>
-                <a:ea typeface="Segoe UI"/>
+                <a:latin typeface="Noto Sans Arabic"/>
+                <a:cs typeface="Noto Sans Arabic"/>
+                <a:ea typeface="Noto Sans Arabic"/>
               </a:rPr>
               <a:t>١</a:t>
             </a:r>
@@ -14380,9 +14387,9 @@
                 <a:solidFill>
                   <a:srgbClr val="FFFFFF"/>
                 </a:solidFill>
-                <a:latin typeface="Segoe UI"/>
-                <a:cs typeface="Segoe UI"/>
-                <a:ea typeface="Segoe UI"/>
+                <a:latin typeface="Noto Sans Arabic"/>
+                <a:cs typeface="Noto Sans Arabic"/>
+                <a:ea typeface="Noto Sans Arabic"/>
               </a:rPr>
               <a:t>الفجوة البحثية أساس أي بحث علمي ناجح</a:t>
             </a:r>
@@ -14427,9 +14434,9 @@
                 <a:solidFill>
                   <a:srgbClr val="FFFFFF"/>
                 </a:solidFill>
-                <a:latin typeface="Segoe UI"/>
-                <a:cs typeface="Segoe UI"/>
-                <a:ea typeface="Segoe UI"/>
+                <a:latin typeface="Noto Sans Arabic"/>
+                <a:cs typeface="Noto Sans Arabic"/>
+                <a:ea typeface="Noto Sans Arabic"/>
               </a:rPr>
               <a:t>هي جواز مرورك إلى الأصالة والقبول والنشر والتمويل</a:t>
             </a:r>
@@ -14544,9 +14551,9 @@
                 <a:solidFill>
                   <a:srgbClr val="FFFFFF"/>
                 </a:solidFill>
-                <a:latin typeface="Segoe UI"/>
-                <a:cs typeface="Segoe UI"/>
-                <a:ea typeface="Segoe UI"/>
+                <a:latin typeface="Noto Sans Arabic"/>
+                <a:cs typeface="Noto Sans Arabic"/>
+                <a:ea typeface="Noto Sans Arabic"/>
               </a:rPr>
               <a:t>٢</a:t>
             </a:r>
@@ -14591,9 +14598,9 @@
                 <a:solidFill>
                   <a:srgbClr val="FFFFFF"/>
                 </a:solidFill>
-                <a:latin typeface="Segoe UI"/>
-                <a:cs typeface="Segoe UI"/>
-                <a:ea typeface="Segoe UI"/>
+                <a:latin typeface="Noto Sans Arabic"/>
+                <a:cs typeface="Noto Sans Arabic"/>
+                <a:ea typeface="Noto Sans Arabic"/>
               </a:rPr>
               <a:t>اعرف الأنواع الستة وسؤال كل نوع</a:t>
             </a:r>
@@ -14638,9 +14645,9 @@
                 <a:solidFill>
                   <a:srgbClr val="FFFFFF"/>
                 </a:solidFill>
-                <a:latin typeface="Segoe UI"/>
-                <a:cs typeface="Segoe UI"/>
-                <a:ea typeface="Segoe UI"/>
+                <a:latin typeface="Noto Sans Arabic"/>
+                <a:cs typeface="Noto Sans Arabic"/>
+                <a:ea typeface="Noto Sans Arabic"/>
               </a:rPr>
               <a:t>معرفة، ممارسة، أدلة، سكان، منهجية، زمن — ولكل نوع بابه</a:t>
             </a:r>
@@ -14755,9 +14762,9 @@
                 <a:solidFill>
                   <a:srgbClr val="FFFFFF"/>
                 </a:solidFill>
-                <a:latin typeface="Segoe UI"/>
-                <a:cs typeface="Segoe UI"/>
-                <a:ea typeface="Segoe UI"/>
+                <a:latin typeface="Noto Sans Arabic"/>
+                <a:cs typeface="Noto Sans Arabic"/>
+                <a:ea typeface="Noto Sans Arabic"/>
               </a:rPr>
               <a:t>٣</a:t>
             </a:r>
@@ -14802,9 +14809,9 @@
                 <a:solidFill>
                   <a:srgbClr val="FFFFFF"/>
                 </a:solidFill>
-                <a:latin typeface="Segoe UI"/>
-                <a:cs typeface="Segoe UI"/>
-                <a:ea typeface="Segoe UI"/>
+                <a:latin typeface="Noto Sans Arabic"/>
+                <a:cs typeface="Noto Sans Arabic"/>
+                <a:ea typeface="Noto Sans Arabic"/>
               </a:rPr>
               <a:t>استخدم الذكاء الاصطناعي بذكاء</a:t>
             </a:r>
@@ -14849,9 +14856,9 @@
                 <a:solidFill>
                   <a:srgbClr val="FFFFFF"/>
                 </a:solidFill>
-                <a:latin typeface="Segoe UI"/>
-                <a:cs typeface="Segoe UI"/>
-                <a:ea typeface="Segoe UI"/>
+                <a:latin typeface="Noto Sans Arabic"/>
+                <a:cs typeface="Noto Sans Arabic"/>
+                <a:ea typeface="Noto Sans Arabic"/>
               </a:rPr>
               <a:t>ارفع، اسأل بدقة، راجع بنفسك — الأداة تقترح والباحث يقرر</a:t>
             </a:r>
@@ -14966,9 +14973,9 @@
                 <a:solidFill>
                   <a:srgbClr val="FFFFFF"/>
                 </a:solidFill>
-                <a:latin typeface="Segoe UI"/>
-                <a:cs typeface="Segoe UI"/>
-                <a:ea typeface="Segoe UI"/>
+                <a:latin typeface="Noto Sans Arabic"/>
+                <a:cs typeface="Noto Sans Arabic"/>
+                <a:ea typeface="Noto Sans Arabic"/>
               </a:rPr>
               <a:t>٤</a:t>
             </a:r>
@@ -15013,9 +15020,9 @@
                 <a:solidFill>
                   <a:srgbClr val="FFFFFF"/>
                 </a:solidFill>
-                <a:latin typeface="Segoe UI"/>
-                <a:cs typeface="Segoe UI"/>
-                <a:ea typeface="Segoe UI"/>
+                <a:latin typeface="Noto Sans Arabic"/>
+                <a:cs typeface="Noto Sans Arabic"/>
+                <a:ea typeface="Noto Sans Arabic"/>
               </a:rPr>
               <a:t>اصنع فجوة قوية لا ضعيفة</a:t>
             </a:r>
@@ -15060,9 +15067,9 @@
                 <a:solidFill>
                   <a:srgbClr val="FFFFFF"/>
                 </a:solidFill>
-                <a:latin typeface="Segoe UI"/>
-                <a:cs typeface="Segoe UI"/>
-                <a:ea typeface="Segoe UI"/>
+                <a:latin typeface="Noto Sans Arabic"/>
+                <a:cs typeface="Noto Sans Arabic"/>
+                <a:ea typeface="Noto Sans Arabic"/>
               </a:rPr>
               <a:t>محددة، موثقة، مهمة — استخدم القالب وقائمة الفحص الخماسية</a:t>
             </a:r>
@@ -15159,9 +15166,9 @@
                 <a:solidFill>
                   <a:srgbClr val="FBBF24"/>
                 </a:solidFill>
-                <a:latin typeface="Segoe UI"/>
-                <a:cs typeface="Segoe UI"/>
-                <a:ea typeface="Segoe UI"/>
+                <a:latin typeface="Noto Sans Arabic"/>
+                <a:cs typeface="Noto Sans Arabic"/>
+                <a:ea typeface="Noto Sans Arabic"/>
               </a:rPr>
               <a:t>«الباحث المتميّز ليس من يجد الإجابات فقط… بل من يطرح أسئلة لم يفكر فيها أحد من قبل»</a:t>
             </a:r>
@@ -15206,9 +15213,9 @@
                 <a:solidFill>
                   <a:srgbClr val="FFFFFF"/>
                 </a:solidFill>
-                <a:latin typeface="Segoe UI"/>
-                <a:cs typeface="Segoe UI"/>
-                <a:ea typeface="Segoe UI"/>
+                <a:latin typeface="Noto Sans Arabic"/>
+                <a:cs typeface="Noto Sans Arabic"/>
+                <a:ea typeface="Noto Sans Arabic"/>
               </a:rPr>
               <a:t>شكراً لحسن استماعكم — </a:t>
             </a:r>
@@ -15217,9 +15224,9 @@
                 <a:solidFill>
                   <a:srgbClr val="FFFFFF"/>
                 </a:solidFill>
-                <a:latin typeface="Segoe UI"/>
-                <a:cs typeface="Segoe UI"/>
-                <a:ea typeface="Segoe UI"/>
+                <a:latin typeface="Noto Sans Arabic"/>
+                <a:cs typeface="Noto Sans Arabic"/>
+                <a:ea typeface="Noto Sans Arabic"/>
               </a:rPr>
               <a:t>الدكتورة هناء حسين الأهيمر</a:t>
             </a:r>
@@ -15228,9 +15235,9 @@
                 <a:solidFill>
                   <a:srgbClr val="FFFFFF"/>
                 </a:solidFill>
-                <a:latin typeface="Segoe UI"/>
-                <a:cs typeface="Segoe UI"/>
-                <a:ea typeface="Segoe UI"/>
+                <a:latin typeface="Noto Sans Arabic"/>
+                <a:cs typeface="Noto Sans Arabic"/>
+                <a:ea typeface="Noto Sans Arabic"/>
               </a:rPr>
               <a:t>  •  نسخة موسّعة بتصميم جديد</a:t>
             </a:r>
@@ -15337,9 +15344,9 @@
                 <a:solidFill>
                   <a:srgbClr val="ECE9FA"/>
                 </a:solidFill>
-                <a:latin typeface="Segoe UI"/>
-                <a:cs typeface="Segoe UI"/>
-                <a:ea typeface="Segoe UI"/>
+                <a:latin typeface="Noto Sans Arabic"/>
+                <a:cs typeface="Noto Sans Arabic"/>
+                <a:ea typeface="Noto Sans Arabic"/>
               </a:rPr>
               <a:t>02</a:t>
             </a:r>
@@ -15408,9 +15415,9 @@
                 <a:solidFill>
                   <a:srgbClr val="FFFFFF"/>
                 </a:solidFill>
-                <a:latin typeface="Segoe UI"/>
-                <a:cs typeface="Segoe UI"/>
-                <a:ea typeface="Segoe UI"/>
+                <a:latin typeface="Noto Sans Arabic"/>
+                <a:cs typeface="Noto Sans Arabic"/>
+                <a:ea typeface="Noto Sans Arabic"/>
               </a:rPr>
               <a:t>🗂</a:t>
             </a:r>
@@ -15455,9 +15462,9 @@
                 <a:solidFill>
                   <a:srgbClr val="D97706"/>
                 </a:solidFill>
-                <a:latin typeface="Segoe UI"/>
-                <a:cs typeface="Segoe UI"/>
-                <a:ea typeface="Segoe UI"/>
+                <a:latin typeface="Noto Sans Arabic"/>
+                <a:cs typeface="Noto Sans Arabic"/>
+                <a:ea typeface="Noto Sans Arabic"/>
               </a:rPr>
               <a:t>AGENDA &amp; GOAL</a:t>
             </a:r>
@@ -15502,9 +15509,9 @@
                 <a:solidFill>
                   <a:srgbClr val="221C57"/>
                 </a:solidFill>
-                <a:latin typeface="Segoe UI"/>
-                <a:cs typeface="Segoe UI"/>
-                <a:ea typeface="Segoe UI"/>
+                <a:latin typeface="Noto Sans Arabic"/>
+                <a:cs typeface="Noto Sans Arabic"/>
+                <a:ea typeface="Noto Sans Arabic"/>
               </a:rPr>
               <a:t>خطة العرض وهدفه</a:t>
             </a:r>
@@ -15673,9 +15680,9 @@
                 <a:solidFill>
                   <a:srgbClr val="FFFFFF"/>
                 </a:solidFill>
-                <a:latin typeface="Segoe UI"/>
-                <a:cs typeface="Segoe UI"/>
-                <a:ea typeface="Segoe UI"/>
+                <a:latin typeface="Noto Sans Arabic"/>
+                <a:cs typeface="Noto Sans Arabic"/>
+                <a:ea typeface="Noto Sans Arabic"/>
               </a:rPr>
               <a:t>02</a:t>
             </a:r>
@@ -15720,9 +15727,9 @@
                 <a:solidFill>
                   <a:srgbClr val="6E6A8F"/>
                 </a:solidFill>
-                <a:latin typeface="Segoe UI"/>
-                <a:cs typeface="Segoe UI"/>
-                <a:ea typeface="Segoe UI"/>
+                <a:latin typeface="Noto Sans Arabic"/>
+                <a:cs typeface="Noto Sans Arabic"/>
+                <a:ea typeface="Noto Sans Arabic"/>
               </a:rPr>
               <a:t>الفجوات البحثية  •  د. هناء حسين الأهيمر</a:t>
             </a:r>
@@ -15827,9 +15834,9 @@
                 <a:solidFill>
                   <a:srgbClr val="FBBF24"/>
                 </a:solidFill>
-                <a:latin typeface="Segoe UI"/>
-                <a:cs typeface="Segoe UI"/>
-                <a:ea typeface="Segoe UI"/>
+                <a:latin typeface="Noto Sans Arabic"/>
+                <a:cs typeface="Noto Sans Arabic"/>
+                <a:ea typeface="Noto Sans Arabic"/>
               </a:rPr>
               <a:t>🎯 هدف الورشة:  </a:t>
             </a:r>
@@ -15838,9 +15845,9 @@
                 <a:solidFill>
                   <a:srgbClr val="FFFFFF"/>
                 </a:solidFill>
-                <a:latin typeface="Segoe UI"/>
-                <a:cs typeface="Segoe UI"/>
-                <a:ea typeface="Segoe UI"/>
+                <a:latin typeface="Noto Sans Arabic"/>
+                <a:cs typeface="Noto Sans Arabic"/>
+                <a:ea typeface="Noto Sans Arabic"/>
               </a:rPr>
               <a:t>أن يتمكّن أي طالب أو باحث — بعد هذا العرض — من تحديد فجوة بحثية قوية بطريقة احترافية</a:t>
             </a:r>
@@ -15955,9 +15962,9 @@
                 <a:solidFill>
                   <a:srgbClr val="FFFFFF"/>
                 </a:solidFill>
-                <a:latin typeface="Segoe UI"/>
-                <a:cs typeface="Segoe UI"/>
-                <a:ea typeface="Segoe UI"/>
+                <a:latin typeface="Noto Sans Arabic"/>
+                <a:cs typeface="Noto Sans Arabic"/>
+                <a:ea typeface="Noto Sans Arabic"/>
               </a:rPr>
               <a:t>١</a:t>
             </a:r>
@@ -16002,9 +16009,9 @@
                 <a:solidFill>
                   <a:srgbClr val="221C57"/>
                 </a:solidFill>
-                <a:latin typeface="Segoe UI"/>
-                <a:cs typeface="Segoe UI"/>
-                <a:ea typeface="Segoe UI"/>
+                <a:latin typeface="Noto Sans Arabic"/>
+                <a:cs typeface="Noto Sans Arabic"/>
+                <a:ea typeface="Noto Sans Arabic"/>
               </a:rPr>
               <a:t>مفهوم الفجوة البحثية</a:t>
             </a:r>
@@ -16049,9 +16056,9 @@
                 <a:solidFill>
                   <a:srgbClr val="6E6A8F"/>
                 </a:solidFill>
-                <a:latin typeface="Segoe UI"/>
-                <a:cs typeface="Segoe UI"/>
-                <a:ea typeface="Segoe UI"/>
+                <a:latin typeface="Noto Sans Arabic"/>
+                <a:cs typeface="Noto Sans Arabic"/>
+                <a:ea typeface="Noto Sans Arabic"/>
               </a:rPr>
               <a:t>التعريف الدقيق وصورها الأربع كما شرحتها الورشة</a:t>
             </a:r>
@@ -16166,9 +16173,9 @@
                 <a:solidFill>
                   <a:srgbClr val="FFFFFF"/>
                 </a:solidFill>
-                <a:latin typeface="Segoe UI"/>
-                <a:cs typeface="Segoe UI"/>
-                <a:ea typeface="Segoe UI"/>
+                <a:latin typeface="Noto Sans Arabic"/>
+                <a:cs typeface="Noto Sans Arabic"/>
+                <a:ea typeface="Noto Sans Arabic"/>
               </a:rPr>
               <a:t>٢</a:t>
             </a:r>
@@ -16213,9 +16220,9 @@
                 <a:solidFill>
                   <a:srgbClr val="221C57"/>
                 </a:solidFill>
-                <a:latin typeface="Segoe UI"/>
-                <a:cs typeface="Segoe UI"/>
-                <a:ea typeface="Segoe UI"/>
+                <a:latin typeface="Noto Sans Arabic"/>
+                <a:cs typeface="Noto Sans Arabic"/>
+                <a:ea typeface="Noto Sans Arabic"/>
               </a:rPr>
               <a:t>لماذا تهمّنا الفجوات؟</a:t>
             </a:r>
@@ -16260,9 +16267,9 @@
                 <a:solidFill>
                   <a:srgbClr val="6E6A8F"/>
                 </a:solidFill>
-                <a:latin typeface="Segoe UI"/>
-                <a:cs typeface="Segoe UI"/>
-                <a:ea typeface="Segoe UI"/>
+                <a:latin typeface="Noto Sans Arabic"/>
+                <a:cs typeface="Noto Sans Arabic"/>
+                <a:ea typeface="Noto Sans Arabic"/>
               </a:rPr>
               <a:t>ستة أسباب تجعلها حجر الأساس في أي بحث ناجح</a:t>
             </a:r>
@@ -16377,9 +16384,9 @@
                 <a:solidFill>
                   <a:srgbClr val="FFFFFF"/>
                 </a:solidFill>
-                <a:latin typeface="Segoe UI"/>
-                <a:cs typeface="Segoe UI"/>
-                <a:ea typeface="Segoe UI"/>
+                <a:latin typeface="Noto Sans Arabic"/>
+                <a:cs typeface="Noto Sans Arabic"/>
+                <a:ea typeface="Noto Sans Arabic"/>
               </a:rPr>
               <a:t>٣</a:t>
             </a:r>
@@ -16424,9 +16431,9 @@
                 <a:solidFill>
                   <a:srgbClr val="221C57"/>
                 </a:solidFill>
-                <a:latin typeface="Segoe UI"/>
-                <a:cs typeface="Segoe UI"/>
-                <a:ea typeface="Segoe UI"/>
+                <a:latin typeface="Noto Sans Arabic"/>
+                <a:cs typeface="Noto Sans Arabic"/>
+                <a:ea typeface="Noto Sans Arabic"/>
               </a:rPr>
               <a:t>الأنواع الستة بالتفصيل</a:t>
             </a:r>
@@ -16471,9 +16478,9 @@
                 <a:solidFill>
                   <a:srgbClr val="6E6A8F"/>
                 </a:solidFill>
-                <a:latin typeface="Segoe UI"/>
-                <a:cs typeface="Segoe UI"/>
-                <a:ea typeface="Segoe UI"/>
+                <a:latin typeface="Noto Sans Arabic"/>
+                <a:cs typeface="Noto Sans Arabic"/>
+                <a:ea typeface="Noto Sans Arabic"/>
               </a:rPr>
               <a:t>شرح موسّع لكل نوع مع سؤاله المفتاحي ومثاله</a:t>
             </a:r>
@@ -16588,9 +16595,9 @@
                 <a:solidFill>
                   <a:srgbClr val="FFFFFF"/>
                 </a:solidFill>
-                <a:latin typeface="Segoe UI"/>
-                <a:cs typeface="Segoe UI"/>
-                <a:ea typeface="Segoe UI"/>
+                <a:latin typeface="Noto Sans Arabic"/>
+                <a:cs typeface="Noto Sans Arabic"/>
+                <a:ea typeface="Noto Sans Arabic"/>
               </a:rPr>
               <a:t>٤</a:t>
             </a:r>
@@ -16635,9 +16642,9 @@
                 <a:solidFill>
                   <a:srgbClr val="221C57"/>
                 </a:solidFill>
-                <a:latin typeface="Segoe UI"/>
-                <a:cs typeface="Segoe UI"/>
-                <a:ea typeface="Segoe UI"/>
+                <a:latin typeface="Noto Sans Arabic"/>
+                <a:cs typeface="Noto Sans Arabic"/>
+                <a:ea typeface="Noto Sans Arabic"/>
               </a:rPr>
               <a:t>أمثلة تطبيقية واقعية</a:t>
             </a:r>
@@ -16682,9 +16689,9 @@
                 <a:solidFill>
                   <a:srgbClr val="6E6A8F"/>
                 </a:solidFill>
-                <a:latin typeface="Segoe UI"/>
-                <a:cs typeface="Segoe UI"/>
-                <a:ea typeface="Segoe UI"/>
+                <a:latin typeface="Noto Sans Arabic"/>
+                <a:cs typeface="Noto Sans Arabic"/>
+                <a:ea typeface="Noto Sans Arabic"/>
               </a:rPr>
               <a:t>مثال ملموس على كل نوع ولماذا يُعد فجوة</a:t>
             </a:r>
@@ -16799,9 +16806,9 @@
                 <a:solidFill>
                   <a:srgbClr val="FFFFFF"/>
                 </a:solidFill>
-                <a:latin typeface="Segoe UI"/>
-                <a:cs typeface="Segoe UI"/>
-                <a:ea typeface="Segoe UI"/>
+                <a:latin typeface="Noto Sans Arabic"/>
+                <a:cs typeface="Noto Sans Arabic"/>
+                <a:ea typeface="Noto Sans Arabic"/>
               </a:rPr>
               <a:t>٥</a:t>
             </a:r>
@@ -16846,9 +16853,9 @@
                 <a:solidFill>
                   <a:srgbClr val="221C57"/>
                 </a:solidFill>
-                <a:latin typeface="Segoe UI"/>
-                <a:cs typeface="Segoe UI"/>
-                <a:ea typeface="Segoe UI"/>
+                <a:latin typeface="Noto Sans Arabic"/>
+                <a:cs typeface="Noto Sans Arabic"/>
+                <a:ea typeface="Noto Sans Arabic"/>
               </a:rPr>
               <a:t>أدوات الذكاء الاصطناعي</a:t>
             </a:r>
@@ -16893,9 +16900,9 @@
                 <a:solidFill>
                   <a:srgbClr val="6E6A8F"/>
                 </a:solidFill>
-                <a:latin typeface="Segoe UI"/>
-                <a:cs typeface="Segoe UI"/>
-                <a:ea typeface="Segoe UI"/>
+                <a:latin typeface="Noto Sans Arabic"/>
+                <a:cs typeface="Noto Sans Arabic"/>
+                <a:ea typeface="Noto Sans Arabic"/>
               </a:rPr>
               <a:t>ثماني أدوات + سير العمل الذكي مع الأداة الأقوى</a:t>
             </a:r>
@@ -17010,9 +17017,9 @@
                 <a:solidFill>
                   <a:srgbClr val="FFFFFF"/>
                 </a:solidFill>
-                <a:latin typeface="Segoe UI"/>
-                <a:cs typeface="Segoe UI"/>
-                <a:ea typeface="Segoe UI"/>
+                <a:latin typeface="Noto Sans Arabic"/>
+                <a:cs typeface="Noto Sans Arabic"/>
+                <a:ea typeface="Noto Sans Arabic"/>
               </a:rPr>
               <a:t>٦</a:t>
             </a:r>
@@ -17057,9 +17064,9 @@
                 <a:solidFill>
                   <a:srgbClr val="221C57"/>
                 </a:solidFill>
-                <a:latin typeface="Segoe UI"/>
-                <a:cs typeface="Segoe UI"/>
-                <a:ea typeface="Segoe UI"/>
+                <a:latin typeface="Noto Sans Arabic"/>
+                <a:cs typeface="Noto Sans Arabic"/>
+                <a:ea typeface="Noto Sans Arabic"/>
               </a:rPr>
               <a:t>استراتيجيات المحترفين</a:t>
             </a:r>
@@ -17104,9 +17111,9 @@
                 <a:solidFill>
                   <a:srgbClr val="6E6A8F"/>
                 </a:solidFill>
-                <a:latin typeface="Segoe UI"/>
-                <a:cs typeface="Segoe UI"/>
-                <a:ea typeface="Segoe UI"/>
+                <a:latin typeface="Noto Sans Arabic"/>
+                <a:cs typeface="Noto Sans Arabic"/>
+                <a:ea typeface="Noto Sans Arabic"/>
               </a:rPr>
               <a:t>أربع استراتيجيات ميدانية + إطار التفكير النقدي</a:t>
             </a:r>
@@ -17221,9 +17228,9 @@
                 <a:solidFill>
                   <a:srgbClr val="FFFFFF"/>
                 </a:solidFill>
-                <a:latin typeface="Segoe UI"/>
-                <a:cs typeface="Segoe UI"/>
-                <a:ea typeface="Segoe UI"/>
+                <a:latin typeface="Noto Sans Arabic"/>
+                <a:cs typeface="Noto Sans Arabic"/>
+                <a:ea typeface="Noto Sans Arabic"/>
               </a:rPr>
               <a:t>٧</a:t>
             </a:r>
@@ -17268,9 +17275,9 @@
                 <a:solidFill>
                   <a:srgbClr val="221C57"/>
                 </a:solidFill>
-                <a:latin typeface="Segoe UI"/>
-                <a:cs typeface="Segoe UI"/>
-                <a:ea typeface="Segoe UI"/>
+                <a:latin typeface="Noto Sans Arabic"/>
+                <a:cs typeface="Noto Sans Arabic"/>
+                <a:ea typeface="Noto Sans Arabic"/>
               </a:rPr>
               <a:t>من الفجوة إلى الصياغة</a:t>
             </a:r>
@@ -17315,9 +17322,9 @@
                 <a:solidFill>
                   <a:srgbClr val="6E6A8F"/>
                 </a:solidFill>
-                <a:latin typeface="Segoe UI"/>
-                <a:cs typeface="Segoe UI"/>
-                <a:ea typeface="Segoe UI"/>
+                <a:latin typeface="Noto Sans Arabic"/>
+                <a:cs typeface="Noto Sans Arabic"/>
+                <a:ea typeface="Noto Sans Arabic"/>
               </a:rPr>
               <a:t>تمييز الفجوة القوية، خارطة طريق، وقالب صياغة جاهز</a:t>
             </a:r>
@@ -17410,9 +17417,9 @@
                 <a:solidFill>
                   <a:srgbClr val="6D28D9"/>
                 </a:solidFill>
-                <a:latin typeface="Segoe UI"/>
-                <a:cs typeface="Segoe UI"/>
-                <a:ea typeface="Segoe UI"/>
+                <a:latin typeface="Noto Sans Arabic"/>
+                <a:cs typeface="Noto Sans Arabic"/>
+                <a:ea typeface="Noto Sans Arabic"/>
               </a:rPr>
               <a:t>«الفجوة البحثية هي أساس أي بحث علمي ناجح»</a:t>
             </a:r>
@@ -17434,9 +17441,9 @@
                 <a:solidFill>
                   <a:srgbClr val="6E6A8F"/>
                 </a:solidFill>
-                <a:latin typeface="Segoe UI"/>
-                <a:cs typeface="Segoe UI"/>
-                <a:ea typeface="Segoe UI"/>
+                <a:latin typeface="Noto Sans Arabic"/>
+                <a:cs typeface="Noto Sans Arabic"/>
+                <a:ea typeface="Noto Sans Arabic"/>
               </a:rPr>
               <a:t>— من خلاصة الورشة</a:t>
             </a:r>
@@ -17543,9 +17550,9 @@
                 <a:solidFill>
                   <a:srgbClr val="ECE9FA"/>
                 </a:solidFill>
-                <a:latin typeface="Segoe UI"/>
-                <a:cs typeface="Segoe UI"/>
-                <a:ea typeface="Segoe UI"/>
+                <a:latin typeface="Noto Sans Arabic"/>
+                <a:cs typeface="Noto Sans Arabic"/>
+                <a:ea typeface="Noto Sans Arabic"/>
               </a:rPr>
               <a:t>03</a:t>
             </a:r>
@@ -17614,9 +17621,9 @@
                 <a:solidFill>
                   <a:srgbClr val="FFFFFF"/>
                 </a:solidFill>
-                <a:latin typeface="Segoe UI"/>
-                <a:cs typeface="Segoe UI"/>
-                <a:ea typeface="Segoe UI"/>
+                <a:latin typeface="Noto Sans Arabic"/>
+                <a:cs typeface="Noto Sans Arabic"/>
+                <a:ea typeface="Noto Sans Arabic"/>
               </a:rPr>
               <a:t>🧠</a:t>
             </a:r>
@@ -17661,9 +17668,9 @@
                 <a:solidFill>
                   <a:srgbClr val="A21CAF"/>
                 </a:solidFill>
-                <a:latin typeface="Segoe UI"/>
-                <a:cs typeface="Segoe UI"/>
-                <a:ea typeface="Segoe UI"/>
+                <a:latin typeface="Noto Sans Arabic"/>
+                <a:cs typeface="Noto Sans Arabic"/>
+                <a:ea typeface="Noto Sans Arabic"/>
               </a:rPr>
               <a:t>WHAT IS A RESEARCH GAP?</a:t>
             </a:r>
@@ -17708,9 +17715,9 @@
                 <a:solidFill>
                   <a:srgbClr val="221C57"/>
                 </a:solidFill>
-                <a:latin typeface="Segoe UI"/>
-                <a:cs typeface="Segoe UI"/>
-                <a:ea typeface="Segoe UI"/>
+                <a:latin typeface="Noto Sans Arabic"/>
+                <a:cs typeface="Noto Sans Arabic"/>
+                <a:ea typeface="Noto Sans Arabic"/>
               </a:rPr>
               <a:t>ما هي الفجوة البحثية؟</a:t>
             </a:r>
@@ -17879,9 +17886,9 @@
                 <a:solidFill>
                   <a:srgbClr val="FFFFFF"/>
                 </a:solidFill>
-                <a:latin typeface="Segoe UI"/>
-                <a:cs typeface="Segoe UI"/>
-                <a:ea typeface="Segoe UI"/>
+                <a:latin typeface="Noto Sans Arabic"/>
+                <a:cs typeface="Noto Sans Arabic"/>
+                <a:ea typeface="Noto Sans Arabic"/>
               </a:rPr>
               <a:t>03</a:t>
             </a:r>
@@ -17926,9 +17933,9 @@
                 <a:solidFill>
                   <a:srgbClr val="6E6A8F"/>
                 </a:solidFill>
-                <a:latin typeface="Segoe UI"/>
-                <a:cs typeface="Segoe UI"/>
-                <a:ea typeface="Segoe UI"/>
+                <a:latin typeface="Noto Sans Arabic"/>
+                <a:cs typeface="Noto Sans Arabic"/>
+                <a:ea typeface="Noto Sans Arabic"/>
               </a:rPr>
               <a:t>الفجوات البحثية  •  د. هناء حسين الأهيمر</a:t>
             </a:r>
@@ -18081,9 +18088,9 @@
                 <a:solidFill>
                   <a:srgbClr val="A21CAF"/>
                 </a:solidFill>
-                <a:latin typeface="Segoe UI"/>
-                <a:cs typeface="Segoe UI"/>
-                <a:ea typeface="Segoe UI"/>
+                <a:latin typeface="Noto Sans Arabic"/>
+                <a:cs typeface="Noto Sans Arabic"/>
+                <a:ea typeface="Noto Sans Arabic"/>
               </a:rPr>
               <a:t>التعريف كما ورد في الشرح:  </a:t>
             </a:r>
@@ -18092,9 +18099,9 @@
                 <a:solidFill>
                   <a:srgbClr val="221C57"/>
                 </a:solidFill>
-                <a:latin typeface="Segoe UI"/>
-                <a:cs typeface="Segoe UI"/>
-                <a:ea typeface="Segoe UI"/>
+                <a:latin typeface="Noto Sans Arabic"/>
+                <a:cs typeface="Noto Sans Arabic"/>
+                <a:ea typeface="Noto Sans Arabic"/>
               </a:rPr>
               <a:t>الفجوة البحثية ببساطة هي منطقة أو مشكلة في مجال معيّن: إما لم يدرسها أحد من قبل، أو تمت دراستها بشكل ناقص، أو تحتاج مزيداً من التحليل والاستكشاف.</a:t>
             </a:r>
@@ -18116,9 +18123,9 @@
                 <a:solidFill>
                   <a:srgbClr val="6D28D9"/>
                 </a:solidFill>
-                <a:latin typeface="Segoe UI"/>
-                <a:cs typeface="Segoe UI"/>
-                <a:ea typeface="Segoe UI"/>
+                <a:latin typeface="Noto Sans Arabic"/>
+                <a:cs typeface="Noto Sans Arabic"/>
+                <a:ea typeface="Noto Sans Arabic"/>
               </a:rPr>
               <a:t>بعبارة أخرى:  </a:t>
             </a:r>
@@ -18127,9 +18134,9 @@
                 <a:solidFill>
                   <a:srgbClr val="221C57"/>
                 </a:solidFill>
-                <a:latin typeface="Segoe UI"/>
-                <a:cs typeface="Segoe UI"/>
-                <a:ea typeface="Segoe UI"/>
+                <a:latin typeface="Noto Sans Arabic"/>
+                <a:cs typeface="Noto Sans Arabic"/>
+                <a:ea typeface="Noto Sans Arabic"/>
               </a:rPr>
               <a:t>هي شيء لم تتم دراسته بشكل كافٍ بعد، أو نقطة لم يركّز عليها الباحثون بوضوح — وسدّها هو ما يمنح بحثك قيمته.</a:t>
             </a:r>
@@ -18174,9 +18181,9 @@
                 <a:solidFill>
                   <a:srgbClr val="6E6A8F"/>
                 </a:solidFill>
-                <a:latin typeface="Segoe UI"/>
-                <a:cs typeface="Segoe UI"/>
-                <a:ea typeface="Segoe UI"/>
+                <a:latin typeface="Noto Sans Arabic"/>
+                <a:cs typeface="Noto Sans Arabic"/>
+                <a:ea typeface="Noto Sans Arabic"/>
               </a:rPr>
               <a:t>للفجوة البحثية أكثر من صورة — هذه أشهر أربع صور تظهر بها:</a:t>
             </a:r>
@@ -18351,9 +18358,9 @@
                 <a:solidFill>
                   <a:srgbClr val="FFFFFF"/>
                 </a:solidFill>
-                <a:latin typeface="Segoe UI"/>
-                <a:cs typeface="Segoe UI"/>
-                <a:ea typeface="Segoe UI"/>
+                <a:latin typeface="Noto Sans Arabic"/>
+                <a:cs typeface="Noto Sans Arabic"/>
+                <a:ea typeface="Noto Sans Arabic"/>
               </a:rPr>
               <a:t>🔍</a:t>
             </a:r>
@@ -18398,9 +18405,9 @@
                 <a:solidFill>
                   <a:srgbClr val="A21CAF"/>
                 </a:solidFill>
-                <a:latin typeface="Segoe UI"/>
-                <a:cs typeface="Segoe UI"/>
-                <a:ea typeface="Segoe UI"/>
+                <a:latin typeface="Noto Sans Arabic"/>
+                <a:cs typeface="Noto Sans Arabic"/>
+                <a:ea typeface="Noto Sans Arabic"/>
               </a:rPr>
               <a:t>موضوع جديد كلياً</a:t>
             </a:r>
@@ -18445,9 +18452,9 @@
                 <a:solidFill>
                   <a:srgbClr val="221C57"/>
                 </a:solidFill>
-                <a:latin typeface="Segoe UI"/>
-                <a:cs typeface="Segoe UI"/>
-                <a:ea typeface="Segoe UI"/>
+                <a:latin typeface="Noto Sans Arabic"/>
+                <a:cs typeface="Noto Sans Arabic"/>
+                <a:ea typeface="Noto Sans Arabic"/>
               </a:rPr>
               <a:t>لم يتناوله أي باحث من قبل — أندر الصور وأثمنها متى كان الموضوع مهماً وملحّاً</a:t>
             </a:r>
@@ -18622,9 +18629,9 @@
                 <a:solidFill>
                   <a:srgbClr val="FFFFFF"/>
                 </a:solidFill>
-                <a:latin typeface="Segoe UI"/>
-                <a:cs typeface="Segoe UI"/>
-                <a:ea typeface="Segoe UI"/>
+                <a:latin typeface="Noto Sans Arabic"/>
+                <a:cs typeface="Noto Sans Arabic"/>
+                <a:ea typeface="Noto Sans Arabic"/>
               </a:rPr>
               <a:t>⚡</a:t>
             </a:r>
@@ -18669,9 +18676,9 @@
                 <a:solidFill>
                   <a:srgbClr val="D97706"/>
                 </a:solidFill>
-                <a:latin typeface="Segoe UI"/>
-                <a:cs typeface="Segoe UI"/>
-                <a:ea typeface="Segoe UI"/>
+                <a:latin typeface="Noto Sans Arabic"/>
+                <a:cs typeface="Noto Sans Arabic"/>
+                <a:ea typeface="Noto Sans Arabic"/>
               </a:rPr>
               <a:t>دراسة من زاوية واحدة</a:t>
             </a:r>
@@ -18716,9 +18723,9 @@
                 <a:solidFill>
                   <a:srgbClr val="221C57"/>
                 </a:solidFill>
-                <a:latin typeface="Segoe UI"/>
-                <a:cs typeface="Segoe UI"/>
-                <a:ea typeface="Segoe UI"/>
+                <a:latin typeface="Noto Sans Arabic"/>
+                <a:cs typeface="Noto Sans Arabic"/>
+                <a:ea typeface="Noto Sans Arabic"/>
               </a:rPr>
               <a:t>الموضوع دُرس جزئياً من منظور واحد فقط، وبقيت زواياه الأخرى مجهولة تماماً</a:t>
             </a:r>
@@ -18893,9 +18900,9 @@
                 <a:solidFill>
                   <a:srgbClr val="FFFFFF"/>
                 </a:solidFill>
-                <a:latin typeface="Segoe UI"/>
-                <a:cs typeface="Segoe UI"/>
-                <a:ea typeface="Segoe UI"/>
+                <a:latin typeface="Noto Sans Arabic"/>
+                <a:cs typeface="Noto Sans Arabic"/>
+                <a:ea typeface="Noto Sans Arabic"/>
               </a:rPr>
               <a:t>🔄</a:t>
             </a:r>
@@ -18940,9 +18947,9 @@
                 <a:solidFill>
                   <a:srgbClr val="0D9488"/>
                 </a:solidFill>
-                <a:latin typeface="Segoe UI"/>
-                <a:cs typeface="Segoe UI"/>
-                <a:ea typeface="Segoe UI"/>
+                <a:latin typeface="Noto Sans Arabic"/>
+                <a:cs typeface="Noto Sans Arabic"/>
+                <a:ea typeface="Noto Sans Arabic"/>
               </a:rPr>
               <a:t>نتائج متضاربة</a:t>
             </a:r>
@@ -18987,9 +18994,9 @@
                 <a:solidFill>
                   <a:srgbClr val="221C57"/>
                 </a:solidFill>
-                <a:latin typeface="Segoe UI"/>
-                <a:cs typeface="Segoe UI"/>
-                <a:ea typeface="Segoe UI"/>
+                <a:latin typeface="Noto Sans Arabic"/>
+                <a:cs typeface="Noto Sans Arabic"/>
+                <a:ea typeface="Noto Sans Arabic"/>
               </a:rPr>
               <a:t>دراسات وصلت إلى نتائج متناقضة — والحسم بينها يحتاج بحثاً جديداً محكماً</a:t>
             </a:r>
@@ -19164,9 +19171,9 @@
                 <a:solidFill>
                   <a:srgbClr val="FFFFFF"/>
                 </a:solidFill>
-                <a:latin typeface="Segoe UI"/>
-                <a:cs typeface="Segoe UI"/>
-                <a:ea typeface="Segoe UI"/>
+                <a:latin typeface="Noto Sans Arabic"/>
+                <a:cs typeface="Noto Sans Arabic"/>
+                <a:ea typeface="Noto Sans Arabic"/>
               </a:rPr>
               <a:t>🌍</a:t>
             </a:r>
@@ -19211,9 +19218,9 @@
                 <a:solidFill>
                   <a:srgbClr val="047857"/>
                 </a:solidFill>
-                <a:latin typeface="Segoe UI"/>
-                <a:cs typeface="Segoe UI"/>
-                <a:ea typeface="Segoe UI"/>
+                <a:latin typeface="Noto Sans Arabic"/>
+                <a:cs typeface="Noto Sans Arabic"/>
+                <a:ea typeface="Noto Sans Arabic"/>
               </a:rPr>
               <a:t>سياق جغرافي مختلف</a:t>
             </a:r>
@@ -19258,9 +19265,9 @@
                 <a:solidFill>
                   <a:srgbClr val="221C57"/>
                 </a:solidFill>
-                <a:latin typeface="Segoe UI"/>
-                <a:cs typeface="Segoe UI"/>
-                <a:ea typeface="Segoe UI"/>
+                <a:latin typeface="Noto Sans Arabic"/>
+                <a:cs typeface="Noto Sans Arabic"/>
+                <a:ea typeface="Noto Sans Arabic"/>
               </a:rPr>
               <a:t>دراسة نجحت في دولة ما، وليس شرطاً أن تنجح بالطريقة نفسها في مجتمع آخر</a:t>
             </a:r>
@@ -19367,9 +19374,9 @@
                 <a:solidFill>
                   <a:srgbClr val="ECE9FA"/>
                 </a:solidFill>
-                <a:latin typeface="Segoe UI"/>
-                <a:cs typeface="Segoe UI"/>
-                <a:ea typeface="Segoe UI"/>
+                <a:latin typeface="Noto Sans Arabic"/>
+                <a:cs typeface="Noto Sans Arabic"/>
+                <a:ea typeface="Noto Sans Arabic"/>
               </a:rPr>
               <a:t>04</a:t>
             </a:r>
@@ -19438,9 +19445,9 @@
                 <a:solidFill>
                   <a:srgbClr val="FFFFFF"/>
                 </a:solidFill>
-                <a:latin typeface="Segoe UI"/>
-                <a:cs typeface="Segoe UI"/>
-                <a:ea typeface="Segoe UI"/>
+                <a:latin typeface="Noto Sans Arabic"/>
+                <a:cs typeface="Noto Sans Arabic"/>
+                <a:ea typeface="Noto Sans Arabic"/>
               </a:rPr>
               <a:t>⚙️</a:t>
             </a:r>
@@ -19485,9 +19492,9 @@
                 <a:solidFill>
                   <a:srgbClr val="D97706"/>
                 </a:solidFill>
-                <a:latin typeface="Segoe UI"/>
-                <a:cs typeface="Segoe UI"/>
-                <a:ea typeface="Segoe UI"/>
+                <a:latin typeface="Noto Sans Arabic"/>
+                <a:cs typeface="Noto Sans Arabic"/>
+                <a:ea typeface="Noto Sans Arabic"/>
               </a:rPr>
               <a:t>WHY RESEARCH GAPS MATTER</a:t>
             </a:r>
@@ -19532,9 +19539,9 @@
                 <a:solidFill>
                   <a:srgbClr val="221C57"/>
                 </a:solidFill>
-                <a:latin typeface="Segoe UI"/>
-                <a:cs typeface="Segoe UI"/>
-                <a:ea typeface="Segoe UI"/>
+                <a:latin typeface="Noto Sans Arabic"/>
+                <a:cs typeface="Noto Sans Arabic"/>
+                <a:ea typeface="Noto Sans Arabic"/>
               </a:rPr>
               <a:t>لماذا تهمّنا الفجوات البحثية؟</a:t>
             </a:r>
@@ -19703,9 +19710,9 @@
                 <a:solidFill>
                   <a:srgbClr val="FFFFFF"/>
                 </a:solidFill>
-                <a:latin typeface="Segoe UI"/>
-                <a:cs typeface="Segoe UI"/>
-                <a:ea typeface="Segoe UI"/>
+                <a:latin typeface="Noto Sans Arabic"/>
+                <a:cs typeface="Noto Sans Arabic"/>
+                <a:ea typeface="Noto Sans Arabic"/>
               </a:rPr>
               <a:t>04</a:t>
             </a:r>
@@ -19750,9 +19757,9 @@
                 <a:solidFill>
                   <a:srgbClr val="6E6A8F"/>
                 </a:solidFill>
-                <a:latin typeface="Segoe UI"/>
-                <a:cs typeface="Segoe UI"/>
-                <a:ea typeface="Segoe UI"/>
+                <a:latin typeface="Noto Sans Arabic"/>
+                <a:cs typeface="Noto Sans Arabic"/>
+                <a:ea typeface="Noto Sans Arabic"/>
               </a:rPr>
               <a:t>الفجوات البحثية  •  د. هناء حسين الأهيمر</a:t>
             </a:r>
@@ -19869,9 +19876,9 @@
                 <a:solidFill>
                   <a:srgbClr val="FFFFFF"/>
                 </a:solidFill>
-                <a:latin typeface="Segoe UI"/>
-                <a:cs typeface="Segoe UI"/>
-                <a:ea typeface="Segoe UI"/>
+                <a:latin typeface="Noto Sans Arabic"/>
+                <a:cs typeface="Noto Sans Arabic"/>
+                <a:ea typeface="Noto Sans Arabic"/>
               </a:rPr>
               <a:t>🧭</a:t>
             </a:r>
@@ -19916,9 +19923,9 @@
                 <a:solidFill>
                   <a:srgbClr val="A21CAF"/>
                 </a:solidFill>
-                <a:latin typeface="Segoe UI"/>
-                <a:cs typeface="Segoe UI"/>
-                <a:ea typeface="Segoe UI"/>
+                <a:latin typeface="Noto Sans Arabic"/>
+                <a:cs typeface="Noto Sans Arabic"/>
+                <a:ea typeface="Noto Sans Arabic"/>
               </a:rPr>
               <a:t>اتجاه واضح لبحثك</a:t>
             </a:r>
@@ -19963,9 +19970,9 @@
                 <a:solidFill>
                   <a:srgbClr val="6E6A8F"/>
                 </a:solidFill>
-                <a:latin typeface="Segoe UI"/>
-                <a:cs typeface="Segoe UI"/>
-                <a:ea typeface="Segoe UI"/>
+                <a:latin typeface="Noto Sans Arabic"/>
+                <a:cs typeface="Noto Sans Arabic"/>
+                <a:ea typeface="Noto Sans Arabic"/>
               </a:rPr>
               <a:t>Research Direction</a:t>
             </a:r>
@@ -20010,9 +20017,9 @@
                 <a:solidFill>
                   <a:srgbClr val="221C57"/>
                 </a:solidFill>
-                <a:latin typeface="Segoe UI"/>
-                <a:cs typeface="Segoe UI"/>
-                <a:ea typeface="Segoe UI"/>
+                <a:latin typeface="Noto Sans Arabic"/>
+                <a:cs typeface="Noto Sans Arabic"/>
+                <a:ea typeface="Noto Sans Arabic"/>
               </a:rPr>
               <a:t>تمنحك بوصلة واضحة لرسالتك أو أطروحتك بدلاً من التخبط بين مواضيع مكررة</a:t>
             </a:r>
@@ -20129,9 +20136,9 @@
                 <a:solidFill>
                   <a:srgbClr val="FFFFFF"/>
                 </a:solidFill>
-                <a:latin typeface="Segoe UI"/>
-                <a:cs typeface="Segoe UI"/>
-                <a:ea typeface="Segoe UI"/>
+                <a:latin typeface="Noto Sans Arabic"/>
+                <a:cs typeface="Noto Sans Arabic"/>
+                <a:ea typeface="Noto Sans Arabic"/>
               </a:rPr>
               <a:t>🏆</a:t>
             </a:r>
@@ -20176,9 +20183,9 @@
                 <a:solidFill>
                   <a:srgbClr val="D97706"/>
                 </a:solidFill>
-                <a:latin typeface="Segoe UI"/>
-                <a:cs typeface="Segoe UI"/>
-                <a:ea typeface="Segoe UI"/>
+                <a:latin typeface="Noto Sans Arabic"/>
+                <a:cs typeface="Noto Sans Arabic"/>
+                <a:ea typeface="Noto Sans Arabic"/>
               </a:rPr>
               <a:t>الأصالة العلمية</a:t>
             </a:r>
@@ -20223,9 +20230,9 @@
                 <a:solidFill>
                   <a:srgbClr val="6E6A8F"/>
                 </a:solidFill>
-                <a:latin typeface="Segoe UI"/>
-                <a:cs typeface="Segoe UI"/>
-                <a:ea typeface="Segoe UI"/>
+                <a:latin typeface="Noto Sans Arabic"/>
+                <a:cs typeface="Noto Sans Arabic"/>
+                <a:ea typeface="Noto Sans Arabic"/>
               </a:rPr>
               <a:t>Scientific Originality</a:t>
             </a:r>
@@ -20270,9 +20277,9 @@
                 <a:solidFill>
                   <a:srgbClr val="221C57"/>
                 </a:solidFill>
-                <a:latin typeface="Segoe UI"/>
-                <a:cs typeface="Segoe UI"/>
-                <a:ea typeface="Segoe UI"/>
+                <a:latin typeface="Noto Sans Arabic"/>
+                <a:cs typeface="Noto Sans Arabic"/>
+                <a:ea typeface="Noto Sans Arabic"/>
               </a:rPr>
               <a:t>تضمن أن بحثك فيه إضافة جديدة حقيقية للمعرفة ولا يعيد ما هو موجود</a:t>
             </a:r>
@@ -20389,9 +20396,9 @@
                 <a:solidFill>
                   <a:srgbClr val="FFFFFF"/>
                 </a:solidFill>
-                <a:latin typeface="Segoe UI"/>
-                <a:cs typeface="Segoe UI"/>
-                <a:ea typeface="Segoe UI"/>
+                <a:latin typeface="Noto Sans Arabic"/>
+                <a:cs typeface="Noto Sans Arabic"/>
+                <a:ea typeface="Noto Sans Arabic"/>
               </a:rPr>
               <a:t>⚖️</a:t>
             </a:r>
@@ -20436,9 +20443,9 @@
                 <a:solidFill>
                   <a:srgbClr val="6D28D9"/>
                 </a:solidFill>
-                <a:latin typeface="Segoe UI"/>
-                <a:cs typeface="Segoe UI"/>
-                <a:ea typeface="Segoe UI"/>
+                <a:latin typeface="Noto Sans Arabic"/>
+                <a:cs typeface="Noto Sans Arabic"/>
+                <a:ea typeface="Noto Sans Arabic"/>
               </a:rPr>
               <a:t>تبرير الدراسة</a:t>
             </a:r>
@@ -20483,9 +20490,9 @@
                 <a:solidFill>
                   <a:srgbClr val="6E6A8F"/>
                 </a:solidFill>
-                <a:latin typeface="Segoe UI"/>
-                <a:cs typeface="Segoe UI"/>
-                <a:ea typeface="Segoe UI"/>
+                <a:latin typeface="Noto Sans Arabic"/>
+                <a:cs typeface="Noto Sans Arabic"/>
+                <a:ea typeface="Noto Sans Arabic"/>
               </a:rPr>
               <a:t>Justifying the Study</a:t>
             </a:r>
@@ -20530,9 +20537,9 @@
                 <a:solidFill>
                   <a:srgbClr val="221C57"/>
                 </a:solidFill>
-                <a:latin typeface="Segoe UI"/>
-                <a:cs typeface="Segoe UI"/>
-                <a:ea typeface="Segoe UI"/>
+                <a:latin typeface="Noto Sans Arabic"/>
+                <a:cs typeface="Noto Sans Arabic"/>
+                <a:ea typeface="Noto Sans Arabic"/>
               </a:rPr>
               <a:t>حجّتك الأقوى لإقناع اللجنة العلمية بقيمة بحثك وجدوى إجرائه</a:t>
             </a:r>
@@ -20649,9 +20656,9 @@
                 <a:solidFill>
                   <a:srgbClr val="FFFFFF"/>
                 </a:solidFill>
-                <a:latin typeface="Segoe UI"/>
-                <a:cs typeface="Segoe UI"/>
-                <a:ea typeface="Segoe UI"/>
+                <a:latin typeface="Noto Sans Arabic"/>
+                <a:cs typeface="Noto Sans Arabic"/>
+                <a:ea typeface="Noto Sans Arabic"/>
               </a:rPr>
               <a:t>🔗</a:t>
             </a:r>
@@ -20696,9 +20703,9 @@
                 <a:solidFill>
                   <a:srgbClr val="0D9488"/>
                 </a:solidFill>
-                <a:latin typeface="Segoe UI"/>
-                <a:cs typeface="Segoe UI"/>
-                <a:ea typeface="Segoe UI"/>
+                <a:latin typeface="Noto Sans Arabic"/>
+                <a:cs typeface="Noto Sans Arabic"/>
+                <a:ea typeface="Noto Sans Arabic"/>
               </a:rPr>
               <a:t>ربط الدراسات السابقة</a:t>
             </a:r>
@@ -20743,9 +20750,9 @@
                 <a:solidFill>
                   <a:srgbClr val="6E6A8F"/>
                 </a:solidFill>
-                <a:latin typeface="Segoe UI"/>
-                <a:cs typeface="Segoe UI"/>
-                <a:ea typeface="Segoe UI"/>
+                <a:latin typeface="Noto Sans Arabic"/>
+                <a:cs typeface="Noto Sans Arabic"/>
+                <a:ea typeface="Noto Sans Arabic"/>
               </a:rPr>
               <a:t>Linking the Literature</a:t>
             </a:r>
@@ -20790,9 +20797,9 @@
                 <a:solidFill>
                   <a:srgbClr val="221C57"/>
                 </a:solidFill>
-                <a:latin typeface="Segoe UI"/>
-                <a:cs typeface="Segoe UI"/>
-                <a:ea typeface="Segoe UI"/>
+                <a:latin typeface="Noto Sans Arabic"/>
+                <a:cs typeface="Noto Sans Arabic"/>
+                <a:ea typeface="Noto Sans Arabic"/>
               </a:rPr>
               <a:t>تصل بين ما قالته الأدبيات وبين الشيء الجديد الذي ستضيفه أنت</a:t>
             </a:r>
@@ -20909,9 +20916,9 @@
                 <a:solidFill>
                   <a:srgbClr val="FFFFFF"/>
                 </a:solidFill>
-                <a:latin typeface="Segoe UI"/>
-                <a:cs typeface="Segoe UI"/>
-                <a:ea typeface="Segoe UI"/>
+                <a:latin typeface="Noto Sans Arabic"/>
+                <a:cs typeface="Noto Sans Arabic"/>
+                <a:ea typeface="Noto Sans Arabic"/>
               </a:rPr>
               <a:t>📰</a:t>
             </a:r>
@@ -20956,9 +20963,9 @@
                 <a:solidFill>
                   <a:srgbClr val="047857"/>
                 </a:solidFill>
-                <a:latin typeface="Segoe UI"/>
-                <a:cs typeface="Segoe UI"/>
-                <a:ea typeface="Segoe UI"/>
+                <a:latin typeface="Noto Sans Arabic"/>
+                <a:cs typeface="Noto Sans Arabic"/>
+                <a:ea typeface="Noto Sans Arabic"/>
               </a:rPr>
               <a:t>النشر في المجلات</a:t>
             </a:r>
@@ -21003,9 +21010,9 @@
                 <a:solidFill>
                   <a:srgbClr val="6E6A8F"/>
                 </a:solidFill>
-                <a:latin typeface="Segoe UI"/>
-                <a:cs typeface="Segoe UI"/>
-                <a:ea typeface="Segoe UI"/>
+                <a:latin typeface="Noto Sans Arabic"/>
+                <a:cs typeface="Noto Sans Arabic"/>
+                <a:ea typeface="Noto Sans Arabic"/>
               </a:rPr>
               <a:t>Academic Publishing</a:t>
             </a:r>
@@ -21050,9 +21057,9 @@
                 <a:solidFill>
                   <a:srgbClr val="221C57"/>
                 </a:solidFill>
-                <a:latin typeface="Segoe UI"/>
-                <a:cs typeface="Segoe UI"/>
-                <a:ea typeface="Segoe UI"/>
+                <a:latin typeface="Noto Sans Arabic"/>
+                <a:cs typeface="Noto Sans Arabic"/>
+                <a:ea typeface="Noto Sans Arabic"/>
               </a:rPr>
               <a:t>المجلات العلمية المحكّمة تفضّل الأبحاث التي تعالج فجوات واضحة</a:t>
             </a:r>
@@ -21169,9 +21176,9 @@
                 <a:solidFill>
                   <a:srgbClr val="FFFFFF"/>
                 </a:solidFill>
-                <a:latin typeface="Segoe UI"/>
-                <a:cs typeface="Segoe UI"/>
-                <a:ea typeface="Segoe UI"/>
+                <a:latin typeface="Noto Sans Arabic"/>
+                <a:cs typeface="Noto Sans Arabic"/>
+                <a:ea typeface="Noto Sans Arabic"/>
               </a:rPr>
               <a:t>💰</a:t>
             </a:r>
@@ -21216,9 +21223,9 @@
                 <a:solidFill>
                   <a:srgbClr val="BE123C"/>
                 </a:solidFill>
-                <a:latin typeface="Segoe UI"/>
-                <a:cs typeface="Segoe UI"/>
-                <a:ea typeface="Segoe UI"/>
+                <a:latin typeface="Noto Sans Arabic"/>
+                <a:cs typeface="Noto Sans Arabic"/>
+                <a:ea typeface="Noto Sans Arabic"/>
               </a:rPr>
               <a:t>التمويل البحثي</a:t>
             </a:r>
@@ -21263,9 +21270,9 @@
                 <a:solidFill>
                   <a:srgbClr val="6E6A8F"/>
                 </a:solidFill>
-                <a:latin typeface="Segoe UI"/>
-                <a:cs typeface="Segoe UI"/>
-                <a:ea typeface="Segoe UI"/>
+                <a:latin typeface="Noto Sans Arabic"/>
+                <a:cs typeface="Noto Sans Arabic"/>
+                <a:ea typeface="Noto Sans Arabic"/>
               </a:rPr>
               <a:t>Research Funding</a:t>
             </a:r>
@@ -21310,9 +21317,9 @@
                 <a:solidFill>
                   <a:srgbClr val="221C57"/>
                 </a:solidFill>
-                <a:latin typeface="Segoe UI"/>
-                <a:cs typeface="Segoe UI"/>
-                <a:ea typeface="Segoe UI"/>
+                <a:latin typeface="Noto Sans Arabic"/>
+                <a:cs typeface="Noto Sans Arabic"/>
+                <a:ea typeface="Noto Sans Arabic"/>
               </a:rPr>
               <a:t>الجهات الممولة تبحث دائماً عن مشاكل حقيقية تحتاج إلى حلول</a:t>
             </a:r>
@@ -21419,9 +21426,9 @@
                 <a:solidFill>
                   <a:srgbClr val="ECE9FA"/>
                 </a:solidFill>
-                <a:latin typeface="Segoe UI"/>
-                <a:cs typeface="Segoe UI"/>
-                <a:ea typeface="Segoe UI"/>
+                <a:latin typeface="Noto Sans Arabic"/>
+                <a:cs typeface="Noto Sans Arabic"/>
+                <a:ea typeface="Noto Sans Arabic"/>
               </a:rPr>
               <a:t>05</a:t>
             </a:r>
@@ -21490,9 +21497,9 @@
                 <a:solidFill>
                   <a:srgbClr val="FFFFFF"/>
                 </a:solidFill>
-                <a:latin typeface="Segoe UI"/>
-                <a:cs typeface="Segoe UI"/>
-                <a:ea typeface="Segoe UI"/>
+                <a:latin typeface="Noto Sans Arabic"/>
+                <a:cs typeface="Noto Sans Arabic"/>
+                <a:ea typeface="Noto Sans Arabic"/>
               </a:rPr>
               <a:t>🔎</a:t>
             </a:r>
@@ -21537,9 +21544,9 @@
                 <a:solidFill>
                   <a:srgbClr val="0D9488"/>
                 </a:solidFill>
-                <a:latin typeface="Segoe UI"/>
-                <a:cs typeface="Segoe UI"/>
-                <a:ea typeface="Segoe UI"/>
+                <a:latin typeface="Noto Sans Arabic"/>
+                <a:cs typeface="Noto Sans Arabic"/>
+                <a:ea typeface="Noto Sans Arabic"/>
               </a:rPr>
               <a:t>TYPES OF RESEARCH GAPS — 1/2</a:t>
             </a:r>
@@ -21584,9 +21591,9 @@
                 <a:solidFill>
                   <a:srgbClr val="221C57"/>
                 </a:solidFill>
-                <a:latin typeface="Segoe UI"/>
-                <a:cs typeface="Segoe UI"/>
-                <a:ea typeface="Segoe UI"/>
+                <a:latin typeface="Noto Sans Arabic"/>
+                <a:cs typeface="Noto Sans Arabic"/>
+                <a:ea typeface="Noto Sans Arabic"/>
               </a:rPr>
               <a:t>الأنواع الستة بالتفصيل (١–٣)</a:t>
             </a:r>
@@ -21755,9 +21762,9 @@
                 <a:solidFill>
                   <a:srgbClr val="FFFFFF"/>
                 </a:solidFill>
-                <a:latin typeface="Segoe UI"/>
-                <a:cs typeface="Segoe UI"/>
-                <a:ea typeface="Segoe UI"/>
+                <a:latin typeface="Noto Sans Arabic"/>
+                <a:cs typeface="Noto Sans Arabic"/>
+                <a:ea typeface="Noto Sans Arabic"/>
               </a:rPr>
               <a:t>05</a:t>
             </a:r>
@@ -21802,9 +21809,9 @@
                 <a:solidFill>
                   <a:srgbClr val="6E6A8F"/>
                 </a:solidFill>
-                <a:latin typeface="Segoe UI"/>
-                <a:cs typeface="Segoe UI"/>
-                <a:ea typeface="Segoe UI"/>
+                <a:latin typeface="Noto Sans Arabic"/>
+                <a:cs typeface="Noto Sans Arabic"/>
+                <a:ea typeface="Noto Sans Arabic"/>
               </a:rPr>
               <a:t>الفجوات البحثية  •  د. هناء حسين الأهيمر</a:t>
             </a:r>
@@ -21849,9 +21856,9 @@
                 <a:solidFill>
                   <a:srgbClr val="6E6A8F"/>
                 </a:solidFill>
-                <a:latin typeface="Segoe UI"/>
-                <a:cs typeface="Segoe UI"/>
-                <a:ea typeface="Segoe UI"/>
+                <a:latin typeface="Noto Sans Arabic"/>
+                <a:cs typeface="Noto Sans Arabic"/>
+                <a:ea typeface="Noto Sans Arabic"/>
               </a:rPr>
               <a:t>لكل نوع استخدامه الخاص — اعرفها جيداً لتعرف أي باب تطرقه في بحثك:</a:t>
             </a:r>
@@ -22014,9 +22021,9 @@
                 <a:solidFill>
                   <a:srgbClr val="FFFFFF"/>
                 </a:solidFill>
-                <a:latin typeface="Segoe UI"/>
-                <a:cs typeface="Segoe UI"/>
-                <a:ea typeface="Segoe UI"/>
+                <a:latin typeface="Noto Sans Arabic"/>
+                <a:cs typeface="Noto Sans Arabic"/>
+                <a:ea typeface="Noto Sans Arabic"/>
               </a:rPr>
               <a:t>١</a:t>
             </a:r>
@@ -22061,9 +22068,9 @@
                 <a:solidFill>
                   <a:srgbClr val="FFFFFF"/>
                 </a:solidFill>
-                <a:latin typeface="Segoe UI"/>
-                <a:cs typeface="Segoe UI"/>
-                <a:ea typeface="Segoe UI"/>
+                <a:latin typeface="Noto Sans Arabic"/>
+                <a:cs typeface="Noto Sans Arabic"/>
+                <a:ea typeface="Noto Sans Arabic"/>
               </a:rPr>
               <a:t>فجوة المعرفة</a:t>
             </a:r>
@@ -22108,9 +22115,9 @@
                 <a:solidFill>
                   <a:srgbClr val="FFFFFF"/>
                 </a:solidFill>
-                <a:latin typeface="Segoe UI"/>
-                <a:cs typeface="Segoe UI"/>
-                <a:ea typeface="Segoe UI"/>
+                <a:latin typeface="Noto Sans Arabic"/>
+                <a:cs typeface="Noto Sans Arabic"/>
+                <a:ea typeface="Noto Sans Arabic"/>
               </a:rPr>
               <a:t>💡  Knowledge Gap</a:t>
             </a:r>
@@ -22155,9 +22162,9 @@
                 <a:solidFill>
                   <a:srgbClr val="A21CAF"/>
                 </a:solidFill>
-                <a:latin typeface="Segoe UI"/>
-                <a:cs typeface="Segoe UI"/>
-                <a:ea typeface="Segoe UI"/>
+                <a:latin typeface="Noto Sans Arabic"/>
+                <a:cs typeface="Noto Sans Arabic"/>
+                <a:ea typeface="Noto Sans Arabic"/>
               </a:rPr>
               <a:t>التعريف:  </a:t>
             </a:r>
@@ -22166,9 +22173,9 @@
                 <a:solidFill>
                   <a:srgbClr val="221C57"/>
                 </a:solidFill>
-                <a:latin typeface="Segoe UI"/>
-                <a:cs typeface="Segoe UI"/>
-                <a:ea typeface="Segoe UI"/>
+                <a:latin typeface="Noto Sans Arabic"/>
+                <a:cs typeface="Noto Sans Arabic"/>
+                <a:ea typeface="Noto Sans Arabic"/>
               </a:rPr>
               <a:t>معلومة أو ظاهرة لا يعرفها العلم حتى الآن في مجال معيّن.</a:t>
             </a:r>
@@ -22213,9 +22220,9 @@
                 <a:solidFill>
                   <a:srgbClr val="A21CAF"/>
                 </a:solidFill>
-                <a:latin typeface="Segoe UI"/>
-                <a:cs typeface="Segoe UI"/>
-                <a:ea typeface="Segoe UI"/>
+                <a:latin typeface="Noto Sans Arabic"/>
+                <a:cs typeface="Noto Sans Arabic"/>
+                <a:ea typeface="Noto Sans Arabic"/>
               </a:rPr>
               <a:t>من شرح الورشة:  </a:t>
             </a:r>
@@ -22224,9 +22231,9 @@
                 <a:solidFill>
                   <a:srgbClr val="221C57"/>
                 </a:solidFill>
-                <a:latin typeface="Segoe UI"/>
-                <a:cs typeface="Segoe UI"/>
-                <a:ea typeface="Segoe UI"/>
+                <a:latin typeface="Noto Sans Arabic"/>
+                <a:cs typeface="Noto Sans Arabic"/>
+                <a:ea typeface="Noto Sans Arabic"/>
               </a:rPr>
               <a:t>تظهر عندما يكون الموضوع جديداً بالكامل — تقنية ناشئة أو ظاهرة مستجدة لم تلحق بها الأبحاث بعد، فيكون أي بحث جاد فيها إضافة صافية للمعرفة.</a:t>
             </a:r>
@@ -22283,9 +22290,9 @@
                 <a:solidFill>
                   <a:srgbClr val="A21CAF"/>
                 </a:solidFill>
-                <a:latin typeface="Segoe UI"/>
-                <a:cs typeface="Segoe UI"/>
-                <a:ea typeface="Segoe UI"/>
+                <a:latin typeface="Noto Sans Arabic"/>
+                <a:cs typeface="Noto Sans Arabic"/>
+                <a:ea typeface="Noto Sans Arabic"/>
               </a:rPr>
               <a:t>السؤال المفتاحي: ماذا لا نعرف بعد؟</a:t>
             </a:r>
@@ -22448,9 +22455,9 @@
                 <a:solidFill>
                   <a:srgbClr val="FFFFFF"/>
                 </a:solidFill>
-                <a:latin typeface="Segoe UI"/>
-                <a:cs typeface="Segoe UI"/>
-                <a:ea typeface="Segoe UI"/>
+                <a:latin typeface="Noto Sans Arabic"/>
+                <a:cs typeface="Noto Sans Arabic"/>
+                <a:ea typeface="Noto Sans Arabic"/>
               </a:rPr>
               <a:t>٢</a:t>
             </a:r>
@@ -22495,9 +22502,9 @@
                 <a:solidFill>
                   <a:srgbClr val="FFFFFF"/>
                 </a:solidFill>
-                <a:latin typeface="Segoe UI"/>
-                <a:cs typeface="Segoe UI"/>
-                <a:ea typeface="Segoe UI"/>
+                <a:latin typeface="Noto Sans Arabic"/>
+                <a:cs typeface="Noto Sans Arabic"/>
+                <a:ea typeface="Noto Sans Arabic"/>
               </a:rPr>
               <a:t>فجوة الممارسة</a:t>
             </a:r>
@@ -22542,9 +22549,9 @@
                 <a:solidFill>
                   <a:srgbClr val="FFFFFF"/>
                 </a:solidFill>
-                <a:latin typeface="Segoe UI"/>
-                <a:cs typeface="Segoe UI"/>
-                <a:ea typeface="Segoe UI"/>
+                <a:latin typeface="Noto Sans Arabic"/>
+                <a:cs typeface="Noto Sans Arabic"/>
+                <a:ea typeface="Noto Sans Arabic"/>
               </a:rPr>
               <a:t>⚙️  Practice Gap</a:t>
             </a:r>
@@ -22589,9 +22596,9 @@
                 <a:solidFill>
                   <a:srgbClr val="D97706"/>
                 </a:solidFill>
-                <a:latin typeface="Segoe UI"/>
-                <a:cs typeface="Segoe UI"/>
-                <a:ea typeface="Segoe UI"/>
+                <a:latin typeface="Noto Sans Arabic"/>
+                <a:cs typeface="Noto Sans Arabic"/>
+                <a:ea typeface="Noto Sans Arabic"/>
               </a:rPr>
               <a:t>التعريف:  </a:t>
             </a:r>
@@ -22600,9 +22607,9 @@
                 <a:solidFill>
                   <a:srgbClr val="221C57"/>
                 </a:solidFill>
-                <a:latin typeface="Segoe UI"/>
-                <a:cs typeface="Segoe UI"/>
-                <a:ea typeface="Segoe UI"/>
+                <a:latin typeface="Noto Sans Arabic"/>
+                <a:cs typeface="Noto Sans Arabic"/>
+                <a:ea typeface="Noto Sans Arabic"/>
               </a:rPr>
               <a:t>الفرق بين ما تقوله النظرية وما يحدث فعلاً في التطبيق الواقعي.</a:t>
             </a:r>
@@ -22647,9 +22654,9 @@
                 <a:solidFill>
                   <a:srgbClr val="D97706"/>
                 </a:solidFill>
-                <a:latin typeface="Segoe UI"/>
-                <a:cs typeface="Segoe UI"/>
-                <a:ea typeface="Segoe UI"/>
+                <a:latin typeface="Noto Sans Arabic"/>
+                <a:cs typeface="Noto Sans Arabic"/>
+                <a:ea typeface="Noto Sans Arabic"/>
               </a:rPr>
               <a:t>من شرح الورشة:  </a:t>
             </a:r>
@@ -22658,9 +22665,9 @@
                 <a:solidFill>
                   <a:srgbClr val="221C57"/>
                 </a:solidFill>
-                <a:latin typeface="Segoe UI"/>
-                <a:cs typeface="Segoe UI"/>
-                <a:ea typeface="Segoe UI"/>
+                <a:latin typeface="Noto Sans Arabic"/>
+                <a:cs typeface="Noto Sans Arabic"/>
+                <a:ea typeface="Noto Sans Arabic"/>
               </a:rPr>
               <a:t>المعرفة موجودة والإرشادات منشورة، لكن الميدان يعمل بطريقة مختلفة. بحثك هنا يجيب: لماذا لا يُطبَّق ما نعرفه؟ وكيف نغلق الفرق بين الاثنين؟</a:t>
             </a:r>
@@ -22717,9 +22724,9 @@
                 <a:solidFill>
                   <a:srgbClr val="D97706"/>
                 </a:solidFill>
-                <a:latin typeface="Segoe UI"/>
-                <a:cs typeface="Segoe UI"/>
-                <a:ea typeface="Segoe UI"/>
+                <a:latin typeface="Noto Sans Arabic"/>
+                <a:cs typeface="Noto Sans Arabic"/>
+                <a:ea typeface="Noto Sans Arabic"/>
               </a:rPr>
               <a:t>السؤال المفتاحي: لماذا لا يُطبَّق ما نعرفه؟</a:t>
             </a:r>
@@ -22882,9 +22889,9 @@
                 <a:solidFill>
                   <a:srgbClr val="FFFFFF"/>
                 </a:solidFill>
-                <a:latin typeface="Segoe UI"/>
-                <a:cs typeface="Segoe UI"/>
-                <a:ea typeface="Segoe UI"/>
+                <a:latin typeface="Noto Sans Arabic"/>
+                <a:cs typeface="Noto Sans Arabic"/>
+                <a:ea typeface="Noto Sans Arabic"/>
               </a:rPr>
               <a:t>٣</a:t>
             </a:r>
@@ -22929,9 +22936,9 @@
                 <a:solidFill>
                   <a:srgbClr val="FFFFFF"/>
                 </a:solidFill>
-                <a:latin typeface="Segoe UI"/>
-                <a:cs typeface="Segoe UI"/>
-                <a:ea typeface="Segoe UI"/>
+                <a:latin typeface="Noto Sans Arabic"/>
+                <a:cs typeface="Noto Sans Arabic"/>
+                <a:ea typeface="Noto Sans Arabic"/>
               </a:rPr>
               <a:t>فجوة الأدلة</a:t>
             </a:r>
@@ -22976,9 +22983,9 @@
                 <a:solidFill>
                   <a:srgbClr val="FFFFFF"/>
                 </a:solidFill>
-                <a:latin typeface="Segoe UI"/>
-                <a:cs typeface="Segoe UI"/>
-                <a:ea typeface="Segoe UI"/>
+                <a:latin typeface="Noto Sans Arabic"/>
+                <a:cs typeface="Noto Sans Arabic"/>
+                <a:ea typeface="Noto Sans Arabic"/>
               </a:rPr>
               <a:t>🧪  Evidence Gap</a:t>
             </a:r>
@@ -23023,9 +23030,9 @@
                 <a:solidFill>
                   <a:srgbClr val="0D9488"/>
                 </a:solidFill>
-                <a:latin typeface="Segoe UI"/>
-                <a:cs typeface="Segoe UI"/>
-                <a:ea typeface="Segoe UI"/>
+                <a:latin typeface="Noto Sans Arabic"/>
+                <a:cs typeface="Noto Sans Arabic"/>
+                <a:ea typeface="Noto Sans Arabic"/>
               </a:rPr>
               <a:t>التعريف:  </a:t>
             </a:r>
@@ -23034,9 +23041,9 @@
                 <a:solidFill>
                   <a:srgbClr val="221C57"/>
                 </a:solidFill>
-                <a:latin typeface="Segoe UI"/>
-                <a:cs typeface="Segoe UI"/>
-                <a:ea typeface="Segoe UI"/>
+                <a:latin typeface="Noto Sans Arabic"/>
+                <a:cs typeface="Noto Sans Arabic"/>
+                <a:ea typeface="Noto Sans Arabic"/>
               </a:rPr>
               <a:t>الأدلة العلمية المتوفرة غير كافية لدعم فرضية أو توصية معيّنة.</a:t>
             </a:r>
@@ -23081,9 +23088,9 @@
                 <a:solidFill>
                   <a:srgbClr val="0D9488"/>
                 </a:solidFill>
-                <a:latin typeface="Segoe UI"/>
-                <a:cs typeface="Segoe UI"/>
-                <a:ea typeface="Segoe UI"/>
+                <a:latin typeface="Noto Sans Arabic"/>
+                <a:cs typeface="Noto Sans Arabic"/>
+                <a:ea typeface="Noto Sans Arabic"/>
               </a:rPr>
               <a:t>من شرح الورشة:  </a:t>
             </a:r>
@@ -23092,9 +23099,9 @@
                 <a:solidFill>
                   <a:srgbClr val="221C57"/>
                 </a:solidFill>
-                <a:latin typeface="Segoe UI"/>
-                <a:cs typeface="Segoe UI"/>
-                <a:ea typeface="Segoe UI"/>
+                <a:latin typeface="Noto Sans Arabic"/>
+                <a:cs typeface="Noto Sans Arabic"/>
+                <a:ea typeface="Noto Sans Arabic"/>
               </a:rPr>
               <a:t>توصيات شائعة ومقبولة على نطاق واسع، لكن دون تجارب مضبوطة تثبتها. البحث هنا يبني الدليل الغائب ويحوّل الرأي الشائع إلى علم موثق.</a:t>
             </a:r>
@@ -23151,9 +23158,9 @@
                 <a:solidFill>
                   <a:srgbClr val="0D9488"/>
                 </a:solidFill>
-                <a:latin typeface="Segoe UI"/>
-                <a:cs typeface="Segoe UI"/>
-                <a:ea typeface="Segoe UI"/>
+                <a:latin typeface="Noto Sans Arabic"/>
+                <a:cs typeface="Noto Sans Arabic"/>
+                <a:ea typeface="Noto Sans Arabic"/>
               </a:rPr>
               <a:t>السؤال المفتاحي: أين الدليل العلمي؟</a:t>
             </a:r>
@@ -23260,9 +23267,9 @@
                 <a:solidFill>
                   <a:srgbClr val="ECE9FA"/>
                 </a:solidFill>
-                <a:latin typeface="Segoe UI"/>
-                <a:cs typeface="Segoe UI"/>
-                <a:ea typeface="Segoe UI"/>
+                <a:latin typeface="Noto Sans Arabic"/>
+                <a:cs typeface="Noto Sans Arabic"/>
+                <a:ea typeface="Noto Sans Arabic"/>
               </a:rPr>
               <a:t>06</a:t>
             </a:r>
@@ -23331,9 +23338,9 @@
                 <a:solidFill>
                   <a:srgbClr val="FFFFFF"/>
                 </a:solidFill>
-                <a:latin typeface="Segoe UI"/>
-                <a:cs typeface="Segoe UI"/>
-                <a:ea typeface="Segoe UI"/>
+                <a:latin typeface="Noto Sans Arabic"/>
+                <a:cs typeface="Noto Sans Arabic"/>
+                <a:ea typeface="Noto Sans Arabic"/>
               </a:rPr>
               <a:t>🔎</a:t>
             </a:r>
@@ -23378,9 +23385,9 @@
                 <a:solidFill>
                   <a:srgbClr val="0D9488"/>
                 </a:solidFill>
-                <a:latin typeface="Segoe UI"/>
-                <a:cs typeface="Segoe UI"/>
-                <a:ea typeface="Segoe UI"/>
+                <a:latin typeface="Noto Sans Arabic"/>
+                <a:cs typeface="Noto Sans Arabic"/>
+                <a:ea typeface="Noto Sans Arabic"/>
               </a:rPr>
               <a:t>TYPES OF RESEARCH GAPS — 2/2</a:t>
             </a:r>
@@ -23425,9 +23432,9 @@
                 <a:solidFill>
                   <a:srgbClr val="221C57"/>
                 </a:solidFill>
-                <a:latin typeface="Segoe UI"/>
-                <a:cs typeface="Segoe UI"/>
-                <a:ea typeface="Segoe UI"/>
+                <a:latin typeface="Noto Sans Arabic"/>
+                <a:cs typeface="Noto Sans Arabic"/>
+                <a:ea typeface="Noto Sans Arabic"/>
               </a:rPr>
               <a:t>الأنواع الستة بالتفصيل (٤–٦)</a:t>
             </a:r>
@@ -23596,9 +23603,9 @@
                 <a:solidFill>
                   <a:srgbClr val="FFFFFF"/>
                 </a:solidFill>
-                <a:latin typeface="Segoe UI"/>
-                <a:cs typeface="Segoe UI"/>
-                <a:ea typeface="Segoe UI"/>
+                <a:latin typeface="Noto Sans Arabic"/>
+                <a:cs typeface="Noto Sans Arabic"/>
+                <a:ea typeface="Noto Sans Arabic"/>
               </a:rPr>
               <a:t>06</a:t>
             </a:r>
@@ -23643,9 +23650,9 @@
                 <a:solidFill>
                   <a:srgbClr val="6E6A8F"/>
                 </a:solidFill>
-                <a:latin typeface="Segoe UI"/>
-                <a:cs typeface="Segoe UI"/>
-                <a:ea typeface="Segoe UI"/>
+                <a:latin typeface="Noto Sans Arabic"/>
+                <a:cs typeface="Noto Sans Arabic"/>
+                <a:ea typeface="Noto Sans Arabic"/>
               </a:rPr>
               <a:t>الفجوات البحثية  •  د. هناء حسين الأهيمر</a:t>
             </a:r>
@@ -23690,9 +23697,9 @@
                 <a:solidFill>
                   <a:srgbClr val="6E6A8F"/>
                 </a:solidFill>
-                <a:latin typeface="Segoe UI"/>
-                <a:cs typeface="Segoe UI"/>
-                <a:ea typeface="Segoe UI"/>
+                <a:latin typeface="Noto Sans Arabic"/>
+                <a:cs typeface="Noto Sans Arabic"/>
+                <a:ea typeface="Noto Sans Arabic"/>
               </a:rPr>
               <a:t>ثلاثة أنواع أخرى شائعة جداً — وغالباً أسهل تناولاً للباحث المبتدئ:</a:t>
             </a:r>
@@ -23855,9 +23862,9 @@
                 <a:solidFill>
                   <a:srgbClr val="FFFFFF"/>
                 </a:solidFill>
-                <a:latin typeface="Segoe UI"/>
-                <a:cs typeface="Segoe UI"/>
-                <a:ea typeface="Segoe UI"/>
+                <a:latin typeface="Noto Sans Arabic"/>
+                <a:cs typeface="Noto Sans Arabic"/>
+                <a:ea typeface="Noto Sans Arabic"/>
               </a:rPr>
               <a:t>٤</a:t>
             </a:r>
@@ -23902,9 +23909,9 @@
                 <a:solidFill>
                   <a:srgbClr val="FFFFFF"/>
                 </a:solidFill>
-                <a:latin typeface="Segoe UI"/>
-                <a:cs typeface="Segoe UI"/>
-                <a:ea typeface="Segoe UI"/>
+                <a:latin typeface="Noto Sans Arabic"/>
+                <a:cs typeface="Noto Sans Arabic"/>
+                <a:ea typeface="Noto Sans Arabic"/>
               </a:rPr>
               <a:t>فجوة السكان</a:t>
             </a:r>
@@ -23949,9 +23956,9 @@
                 <a:solidFill>
                   <a:srgbClr val="FFFFFF"/>
                 </a:solidFill>
-                <a:latin typeface="Segoe UI"/>
-                <a:cs typeface="Segoe UI"/>
-                <a:ea typeface="Segoe UI"/>
+                <a:latin typeface="Noto Sans Arabic"/>
+                <a:cs typeface="Noto Sans Arabic"/>
+                <a:ea typeface="Noto Sans Arabic"/>
               </a:rPr>
               <a:t>👥  Population Gap</a:t>
             </a:r>
@@ -23996,9 +24003,9 @@
                 <a:solidFill>
                   <a:srgbClr val="6D28D9"/>
                 </a:solidFill>
-                <a:latin typeface="Segoe UI"/>
-                <a:cs typeface="Segoe UI"/>
-                <a:ea typeface="Segoe UI"/>
+                <a:latin typeface="Noto Sans Arabic"/>
+                <a:cs typeface="Noto Sans Arabic"/>
+                <a:ea typeface="Noto Sans Arabic"/>
               </a:rPr>
               <a:t>التعريف:  </a:t>
             </a:r>
@@ -24007,9 +24014,9 @@
                 <a:solidFill>
                   <a:srgbClr val="221C57"/>
                 </a:solidFill>
-                <a:latin typeface="Segoe UI"/>
-                <a:cs typeface="Segoe UI"/>
-                <a:ea typeface="Segoe UI"/>
+                <a:latin typeface="Noto Sans Arabic"/>
+                <a:cs typeface="Noto Sans Arabic"/>
+                <a:ea typeface="Noto Sans Arabic"/>
               </a:rPr>
               <a:t>فئة معيّنة لم تتم دراستها بشكل كافٍ: جنس، عمر، ثقافة، أو مهنة.</a:t>
             </a:r>
@@ -24054,9 +24061,9 @@
                 <a:solidFill>
                   <a:srgbClr val="6D28D9"/>
                 </a:solidFill>
-                <a:latin typeface="Segoe UI"/>
-                <a:cs typeface="Segoe UI"/>
-                <a:ea typeface="Segoe UI"/>
+                <a:latin typeface="Noto Sans Arabic"/>
+                <a:cs typeface="Noto Sans Arabic"/>
+                <a:ea typeface="Noto Sans Arabic"/>
               </a:rPr>
               <a:t>من شرح الورشة:  </a:t>
             </a:r>
@@ -24065,9 +24072,9 @@
                 <a:solidFill>
                   <a:srgbClr val="221C57"/>
                 </a:solidFill>
-                <a:latin typeface="Segoe UI"/>
-                <a:cs typeface="Segoe UI"/>
-                <a:ea typeface="Segoe UI"/>
+                <a:latin typeface="Noto Sans Arabic"/>
+                <a:cs typeface="Noto Sans Arabic"/>
+                <a:ea typeface="Noto Sans Arabic"/>
               </a:rPr>
               <a:t>النتائج المبنية على عينات لا تشبه مجتمعك لا يمكن تعميمها عليه ببساطة. دراسة الفئة المهملة في سياقك تسدّ فجوة حقيقية وتخدم مجتمعك مباشرة.</a:t>
             </a:r>
@@ -24124,9 +24131,9 @@
                 <a:solidFill>
                   <a:srgbClr val="6D28D9"/>
                 </a:solidFill>
-                <a:latin typeface="Segoe UI"/>
-                <a:cs typeface="Segoe UI"/>
-                <a:ea typeface="Segoe UI"/>
+                <a:latin typeface="Noto Sans Arabic"/>
+                <a:cs typeface="Noto Sans Arabic"/>
+                <a:ea typeface="Noto Sans Arabic"/>
               </a:rPr>
               <a:t>السؤال المفتاحي: مَن الذي أُهمل من الدراسة؟</a:t>
             </a:r>
@@ -24289,9 +24296,9 @@
                 <a:solidFill>
                   <a:srgbClr val="FFFFFF"/>
                 </a:solidFill>
-                <a:latin typeface="Segoe UI"/>
-                <a:cs typeface="Segoe UI"/>
-                <a:ea typeface="Segoe UI"/>
+                <a:latin typeface="Noto Sans Arabic"/>
+                <a:cs typeface="Noto Sans Arabic"/>
+                <a:ea typeface="Noto Sans Arabic"/>
               </a:rPr>
               <a:t>٥</a:t>
             </a:r>
@@ -24336,9 +24343,9 @@
                 <a:solidFill>
                   <a:srgbClr val="FFFFFF"/>
                 </a:solidFill>
-                <a:latin typeface="Segoe UI"/>
-                <a:cs typeface="Segoe UI"/>
-                <a:ea typeface="Segoe UI"/>
+                <a:latin typeface="Noto Sans Arabic"/>
+                <a:cs typeface="Noto Sans Arabic"/>
+                <a:ea typeface="Noto Sans Arabic"/>
               </a:rPr>
               <a:t>فجوة المنهجية</a:t>
             </a:r>
@@ -24383,9 +24390,9 @@
                 <a:solidFill>
                   <a:srgbClr val="FFFFFF"/>
                 </a:solidFill>
-                <a:latin typeface="Segoe UI"/>
-                <a:cs typeface="Segoe UI"/>
-                <a:ea typeface="Segoe UI"/>
+                <a:latin typeface="Noto Sans Arabic"/>
+                <a:cs typeface="Noto Sans Arabic"/>
+                <a:ea typeface="Noto Sans Arabic"/>
               </a:rPr>
               <a:t>🧩  Methodological Gap</a:t>
             </a:r>
@@ -24430,9 +24437,9 @@
                 <a:solidFill>
                   <a:srgbClr val="BE123C"/>
                 </a:solidFill>
-                <a:latin typeface="Segoe UI"/>
-                <a:cs typeface="Segoe UI"/>
-                <a:ea typeface="Segoe UI"/>
+                <a:latin typeface="Noto Sans Arabic"/>
+                <a:cs typeface="Noto Sans Arabic"/>
+                <a:ea typeface="Noto Sans Arabic"/>
               </a:rPr>
               <a:t>التعريف:  </a:t>
             </a:r>
@@ -24441,9 +24448,9 @@
                 <a:solidFill>
                   <a:srgbClr val="221C57"/>
                 </a:solidFill>
-                <a:latin typeface="Segoe UI"/>
-                <a:cs typeface="Segoe UI"/>
-                <a:ea typeface="Segoe UI"/>
+                <a:latin typeface="Noto Sans Arabic"/>
+                <a:cs typeface="Noto Sans Arabic"/>
+                <a:ea typeface="Noto Sans Arabic"/>
               </a:rPr>
               <a:t>الباحثون استخدموا منهجاً واحداً فقط لدراسة الظاهرة.</a:t>
             </a:r>
@@ -24488,9 +24495,9 @@
                 <a:solidFill>
                   <a:srgbClr val="BE123C"/>
                 </a:solidFill>
-                <a:latin typeface="Segoe UI"/>
-                <a:cs typeface="Segoe UI"/>
-                <a:ea typeface="Segoe UI"/>
+                <a:latin typeface="Noto Sans Arabic"/>
+                <a:cs typeface="Noto Sans Arabic"/>
+                <a:ea typeface="Noto Sans Arabic"/>
               </a:rPr>
               <a:t>من شرح الورشة:  </a:t>
             </a:r>
@@ -24499,9 +24506,9 @@
                 <a:solidFill>
                   <a:srgbClr val="221C57"/>
                 </a:solidFill>
-                <a:latin typeface="Segoe UI"/>
-                <a:cs typeface="Segoe UI"/>
-                <a:ea typeface="Segoe UI"/>
+                <a:latin typeface="Noto Sans Arabic"/>
+                <a:cs typeface="Noto Sans Arabic"/>
+                <a:ea typeface="Noto Sans Arabic"/>
               </a:rPr>
               <a:t>تغيير المنهج — من كمي إلى نوعي أو مختلط — قد يكشف نتائج جديدة كلياً عن الظاهرة نفسها، ويضيف عمقاً لم تصل إليه الدراسات السابقة.</a:t>
             </a:r>
@@ -24558,9 +24565,9 @@
                 <a:solidFill>
                   <a:srgbClr val="BE123C"/>
                 </a:solidFill>
-                <a:latin typeface="Segoe UI"/>
-                <a:cs typeface="Segoe UI"/>
-                <a:ea typeface="Segoe UI"/>
+                <a:latin typeface="Noto Sans Arabic"/>
+                <a:cs typeface="Noto Sans Arabic"/>
+                <a:ea typeface="Noto Sans Arabic"/>
               </a:rPr>
               <a:t>السؤال المفتاحي: ماذا لو بحثنا بطريقة أخرى؟</a:t>
             </a:r>
@@ -24723,9 +24730,9 @@
                 <a:solidFill>
                   <a:srgbClr val="FFFFFF"/>
                 </a:solidFill>
-                <a:latin typeface="Segoe UI"/>
-                <a:cs typeface="Segoe UI"/>
-                <a:ea typeface="Segoe UI"/>
+                <a:latin typeface="Noto Sans Arabic"/>
+                <a:cs typeface="Noto Sans Arabic"/>
+                <a:ea typeface="Noto Sans Arabic"/>
               </a:rPr>
               <a:t>٦</a:t>
             </a:r>
@@ -24770,9 +24777,9 @@
                 <a:solidFill>
                   <a:srgbClr val="FFFFFF"/>
                 </a:solidFill>
-                <a:latin typeface="Segoe UI"/>
-                <a:cs typeface="Segoe UI"/>
-                <a:ea typeface="Segoe UI"/>
+                <a:latin typeface="Noto Sans Arabic"/>
+                <a:cs typeface="Noto Sans Arabic"/>
+                <a:ea typeface="Noto Sans Arabic"/>
               </a:rPr>
               <a:t>فجوة الزمن</a:t>
             </a:r>
@@ -24817,9 +24824,9 @@
                 <a:solidFill>
                   <a:srgbClr val="FFFFFF"/>
                 </a:solidFill>
-                <a:latin typeface="Segoe UI"/>
-                <a:cs typeface="Segoe UI"/>
-                <a:ea typeface="Segoe UI"/>
+                <a:latin typeface="Noto Sans Arabic"/>
+                <a:cs typeface="Noto Sans Arabic"/>
+                <a:ea typeface="Noto Sans Arabic"/>
               </a:rPr>
               <a:t>⏳  Temporal Gap</a:t>
             </a:r>
@@ -24864,9 +24871,9 @@
                 <a:solidFill>
                   <a:srgbClr val="047857"/>
                 </a:solidFill>
-                <a:latin typeface="Segoe UI"/>
-                <a:cs typeface="Segoe UI"/>
-                <a:ea typeface="Segoe UI"/>
+                <a:latin typeface="Noto Sans Arabic"/>
+                <a:cs typeface="Noto Sans Arabic"/>
+                <a:ea typeface="Noto Sans Arabic"/>
               </a:rPr>
               <a:t>التعريف:  </a:t>
             </a:r>
@@ -24875,9 +24882,9 @@
                 <a:solidFill>
                   <a:srgbClr val="221C57"/>
                 </a:solidFill>
-                <a:latin typeface="Segoe UI"/>
-                <a:cs typeface="Segoe UI"/>
-                <a:ea typeface="Segoe UI"/>
+                <a:latin typeface="Noto Sans Arabic"/>
+                <a:cs typeface="Noto Sans Arabic"/>
+                <a:ea typeface="Noto Sans Arabic"/>
               </a:rPr>
               <a:t>الدراسات المتاحة قديمة ولا تعكس الوضع الحالي.</a:t>
             </a:r>
@@ -24922,9 +24929,9 @@
                 <a:solidFill>
                   <a:srgbClr val="047857"/>
                 </a:solidFill>
-                <a:latin typeface="Segoe UI"/>
-                <a:cs typeface="Segoe UI"/>
-                <a:ea typeface="Segoe UI"/>
+                <a:latin typeface="Noto Sans Arabic"/>
+                <a:cs typeface="Noto Sans Arabic"/>
+                <a:ea typeface="Noto Sans Arabic"/>
               </a:rPr>
               <a:t>من شرح الورشة:  </a:t>
             </a:r>
@@ -24933,9 +24940,9 @@
                 <a:solidFill>
                   <a:srgbClr val="221C57"/>
                 </a:solidFill>
-                <a:latin typeface="Segoe UI"/>
-                <a:cs typeface="Segoe UI"/>
-                <a:ea typeface="Segoe UI"/>
+                <a:latin typeface="Noto Sans Arabic"/>
+                <a:cs typeface="Noto Sans Arabic"/>
+                <a:ea typeface="Noto Sans Arabic"/>
               </a:rPr>
               <a:t>بعد كل تحول كبير — كالجائحة أو ثورة الذكاء الاصطناعي — تصبح النتائج القديمة بحاجة إلى إعادة اختبار، فالواقع تغيّر والأرقام لم تعد تمثله.</a:t>
             </a:r>
@@ -24992,9 +24999,9 @@
                 <a:solidFill>
                   <a:srgbClr val="047857"/>
                 </a:solidFill>
-                <a:latin typeface="Segoe UI"/>
-                <a:cs typeface="Segoe UI"/>
-                <a:ea typeface="Segoe UI"/>
+                <a:latin typeface="Noto Sans Arabic"/>
+                <a:cs typeface="Noto Sans Arabic"/>
+                <a:ea typeface="Noto Sans Arabic"/>
               </a:rPr>
               <a:t>السؤال المفتاحي: هل ما زالت النتائج صحيحة اليوم؟</a:t>
             </a:r>
@@ -25101,9 +25108,9 @@
                 <a:solidFill>
                   <a:srgbClr val="ECE9FA"/>
                 </a:solidFill>
-                <a:latin typeface="Segoe UI"/>
-                <a:cs typeface="Segoe UI"/>
-                <a:ea typeface="Segoe UI"/>
+                <a:latin typeface="Noto Sans Arabic"/>
+                <a:cs typeface="Noto Sans Arabic"/>
+                <a:ea typeface="Noto Sans Arabic"/>
               </a:rPr>
               <a:t>07</a:t>
             </a:r>
@@ -25172,9 +25179,9 @@
                 <a:solidFill>
                   <a:srgbClr val="FFFFFF"/>
                 </a:solidFill>
-                <a:latin typeface="Segoe UI"/>
-                <a:cs typeface="Segoe UI"/>
-                <a:ea typeface="Segoe UI"/>
+                <a:latin typeface="Noto Sans Arabic"/>
+                <a:cs typeface="Noto Sans Arabic"/>
+                <a:ea typeface="Noto Sans Arabic"/>
               </a:rPr>
               <a:t>📚</a:t>
             </a:r>
@@ -25219,9 +25226,9 @@
                 <a:solidFill>
                   <a:srgbClr val="6D28D9"/>
                 </a:solidFill>
-                <a:latin typeface="Segoe UI"/>
-                <a:cs typeface="Segoe UI"/>
-                <a:ea typeface="Segoe UI"/>
+                <a:latin typeface="Noto Sans Arabic"/>
+                <a:cs typeface="Noto Sans Arabic"/>
+                <a:ea typeface="Noto Sans Arabic"/>
               </a:rPr>
               <a:t>PRACTICAL EXAMPLES</a:t>
             </a:r>
@@ -25266,9 +25273,9 @@
                 <a:solidFill>
                   <a:srgbClr val="221C57"/>
                 </a:solidFill>
-                <a:latin typeface="Segoe UI"/>
-                <a:cs typeface="Segoe UI"/>
-                <a:ea typeface="Segoe UI"/>
+                <a:latin typeface="Noto Sans Arabic"/>
+                <a:cs typeface="Noto Sans Arabic"/>
+                <a:ea typeface="Noto Sans Arabic"/>
               </a:rPr>
               <a:t>أمثلة عملية على الفجوات</a:t>
             </a:r>
@@ -25437,9 +25444,9 @@
                 <a:solidFill>
                   <a:srgbClr val="FFFFFF"/>
                 </a:solidFill>
-                <a:latin typeface="Segoe UI"/>
-                <a:cs typeface="Segoe UI"/>
-                <a:ea typeface="Segoe UI"/>
+                <a:latin typeface="Noto Sans Arabic"/>
+                <a:cs typeface="Noto Sans Arabic"/>
+                <a:ea typeface="Noto Sans Arabic"/>
               </a:rPr>
               <a:t>07</a:t>
             </a:r>
@@ -25484,9 +25491,9 @@
                 <a:solidFill>
                   <a:srgbClr val="6E6A8F"/>
                 </a:solidFill>
-                <a:latin typeface="Segoe UI"/>
-                <a:cs typeface="Segoe UI"/>
-                <a:ea typeface="Segoe UI"/>
+                <a:latin typeface="Noto Sans Arabic"/>
+                <a:cs typeface="Noto Sans Arabic"/>
+                <a:ea typeface="Noto Sans Arabic"/>
               </a:rPr>
               <a:t>الفجوات البحثية  •  د. هناء حسين الأهيمر</a:t>
             </a:r>
@@ -25603,9 +25610,9 @@
                 <a:solidFill>
                   <a:srgbClr val="FFFFFF"/>
                 </a:solidFill>
-                <a:latin typeface="Segoe UI"/>
-                <a:cs typeface="Segoe UI"/>
-                <a:ea typeface="Segoe UI"/>
+                <a:latin typeface="Noto Sans Arabic"/>
+                <a:cs typeface="Noto Sans Arabic"/>
+                <a:ea typeface="Noto Sans Arabic"/>
               </a:rPr>
               <a:t>معرفة</a:t>
             </a:r>
@@ -25650,9 +25657,9 @@
                 <a:solidFill>
                   <a:srgbClr val="221C57"/>
                 </a:solidFill>
-                <a:latin typeface="Segoe UI"/>
-                <a:cs typeface="Segoe UI"/>
-                <a:ea typeface="Segoe UI"/>
+                <a:latin typeface="Noto Sans Arabic"/>
+                <a:cs typeface="Noto Sans Arabic"/>
+                <a:ea typeface="Noto Sans Arabic"/>
               </a:rPr>
               <a:t>تأثير الذكاء الاصطناعي على القرارات الأخلاقية في القطاع الصحي العربي لم تتم دراسته بشكل كافٍ</a:t>
             </a:r>
@@ -25697,9 +25704,9 @@
                 <a:solidFill>
                   <a:srgbClr val="A21CAF"/>
                 </a:solidFill>
-                <a:latin typeface="Segoe UI"/>
-                <a:cs typeface="Segoe UI"/>
-                <a:ea typeface="Segoe UI"/>
+                <a:latin typeface="Noto Sans Arabic"/>
+                <a:cs typeface="Noto Sans Arabic"/>
+                <a:ea typeface="Noto Sans Arabic"/>
               </a:rPr>
               <a:t>لماذا هي فجوة؟  </a:t>
             </a:r>
@@ -25708,9 +25715,9 @@
                 <a:solidFill>
                   <a:srgbClr val="6E6A8F"/>
                 </a:solidFill>
-                <a:latin typeface="Segoe UI"/>
-                <a:cs typeface="Segoe UI"/>
-                <a:ea typeface="Segoe UI"/>
+                <a:latin typeface="Noto Sans Arabic"/>
+                <a:cs typeface="Noto Sans Arabic"/>
+                <a:ea typeface="Noto Sans Arabic"/>
               </a:rPr>
               <a:t>موضوع حديث وحسّاس بلا دراسات كافية — إضافة صافية للمعرفة</a:t>
             </a:r>
@@ -25827,9 +25834,9 @@
                 <a:solidFill>
                   <a:srgbClr val="FFFFFF"/>
                 </a:solidFill>
-                <a:latin typeface="Segoe UI"/>
-                <a:cs typeface="Segoe UI"/>
-                <a:ea typeface="Segoe UI"/>
+                <a:latin typeface="Noto Sans Arabic"/>
+                <a:cs typeface="Noto Sans Arabic"/>
+                <a:ea typeface="Noto Sans Arabic"/>
               </a:rPr>
               <a:t>ممارسة</a:t>
             </a:r>
@@ -25874,9 +25881,9 @@
                 <a:solidFill>
                   <a:srgbClr val="221C57"/>
                 </a:solidFill>
-                <a:latin typeface="Segoe UI"/>
-                <a:cs typeface="Segoe UI"/>
-                <a:ea typeface="Segoe UI"/>
+                <a:latin typeface="Noto Sans Arabic"/>
+                <a:cs typeface="Noto Sans Arabic"/>
+                <a:ea typeface="Noto Sans Arabic"/>
               </a:rPr>
               <a:t>البروتوكولات الطبية الدولية موجودة وموثقة، لكن التطبيق الواقعي في المستشفيات مختلف تماماً</a:t>
             </a:r>
@@ -25921,9 +25928,9 @@
                 <a:solidFill>
                   <a:srgbClr val="D97706"/>
                 </a:solidFill>
-                <a:latin typeface="Segoe UI"/>
-                <a:cs typeface="Segoe UI"/>
-                <a:ea typeface="Segoe UI"/>
+                <a:latin typeface="Noto Sans Arabic"/>
+                <a:cs typeface="Noto Sans Arabic"/>
+                <a:ea typeface="Noto Sans Arabic"/>
               </a:rPr>
               <a:t>لماذا هي فجوة؟  </a:t>
             </a:r>
@@ -25932,9 +25939,9 @@
                 <a:solidFill>
                   <a:srgbClr val="6E6A8F"/>
                 </a:solidFill>
-                <a:latin typeface="Segoe UI"/>
-                <a:cs typeface="Segoe UI"/>
-                <a:ea typeface="Segoe UI"/>
+                <a:latin typeface="Noto Sans Arabic"/>
+                <a:cs typeface="Noto Sans Arabic"/>
+                <a:ea typeface="Noto Sans Arabic"/>
               </a:rPr>
               <a:t>المعرفة متوفرة والتطبيق غائب — البحث يدرس لماذا وكيف نصلحه</a:t>
             </a:r>
@@ -26051,9 +26058,9 @@
                 <a:solidFill>
                   <a:srgbClr val="FFFFFF"/>
                 </a:solidFill>
-                <a:latin typeface="Segoe UI"/>
-                <a:cs typeface="Segoe UI"/>
-                <a:ea typeface="Segoe UI"/>
+                <a:latin typeface="Noto Sans Arabic"/>
+                <a:cs typeface="Noto Sans Arabic"/>
+                <a:ea typeface="Noto Sans Arabic"/>
               </a:rPr>
               <a:t>أدلة</a:t>
             </a:r>
@@ -26098,9 +26105,9 @@
                 <a:solidFill>
                   <a:srgbClr val="221C57"/>
                 </a:solidFill>
-                <a:latin typeface="Segoe UI"/>
-                <a:cs typeface="Segoe UI"/>
-                <a:ea typeface="Segoe UI"/>
+                <a:latin typeface="Noto Sans Arabic"/>
+                <a:cs typeface="Noto Sans Arabic"/>
+                <a:ea typeface="Noto Sans Arabic"/>
               </a:rPr>
               <a:t>توصيات كثيرة بدمج التعلم المصغّر في التدريب، دون تجارب مضبوطة تثبت فاعليته</a:t>
             </a:r>
@@ -26145,9 +26152,9 @@
                 <a:solidFill>
                   <a:srgbClr val="0D9488"/>
                 </a:solidFill>
-                <a:latin typeface="Segoe UI"/>
-                <a:cs typeface="Segoe UI"/>
-                <a:ea typeface="Segoe UI"/>
+                <a:latin typeface="Noto Sans Arabic"/>
+                <a:cs typeface="Noto Sans Arabic"/>
+                <a:ea typeface="Noto Sans Arabic"/>
               </a:rPr>
               <a:t>لماذا هي فجوة؟  </a:t>
             </a:r>
@@ -26156,9 +26163,9 @@
                 <a:solidFill>
                   <a:srgbClr val="6E6A8F"/>
                 </a:solidFill>
-                <a:latin typeface="Segoe UI"/>
-                <a:cs typeface="Segoe UI"/>
-                <a:ea typeface="Segoe UI"/>
+                <a:latin typeface="Noto Sans Arabic"/>
+                <a:cs typeface="Noto Sans Arabic"/>
+                <a:ea typeface="Noto Sans Arabic"/>
               </a:rPr>
               <a:t>ادعاء شائع ينقصه الدليل التجريبي — بحثك يبني هذا الدليل</a:t>
             </a:r>
@@ -26275,9 +26282,9 @@
                 <a:solidFill>
                   <a:srgbClr val="FFFFFF"/>
                 </a:solidFill>
-                <a:latin typeface="Segoe UI"/>
-                <a:cs typeface="Segoe UI"/>
-                <a:ea typeface="Segoe UI"/>
+                <a:latin typeface="Noto Sans Arabic"/>
+                <a:cs typeface="Noto Sans Arabic"/>
+                <a:ea typeface="Noto Sans Arabic"/>
               </a:rPr>
               <a:t>سكان</a:t>
             </a:r>
@@ -26322,9 +26329,9 @@
                 <a:solidFill>
                   <a:srgbClr val="221C57"/>
                 </a:solidFill>
-                <a:latin typeface="Segoe UI"/>
-                <a:cs typeface="Segoe UI"/>
-                <a:ea typeface="Segoe UI"/>
+                <a:latin typeface="Noto Sans Arabic"/>
+                <a:cs typeface="Noto Sans Arabic"/>
+                <a:ea typeface="Noto Sans Arabic"/>
               </a:rPr>
               <a:t>معظم دراسات القلق الاجتماعي أُجريت على طلاب غربيين، والشباب العربي ما زال ناقصاً في الدراسات</a:t>
             </a:r>
@@ -26369,9 +26376,9 @@
                 <a:solidFill>
                   <a:srgbClr val="6D28D9"/>
                 </a:solidFill>
-                <a:latin typeface="Segoe UI"/>
-                <a:cs typeface="Segoe UI"/>
-                <a:ea typeface="Segoe UI"/>
+                <a:latin typeface="Noto Sans Arabic"/>
+                <a:cs typeface="Noto Sans Arabic"/>
+                <a:ea typeface="Noto Sans Arabic"/>
               </a:rPr>
               <a:t>لماذا هي فجوة؟  </a:t>
             </a:r>
@@ -26380,9 +26387,9 @@
                 <a:solidFill>
                   <a:srgbClr val="6E6A8F"/>
                 </a:solidFill>
-                <a:latin typeface="Segoe UI"/>
-                <a:cs typeface="Segoe UI"/>
-                <a:ea typeface="Segoe UI"/>
+                <a:latin typeface="Noto Sans Arabic"/>
+                <a:cs typeface="Noto Sans Arabic"/>
+                <a:ea typeface="Noto Sans Arabic"/>
               </a:rPr>
               <a:t>العينة لا تمثل مجتمعك — إعادة الدراسة محلياً تسد الفجوة</a:t>
             </a:r>
@@ -26499,9 +26506,9 @@
                 <a:solidFill>
                   <a:srgbClr val="FFFFFF"/>
                 </a:solidFill>
-                <a:latin typeface="Segoe UI"/>
-                <a:cs typeface="Segoe UI"/>
-                <a:ea typeface="Segoe UI"/>
+                <a:latin typeface="Noto Sans Arabic"/>
+                <a:cs typeface="Noto Sans Arabic"/>
+                <a:ea typeface="Noto Sans Arabic"/>
               </a:rPr>
               <a:t>منهجية</a:t>
             </a:r>
@@ -26546,9 +26553,9 @@
                 <a:solidFill>
                   <a:srgbClr val="221C57"/>
                 </a:solidFill>
-                <a:latin typeface="Segoe UI"/>
-                <a:cs typeface="Segoe UI"/>
-                <a:ea typeface="Segoe UI"/>
+                <a:latin typeface="Noto Sans Arabic"/>
+                <a:cs typeface="Noto Sans Arabic"/>
+                <a:ea typeface="Noto Sans Arabic"/>
               </a:rPr>
               <a:t>كل الدراسات استخدمت المنهج الكمي فقط، بينما المنهج النوعي يمكن أن يعطي تفاصيل أعمق</a:t>
             </a:r>
@@ -26593,9 +26600,9 @@
                 <a:solidFill>
                   <a:srgbClr val="BE123C"/>
                 </a:solidFill>
-                <a:latin typeface="Segoe UI"/>
-                <a:cs typeface="Segoe UI"/>
-                <a:ea typeface="Segoe UI"/>
+                <a:latin typeface="Noto Sans Arabic"/>
+                <a:cs typeface="Noto Sans Arabic"/>
+                <a:ea typeface="Noto Sans Arabic"/>
               </a:rPr>
               <a:t>لماذا هي فجوة؟  </a:t>
             </a:r>
@@ -26604,9 +26611,9 @@
                 <a:solidFill>
                   <a:srgbClr val="6E6A8F"/>
                 </a:solidFill>
-                <a:latin typeface="Segoe UI"/>
-                <a:cs typeface="Segoe UI"/>
-                <a:ea typeface="Segoe UI"/>
+                <a:latin typeface="Noto Sans Arabic"/>
+                <a:cs typeface="Noto Sans Arabic"/>
+                <a:ea typeface="Noto Sans Arabic"/>
               </a:rPr>
               <a:t>تغيير أسلوب البحث يفتح نافذة جديدة على الظاهرة نفسها</a:t>
             </a:r>
@@ -26723,9 +26730,9 @@
                 <a:solidFill>
                   <a:srgbClr val="FFFFFF"/>
                 </a:solidFill>
-                <a:latin typeface="Segoe UI"/>
-                <a:cs typeface="Segoe UI"/>
-                <a:ea typeface="Segoe UI"/>
+                <a:latin typeface="Noto Sans Arabic"/>
+                <a:cs typeface="Noto Sans Arabic"/>
+                <a:ea typeface="Noto Sans Arabic"/>
               </a:rPr>
               <a:t>زمنية</a:t>
             </a:r>
@@ -26770,9 +26777,9 @@
                 <a:solidFill>
                   <a:srgbClr val="221C57"/>
                 </a:solidFill>
-                <a:latin typeface="Segoe UI"/>
-                <a:cs typeface="Segoe UI"/>
-                <a:ea typeface="Segoe UI"/>
+                <a:latin typeface="Noto Sans Arabic"/>
+                <a:cs typeface="Noto Sans Arabic"/>
+                <a:ea typeface="Noto Sans Arabic"/>
               </a:rPr>
               <a:t>الدراسات القديمة قبل 2020 لا تعكس التغيرات التي حدثت بعد الجائحة</a:t>
             </a:r>
@@ -26817,9 +26824,9 @@
                 <a:solidFill>
                   <a:srgbClr val="047857"/>
                 </a:solidFill>
-                <a:latin typeface="Segoe UI"/>
-                <a:cs typeface="Segoe UI"/>
-                <a:ea typeface="Segoe UI"/>
+                <a:latin typeface="Noto Sans Arabic"/>
+                <a:cs typeface="Noto Sans Arabic"/>
+                <a:ea typeface="Noto Sans Arabic"/>
               </a:rPr>
               <a:t>لماذا هي فجوة؟  </a:t>
             </a:r>
@@ -26828,9 +26835,9 @@
                 <a:solidFill>
                   <a:srgbClr val="6E6A8F"/>
                 </a:solidFill>
-                <a:latin typeface="Segoe UI"/>
-                <a:cs typeface="Segoe UI"/>
-                <a:ea typeface="Segoe UI"/>
+                <a:latin typeface="Noto Sans Arabic"/>
+                <a:cs typeface="Noto Sans Arabic"/>
+                <a:ea typeface="Noto Sans Arabic"/>
               </a:rPr>
               <a:t>الواقع تغيّر جذرياً والأرقام القديمة لم تعد تمثله</a:t>
             </a:r>
@@ -26937,9 +26944,9 @@
                 <a:solidFill>
                   <a:srgbClr val="ECE9FA"/>
                 </a:solidFill>
-                <a:latin typeface="Segoe UI"/>
-                <a:cs typeface="Segoe UI"/>
-                <a:ea typeface="Segoe UI"/>
+                <a:latin typeface="Noto Sans Arabic"/>
+                <a:cs typeface="Noto Sans Arabic"/>
+                <a:ea typeface="Noto Sans Arabic"/>
               </a:rPr>
               <a:t>08</a:t>
             </a:r>
@@ -27008,9 +27015,9 @@
                 <a:solidFill>
                   <a:srgbClr val="FFFFFF"/>
                 </a:solidFill>
-                <a:latin typeface="Segoe UI"/>
-                <a:cs typeface="Segoe UI"/>
-                <a:ea typeface="Segoe UI"/>
+                <a:latin typeface="Noto Sans Arabic"/>
+                <a:cs typeface="Noto Sans Arabic"/>
+                <a:ea typeface="Noto Sans Arabic"/>
               </a:rPr>
               <a:t>🤖</a:t>
             </a:r>
@@ -27055,9 +27062,9 @@
                 <a:solidFill>
                   <a:srgbClr val="BE123C"/>
                 </a:solidFill>
-                <a:latin typeface="Segoe UI"/>
-                <a:cs typeface="Segoe UI"/>
-                <a:ea typeface="Segoe UI"/>
+                <a:latin typeface="Noto Sans Arabic"/>
+                <a:cs typeface="Noto Sans Arabic"/>
+                <a:ea typeface="Noto Sans Arabic"/>
               </a:rPr>
               <a:t>AI TOOLS FOR GAP DISCOVERY</a:t>
             </a:r>
@@ -27102,9 +27109,9 @@
                 <a:solidFill>
                   <a:srgbClr val="221C57"/>
                 </a:solidFill>
-                <a:latin typeface="Segoe UI"/>
-                <a:cs typeface="Segoe UI"/>
-                <a:ea typeface="Segoe UI"/>
+                <a:latin typeface="Noto Sans Arabic"/>
+                <a:cs typeface="Noto Sans Arabic"/>
+                <a:ea typeface="Noto Sans Arabic"/>
               </a:rPr>
               <a:t>أدوات الذكاء الاصطناعي الثمانية</a:t>
             </a:r>
@@ -27273,9 +27280,9 @@
                 <a:solidFill>
                   <a:srgbClr val="FFFFFF"/>
                 </a:solidFill>
-                <a:latin typeface="Segoe UI"/>
-                <a:cs typeface="Segoe UI"/>
-                <a:ea typeface="Segoe UI"/>
+                <a:latin typeface="Noto Sans Arabic"/>
+                <a:cs typeface="Noto Sans Arabic"/>
+                <a:ea typeface="Noto Sans Arabic"/>
               </a:rPr>
               <a:t>08</a:t>
             </a:r>
@@ -27320,9 +27327,9 @@
                 <a:solidFill>
                   <a:srgbClr val="6E6A8F"/>
                 </a:solidFill>
-                <a:latin typeface="Segoe UI"/>
-                <a:cs typeface="Segoe UI"/>
-                <a:ea typeface="Segoe UI"/>
+                <a:latin typeface="Noto Sans Arabic"/>
+                <a:cs typeface="Noto Sans Arabic"/>
+                <a:ea typeface="Noto Sans Arabic"/>
               </a:rPr>
               <a:t>الفجوات البحثية  •  د. هناء حسين الأهيمر</a:t>
             </a:r>
@@ -27443,9 +27450,9 @@
                 <a:solidFill>
                   <a:srgbClr val="FFFFFF"/>
                 </a:solidFill>
-                <a:latin typeface="Segoe UI"/>
-                <a:cs typeface="Segoe UI"/>
-                <a:ea typeface="Segoe UI"/>
+                <a:latin typeface="Noto Sans Arabic"/>
+                <a:cs typeface="Noto Sans Arabic"/>
+                <a:ea typeface="Noto Sans Arabic"/>
               </a:rPr>
               <a:t>🔍</a:t>
             </a:r>
@@ -27490,9 +27497,9 @@
                 <a:solidFill>
                   <a:srgbClr val="A21CAF"/>
                 </a:solidFill>
-                <a:latin typeface="Segoe UI"/>
-                <a:cs typeface="Segoe UI"/>
-                <a:ea typeface="Segoe UI"/>
+                <a:latin typeface="Noto Sans Arabic"/>
+                <a:cs typeface="Noto Sans Arabic"/>
+                <a:ea typeface="Noto Sans Arabic"/>
               </a:rPr>
               <a:t>Elicit</a:t>
             </a:r>
@@ -27537,9 +27544,9 @@
                 <a:solidFill>
                   <a:srgbClr val="221C57"/>
                 </a:solidFill>
-                <a:latin typeface="Segoe UI"/>
-                <a:cs typeface="Segoe UI"/>
-                <a:ea typeface="Segoe UI"/>
+                <a:latin typeface="Noto Sans Arabic"/>
+                <a:cs typeface="Noto Sans Arabic"/>
+                <a:ea typeface="Noto Sans Arabic"/>
               </a:rPr>
               <a:t>يلخّص الدراسات ويستخرج النتائج بسؤال مباشر بلغة طبيعية</a:t>
             </a:r>
@@ -27660,9 +27667,9 @@
                 <a:solidFill>
                   <a:srgbClr val="FFFFFF"/>
                 </a:solidFill>
-                <a:latin typeface="Segoe UI"/>
-                <a:cs typeface="Segoe UI"/>
-                <a:ea typeface="Segoe UI"/>
+                <a:latin typeface="Noto Sans Arabic"/>
+                <a:cs typeface="Noto Sans Arabic"/>
+                <a:ea typeface="Noto Sans Arabic"/>
               </a:rPr>
               <a:t>🤝</a:t>
             </a:r>
@@ -27707,9 +27714,9 @@
                 <a:solidFill>
                   <a:srgbClr val="0D9488"/>
                 </a:solidFill>
-                <a:latin typeface="Segoe UI"/>
-                <a:cs typeface="Segoe UI"/>
-                <a:ea typeface="Segoe UI"/>
+                <a:latin typeface="Noto Sans Arabic"/>
+                <a:cs typeface="Noto Sans Arabic"/>
+                <a:ea typeface="Noto Sans Arabic"/>
               </a:rPr>
               <a:t>Consensus</a:t>
             </a:r>
@@ -27754,9 +27761,9 @@
                 <a:solidFill>
                   <a:srgbClr val="221C57"/>
                 </a:solidFill>
-                <a:latin typeface="Segoe UI"/>
-                <a:cs typeface="Segoe UI"/>
-                <a:ea typeface="Segoe UI"/>
+                <a:latin typeface="Noto Sans Arabic"/>
+                <a:cs typeface="Noto Sans Arabic"/>
+                <a:ea typeface="Noto Sans Arabic"/>
               </a:rPr>
               <a:t>يعطيك إجماع الأبحاث حول سؤال علمي معيّن واتجاه الأدلة</a:t>
             </a:r>
@@ -27877,9 +27884,9 @@
                 <a:solidFill>
                   <a:srgbClr val="FFFFFF"/>
                 </a:solidFill>
-                <a:latin typeface="Segoe UI"/>
-                <a:cs typeface="Segoe UI"/>
-                <a:ea typeface="Segoe UI"/>
+                <a:latin typeface="Noto Sans Arabic"/>
+                <a:cs typeface="Noto Sans Arabic"/>
+                <a:ea typeface="Noto Sans Arabic"/>
               </a:rPr>
               <a:t>🐇</a:t>
             </a:r>
@@ -27924,9 +27931,9 @@
                 <a:solidFill>
                   <a:srgbClr val="D97706"/>
                 </a:solidFill>
-                <a:latin typeface="Segoe UI"/>
-                <a:cs typeface="Segoe UI"/>
-                <a:ea typeface="Segoe UI"/>
+                <a:latin typeface="Noto Sans Arabic"/>
+                <a:cs typeface="Noto Sans Arabic"/>
+                <a:ea typeface="Noto Sans Arabic"/>
               </a:rPr>
               <a:t>Research Rabbit</a:t>
             </a:r>
@@ -27971,9 +27978,9 @@
                 <a:solidFill>
                   <a:srgbClr val="221C57"/>
                 </a:solidFill>
-                <a:latin typeface="Segoe UI"/>
-                <a:cs typeface="Segoe UI"/>
-                <a:ea typeface="Segoe UI"/>
+                <a:latin typeface="Noto Sans Arabic"/>
+                <a:cs typeface="Noto Sans Arabic"/>
+                <a:ea typeface="Noto Sans Arabic"/>
               </a:rPr>
               <a:t>يرسم خريطة للعلاقات بين الأبحاث — الأقوى بحسب الورشة</a:t>
             </a:r>
@@ -28042,9 +28049,9 @@
                 <a:solidFill>
                   <a:srgbClr val="FFFFFF"/>
                 </a:solidFill>
-                <a:latin typeface="Segoe UI"/>
-                <a:cs typeface="Segoe UI"/>
-                <a:ea typeface="Segoe UI"/>
+                <a:latin typeface="Noto Sans Arabic"/>
+                <a:cs typeface="Noto Sans Arabic"/>
+                <a:ea typeface="Noto Sans Arabic"/>
               </a:rPr>
               <a:t>⭐ الأقوى</a:t>
             </a:r>
@@ -28165,9 +28172,9 @@
                 <a:solidFill>
                   <a:srgbClr val="FFFFFF"/>
                 </a:solidFill>
-                <a:latin typeface="Segoe UI"/>
-                <a:cs typeface="Segoe UI"/>
-                <a:ea typeface="Segoe UI"/>
+                <a:latin typeface="Noto Sans Arabic"/>
+                <a:cs typeface="Noto Sans Arabic"/>
+                <a:ea typeface="Noto Sans Arabic"/>
               </a:rPr>
               <a:t>🕸</a:t>
             </a:r>
@@ -28212,9 +28219,9 @@
                 <a:solidFill>
                   <a:srgbClr val="6D28D9"/>
                 </a:solidFill>
-                <a:latin typeface="Segoe UI"/>
-                <a:cs typeface="Segoe UI"/>
-                <a:ea typeface="Segoe UI"/>
+                <a:latin typeface="Noto Sans Arabic"/>
+                <a:cs typeface="Noto Sans Arabic"/>
+                <a:ea typeface="Noto Sans Arabic"/>
               </a:rPr>
               <a:t>Connected Papers</a:t>
             </a:r>
@@ -28259,9 +28266,9 @@
                 <a:solidFill>
                   <a:srgbClr val="221C57"/>
                 </a:solidFill>
-                <a:latin typeface="Segoe UI"/>
-                <a:cs typeface="Segoe UI"/>
-                <a:ea typeface="Segoe UI"/>
+                <a:latin typeface="Noto Sans Arabic"/>
+                <a:cs typeface="Noto Sans Arabic"/>
+                <a:ea typeface="Noto Sans Arabic"/>
               </a:rPr>
               <a:t>يوضح الدراسات المرتبطة ببحثك في شبكة بصرية واحدة</a:t>
             </a:r>
@@ -28382,9 +28389,9 @@
                 <a:solidFill>
                   <a:srgbClr val="FFFFFF"/>
                 </a:solidFill>
-                <a:latin typeface="Segoe UI"/>
-                <a:cs typeface="Segoe UI"/>
-                <a:ea typeface="Segoe UI"/>
+                <a:latin typeface="Noto Sans Arabic"/>
+                <a:cs typeface="Noto Sans Arabic"/>
+                <a:ea typeface="Noto Sans Arabic"/>
               </a:rPr>
               <a:t>📊</a:t>
             </a:r>
@@ -28429,9 +28436,9 @@
                 <a:solidFill>
                   <a:srgbClr val="BE123C"/>
                 </a:solidFill>
-                <a:latin typeface="Segoe UI"/>
-                <a:cs typeface="Segoe UI"/>
-                <a:ea typeface="Segoe UI"/>
+                <a:latin typeface="Noto Sans Arabic"/>
+                <a:cs typeface="Noto Sans Arabic"/>
+                <a:ea typeface="Noto Sans Arabic"/>
               </a:rPr>
               <a:t>Scite.ai</a:t>
             </a:r>
@@ -28476,9 +28483,9 @@
                 <a:solidFill>
                   <a:srgbClr val="221C57"/>
                 </a:solidFill>
-                <a:latin typeface="Segoe UI"/>
-                <a:cs typeface="Segoe UI"/>
-                <a:ea typeface="Segoe UI"/>
+                <a:latin typeface="Noto Sans Arabic"/>
+                <a:cs typeface="Noto Sans Arabic"/>
+                <a:ea typeface="Noto Sans Arabic"/>
               </a:rPr>
               <a:t>يقيّم قوة المراجع ويميز الاقتباسات الداعمة من المعارضة</a:t>
             </a:r>
@@ -28599,9 +28606,9 @@
                 <a:solidFill>
                   <a:srgbClr val="FFFFFF"/>
                 </a:solidFill>
-                <a:latin typeface="Segoe UI"/>
-                <a:cs typeface="Segoe UI"/>
-                <a:ea typeface="Segoe UI"/>
+                <a:latin typeface="Noto Sans Arabic"/>
+                <a:cs typeface="Noto Sans Arabic"/>
+                <a:ea typeface="Noto Sans Arabic"/>
               </a:rPr>
               <a:t>🧠</a:t>
             </a:r>
@@ -28646,9 +28653,9 @@
                 <a:solidFill>
                   <a:srgbClr val="047857"/>
                 </a:solidFill>
-                <a:latin typeface="Segoe UI"/>
-                <a:cs typeface="Segoe UI"/>
-                <a:ea typeface="Segoe UI"/>
+                <a:latin typeface="Noto Sans Arabic"/>
+                <a:cs typeface="Noto Sans Arabic"/>
+                <a:ea typeface="Noto Sans Arabic"/>
               </a:rPr>
               <a:t>Semantic Scholar</a:t>
             </a:r>
@@ -28693,9 +28700,9 @@
                 <a:solidFill>
                   <a:srgbClr val="221C57"/>
                 </a:solidFill>
-                <a:latin typeface="Segoe UI"/>
-                <a:cs typeface="Segoe UI"/>
-                <a:ea typeface="Segoe UI"/>
+                <a:latin typeface="Noto Sans Arabic"/>
+                <a:cs typeface="Noto Sans Arabic"/>
+                <a:ea typeface="Noto Sans Arabic"/>
               </a:rPr>
               <a:t>محرك بحث أكاديمي دلالي يفهم المعنى لا الكلمات فقط</a:t>
             </a:r>
@@ -28816,9 +28823,9 @@
                 <a:solidFill>
                   <a:srgbClr val="FFFFFF"/>
                 </a:solidFill>
-                <a:latin typeface="Segoe UI"/>
-                <a:cs typeface="Segoe UI"/>
-                <a:ea typeface="Segoe UI"/>
+                <a:latin typeface="Noto Sans Arabic"/>
+                <a:cs typeface="Noto Sans Arabic"/>
+                <a:ea typeface="Noto Sans Arabic"/>
               </a:rPr>
               <a:t>⭐</a:t>
             </a:r>
@@ -28863,9 +28870,9 @@
                 <a:solidFill>
                   <a:srgbClr val="17123B"/>
                 </a:solidFill>
-                <a:latin typeface="Segoe UI"/>
-                <a:cs typeface="Segoe UI"/>
-                <a:ea typeface="Segoe UI"/>
+                <a:latin typeface="Noto Sans Arabic"/>
+                <a:cs typeface="Noto Sans Arabic"/>
+                <a:ea typeface="Noto Sans Arabic"/>
               </a:rPr>
               <a:t>Claude</a:t>
             </a:r>
@@ -28910,9 +28917,9 @@
                 <a:solidFill>
                   <a:srgbClr val="221C57"/>
                 </a:solidFill>
-                <a:latin typeface="Segoe UI"/>
-                <a:cs typeface="Segoe UI"/>
-                <a:ea typeface="Segoe UI"/>
+                <a:latin typeface="Noto Sans Arabic"/>
+                <a:cs typeface="Noto Sans Arabic"/>
+                <a:ea typeface="Noto Sans Arabic"/>
               </a:rPr>
               <a:t>يحلل الأدبيات بعمق ويقترح فجوات عبر حوار نقدي متدرج</a:t>
             </a:r>
@@ -29033,9 +29040,9 @@
                 <a:solidFill>
                   <a:srgbClr val="FFFFFF"/>
                 </a:solidFill>
-                <a:latin typeface="Segoe UI"/>
-                <a:cs typeface="Segoe UI"/>
-                <a:ea typeface="Segoe UI"/>
+                <a:latin typeface="Noto Sans Arabic"/>
+                <a:cs typeface="Noto Sans Arabic"/>
+                <a:ea typeface="Noto Sans Arabic"/>
               </a:rPr>
               <a:t>💬</a:t>
             </a:r>
@@ -29080,9 +29087,9 @@
                 <a:solidFill>
                   <a:srgbClr val="1D4ED8"/>
                 </a:solidFill>
-                <a:latin typeface="Segoe UI"/>
-                <a:cs typeface="Segoe UI"/>
-                <a:ea typeface="Segoe UI"/>
+                <a:latin typeface="Noto Sans Arabic"/>
+                <a:cs typeface="Noto Sans Arabic"/>
+                <a:ea typeface="Noto Sans Arabic"/>
               </a:rPr>
               <a:t>ChatGPT</a:t>
             </a:r>
@@ -29127,9 +29134,9 @@
                 <a:solidFill>
                   <a:srgbClr val="221C57"/>
                 </a:solidFill>
-                <a:latin typeface="Segoe UI"/>
-                <a:cs typeface="Segoe UI"/>
-                <a:ea typeface="Segoe UI"/>
+                <a:latin typeface="Noto Sans Arabic"/>
+                <a:cs typeface="Noto Sans Arabic"/>
+                <a:ea typeface="Noto Sans Arabic"/>
               </a:rPr>
               <a:t>يساعد في الفهم العام وصياغة أسئلة البحث الأولية</a:t>
             </a:r>
@@ -29234,9 +29241,9 @@
                 <a:solidFill>
                   <a:srgbClr val="FBBF24"/>
                 </a:solidFill>
-                <a:latin typeface="Segoe UI"/>
-                <a:cs typeface="Segoe UI"/>
-                <a:ea typeface="Segoe UI"/>
+                <a:latin typeface="Noto Sans Arabic"/>
+                <a:cs typeface="Noto Sans Arabic"/>
+                <a:ea typeface="Noto Sans Arabic"/>
               </a:rPr>
               <a:t>💡 من الشرح: </a:t>
             </a:r>
@@ -29245,9 +29252,9 @@
                 <a:solidFill>
                   <a:srgbClr val="FFFFFF"/>
                 </a:solidFill>
-                <a:latin typeface="Segoe UI"/>
-                <a:cs typeface="Segoe UI"/>
-                <a:ea typeface="Segoe UI"/>
+                <a:latin typeface="Noto Sans Arabic"/>
+                <a:cs typeface="Noto Sans Arabic"/>
+                <a:ea typeface="Noto Sans Arabic"/>
               </a:rPr>
               <a:t>الأدوات كثيرة، لكن الأقوى هو Research Rabbit لأنه يرسم خريطة واضحة للعلاقات بين الأبحاث — وسير العمل معه في الشريحة التالية</a:t>
             </a:r>
@@ -29354,9 +29361,9 @@
                 <a:solidFill>
                   <a:srgbClr val="ECE9FA"/>
                 </a:solidFill>
-                <a:latin typeface="Segoe UI"/>
-                <a:cs typeface="Segoe UI"/>
-                <a:ea typeface="Segoe UI"/>
+                <a:latin typeface="Noto Sans Arabic"/>
+                <a:cs typeface="Noto Sans Arabic"/>
+                <a:ea typeface="Noto Sans Arabic"/>
               </a:rPr>
               <a:t>09</a:t>
             </a:r>
@@ -29425,9 +29432,9 @@
                 <a:solidFill>
                   <a:srgbClr val="FFFFFF"/>
                 </a:solidFill>
-                <a:latin typeface="Segoe UI"/>
-                <a:cs typeface="Segoe UI"/>
-                <a:ea typeface="Segoe UI"/>
+                <a:latin typeface="Noto Sans Arabic"/>
+                <a:cs typeface="Noto Sans Arabic"/>
+                <a:ea typeface="Noto Sans Arabic"/>
               </a:rPr>
               <a:t>🐇</a:t>
             </a:r>
@@ -29472,9 +29479,9 @@
                 <a:solidFill>
                   <a:srgbClr val="D97706"/>
                 </a:solidFill>
-                <a:latin typeface="Segoe UI"/>
-                <a:cs typeface="Segoe UI"/>
-                <a:ea typeface="Segoe UI"/>
+                <a:latin typeface="Noto Sans Arabic"/>
+                <a:cs typeface="Noto Sans Arabic"/>
+                <a:ea typeface="Noto Sans Arabic"/>
               </a:rPr>
               <a:t>THE RECOMMENDED WORKFLOW</a:t>
             </a:r>
@@ -29519,9 +29526,9 @@
                 <a:solidFill>
                   <a:srgbClr val="221C57"/>
                 </a:solidFill>
-                <a:latin typeface="Segoe UI"/>
-                <a:cs typeface="Segoe UI"/>
-                <a:ea typeface="Segoe UI"/>
+                <a:latin typeface="Noto Sans Arabic"/>
+                <a:cs typeface="Noto Sans Arabic"/>
+                <a:ea typeface="Noto Sans Arabic"/>
               </a:rPr>
               <a:t>سير العمل الذكي مع Research Rabbit</a:t>
             </a:r>
@@ -29690,9 +29697,9 @@
                 <a:solidFill>
                   <a:srgbClr val="FFFFFF"/>
                 </a:solidFill>
-                <a:latin typeface="Segoe UI"/>
-                <a:cs typeface="Segoe UI"/>
-                <a:ea typeface="Segoe UI"/>
+                <a:latin typeface="Noto Sans Arabic"/>
+                <a:cs typeface="Noto Sans Arabic"/>
+                <a:ea typeface="Noto Sans Arabic"/>
               </a:rPr>
               <a:t>09</a:t>
             </a:r>
@@ -29737,9 +29744,9 @@
                 <a:solidFill>
                   <a:srgbClr val="6E6A8F"/>
                 </a:solidFill>
-                <a:latin typeface="Segoe UI"/>
-                <a:cs typeface="Segoe UI"/>
-                <a:ea typeface="Segoe UI"/>
+                <a:latin typeface="Noto Sans Arabic"/>
+                <a:cs typeface="Noto Sans Arabic"/>
+                <a:ea typeface="Noto Sans Arabic"/>
               </a:rPr>
               <a:t>الفجوات البحثية  •  د. هناء حسين الأهيمر</a:t>
             </a:r>
@@ -29784,9 +29791,9 @@
                 <a:solidFill>
                   <a:srgbClr val="6E6A8F"/>
                 </a:solidFill>
-                <a:latin typeface="Segoe UI"/>
-                <a:cs typeface="Segoe UI"/>
-                <a:ea typeface="Segoe UI"/>
+                <a:latin typeface="Noto Sans Arabic"/>
+                <a:cs typeface="Noto Sans Arabic"/>
+                <a:ea typeface="Noto Sans Arabic"/>
               </a:rPr>
               <a:t>الطريقة العملية التي أوصت بها الورشة لاستخراج الفجوة بالذكاء الاصطناعي — أربع خطوات:</a:t>
             </a:r>
@@ -29961,9 +29968,9 @@
                 <a:solidFill>
                   <a:srgbClr val="FFFFFF"/>
                 </a:solidFill>
-                <a:latin typeface="Segoe UI"/>
-                <a:cs typeface="Segoe UI"/>
-                <a:ea typeface="Segoe UI"/>
+                <a:latin typeface="Noto Sans Arabic"/>
+                <a:cs typeface="Noto Sans Arabic"/>
+                <a:ea typeface="Noto Sans Arabic"/>
               </a:rPr>
               <a:t>📤</a:t>
             </a:r>
@@ -30018,9 +30025,9 @@
                 <a:solidFill>
                   <a:srgbClr val="A21CAF"/>
                 </a:solidFill>
-                <a:latin typeface="Segoe UI"/>
-                <a:cs typeface="Segoe UI"/>
-                <a:ea typeface="Segoe UI"/>
+                <a:latin typeface="Noto Sans Arabic"/>
+                <a:cs typeface="Noto Sans Arabic"/>
+                <a:ea typeface="Noto Sans Arabic"/>
               </a:rPr>
               <a:t>الخطوة ١</a:t>
             </a:r>
@@ -30065,9 +30072,9 @@
                 <a:solidFill>
                   <a:srgbClr val="A21CAF"/>
                 </a:solidFill>
-                <a:latin typeface="Segoe UI"/>
-                <a:cs typeface="Segoe UI"/>
-                <a:ea typeface="Segoe UI"/>
+                <a:latin typeface="Noto Sans Arabic"/>
+                <a:cs typeface="Noto Sans Arabic"/>
+                <a:ea typeface="Noto Sans Arabic"/>
               </a:rPr>
               <a:t>ارفع ملفات الدراسات</a:t>
             </a:r>
@@ -30112,9 +30119,9 @@
                 <a:solidFill>
                   <a:srgbClr val="221C57"/>
                 </a:solidFill>
-                <a:latin typeface="Segoe UI"/>
-                <a:cs typeface="Segoe UI"/>
-                <a:ea typeface="Segoe UI"/>
+                <a:latin typeface="Noto Sans Arabic"/>
+                <a:cs typeface="Noto Sans Arabic"/>
+                <a:ea typeface="Noto Sans Arabic"/>
               </a:rPr>
               <a:t>حمّل الأوراق العلمية المرتبطة بموضوعك إلى المنصة — كلما كانت أحدث وأشمل كانت الخريطة أدق</a:t>
             </a:r>
@@ -30165,9 +30172,9 @@
                 <a:solidFill>
                   <a:srgbClr val="6E6A8F"/>
                 </a:solidFill>
-                <a:latin typeface="Segoe UI"/>
-                <a:cs typeface="Segoe UI"/>
-                <a:ea typeface="Segoe UI"/>
+                <a:latin typeface="Noto Sans Arabic"/>
+                <a:cs typeface="Noto Sans Arabic"/>
+                <a:ea typeface="Noto Sans Arabic"/>
               </a:rPr>
               <a:t>⬅</a:t>
             </a:r>
@@ -30342,9 +30349,9 @@
                 <a:solidFill>
                   <a:srgbClr val="FFFFFF"/>
                 </a:solidFill>
-                <a:latin typeface="Segoe UI"/>
-                <a:cs typeface="Segoe UI"/>
-                <a:ea typeface="Segoe UI"/>
+                <a:latin typeface="Noto Sans Arabic"/>
+                <a:cs typeface="Noto Sans Arabic"/>
+                <a:ea typeface="Noto Sans Arabic"/>
               </a:rPr>
               <a:t>🎯</a:t>
             </a:r>
@@ -30399,9 +30406,9 @@
                 <a:solidFill>
                   <a:srgbClr val="D97706"/>
                 </a:solidFill>
-                <a:latin typeface="Segoe UI"/>
-                <a:cs typeface="Segoe UI"/>
-                <a:ea typeface="Segoe UI"/>
+                <a:latin typeface="Noto Sans Arabic"/>
+                <a:cs typeface="Noto Sans Arabic"/>
+                <a:ea typeface="Noto Sans Arabic"/>
               </a:rPr>
               <a:t>الخطوة ٢</a:t>
             </a:r>
@@ -30446,9 +30453,9 @@
                 <a:solidFill>
                   <a:srgbClr val="D97706"/>
                 </a:solidFill>
-                <a:latin typeface="Segoe UI"/>
-                <a:cs typeface="Segoe UI"/>
-                <a:ea typeface="Segoe UI"/>
+                <a:latin typeface="Noto Sans Arabic"/>
+                <a:cs typeface="Noto Sans Arabic"/>
+                <a:ea typeface="Noto Sans Arabic"/>
               </a:rPr>
               <a:t>اطرح سؤالاً دقيقاً</a:t>
             </a:r>
@@ -30493,9 +30500,9 @@
                 <a:solidFill>
                   <a:srgbClr val="221C57"/>
                 </a:solidFill>
-                <a:latin typeface="Segoe UI"/>
-                <a:cs typeface="Segoe UI"/>
-                <a:ea typeface="Segoe UI"/>
+                <a:latin typeface="Noto Sans Arabic"/>
+                <a:cs typeface="Noto Sans Arabic"/>
+                <a:ea typeface="Noto Sans Arabic"/>
               </a:rPr>
               <a:t>اكتب طلباً محدداً: «حلّل هذه الملفات واستخرج الفجوة البحثية» — دقة السؤال تصنع دقة الإجابة</a:t>
             </a:r>
@@ -30546,9 +30553,9 @@
                 <a:solidFill>
                   <a:srgbClr val="6E6A8F"/>
                 </a:solidFill>
-                <a:latin typeface="Segoe UI"/>
-                <a:cs typeface="Segoe UI"/>
-                <a:ea typeface="Segoe UI"/>
+                <a:latin typeface="Noto Sans Arabic"/>
+                <a:cs typeface="Noto Sans Arabic"/>
+                <a:ea typeface="Noto Sans Arabic"/>
               </a:rPr>
               <a:t>⬅</a:t>
             </a:r>
@@ -30723,9 +30730,9 @@
                 <a:solidFill>
                   <a:srgbClr val="FFFFFF"/>
                 </a:solidFill>
-                <a:latin typeface="Segoe UI"/>
-                <a:cs typeface="Segoe UI"/>
-                <a:ea typeface="Segoe UI"/>
+                <a:latin typeface="Noto Sans Arabic"/>
+                <a:cs typeface="Noto Sans Arabic"/>
+                <a:ea typeface="Noto Sans Arabic"/>
               </a:rPr>
               <a:t>🧐</a:t>
             </a:r>
@@ -30780,9 +30787,9 @@
                 <a:solidFill>
                   <a:srgbClr val="0D9488"/>
                 </a:solidFill>
-                <a:latin typeface="Segoe UI"/>
-                <a:cs typeface="Segoe UI"/>
-                <a:ea typeface="Segoe UI"/>
+                <a:latin typeface="Noto Sans Arabic"/>
+                <a:cs typeface="Noto Sans Arabic"/>
+                <a:ea typeface="Noto Sans Arabic"/>
               </a:rPr>
               <a:t>الخطوة ٣</a:t>
             </a:r>
@@ -30827,9 +30834,9 @@
                 <a:solidFill>
                   <a:srgbClr val="0D9488"/>
                 </a:solidFill>
-                <a:latin typeface="Segoe UI"/>
-                <a:cs typeface="Segoe UI"/>
-                <a:ea typeface="Segoe UI"/>
+                <a:latin typeface="Noto Sans Arabic"/>
+                <a:cs typeface="Noto Sans Arabic"/>
+                <a:ea typeface="Noto Sans Arabic"/>
               </a:rPr>
               <a:t>راجع التحليل بنفسك</a:t>
             </a:r>
@@ -30874,9 +30881,9 @@
                 <a:solidFill>
                   <a:srgbClr val="221C57"/>
                 </a:solidFill>
-                <a:latin typeface="Segoe UI"/>
-                <a:cs typeface="Segoe UI"/>
-                <a:ea typeface="Segoe UI"/>
+                <a:latin typeface="Noto Sans Arabic"/>
+                <a:cs typeface="Noto Sans Arabic"/>
+                <a:ea typeface="Noto Sans Arabic"/>
               </a:rPr>
               <a:t>افحص ما قدّمه الذكاء الاصطناعي بعقلك النقدي — لا تعتمد المخرجات كما هي أبداً</a:t>
             </a:r>
@@ -30927,9 +30934,9 @@
                 <a:solidFill>
                   <a:srgbClr val="6E6A8F"/>
                 </a:solidFill>
-                <a:latin typeface="Segoe UI"/>
-                <a:cs typeface="Segoe UI"/>
-                <a:ea typeface="Segoe UI"/>
+                <a:latin typeface="Noto Sans Arabic"/>
+                <a:cs typeface="Noto Sans Arabic"/>
+                <a:ea typeface="Noto Sans Arabic"/>
               </a:rPr>
               <a:t>⬅</a:t>
             </a:r>
@@ -31104,9 +31111,9 @@
                 <a:solidFill>
                   <a:srgbClr val="FFFFFF"/>
                 </a:solidFill>
-                <a:latin typeface="Segoe UI"/>
-                <a:cs typeface="Segoe UI"/>
-                <a:ea typeface="Segoe UI"/>
+                <a:latin typeface="Noto Sans Arabic"/>
+                <a:cs typeface="Noto Sans Arabic"/>
+                <a:ea typeface="Noto Sans Arabic"/>
               </a:rPr>
               <a:t>✅</a:t>
             </a:r>
@@ -31161,9 +31168,9 @@
                 <a:solidFill>
                   <a:srgbClr val="047857"/>
                 </a:solidFill>
-                <a:latin typeface="Segoe UI"/>
-                <a:cs typeface="Segoe UI"/>
-                <a:ea typeface="Segoe UI"/>
+                <a:latin typeface="Noto Sans Arabic"/>
+                <a:cs typeface="Noto Sans Arabic"/>
+                <a:ea typeface="Noto Sans Arabic"/>
               </a:rPr>
               <a:t>الخطوة ٤</a:t>
             </a:r>
@@ -31208,9 +31215,9 @@
                 <a:solidFill>
                   <a:srgbClr val="047857"/>
                 </a:solidFill>
-                <a:latin typeface="Segoe UI"/>
-                <a:cs typeface="Segoe UI"/>
-                <a:ea typeface="Segoe UI"/>
+                <a:latin typeface="Noto Sans Arabic"/>
+                <a:cs typeface="Noto Sans Arabic"/>
+                <a:ea typeface="Noto Sans Arabic"/>
               </a:rPr>
               <a:t>اعتمد القرار الأكاديمي</a:t>
             </a:r>
@@ -31255,9 +31262,9 @@
                 <a:solidFill>
                   <a:srgbClr val="221C57"/>
                 </a:solidFill>
-                <a:latin typeface="Segoe UI"/>
-                <a:cs typeface="Segoe UI"/>
-                <a:ea typeface="Segoe UI"/>
+                <a:latin typeface="Noto Sans Arabic"/>
+                <a:cs typeface="Noto Sans Arabic"/>
+                <a:ea typeface="Noto Sans Arabic"/>
               </a:rPr>
               <a:t>بعد التحقق من المصادر تصبح الفجوة موثوقة وجاهزة لتتصدر مقترحك البحثي</a:t>
             </a:r>
@@ -31362,9 +31369,9 @@
                 <a:solidFill>
                   <a:srgbClr val="FBBF24"/>
                 </a:solidFill>
-                <a:latin typeface="Segoe UI"/>
-                <a:cs typeface="Segoe UI"/>
-                <a:ea typeface="Segoe UI"/>
+                <a:latin typeface="Noto Sans Arabic"/>
+                <a:cs typeface="Noto Sans Arabic"/>
+                <a:ea typeface="Noto Sans Arabic"/>
               </a:rPr>
               <a:t>⚠️ القاعدة الذهبية: </a:t>
             </a:r>
@@ -31373,9 +31380,9 @@
                 <a:solidFill>
                   <a:srgbClr val="FFFFFF"/>
                 </a:solidFill>
-                <a:latin typeface="Segoe UI"/>
-                <a:cs typeface="Segoe UI"/>
-                <a:ea typeface="Segoe UI"/>
+                <a:latin typeface="Noto Sans Arabic"/>
+                <a:cs typeface="Noto Sans Arabic"/>
+                <a:ea typeface="Noto Sans Arabic"/>
               </a:rPr>
               <a:t>الذكاء الاصطناعي يقترح والباحث يقرر — المراجعة البشرية للتحليل شرط أساسي لضمان دقة القرار الأكاديمي</a:t>
             </a:r>

--- a/Research-Gaps-الفجوات-البحثية.pptx
+++ b/Research-Gaps-الفجوات-البحثية.pptx
@@ -523,7 +523,7 @@
           <a:lstStyle/>
           <a:p>
             <a:r>
-              <a:t>افتتاحية الورشة كما وردت في الشرح: أكثر الأسئلة التي تصل للمقدمة على الخاص هو: هل يمكن استخدام الذكاء الاصطناعي لإيجاد الفجوة البحثية؟ والجواب: نعم — والورشة تشرح كيف. الموضوع من أهم مواضيع البحث العلمي: الفجوة البحثية تعني ببساطة الشيء الذي لم تتم دراسته بشكل كافٍ بعد، أو النقطة التي لم يركّز عليها الباحثون بوضوح. سنتعلم في هذا العرض: ما هي الفجوة البحثية، لماذا تعتبر مهمة، أنواعها المختلفة، والأهم: كيف نكتشفها باستخدام أدوات الذكاء الاصطناعي. والهدف النهائي: أن يتمكن أي طالب أو باحث بعد هذا العرض من تحديد فجوة بحثية قوية بطريقة احترافية.</a:t>
+              <a:t>افتتاحية مقترحة: من أكثر الأسئلة التي تشغل الباحثين اليوم: هل يمكن استخدام الذكاء الاصطناعي لإيجاد الفجوة البحثية؟ والجواب: نعم — وهذا ما سنتعلمه معاً. الموضوع من أهم مواضيع البحث العلمي: الفجوة البحثية تعني ببساطة الشيء الذي لم تتم دراسته بشكل كافٍ بعد، أو النقطة التي لم يركّز عليها الباحثون بوضوح. سنتعلم في هذا العرض: ما هي الفجوة البحثية، لماذا تعتبر مهمة، أنواعها المختلفة، والأهم: كيف نكتشفها باستخدام أدوات الذكاء الاصطناعي. والهدف النهائي: أن يتمكن أي طالب أو باحث بعد هذا العرض من تحديد فجوة بحثية قوية بطريقة احترافية.</a:t>
             </a:r>
           </a:p>
         </p:txBody>
@@ -593,7 +593,7 @@
           <a:lstStyle/>
           <a:p>
             <a:r>
-              <a:t>الباحثون المحترفون لديهم استراتيجيات ذكية لاكتشاف الفجوات، كما عرضتها الورشة: (1) قراءة خاتمة الدراسات (Conclusion Section): الباحثون غالباً يذكرون اقتراحات مستقبلية صريحة — هذه فجوات جاهزة أوصى بها أصحاب الدراسات أنفسهم. (2) عمل Literature Mapping أو خريطة للأدبيات العلمية حسب السكان والمنهج والدولة والزمن — الفراغ في الخريطة يظهر بصرياً بدل التخمين. (3) البحث عن التناقضات بين النتائج — التضارب فرصة لبحث يحسم الخلاف. (4) ومن أفضل الأسئلة: What if — ماذا لو طبقنا الدراسة نفسها على فئة عمرية مختلفة أو دولة مختلفة؟ قالت الورشة نصاً: هنا غالباً نجد فجوة بحثية ممتازة.</a:t>
+              <a:t>الباحثون المحترفون لديهم استراتيجيات ذكية لاكتشاف الفجوات، وأهمها: (1) قراءة خاتمة الدراسات (Conclusion Section): الباحثون غالباً يذكرون اقتراحات مستقبلية صريحة — هذه فجوات جاهزة أوصى بها أصحاب الدراسات أنفسهم. (2) عمل Literature Mapping أو خريطة للأدبيات العلمية حسب السكان والمنهج والدولة والزمن — الفراغ في الخريطة يظهر بصرياً بدل التخمين. (3) البحث عن التناقضات بين النتائج — التضارب فرصة لبحث يحسم الخلاف. (4) ومن أفضل الأسئلة: What if — ماذا لو طبقنا الدراسة نفسها على فئة عمرية مختلفة أو دولة مختلفة؟ وهنا غالباً نجد فجوة بحثية ممتازة.</a:t>
             </a:r>
           </a:p>
         </p:txBody>
@@ -663,7 +663,7 @@
           <a:lstStyle/>
           <a:p>
             <a:r>
-              <a:t>أي باحث ناجح لا بد أن يستخدم التفكير النقدي، وفي الورشة إطار من ستة أسئلة: Who — من الذي تمت دراسته؟ What — ما المتغيرات؟ Where — أين صار البحث؟ When — متى نُشرت الدراسة؟ How — كيف تمت الدراسة؟ Why — لماذا توقفت وما حدودها؟ اطرح هذه الأسئلة على كل دراسة تقرؤها وستتكشف الفجوات تلقائياً. ومن المؤشرات المهمة أثناء القراءة عبارات مثل: This area has not been studied، وResults are conflicting، وThe sample does not represent — التقاط هذه العبارات في الأدبيات يقودك مباشرة إلى فجوات قابلة للبحث. وتختم الورشة بقاعدة مهمة: التفكير النقدي ليس معناه أن ننتقد الدراسات السابقة، بل أن نبني عليها ونطورها.</a:t>
+              <a:t>أي باحث ناجح لا بد أن يستخدم التفكير النقدي، وهناك إطار من ستة أسئلة: Who — من الذي تمت دراسته؟ What — ما المتغيرات؟ Where — أين صار البحث؟ When — متى نُشرت الدراسة؟ How — كيف تمت الدراسة؟ Why — لماذا توقفت وما حدودها؟ اطرح هذه الأسئلة على كل دراسة تقرؤها وستتكشف الفجوات تلقائياً. ومن المؤشرات المهمة أثناء القراءة عبارات مثل: This area has not been studied، وResults are conflicting، وThe sample does not represent — التقاط هذه العبارات في الأدبيات يقودك مباشرة إلى فجوات قابلة للبحث. وقاعدة مهمة: التفكير النقدي ليس معناه أن ننتقد الدراسات السابقة، بل أن نبني عليها ونطورها.</a:t>
             </a:r>
           </a:p>
         </p:txBody>
@@ -733,7 +733,7 @@
           <a:lstStyle/>
           <a:p>
             <a:r>
-              <a:t>ليست كل فجوة تعتبر قوية — كما نبهت الورشة. الفجوة القوية (Strong Research Gap) تكون: مدعومة بالأدلة من مراجعة حقيقية للأدبيات، محددة وقابلة للقياس، ولها قيمة علمية وعملية، إضافة إلى قابليتها للمعالجة بمنهجية واقعية وارتباطها بسياق محدد. أما الفجوة الضعيفة (Weak Gap) فتكون عامة جداً وغير واضحة. والمثال الذي ضربته الورشة يوضح الفرق تماماً: قولنا «الصحة النفسية لم تُدرس بشكل كافٍ» فجوة ضعيفة — عامة بلا حدود ويسهل دحضها. لكن قولنا «لا توجد دراسة حول تأثير الدراسة عن بعد على القلق عند طلاب الجامعات العربية بعد 2020» فجوة قوية واضحة وقابلة للبحث: فيها المتغير والفئة والسياق والزمن. احرص أن تكون صياغتك دائماً من النوع الثاني.</a:t>
+              <a:t>ليست كل فجوة تعتبر قوية. الفجوة القوية (Strong Research Gap) تكون: مدعومة بالأدلة من مراجعة حقيقية للأدبيات، محددة وقابلة للقياس، ولها قيمة علمية وعملية، إضافة إلى قابليتها للمعالجة بمنهجية واقعية وارتباطها بسياق محدد. أما الفجوة الضعيفة (Weak Gap) فتكون عامة جداً وغير واضحة. والمثال المقارن يوضح الفرق تماماً: قولنا «الصحة النفسية لم تُدرس بشكل كافٍ» فجوة ضعيفة — عامة بلا حدود ويسهل دحضها. لكن قولنا «لا توجد دراسة حول تأثير الدراسة عن بعد على القلق عند طلاب الجامعات العربية بعد 2020» فجوة قوية واضحة وقابلة للبحث: فيها المتغير والفئة والسياق والزمن. احرص أن تكون صياغتك دائماً من النوع الثاني.</a:t>
             </a:r>
           </a:p>
         </p:txBody>
@@ -803,7 +803,7 @@
           <a:lstStyle/>
           <a:p>
             <a:r>
-              <a:t>خارطة طريق تنفيذية تجمع كل ما سبق في مسار عملي واحد من سبع خطوات: (1) تضييق المجال إلى تخصص فرعي — يسهل حصر الأدبيات. (2) جمع 20–30 دراسة حديثة من آخر خمس سنوات. (3) البدء بقراءة الخاتمات وأقسام حدود الدراسة — كما أوصت الورشة، فهي منجم الفجوات الجاهزة. (4) بناء خريطة الأدبيات (Literature Mapping) حسب السكان والمنهج والدولة والزمن. (5) تظليل الفراغات والتناقضات — الفجوة تظهر بصرياً في الخريطة. (6) التحقق عبر أدوات الذكاء الاصطناعي (سير عمل Research Rabbit من الشريحة التاسعة) من أن الفجوة لم تُسد بدراسة أحدث. (7) الصياغة النهائية بجملة محددة قابلة للقياس. الزمن الواقعي للمسار كاملاً: من أسبوعين إلى أربعة أسابيع من العمل المنتظم.</a:t>
+              <a:t>خارطة طريق تنفيذية تجمع كل ما سبق في مسار عملي واحد من سبع خطوات: (1) تضييق المجال إلى تخصص فرعي — يسهل حصر الأدبيات. (2) جمع 20–30 دراسة حديثة من آخر خمس سنوات. (3) البدء بقراءة الخاتمات وأقسام حدود الدراسة — فهي منجم الفجوات الجاهزة. (4) بناء خريطة الأدبيات (Literature Mapping) حسب السكان والمنهج والدولة والزمن. (5) تظليل الفراغات والتناقضات — الفجوة تظهر بصرياً في الخريطة. (6) التحقق عبر أدوات الذكاء الاصطناعي (سير عمل Research Rabbit من الشريحة التاسعة) من أن الفجوة لم تُسد بدراسة أحدث. (7) الصياغة النهائية بجملة محددة قابلة للقياس. الزمن الواقعي للمسار كاملاً: من أسبوعين إلى أربعة أسابيع من العمل المنتظم.</a:t>
             </a:r>
           </a:p>
         </p:txBody>
@@ -873,7 +873,7 @@
           <a:lstStyle/>
           <a:p>
             <a:r>
-              <a:t>المرحلة الأخيرة: تحويل الملاحظة إلى فجوة علمية مصاغة باحترافية. القالب المعياري أربعة عناصر: (X) ما تناولته الدراسات فعلاً — يثبت اطلاعك على الأدبيات، (Y) الجانب الغائب — جوهر الفجوة، (Z) السياق المحدد — يمنحها حدوداً واقعية، ثم نوع الدراسة المقترحة — يحولها إلى خطة عمل. المثال المطبق مبني على المثال القوي الذي ذكرته الورشة (الدراسة عن بعد والقلق عند طلاب الجامعات العربية بعد 2020). وقبل الاعتماد النهائي مرر فجوتك على قائمة الفحص الخماسية: موثقة، محددة، مهمة، قابلة للمعالجة، وجديدة. إن اجتازت الخمسة فهي جاهزة لتتصدر مقدمة مقترحك البحثي وتصمد أمام المناقشة.</a:t>
+              <a:t>المرحلة الأخيرة: تحويل الملاحظة إلى فجوة علمية مصاغة باحترافية. القالب المعياري أربعة عناصر: (X) ما تناولته الدراسات فعلاً — يثبت اطلاعك على الأدبيات، (Y) الجانب الغائب — جوهر الفجوة، (Z) السياق المحدد — يمنحها حدوداً واقعية، ثم نوع الدراسة المقترحة — يحولها إلى خطة عمل. المثال المطبق يوضح كيفية ملء العناصر الأربعة بمحتوى حقيقي. وقبل الاعتماد النهائي مرر فجوتك على قائمة الفحص الخماسية: موثقة، محددة، مهمة، قابلة للمعالجة، وجديدة. إن اجتازت الخمسة فهي جاهزة لتتصدر مقدمة مقترحك البحثي وتصمد أمام المناقشة.</a:t>
             </a:r>
           </a:p>
         </p:txBody>
@@ -943,7 +943,7 @@
           <a:lstStyle/>
           <a:p>
             <a:r>
-              <a:t>الخلاصة كما وردت في ختام الورشة: الفجوة البحثية (Research Gap) هي أساس أي بحث علمي ناجح. تذكّر الرسائل الأربع: (1) الفجوة أساس البحث وجواز مرورك للأصالة والنشر والتمويل. (2) الأنواع الستة إطارك العملي — لكل نوع سؤاله المفتاحي وبابه الخاص. (3) استخدم أدوات الذكاء الاصطناعي بالطريقة الصحيحة: ارفع الملفات، اسأل بدقة، ثم راجع التحليل بنفسك قبل اعتماده. (4) اجعل فجوتك قوية: محددة وموثقة ومهمة وقابلة للمعالجة. وتختم الورشة بالرسالة الأجمل: الباحث المتميز ليس الشخص الذي يجد الإجابات فقط، لكنه الشخص الذي يطرح أسئلة لم يفكر فيها أحد من قبل. بالتوفيق في رحلتك البحثية!</a:t>
+              <a:t>الخلاصة: الفجوة البحثية (Research Gap) هي أساس أي بحث علمي ناجح. تذكّر الرسائل الأربع: (1) الفجوة أساس البحث وجواز مرورك للأصالة والنشر والتمويل. (2) الأنواع الستة إطارك العملي — لكل نوع سؤاله المفتاحي وبابه الخاص. (3) استخدم أدوات الذكاء الاصطناعي بالطريقة الصحيحة: ارفع الملفات، اسأل بدقة، ثم راجع التحليل بنفسك قبل اعتماده. (4) اجعل فجوتك قوية: محددة وموثقة ومهمة وقابلة للمعالجة. والرسالة الأجمل: الباحث المتميز ليس الشخص الذي يجد الإجابات فقط، لكنه الشخص الذي يطرح أسئلة لم يفكر فيها أحد من قبل. بالتوفيق في رحلتك البحثية!</a:t>
             </a:r>
           </a:p>
         </p:txBody>
@@ -1013,7 +1013,7 @@
           <a:lstStyle/>
           <a:p>
             <a:r>
-              <a:t>خطة العرض في سبعة محاور تتدرج منطقياً: نبدأ بالمفهوم (ما هي الفجوة وما صورها؟)، ثم الأهمية (لماذا نهتم؟)، ثم الأنواع الستة بشرح موسّع لكل نوع، ثم أمثلة تطبيقية واقعية، ثم ننتقل للجانب العملي: أدوات الذكاء الاصطناعي الثماني وسير العمل الذكي الذي أوصت به الورشة، فاستراتيجيات الباحثين المحترفين وإطار التفكير النقدي، ونختم بالتمييز بين الفجوة القوية والضعيفة وقالب صياغة جاهز للاستخدام. الهدف المعلن في الورشة: أن يخرج كل طالب وباحث قادراً على تحديد فجوة بحثية قوية باحترافية.</a:t>
+              <a:t>خطة العرض في سبعة محاور تتدرج منطقياً: نبدأ بالمفهوم (ما هي الفجوة وما صورها؟)، ثم الأهمية (لماذا نهتم؟)، ثم الأنواع الستة بشرح موسّع لكل نوع، ثم أمثلة تطبيقية واقعية، ثم ننتقل للجانب العملي: أدوات الذكاء الاصطناعي الثماني وسير العمل الذكي الموصى به، فاستراتيجيات الباحثين المحترفين وإطار التفكير النقدي، ونختم بالتمييز بين الفجوة القوية والضعيفة وقالب صياغة جاهز للاستخدام. الهدف: أن يخرج كل طالب وباحث قادراً على تحديد فجوة بحثية قوية باحترافية.</a:t>
             </a:r>
           </a:p>
         </p:txBody>
@@ -1083,7 +1083,7 @@
           <a:lstStyle/>
           <a:p>
             <a:r>
-              <a:t>من شرح الورشة: ماذا نقصد بالفجوة البحثية؟ ببساطة: منطقة أو مشكلة في مجال معين، إما أن أحداً لم يدرسها من قبل، أو دُرست بشكل ناقص، أو تحتاج مزيداً من التحليل والاستكشاف. وللفجوة أكثر من صورة: (1) موضوع جديد بالكامل لم يبحثه أحد — أقرب لفجوة المعرفة. (2) دراسة جزئية: الموضوع تناوله الباحثون من زاوية واحدة فقط. (3) نتائج متضاربة بين الدراسات تحتاج بحثاً يحسمها. (4) اختلاف السياق الجغرافي — وأكدت الشارحة هذه النقطة بمثال واضح: الدراسة التي تنجح في دولة معينة ليس شرطاً أن تنجح بنفس الطريقة في مجتمع آخر، لاختلاف الثقافة والظروف والبيئة. لذلك إعادة اختبار النتائج في سياقك المحلي فجوة مشروعة وقيّمة.</a:t>
+              <a:t>ماذا نقصد بالفجوة البحثية؟ ببساطة: منطقة أو مشكلة في مجال معين، إما أن أحداً لم يدرسها من قبل، أو دُرست بشكل ناقص، أو تحتاج مزيداً من التحليل والاستكشاف. وللفجوة أكثر من صورة: (1) موضوع جديد بالكامل لم يبحثه أحد — أقرب لفجوة المعرفة. (2) دراسة جزئية: الموضوع تناوله الباحثون من زاوية واحدة فقط. (3) نتائج متضاربة بين الدراسات تحتاج بحثاً يحسمها. (4) اختلاف السياق الجغرافي — ومثالها الواضح: الدراسة التي تنجح في دولة معينة ليس شرطاً أن تنجح بنفس الطريقة في مجتمع آخر، لاختلاف الثقافة والظروف والبيئة. لذلك إعادة اختبار النتائج في سياقك المحلي فجوة مشروعة وقيّمة.</a:t>
             </a:r>
           </a:p>
         </p:txBody>
@@ -1153,7 +1153,7 @@
           <a:lstStyle/>
           <a:p>
             <a:r>
-              <a:t>لماذا الفجوات البحثية مهمة جداً في البحث العلمي؟ كما عدّدتها الورشة: (1) تعطيك Research Direction — اتجاهاً واضحاً لبحثك. (2) تحقق Scientific Originality — الأصالة العلمية، أي أن بحثك فيه إضافة جديدة. (3) تساعدك في Justifying the Study — تبرير دراستك أمام اللجنة العلمية عندما تُسأل: لماذا هذا البحث؟ (4) تربط بين الـ Literature Review (الدراسات السابقة) وبين الشيء الجديد الذي ستضيفه — فيظهر بحثك امتداداً منطقياً للمعرفة. (5) حتى المجلات العلمية المحكّمة تفضّل الأبحاث التي تعالج فجوات واضحة — ذكر الفجوة في المقدمة يرفع حظوظ القبول. (6) والجهات الممولة للبحوث تبحث دائماً عن مشاكل حقيقية تحتاج حلولاً — الفجوة الموثقة هي ما يقنعها بالاستثمار في مقترحك.</a:t>
+              <a:t>لماذا الفجوات البحثية مهمة جداً في البحث العلمي؟ (1) تعطيك Research Direction — اتجاهاً واضحاً لبحثك. (2) تحقق Scientific Originality — الأصالة العلمية، أي أن بحثك فيه إضافة جديدة. (3) تساعدك في Justifying the Study — تبرير دراستك أمام اللجنة العلمية عندما تُسأل: لماذا هذا البحث؟ (4) تربط بين الـ Literature Review (الدراسات السابقة) وبين الشيء الجديد الذي ستضيفه — فيظهر بحثك امتداداً منطقياً للمعرفة. (5) حتى المجلات العلمية المحكّمة تفضّل الأبحاث التي تعالج فجوات واضحة — ذكر الفجوة في المقدمة يرفع حظوظ القبول. (6) والجهات الممولة للبحوث تبحث دائماً عن مشاكل حقيقية تحتاج حلولاً — الفجوة الموثقة هي ما يقنعها بالاستثمار في مقترحك.</a:t>
             </a:r>
           </a:p>
         </p:txBody>
@@ -1223,7 +1223,7 @@
           <a:lstStyle/>
           <a:p>
             <a:r>
-              <a:t>الأنواع الثلاثة الأولى كما شرحتها الورشة: (1) فجوة المعرفة Knowledge Gap: معلومة لا يعرفها العلم إلى الآن — يكون الموضوع جديداً بالكامل. مثالها النموذجي: الظواهر والتقنيات المستجدة. (2) فجوة الممارسة Practice Gap: الفرق بين النظرية وتطبيق الواقع — الإرشادات موجودة لكن الميدان لا يلتزم بها، والبحث يدرس الأسباب وسبل العلاج. هذا النوع مثالي للتخصصات المهنية كالتمريض والتعليم والإدارة. (3) فجوة الأدلة Evidence Gap: الأدلة العلمية غير كافية لدعم فرضية أو توصية — البحث هنا يصمم التجارب التي تبني الدليل الغائب. احفظ السؤال المفتاحي أسفل كل بطاقة؛ فهو أسرع وسيلة لاستدعاء النوع أثناء قراءتك للأدبيات.</a:t>
+              <a:t>الأنواع الثلاثة الأولى: (1) فجوة المعرفة Knowledge Gap: معلومة لا يعرفها العلم إلى الآن — يكون الموضوع جديداً بالكامل. مثالها النموذجي: الظواهر والتقنيات المستجدة. (2) فجوة الممارسة Practice Gap: الفرق بين النظرية وتطبيق الواقع — الإرشادات موجودة لكن الميدان لا يلتزم بها، والبحث يدرس الأسباب وسبل العلاج. هذا النوع مثالي للتخصصات المهنية كالتمريض والتعليم والإدارة. (3) فجوة الأدلة Evidence Gap: الأدلة العلمية غير كافية لدعم فرضية أو توصية — البحث هنا يصمم التجارب التي تبني الدليل الغائب. احفظ السؤال المفتاحي أسفل كل بطاقة؛ فهو أسرع وسيلة لاستدعاء النوع أثناء قراءتك للأدبيات.</a:t>
             </a:r>
           </a:p>
         </p:txBody>
@@ -1363,7 +1363,7 @@
           <a:lstStyle/>
           <a:p>
             <a:r>
-              <a:t>أمثلة عملية كما وردت في الورشة: في فجوة المعرفة — تأثير الذكاء الاصطناعي على القرارات الأخلاقية في القطاع الصحي العربي لم يُدرس بشكل كافٍ. في فجوة الممارسة — البروتوكولات الطبية موجودة لكن التطبيق الواقعي مختلف. في فجوة السكان — معظم الدراسات على طلاب غربيين والشباب العربي ما زال ناقصاً في الدراسات. في الفجوة المنهجية — كل الدراسات استخدمت المنهج الكمي فقط بينما النوعي يعطي تفاصيل أعمق. في الفجوة الزمنية — الدراسات قبل 2020 لا تعكس تغيرات ما بعد الجائحة. وأضفنا مثالاً لفجوة الأدلة: التوصية الشائعة بالتعلم المصغّر دون تجارب مضبوطة. لاحظ البنية المشتركة في كل مثال: موضوع + سياق + سبب اعتباره فجوة — استخدم البنية نفسها عند صياغة فجوتك.</a:t>
+              <a:t>أمثلة عملية: في فجوة المعرفة — تأثير الذكاء الاصطناعي على القرارات الأخلاقية في القطاع الصحي العربي لم يُدرس بشكل كافٍ. في فجوة الممارسة — البروتوكولات الطبية موجودة لكن التطبيق الواقعي مختلف. في فجوة السكان — معظم الدراسات على طلاب غربيين والشباب العربي ما زال ناقصاً في الدراسات. في الفجوة المنهجية — كل الدراسات استخدمت المنهج الكمي فقط بينما النوعي يعطي تفاصيل أعمق. في الفجوة الزمنية — الدراسات قبل 2020 لا تعكس تغيرات ما بعد الجائحة. وفي فجوة الأدلة: التوصية الشائعة بالتعلم المصغّر دون تجارب مضبوطة. لاحظ البنية المشتركة في كل مثال: موضوع + سياق + سبب اعتباره فجوة — استخدم البنية نفسها عند صياغة فجوتك.</a:t>
             </a:r>
           </a:p>
         </p:txBody>
@@ -1433,7 +1433,7 @@
           <a:lstStyle/>
           <a:p>
             <a:r>
-              <a:t>مع تطور التكنولوجيا صارت لدينا أدوات ذكاء اصطناعي قوية تساعد الباحث على اكتشاف الفجوات بسرعة. كما عرضتها الورشة بالترتيب: Elicit يلخص الدراسات، Consensus يعطي إجماع الأبحاث حول سؤال معين، Research Rabbit يرسم خريطة للعلاقات بين الأبحاث، Connected Papers يوضح الدراسات المرتبطة، Scite.ai يقيّم قوة المراجع، Semantic Scholar محرك بحث أكاديمي ذكي، Claude يقدم تحليلاً وحواراً نقدياً معمقاً، وChatGPT يساعد في الفهم العام. وشددت الورشة على أن الأقوى بينها هو Research Rabbit لقدرته على رسم خريطة واضحة للعلاقات — وخصصنا الشريحة التالية لسير العمل الموصى به معه خطوة بخطوة.</a:t>
+              <a:t>مع تطور التكنولوجيا صارت لدينا أدوات ذكاء اصطناعي قوية تساعد الباحث على اكتشاف الفجوات بسرعة. بالترتيب: Elicit يلخص الدراسات، Consensus يعطي إجماع الأبحاث حول سؤال معين، Research Rabbit يرسم خريطة للعلاقات بين الأبحاث، Connected Papers يوضح الدراسات المرتبطة، Scite.ai يقيّم قوة المراجع، Semantic Scholar محرك بحث أكاديمي ذكي، Claude يقدم تحليلاً وحواراً نقدياً معمقاً، وChatGPT يساعد في الفهم العام. والأقوى بينها Research Rabbit لقدرته على رسم خريطة واضحة للعلاقات — والشريحة التالية تعرض سير العمل الموصى به معه خطوة بخطوة.</a:t>
             </a:r>
           </a:p>
         </p:txBody>
@@ -1503,7 +1503,7 @@
           <a:lstStyle/>
           <a:p>
             <a:r>
-              <a:t>هذه الشريحة تلخص أهم إضافة عملية في شرح الورشة — سير العمل الموصى به مع Research Rabbit: (1) يرفع الباحث ملفات الدراسات المرتبطة بموضوعه إلى المنصة. (2) يسأل سؤالاً دقيقاً: «حلّل هذه الملفات واستخرج الفجوة البحثية». (3) ثم — وهذه النقطة التي شددت عليها الورشة — يراجع الباحث التحليل الذي قدمه الذكاء الاصطناعي بنفسه، لضمان دقة القرار الأكاديمي. (4) بعد التحقق يعتمد الفجوة ويبني عليها مقترحه. الرسالة الجوهرية: الأدوات الذكية تسرّع الاكتشاف لكنها لا تلغي دور الباحث — الحكم النهائي دائماً للعقل النقدي البشري وللمصادر الأصلية.</a:t>
+              <a:t>سير العمل الموصى به مع Research Rabbit: (1) يرفع الباحث ملفات الدراسات المرتبطة بموضوعه إلى المنصة. (2) يسأل سؤالاً دقيقاً: «حلّل هذه الملفات واستخرج الفجوة البحثية». (3) ثم يراجع الباحث التحليل الذي قدمه الذكاء الاصطناعي بنفسه، لضمان دقة القرار الأكاديمي. (4) بعد التحقق يعتمد الفجوة ويبني عليها مقترحه. الرسالة الجوهرية: الأدوات الذكية تسرّع الاكتشاف لكنها لا تلغي دور الباحث — الحكم النهائي دائماً للعقل النقدي البشري وللمصادر الأصلية.</a:t>
             </a:r>
           </a:p>
         </p:txBody>
@@ -5084,7 +5084,7 @@
                 <a:cs typeface="Noto Sans Arabic"/>
                 <a:ea typeface="Noto Sans Arabic"/>
               </a:rPr>
-              <a:t>دليلك الشامل لاكتشاف الفجوات البحثية بذكاء واحترافية — نسخة موسّعة من الشرح الكامل للورشة</a:t>
+              <a:t>دليلك الشامل لاكتشاف الفجوات البحثية بذكاء واحترافية</a:t>
             </a:r>
           </a:p>
         </p:txBody>
@@ -5296,53 +5296,6 @@
                 <a:ea typeface="Noto Sans Arabic"/>
               </a:rPr>
               <a:t>   Dr. Hana Hossen Elahemer</a:t>
-            </a:r>
-          </a:p>
-        </p:txBody>
-      </p:sp>
-      <p:sp>
-        <p:nvSpPr>
-          <p:cNvPr id="18" name="TextBox 17"/>
-          <p:cNvSpPr txBox="1"/>
-          <p:nvPr/>
-        </p:nvSpPr>
-        <p:spPr>
-          <a:xfrm>
-            <a:off x="1371600" y="6035040"/>
-            <a:ext cx="9448495" cy="365760"/>
-          </a:xfrm>
-          <a:prstGeom prst="rect">
-            <a:avLst/>
-          </a:prstGeom>
-          <a:noFill/>
-        </p:spPr>
-        <p:txBody>
-          <a:bodyPr wrap="square" anchor="t" lIns="0" rIns="0" tIns="0" bIns="0">
-            <a:spAutoFit/>
-          </a:bodyPr>
-          <a:lstStyle/>
-          <a:p>
-            <a:pPr algn="ctr" rtl="1">
-              <a:lnSpc>
-                <a:spcPct val="105000"/>
-              </a:lnSpc>
-              <a:spcBef>
-                <a:spcPts val="0"/>
-              </a:spcBef>
-              <a:spcAft>
-                <a:spcPts val="400"/>
-              </a:spcAft>
-            </a:pPr>
-            <a:r>
-              <a:rPr sz="1100" b="0" i="0">
-                <a:solidFill>
-                  <a:srgbClr val="FFFFFF"/>
-                </a:solidFill>
-                <a:latin typeface="Noto Sans Arabic"/>
-                <a:cs typeface="Noto Sans Arabic"/>
-                <a:ea typeface="Noto Sans Arabic"/>
-              </a:rPr>
-              <a:t>نسخة موسّعة بشرح تفصيلي أكبر وتصميم جديد</a:t>
             </a:r>
           </a:p>
         </p:txBody>
@@ -8359,18 +8312,7 @@
                 <a:cs typeface="Noto Sans Arabic"/>
                 <a:ea typeface="Noto Sans Arabic"/>
               </a:rPr>
-              <a:t>«التفكير النقدي لا يعني أن ننتقد الدراسات السابقة — بل أن نبني عليها ونطوّرها»  </a:t>
-            </a:r>
-            <a:r>
-              <a:rPr sz="1100" b="0" i="0">
-                <a:solidFill>
-                  <a:srgbClr val="6E6A8F"/>
-                </a:solidFill>
-                <a:latin typeface="Noto Sans Arabic"/>
-                <a:cs typeface="Noto Sans Arabic"/>
-                <a:ea typeface="Noto Sans Arabic"/>
-              </a:rPr>
-              <a:t>— من شرح الورشة</a:t>
+              <a:t>«التفكير النقدي لا يعني أن ننتقد الدراسات السابقة — بل أن نبني عليها ونطوّرها»</a:t>
             </a:r>
           </a:p>
         </p:txBody>
@@ -9779,7 +9721,7 @@
                 <a:cs typeface="Noto Sans Arabic"/>
                 <a:ea typeface="Noto Sans Arabic"/>
               </a:rPr>
-              <a:t>🧪 المثال المقارن من الورشة —  </a:t>
+              <a:t>🧪 مثال مقارن —  </a:t>
             </a:r>
             <a:r>
               <a:rPr sz="1250" b="1" i="0">
@@ -12811,7 +12753,7 @@
                 <a:cs typeface="Noto Sans Arabic"/>
                 <a:ea typeface="Noto Sans Arabic"/>
               </a:rPr>
-              <a:t>✅ مثال مطبَّق بأسلوب الورشة:  </a:t>
+              <a:t>✅ مثال مطبَّق:  </a:t>
             </a:r>
             <a:r>
               <a:rPr sz="1250" b="0" i="0">
@@ -15230,17 +15172,6 @@
               </a:rPr>
               <a:t>الدكتورة هناء حسين الأهيمر</a:t>
             </a:r>
-            <a:r>
-              <a:rPr sz="1100" b="0" i="0">
-                <a:solidFill>
-                  <a:srgbClr val="FFFFFF"/>
-                </a:solidFill>
-                <a:latin typeface="Noto Sans Arabic"/>
-                <a:cs typeface="Noto Sans Arabic"/>
-                <a:ea typeface="Noto Sans Arabic"/>
-              </a:rPr>
-              <a:t>  •  نسخة موسّعة بتصميم جديد</a:t>
-            </a:r>
           </a:p>
         </p:txBody>
       </p:sp>
@@ -16060,7 +15991,7 @@
                 <a:cs typeface="Noto Sans Arabic"/>
                 <a:ea typeface="Noto Sans Arabic"/>
               </a:rPr>
-              <a:t>التعريف الدقيق وصورها الأربع كما شرحتها الورشة</a:t>
+              <a:t>التعريف الدقيق والصور الأربع التي تظهر بها الفجوات</a:t>
             </a:r>
           </a:p>
         </p:txBody>
@@ -17388,7 +17319,7 @@
         <p:spPr>
           <a:xfrm>
             <a:off x="777240" y="5568696"/>
-            <a:ext cx="4884267" cy="640080"/>
+            <a:ext cx="4884267" cy="603504"/>
           </a:xfrm>
           <a:prstGeom prst="rect">
             <a:avLst/>
@@ -17396,34 +17327,10 @@
           <a:noFill/>
         </p:spPr>
         <p:txBody>
-          <a:bodyPr wrap="square" anchor="t" lIns="0" rIns="0" tIns="0" bIns="0">
+          <a:bodyPr wrap="square" anchor="ctr" lIns="0" rIns="0" tIns="0" bIns="0">
             <a:spAutoFit/>
           </a:bodyPr>
           <a:lstStyle/>
-          <a:p>
-            <a:pPr algn="ctr" rtl="1">
-              <a:lnSpc>
-                <a:spcPct val="105000"/>
-              </a:lnSpc>
-              <a:spcBef>
-                <a:spcPts val="0"/>
-              </a:spcBef>
-              <a:spcAft>
-                <a:spcPts val="200"/>
-              </a:spcAft>
-            </a:pPr>
-            <a:r>
-              <a:rPr sz="1300" b="1" i="0">
-                <a:solidFill>
-                  <a:srgbClr val="6D28D9"/>
-                </a:solidFill>
-                <a:latin typeface="Noto Sans Arabic"/>
-                <a:cs typeface="Noto Sans Arabic"/>
-                <a:ea typeface="Noto Sans Arabic"/>
-              </a:rPr>
-              <a:t>«الفجوة البحثية هي أساس أي بحث علمي ناجح»</a:t>
-            </a:r>
-          </a:p>
           <a:p>
             <a:pPr algn="ctr" rtl="1">
               <a:lnSpc>
@@ -17437,15 +17344,15 @@
               </a:spcAft>
             </a:pPr>
             <a:r>
-              <a:rPr sz="1000" b="0" i="0">
-                <a:solidFill>
-                  <a:srgbClr val="6E6A8F"/>
-                </a:solidFill>
-                <a:latin typeface="Noto Sans Arabic"/>
-                <a:cs typeface="Noto Sans Arabic"/>
-                <a:ea typeface="Noto Sans Arabic"/>
-              </a:rPr>
-              <a:t>— من خلاصة الورشة</a:t>
+              <a:rPr sz="1300" b="1" i="0">
+                <a:solidFill>
+                  <a:srgbClr val="6D28D9"/>
+                </a:solidFill>
+                <a:latin typeface="Noto Sans Arabic"/>
+                <a:cs typeface="Noto Sans Arabic"/>
+                <a:ea typeface="Noto Sans Arabic"/>
+              </a:rPr>
+              <a:t>«الفجوة البحثية هي أساس أي بحث علمي ناجح»</a:t>
             </a:r>
           </a:p>
         </p:txBody>
@@ -18092,7 +17999,7 @@
                 <a:cs typeface="Noto Sans Arabic"/>
                 <a:ea typeface="Noto Sans Arabic"/>
               </a:rPr>
-              <a:t>التعريف كما ورد في الشرح:  </a:t>
+              <a:t>التعريف:  </a:t>
             </a:r>
             <a:r>
               <a:rPr sz="1400" b="0" i="0">
@@ -22224,7 +22131,7 @@
                 <a:cs typeface="Noto Sans Arabic"/>
                 <a:ea typeface="Noto Sans Arabic"/>
               </a:rPr>
-              <a:t>من شرح الورشة:  </a:t>
+              <a:t>توضيح:  </a:t>
             </a:r>
             <a:r>
               <a:rPr sz="1200" b="0" i="0">
@@ -22658,7 +22565,7 @@
                 <a:cs typeface="Noto Sans Arabic"/>
                 <a:ea typeface="Noto Sans Arabic"/>
               </a:rPr>
-              <a:t>من شرح الورشة:  </a:t>
+              <a:t>توضيح:  </a:t>
             </a:r>
             <a:r>
               <a:rPr sz="1200" b="0" i="0">
@@ -23092,7 +22999,7 @@
                 <a:cs typeface="Noto Sans Arabic"/>
                 <a:ea typeface="Noto Sans Arabic"/>
               </a:rPr>
-              <a:t>من شرح الورشة:  </a:t>
+              <a:t>توضيح:  </a:t>
             </a:r>
             <a:r>
               <a:rPr sz="1200" b="0" i="0">
@@ -24065,7 +23972,7 @@
                 <a:cs typeface="Noto Sans Arabic"/>
                 <a:ea typeface="Noto Sans Arabic"/>
               </a:rPr>
-              <a:t>من شرح الورشة:  </a:t>
+              <a:t>توضيح:  </a:t>
             </a:r>
             <a:r>
               <a:rPr sz="1200" b="0" i="0">
@@ -24499,7 +24406,7 @@
                 <a:cs typeface="Noto Sans Arabic"/>
                 <a:ea typeface="Noto Sans Arabic"/>
               </a:rPr>
-              <a:t>من شرح الورشة:  </a:t>
+              <a:t>توضيح:  </a:t>
             </a:r>
             <a:r>
               <a:rPr sz="1200" b="0" i="0">
@@ -24933,7 +24840,7 @@
                 <a:cs typeface="Noto Sans Arabic"/>
                 <a:ea typeface="Noto Sans Arabic"/>
               </a:rPr>
-              <a:t>من شرح الورشة:  </a:t>
+              <a:t>توضيح:  </a:t>
             </a:r>
             <a:r>
               <a:rPr sz="1200" b="0" i="0">
@@ -27982,7 +27889,7 @@
                 <a:cs typeface="Noto Sans Arabic"/>
                 <a:ea typeface="Noto Sans Arabic"/>
               </a:rPr>
-              <a:t>يرسم خريطة للعلاقات بين الأبحاث — الأقوى بحسب الورشة</a:t>
+              <a:t>يرسم خريطة للعلاقات بين الأبحاث ويكشف مواضع الفراغ</a:t>
             </a:r>
           </a:p>
         </p:txBody>
@@ -29245,7 +29152,7 @@
                 <a:cs typeface="Noto Sans Arabic"/>
                 <a:ea typeface="Noto Sans Arabic"/>
               </a:rPr>
-              <a:t>💡 من الشرح: </a:t>
+              <a:t>💡 نصيحة: </a:t>
             </a:r>
             <a:r>
               <a:rPr sz="1200" b="0" i="0">
@@ -29256,7 +29163,7 @@
                 <a:cs typeface="Noto Sans Arabic"/>
                 <a:ea typeface="Noto Sans Arabic"/>
               </a:rPr>
-              <a:t>الأدوات كثيرة، لكن الأقوى هو Research Rabbit لأنه يرسم خريطة واضحة للعلاقات بين الأبحاث — وسير العمل معه في الشريحة التالية</a:t>
+              <a:t>الأدوات كثيرة، والأقوى Research Rabbit لأنه يرسم خريطة واضحة للعلاقات بين الأبحاث — وسير العمل معه في الشريحة التالية</a:t>
             </a:r>
           </a:p>
         </p:txBody>
@@ -29795,7 +29702,7 @@
                 <a:cs typeface="Noto Sans Arabic"/>
                 <a:ea typeface="Noto Sans Arabic"/>
               </a:rPr>
-              <a:t>الطريقة العملية التي أوصت بها الورشة لاستخراج الفجوة بالذكاء الاصطناعي — أربع خطوات:</a:t>
+              <a:t>الطريقة العملية لاستخراج الفجوة البحثية بالذكاء الاصطناعي — أربع خطوات:</a:t>
             </a:r>
           </a:p>
         </p:txBody>
